--- a/dochtml-demo.pptx
+++ b/dochtml-demo.pptx
@@ -13,9 +13,10 @@
     <p:sldId id="261" r:id="rId7"/>
     <p:sldId id="262" r:id="rId8"/>
     <p:sldId id="263" r:id="rId9"/>
+    <p:sldId id="264" r:id="rId10"/>
   </p:sldIdLst>
   <p:notesMasterIdLst>
-    <p:notesMasterId r:id="rId10"/>
+    <p:notesMasterId r:id="rId11"/>
   </p:notesMasterIdLst>
   <p:sldSz cx="9144000" cy="5143500"/>
   <p:notesSz cx="5143500" cy="9144000"/>
@@ -1149,6 +1150,94 @@
             <a:fld id="{F7021451-1387-4CA6-816F-3879F97B5CBC}" type="slidenum">
               <a:rPr lang="en-US"/>
               <a:t>8</a:t>
+            </a:fld>
+            <a:endParaRPr lang="en-US"/>
+          </a:p>
+        </p:txBody>
+      </p:sp>
+    </p:spTree>
+    <p:extLst>
+      <p:ext uri="{BB962C8B-B14F-4D97-AF65-F5344CB8AC3E}">
+        <p14:creationId xmlns:p14="http://schemas.microsoft.com/office/powerpoint/2010/main" val="1024086991"/>
+      </p:ext>
+    </p:extLst>
+  </p:cSld>
+  <p:clrMapOvr>
+    <a:masterClrMapping/>
+  </p:clrMapOvr>
+</p:notes>
+</file>
+
+<file path=ppt/notesSlides/notesSlide9.xml><?xml version="1.0" encoding="utf-8"?>
+<p:notes xmlns:a="http://schemas.openxmlformats.org/drawingml/2006/main" xmlns:r="http://schemas.openxmlformats.org/officeDocument/2006/relationships" xmlns:p="http://schemas.openxmlformats.org/presentationml/2006/main">
+  <p:cSld>
+    <p:spTree>
+      <p:nvGrpSpPr>
+        <p:cNvPr id="1" name=""/>
+        <p:cNvGrpSpPr/>
+        <p:nvPr/>
+      </p:nvGrpSpPr>
+      <p:grpSpPr>
+        <a:xfrm>
+          <a:off x="0" y="0"/>
+          <a:ext cx="0" cy="0"/>
+          <a:chOff x="0" y="0"/>
+          <a:chExt cx="0" cy="0"/>
+        </a:xfrm>
+      </p:grpSpPr>
+      <p:sp>
+        <p:nvSpPr>
+          <p:cNvPr id="2" name="Slide Image Placeholder 1"/>
+          <p:cNvSpPr>
+            <a:spLocks noGrp="1" noRot="1" noChangeAspect="1"/>
+          </p:cNvSpPr>
+          <p:nvPr>
+            <p:ph type="sldImg"/>
+          </p:nvPr>
+        </p:nvSpPr>
+        <p:spPr/>
+      </p:sp>
+      <p:sp>
+        <p:nvSpPr>
+          <p:cNvPr id="3" name="Notes Placeholder 2"/>
+          <p:cNvSpPr>
+            <a:spLocks noGrp="1"/>
+          </p:cNvSpPr>
+          <p:nvPr>
+            <p:ph type="body" idx="1"/>
+          </p:nvPr>
+        </p:nvSpPr>
+        <p:spPr/>
+        <p:txBody>
+          <a:bodyPr/>
+          <a:lstStyle/>
+          <a:p>
+            <a:r>
+              <a:rPr lang="en-US" dirty="0"/>
+              <a:t/>
+            </a:r>
+            <a:endParaRPr lang="en-US" dirty="0"/>
+          </a:p>
+        </p:txBody>
+      </p:sp>
+      <p:sp>
+        <p:nvSpPr>
+          <p:cNvPr id="4" name="Slide Number Placeholder 3"/>
+          <p:cNvSpPr>
+            <a:spLocks noGrp="1"/>
+          </p:cNvSpPr>
+          <p:nvPr>
+            <p:ph type="sldNum" sz="quarter" idx="10"/>
+          </p:nvPr>
+        </p:nvSpPr>
+        <p:spPr/>
+        <p:txBody>
+          <a:bodyPr/>
+          <a:lstStyle/>
+          <a:p>
+            <a:fld id="{F7021451-1387-4CA6-816F-3879F97B5CBC}" type="slidenum">
+              <a:rPr lang="en-US"/>
+              <a:t>9</a:t>
             </a:fld>
             <a:endParaRPr lang="en-US"/>
           </a:p>
@@ -2439,11 +2528,11 @@
         <p:spPr>
           <a:xfrm>
             <a:off x="4754880" y="1645920"/>
-            <a:ext cx="3931920" cy="365760"/>
+            <a:ext cx="3931920" cy="329184"/>
           </a:xfrm>
           <a:prstGeom prst="roundRect">
             <a:avLst>
-              <a:gd name="adj" fmla="val 15000"/>
+              <a:gd name="adj" fmla="val 16667"/>
             </a:avLst>
           </a:prstGeom>
           <a:solidFill>
@@ -2466,23 +2555,23 @@
         <p:spPr>
           <a:xfrm>
             <a:off x="4846320" y="1645920"/>
-            <a:ext cx="3749040" cy="365760"/>
-          </a:xfrm>
-          <a:prstGeom prst="rect">
-            <a:avLst/>
-          </a:prstGeom>
-          <a:noFill/>
-          <a:ln/>
-        </p:spPr>
-        <p:txBody>
-          <a:bodyPr wrap="square" lIns="0" tIns="0" rIns="0" bIns="0" rtlCol="0" anchor="ctr"/>
-          <a:lstStyle/>
-          <a:p>
-            <a:pPr indent="0" marL="0">
-              <a:buNone/>
-            </a:pPr>
-            <a:r>
-              <a:rPr lang="en-US" sz="1100" dirty="0">
+            <a:ext cx="3749040" cy="329184"/>
+          </a:xfrm>
+          <a:prstGeom prst="rect">
+            <a:avLst/>
+          </a:prstGeom>
+          <a:noFill/>
+          <a:ln/>
+        </p:spPr>
+        <p:txBody>
+          <a:bodyPr wrap="square" lIns="0" tIns="0" rIns="0" bIns="0" rtlCol="0" anchor="ctr"/>
+          <a:lstStyle/>
+          <a:p>
+            <a:pPr indent="0" marL="0">
+              <a:buNone/>
+            </a:pPr>
+            <a:r>
+              <a:rPr lang="en-US" sz="1000" dirty="0">
                 <a:solidFill>
                   <a:srgbClr val="2D6A4F"/>
                 </a:solidFill>
@@ -2490,9 +2579,9 @@
                 <a:ea typeface="Calibri" pitchFamily="34" charset="-122"/>
                 <a:cs typeface="Calibri" pitchFamily="34" charset="-120"/>
               </a:rPr>
-              <a:t>✓  11 automatic transformation rules</a:t>
-            </a:r>
-            <a:endParaRPr lang="en-US" sz="1100" dirty="0"/>
+              <a:t>✓  14 automatic transformation rules</a:t>
+            </a:r>
+            <a:endParaRPr lang="en-US" sz="1000" dirty="0"/>
           </a:p>
         </p:txBody>
       </p:sp>
@@ -2504,12 +2593,12 @@
         </p:nvSpPr>
         <p:spPr>
           <a:xfrm>
-            <a:off x="4754880" y="2093976"/>
-            <a:ext cx="3931920" cy="365760"/>
+            <a:off x="4754880" y="2029968"/>
+            <a:ext cx="3931920" cy="329184"/>
           </a:xfrm>
           <a:prstGeom prst="roundRect">
             <a:avLst>
-              <a:gd name="adj" fmla="val 15000"/>
+              <a:gd name="adj" fmla="val 16667"/>
             </a:avLst>
           </a:prstGeom>
           <a:solidFill>
@@ -2531,24 +2620,24 @@
         </p:nvSpPr>
         <p:spPr>
           <a:xfrm>
-            <a:off x="4846320" y="2093976"/>
-            <a:ext cx="3749040" cy="365760"/>
-          </a:xfrm>
-          <a:prstGeom prst="rect">
-            <a:avLst/>
-          </a:prstGeom>
-          <a:noFill/>
-          <a:ln/>
-        </p:spPr>
-        <p:txBody>
-          <a:bodyPr wrap="square" lIns="0" tIns="0" rIns="0" bIns="0" rtlCol="0" anchor="ctr"/>
-          <a:lstStyle/>
-          <a:p>
-            <a:pPr indent="0" marL="0">
-              <a:buNone/>
-            </a:pPr>
-            <a:r>
-              <a:rPr lang="en-US" sz="1100" dirty="0">
+            <a:off x="4846320" y="2029968"/>
+            <a:ext cx="3749040" cy="329184"/>
+          </a:xfrm>
+          <a:prstGeom prst="rect">
+            <a:avLst/>
+          </a:prstGeom>
+          <a:noFill/>
+          <a:ln/>
+        </p:spPr>
+        <p:txBody>
+          <a:bodyPr wrap="square" lIns="0" tIns="0" rIns="0" bIns="0" rtlCol="0" anchor="ctr"/>
+          <a:lstStyle/>
+          <a:p>
+            <a:pPr indent="0" marL="0">
+              <a:buNone/>
+            </a:pPr>
+            <a:r>
+              <a:rPr lang="en-US" sz="1000" dirty="0">
                 <a:solidFill>
                   <a:srgbClr val="2D6A4F"/>
                 </a:solidFill>
@@ -2558,7 +2647,7 @@
               </a:rPr>
               <a:t>✓  Strips all inline styles &amp; MSO junk</a:t>
             </a:r>
-            <a:endParaRPr lang="en-US" sz="1100" dirty="0"/>
+            <a:endParaRPr lang="en-US" sz="1000" dirty="0"/>
           </a:p>
         </p:txBody>
       </p:sp>
@@ -2570,12 +2659,12 @@
         </p:nvSpPr>
         <p:spPr>
           <a:xfrm>
-            <a:off x="4754880" y="2542032"/>
-            <a:ext cx="3931920" cy="365760"/>
+            <a:off x="4754880" y="2414016"/>
+            <a:ext cx="3931920" cy="329184"/>
           </a:xfrm>
           <a:prstGeom prst="roundRect">
             <a:avLst>
-              <a:gd name="adj" fmla="val 15000"/>
+              <a:gd name="adj" fmla="val 16667"/>
             </a:avLst>
           </a:prstGeom>
           <a:solidFill>
@@ -2597,24 +2686,24 @@
         </p:nvSpPr>
         <p:spPr>
           <a:xfrm>
-            <a:off x="4846320" y="2542032"/>
-            <a:ext cx="3749040" cy="365760"/>
-          </a:xfrm>
-          <a:prstGeom prst="rect">
-            <a:avLst/>
-          </a:prstGeom>
-          <a:noFill/>
-          <a:ln/>
-        </p:spPr>
-        <p:txBody>
-          <a:bodyPr wrap="square" lIns="0" tIns="0" rIns="0" bIns="0" rtlCol="0" anchor="ctr"/>
-          <a:lstStyle/>
-          <a:p>
-            <a:pPr indent="0" marL="0">
-              <a:buNone/>
-            </a:pPr>
-            <a:r>
-              <a:rPr lang="en-US" sz="1100" dirty="0">
+            <a:off x="4846320" y="2414016"/>
+            <a:ext cx="3749040" cy="329184"/>
+          </a:xfrm>
+          <a:prstGeom prst="rect">
+            <a:avLst/>
+          </a:prstGeom>
+          <a:noFill/>
+          <a:ln/>
+        </p:spPr>
+        <p:txBody>
+          <a:bodyPr wrap="square" lIns="0" tIns="0" rIns="0" bIns="0" rtlCol="0" anchor="ctr"/>
+          <a:lstStyle/>
+          <a:p>
+            <a:pPr indent="0" marL="0">
+              <a:buNone/>
+            </a:pPr>
+            <a:r>
+              <a:rPr lang="en-US" sz="1000" dirty="0">
                 <a:solidFill>
                   <a:srgbClr val="2D6A4F"/>
                 </a:solidFill>
@@ -2624,7 +2713,7 @@
               </a:rPr>
               <a:t>✓  Bold rows → &lt;th scope="col"&gt; detection</a:t>
             </a:r>
-            <a:endParaRPr lang="en-US" sz="1100" dirty="0"/>
+            <a:endParaRPr lang="en-US" sz="1000" dirty="0"/>
           </a:p>
         </p:txBody>
       </p:sp>
@@ -2636,12 +2725,12 @@
         </p:nvSpPr>
         <p:spPr>
           <a:xfrm>
-            <a:off x="4754880" y="2990088"/>
-            <a:ext cx="3931920" cy="365760"/>
+            <a:off x="4754880" y="2798064"/>
+            <a:ext cx="3931920" cy="329184"/>
           </a:xfrm>
           <a:prstGeom prst="roundRect">
             <a:avLst>
-              <a:gd name="adj" fmla="val 15000"/>
+              <a:gd name="adj" fmla="val 16667"/>
             </a:avLst>
           </a:prstGeom>
           <a:solidFill>
@@ -2663,24 +2752,24 @@
         </p:nvSpPr>
         <p:spPr>
           <a:xfrm>
-            <a:off x="4846320" y="2990088"/>
-            <a:ext cx="3749040" cy="365760"/>
-          </a:xfrm>
-          <a:prstGeom prst="rect">
-            <a:avLst/>
-          </a:prstGeom>
-          <a:noFill/>
-          <a:ln/>
-        </p:spPr>
-        <p:txBody>
-          <a:bodyPr wrap="square" lIns="0" tIns="0" rIns="0" bIns="0" rtlCol="0" anchor="ctr"/>
-          <a:lstStyle/>
-          <a:p>
-            <a:pPr indent="0" marL="0">
-              <a:buNone/>
-            </a:pPr>
-            <a:r>
-              <a:rPr lang="en-US" sz="1100" dirty="0">
+            <a:off x="4846320" y="2798064"/>
+            <a:ext cx="3749040" cy="329184"/>
+          </a:xfrm>
+          <a:prstGeom prst="rect">
+            <a:avLst/>
+          </a:prstGeom>
+          <a:noFill/>
+          <a:ln/>
+        </p:spPr>
+        <p:txBody>
+          <a:bodyPr wrap="square" lIns="0" tIns="0" rIns="0" bIns="0" rtlCol="0" anchor="ctr"/>
+          <a:lstStyle/>
+          <a:p>
+            <a:pPr indent="0" marL="0">
+              <a:buNone/>
+            </a:pPr>
+            <a:r>
+              <a:rPr lang="en-US" sz="1000" dirty="0">
                 <a:solidFill>
                   <a:srgbClr val="2D6A4F"/>
                 </a:solidFill>
@@ -2690,7 +2779,7 @@
               </a:rPr>
               <a:t>✓  Fax number exclusion from tel: links</a:t>
             </a:r>
-            <a:endParaRPr lang="en-US" sz="1100" dirty="0"/>
+            <a:endParaRPr lang="en-US" sz="1000" dirty="0"/>
           </a:p>
         </p:txBody>
       </p:sp>
@@ -2702,12 +2791,12 @@
         </p:nvSpPr>
         <p:spPr>
           <a:xfrm>
-            <a:off x="4754880" y="3438144"/>
-            <a:ext cx="3931920" cy="365760"/>
+            <a:off x="4754880" y="3182112"/>
+            <a:ext cx="3931920" cy="329184"/>
           </a:xfrm>
           <a:prstGeom prst="roundRect">
             <a:avLst>
-              <a:gd name="adj" fmla="val 15000"/>
+              <a:gd name="adj" fmla="val 16667"/>
             </a:avLst>
           </a:prstGeom>
           <a:solidFill>
@@ -2729,24 +2818,24 @@
         </p:nvSpPr>
         <p:spPr>
           <a:xfrm>
-            <a:off x="4846320" y="3438144"/>
-            <a:ext cx="3749040" cy="365760"/>
-          </a:xfrm>
-          <a:prstGeom prst="rect">
-            <a:avLst/>
-          </a:prstGeom>
-          <a:noFill/>
-          <a:ln/>
-        </p:spPr>
-        <p:txBody>
-          <a:bodyPr wrap="square" lIns="0" tIns="0" rIns="0" bIns="0" rtlCol="0" anchor="ctr"/>
-          <a:lstStyle/>
-          <a:p>
-            <a:pPr indent="0" marL="0">
-              <a:buNone/>
-            </a:pPr>
-            <a:r>
-              <a:rPr lang="en-US" sz="1100" dirty="0">
+            <a:off x="4846320" y="3182112"/>
+            <a:ext cx="3749040" cy="329184"/>
+          </a:xfrm>
+          <a:prstGeom prst="rect">
+            <a:avLst/>
+          </a:prstGeom>
+          <a:noFill/>
+          <a:ln/>
+        </p:spPr>
+        <p:txBody>
+          <a:bodyPr wrap="square" lIns="0" tIns="0" rIns="0" bIns="0" rtlCol="0" anchor="ctr"/>
+          <a:lstStyle/>
+          <a:p>
+            <a:pPr indent="0" marL="0">
+              <a:buNone/>
+            </a:pPr>
+            <a:r>
+              <a:rPr lang="en-US" sz="1000" dirty="0">
                 <a:solidFill>
                   <a:srgbClr val="2D6A4F"/>
                 </a:solidFill>
@@ -2754,9 +2843,9 @@
                 <a:ea typeface="Calibri" pitchFamily="34" charset="-122"/>
                 <a:cs typeface="Calibri" pitchFamily="34" charset="-120"/>
               </a:rPr>
-              <a:t>✓  Consecutive &lt;strong&gt; tag merging</a:t>
-            </a:r>
-            <a:endParaRPr lang="en-US" sz="1100" dirty="0"/>
+              <a:t>✓  Strikethrough text removed entirely</a:t>
+            </a:r>
+            <a:endParaRPr lang="en-US" sz="1000" dirty="0"/>
           </a:p>
         </p:txBody>
       </p:sp>
@@ -2768,12 +2857,12 @@
         </p:nvSpPr>
         <p:spPr>
           <a:xfrm>
-            <a:off x="4754880" y="3886200"/>
-            <a:ext cx="3931920" cy="365760"/>
+            <a:off x="4754880" y="3566160"/>
+            <a:ext cx="3931920" cy="329184"/>
           </a:xfrm>
           <a:prstGeom prst="roundRect">
             <a:avLst>
-              <a:gd name="adj" fmla="val 15000"/>
+              <a:gd name="adj" fmla="val 16667"/>
             </a:avLst>
           </a:prstGeom>
           <a:solidFill>
@@ -2795,24 +2884,24 @@
         </p:nvSpPr>
         <p:spPr>
           <a:xfrm>
-            <a:off x="4846320" y="3886200"/>
-            <a:ext cx="3749040" cy="365760"/>
-          </a:xfrm>
-          <a:prstGeom prst="rect">
-            <a:avLst/>
-          </a:prstGeom>
-          <a:noFill/>
-          <a:ln/>
-        </p:spPr>
-        <p:txBody>
-          <a:bodyPr wrap="square" lIns="0" tIns="0" rIns="0" bIns="0" rtlCol="0" anchor="ctr"/>
-          <a:lstStyle/>
-          <a:p>
-            <a:pPr indent="0" marL="0">
-              <a:buNone/>
-            </a:pPr>
-            <a:r>
-              <a:rPr lang="en-US" sz="1100" dirty="0">
+            <a:off x="4846320" y="3566160"/>
+            <a:ext cx="3749040" cy="329184"/>
+          </a:xfrm>
+          <a:prstGeom prst="rect">
+            <a:avLst/>
+          </a:prstGeom>
+          <a:noFill/>
+          <a:ln/>
+        </p:spPr>
+        <p:txBody>
+          <a:bodyPr wrap="square" lIns="0" tIns="0" rIns="0" bIns="0" rtlCol="0" anchor="ctr"/>
+          <a:lstStyle/>
+          <a:p>
+            <a:pPr indent="0" marL="0">
+              <a:buNone/>
+            </a:pPr>
+            <a:r>
+              <a:rPr lang="en-US" sz="1000" dirty="0">
                 <a:solidFill>
                   <a:srgbClr val="2D6A4F"/>
                 </a:solidFill>
@@ -2820,9 +2909,141 @@
                 <a:ea typeface="Calibri" pitchFamily="34" charset="-122"/>
                 <a:cs typeface="Calibri" pitchFamily="34" charset="-120"/>
               </a:rPr>
-              <a:t>✓  Identical rules for file &amp; editor paths</a:t>
-            </a:r>
-            <a:endParaRPr lang="en-US" sz="1100" dirty="0"/>
+              <a:t>✓  &lt;strong&gt; always wraps &lt;a&gt; links</a:t>
+            </a:r>
+            <a:endParaRPr lang="en-US" sz="1000" dirty="0"/>
+          </a:p>
+        </p:txBody>
+      </p:sp>
+      <p:sp>
+        <p:nvSpPr>
+          <p:cNvPr id="27" name="Shape 25"/>
+          <p:cNvSpPr/>
+          <p:nvPr/>
+        </p:nvSpPr>
+        <p:spPr>
+          <a:xfrm>
+            <a:off x="4754880" y="3950208"/>
+            <a:ext cx="3931920" cy="329184"/>
+          </a:xfrm>
+          <a:prstGeom prst="roundRect">
+            <a:avLst>
+              <a:gd name="adj" fmla="val 16667"/>
+            </a:avLst>
+          </a:prstGeom>
+          <a:solidFill>
+            <a:srgbClr val="EDF7F0"/>
+          </a:solidFill>
+          <a:ln w="12700">
+            <a:solidFill>
+              <a:srgbClr val="B7E1C9"/>
+            </a:solidFill>
+            <a:prstDash val="solid"/>
+          </a:ln>
+        </p:spPr>
+      </p:sp>
+      <p:sp>
+        <p:nvSpPr>
+          <p:cNvPr id="28" name="Text 26"/>
+          <p:cNvSpPr/>
+          <p:nvPr/>
+        </p:nvSpPr>
+        <p:spPr>
+          <a:xfrm>
+            <a:off x="4846320" y="3950208"/>
+            <a:ext cx="3749040" cy="329184"/>
+          </a:xfrm>
+          <a:prstGeom prst="rect">
+            <a:avLst/>
+          </a:prstGeom>
+          <a:noFill/>
+          <a:ln/>
+        </p:spPr>
+        <p:txBody>
+          <a:bodyPr wrap="square" lIns="0" tIns="0" rIns="0" bIns="0" rtlCol="0" anchor="ctr"/>
+          <a:lstStyle/>
+          <a:p>
+            <a:pPr indent="0" marL="0">
+              <a:buNone/>
+            </a:pPr>
+            <a:r>
+              <a:rPr lang="en-US" sz="1000" dirty="0">
+                <a:solidFill>
+                  <a:srgbClr val="2D6A4F"/>
+                </a:solidFill>
+                <a:latin typeface="Calibri" pitchFamily="34" charset="0"/>
+                <a:ea typeface="Calibri" pitchFamily="34" charset="-122"/>
+                <a:cs typeface="Calibri" pitchFamily="34" charset="-120"/>
+              </a:rPr>
+              <a:t>✓  file:// URLs fixed to https://</a:t>
+            </a:r>
+            <a:endParaRPr lang="en-US" sz="1000" dirty="0"/>
+          </a:p>
+        </p:txBody>
+      </p:sp>
+      <p:sp>
+        <p:nvSpPr>
+          <p:cNvPr id="29" name="Shape 27"/>
+          <p:cNvSpPr/>
+          <p:nvPr/>
+        </p:nvSpPr>
+        <p:spPr>
+          <a:xfrm>
+            <a:off x="4754880" y="4334256"/>
+            <a:ext cx="3931920" cy="329184"/>
+          </a:xfrm>
+          <a:prstGeom prst="roundRect">
+            <a:avLst>
+              <a:gd name="adj" fmla="val 16667"/>
+            </a:avLst>
+          </a:prstGeom>
+          <a:solidFill>
+            <a:srgbClr val="EDF7F0"/>
+          </a:solidFill>
+          <a:ln w="12700">
+            <a:solidFill>
+              <a:srgbClr val="B7E1C9"/>
+            </a:solidFill>
+            <a:prstDash val="solid"/>
+          </a:ln>
+        </p:spPr>
+      </p:sp>
+      <p:sp>
+        <p:nvSpPr>
+          <p:cNvPr id="30" name="Text 28"/>
+          <p:cNvSpPr/>
+          <p:nvPr/>
+        </p:nvSpPr>
+        <p:spPr>
+          <a:xfrm>
+            <a:off x="4846320" y="4334256"/>
+            <a:ext cx="3749040" cy="329184"/>
+          </a:xfrm>
+          <a:prstGeom prst="rect">
+            <a:avLst/>
+          </a:prstGeom>
+          <a:noFill/>
+          <a:ln/>
+        </p:spPr>
+        <p:txBody>
+          <a:bodyPr wrap="square" lIns="0" tIns="0" rIns="0" bIns="0" rtlCol="0" anchor="ctr"/>
+          <a:lstStyle/>
+          <a:p>
+            <a:pPr indent="0" marL="0">
+              <a:buNone/>
+            </a:pPr>
+            <a:r>
+              <a:rPr lang="en-US" sz="1000" dirty="0">
+                <a:solidFill>
+                  <a:srgbClr val="2D6A4F"/>
+                </a:solidFill>
+                <a:latin typeface="Calibri" pitchFamily="34" charset="0"/>
+                <a:ea typeface="Calibri" pitchFamily="34" charset="-122"/>
+                <a:cs typeface="Calibri" pitchFamily="34" charset="-120"/>
+              </a:rPr>
+              <a:t>✓  Consecutive &lt;strong&gt; tag merging</a:t>
+            </a:r>
+            <a:endParaRPr lang="en-US" sz="1000" dirty="0"/>
           </a:p>
         </p:txBody>
       </p:sp>
@@ -3310,7 +3531,7 @@
                 <a:ea typeface="Calibri" pitchFamily="34" charset="-122"/>
                 <a:cs typeface="Calibri" pitchFamily="34" charset="-120"/>
               </a:rPr>
-              <a:t>• contenteditable HTML</a:t>
+              <a:t>• contenteditable</a:t>
             </a:r>
             <a:endParaRPr lang="en-US" sz="1050" dirty="0"/>
           </a:p>
@@ -3690,7 +3911,7 @@
                 <a:ea typeface="Calibri" pitchFamily="34" charset="-122"/>
                 <a:cs typeface="Calibri" pitchFamily="34" charset="-120"/>
               </a:rPr>
-              <a:t>• 11 rules run</a:t>
+              <a:t>• 14 rules run</a:t>
             </a:r>
             <a:endParaRPr lang="en-US" sz="1050" dirty="0"/>
           </a:p>
@@ -4168,24 +4389,24 @@
         </p:nvSpPr>
         <p:spPr>
           <a:xfrm>
-            <a:off x="457200" y="274320"/>
-            <a:ext cx="8229600" cy="502920"/>
-          </a:xfrm>
-          <a:prstGeom prst="rect">
-            <a:avLst/>
-          </a:prstGeom>
-          <a:noFill/>
-          <a:ln/>
-        </p:spPr>
-        <p:txBody>
-          <a:bodyPr wrap="square" lIns="0" tIns="0" rIns="0" bIns="0" rtlCol="0" anchor="ctr"/>
-          <a:lstStyle/>
-          <a:p>
-            <a:pPr indent="0" marL="0">
-              <a:buNone/>
-            </a:pPr>
-            <a:r>
-              <a:rPr lang="en-US" sz="2800" b="1" dirty="0">
+            <a:off x="457200" y="256032"/>
+            <a:ext cx="8229600" cy="457200"/>
+          </a:xfrm>
+          <a:prstGeom prst="rect">
+            <a:avLst/>
+          </a:prstGeom>
+          <a:noFill/>
+          <a:ln/>
+        </p:spPr>
+        <p:txBody>
+          <a:bodyPr wrap="square" lIns="0" tIns="0" rIns="0" bIns="0" rtlCol="0" anchor="ctr"/>
+          <a:lstStyle/>
+          <a:p>
+            <a:pPr indent="0" marL="0">
+              <a:buNone/>
+            </a:pPr>
+            <a:r>
+              <a:rPr lang="en-US" sz="2600" b="1" dirty="0">
                 <a:solidFill>
                   <a:srgbClr val="1A1A18"/>
                 </a:solidFill>
@@ -4193,9 +4414,9 @@
                 <a:ea typeface="Calibri" pitchFamily="34" charset="-122"/>
                 <a:cs typeface="Calibri" pitchFamily="34" charset="-120"/>
               </a:rPr>
-              <a:t>11 Conversion Rules</a:t>
-            </a:r>
-            <a:endParaRPr lang="en-US" sz="2800" dirty="0"/>
+              <a:t>14 Conversion Rules</a:t>
+            </a:r>
+            <a:endParaRPr lang="en-US" sz="2600" dirty="0"/>
           </a:p>
         </p:txBody>
       </p:sp>
@@ -4207,24 +4428,24 @@
         </p:nvSpPr>
         <p:spPr>
           <a:xfrm>
-            <a:off x="457200" y="822960"/>
-            <a:ext cx="8229600" cy="320040"/>
-          </a:xfrm>
-          <a:prstGeom prst="rect">
-            <a:avLst/>
-          </a:prstGeom>
-          <a:noFill/>
-          <a:ln/>
-        </p:spPr>
-        <p:txBody>
-          <a:bodyPr wrap="square" lIns="0" tIns="0" rIns="0" bIns="0" rtlCol="0" anchor="ctr"/>
-          <a:lstStyle/>
-          <a:p>
-            <a:pPr indent="0" marL="0">
-              <a:buNone/>
-            </a:pPr>
-            <a:r>
-              <a:rPr lang="en-US" sz="1200" dirty="0">
+            <a:off x="457200" y="749808"/>
+            <a:ext cx="8229600" cy="274320"/>
+          </a:xfrm>
+          <a:prstGeom prst="rect">
+            <a:avLst/>
+          </a:prstGeom>
+          <a:noFill/>
+          <a:ln/>
+        </p:spPr>
+        <p:txBody>
+          <a:bodyPr wrap="square" lIns="0" tIns="0" rIns="0" bIns="0" rtlCol="0" anchor="ctr"/>
+          <a:lstStyle/>
+          <a:p>
+            <a:pPr indent="0" marL="0">
+              <a:buNone/>
+            </a:pPr>
+            <a:r>
+              <a:rPr lang="en-US" sz="1150" dirty="0">
                 <a:solidFill>
                   <a:srgbClr val="5A5952"/>
                 </a:solidFill>
@@ -4234,7 +4455,7 @@
               </a:rPr>
               <a:t>Applied identically to file uploads and the text editor — same output, every time.</a:t>
             </a:r>
-            <a:endParaRPr lang="en-US" sz="1200" dirty="0"/>
+            <a:endParaRPr lang="en-US" sz="1150" dirty="0"/>
           </a:p>
         </p:txBody>
       </p:sp>
@@ -4246,12 +4467,12 @@
         </p:nvSpPr>
         <p:spPr>
           <a:xfrm>
-            <a:off x="365760" y="1234440"/>
-            <a:ext cx="4023360" cy="594360"/>
+            <a:off x="365760" y="1115568"/>
+            <a:ext cx="4023360" cy="493776"/>
           </a:xfrm>
           <a:prstGeom prst="roundRect">
             <a:avLst>
-              <a:gd name="adj" fmla="val 12308"/>
+              <a:gd name="adj" fmla="val 14815"/>
             </a:avLst>
           </a:prstGeom>
           <a:solidFill>
@@ -4280,12 +4501,12 @@
         </p:nvSpPr>
         <p:spPr>
           <a:xfrm>
-            <a:off x="365760" y="1234440"/>
-            <a:ext cx="365760" cy="594360"/>
+            <a:off x="365760" y="1115568"/>
+            <a:ext cx="347472" cy="493776"/>
           </a:xfrm>
           <a:prstGeom prst="roundRect">
             <a:avLst>
-              <a:gd name="adj" fmla="val 20000"/>
+              <a:gd name="adj" fmla="val 21053"/>
             </a:avLst>
           </a:prstGeom>
           <a:solidFill>
@@ -4307,8 +4528,8 @@
         </p:nvSpPr>
         <p:spPr>
           <a:xfrm>
-            <a:off x="365760" y="1234440"/>
-            <a:ext cx="365760" cy="594360"/>
+            <a:off x="365760" y="1115568"/>
+            <a:ext cx="347472" cy="493776"/>
           </a:xfrm>
           <a:prstGeom prst="rect">
             <a:avLst/>
@@ -4346,24 +4567,24 @@
         </p:nvSpPr>
         <p:spPr>
           <a:xfrm>
-            <a:off x="804672" y="1271016"/>
-            <a:ext cx="2286000" cy="274320"/>
-          </a:xfrm>
-          <a:prstGeom prst="rect">
-            <a:avLst/>
-          </a:prstGeom>
-          <a:noFill/>
-          <a:ln/>
-        </p:spPr>
-        <p:txBody>
-          <a:bodyPr wrap="square" lIns="0" tIns="0" rIns="0" bIns="0" rtlCol="0" anchor="ctr"/>
-          <a:lstStyle/>
-          <a:p>
-            <a:pPr indent="0" marL="0">
-              <a:buNone/>
-            </a:pPr>
-            <a:r>
-              <a:rPr lang="en-US" sz="1050" b="1" dirty="0">
+            <a:off x="786384" y="1143000"/>
+            <a:ext cx="2286000" cy="228600"/>
+          </a:xfrm>
+          <a:prstGeom prst="rect">
+            <a:avLst/>
+          </a:prstGeom>
+          <a:noFill/>
+          <a:ln/>
+        </p:spPr>
+        <p:txBody>
+          <a:bodyPr wrap="square" lIns="0" tIns="0" rIns="0" bIns="0" rtlCol="0" anchor="ctr"/>
+          <a:lstStyle/>
+          <a:p>
+            <a:pPr indent="0" marL="0">
+              <a:buNone/>
+            </a:pPr>
+            <a:r>
+              <a:rPr lang="en-US" sz="1000" b="1" dirty="0">
                 <a:solidFill>
                   <a:srgbClr val="1A1A18"/>
                 </a:solidFill>
@@ -4373,7 +4594,7 @@
               </a:rPr>
               <a:t>h1 → h2</a:t>
             </a:r>
-            <a:endParaRPr lang="en-US" sz="1050" dirty="0"/>
+            <a:endParaRPr lang="en-US" sz="1000" dirty="0"/>
           </a:p>
         </p:txBody>
       </p:sp>
@@ -4385,24 +4606,24 @@
         </p:nvSpPr>
         <p:spPr>
           <a:xfrm>
-            <a:off x="804672" y="1527048"/>
-            <a:ext cx="3474720" cy="256032"/>
-          </a:xfrm>
-          <a:prstGeom prst="rect">
-            <a:avLst/>
-          </a:prstGeom>
-          <a:noFill/>
-          <a:ln/>
-        </p:spPr>
-        <p:txBody>
-          <a:bodyPr wrap="square" lIns="0" tIns="0" rIns="0" bIns="0" rtlCol="0" anchor="ctr"/>
-          <a:lstStyle/>
-          <a:p>
-            <a:pPr indent="0" marL="0">
-              <a:buNone/>
-            </a:pPr>
-            <a:r>
-              <a:rPr lang="en-US" sz="900" dirty="0">
+            <a:off x="786384" y="1371600"/>
+            <a:ext cx="3474720" cy="201168"/>
+          </a:xfrm>
+          <a:prstGeom prst="rect">
+            <a:avLst/>
+          </a:prstGeom>
+          <a:noFill/>
+          <a:ln/>
+        </p:spPr>
+        <p:txBody>
+          <a:bodyPr wrap="square" lIns="0" tIns="0" rIns="0" bIns="0" rtlCol="0" anchor="ctr"/>
+          <a:lstStyle/>
+          <a:p>
+            <a:pPr indent="0" marL="0">
+              <a:buNone/>
+            </a:pPr>
+            <a:r>
+              <a:rPr lang="en-US" sz="850" dirty="0">
                 <a:solidFill>
                   <a:srgbClr val="5A5952"/>
                 </a:solidFill>
@@ -4412,7 +4633,7 @@
               </a:rPr>
               <a:t>&lt;h1&gt; becomes &lt;h2&gt;</a:t>
             </a:r>
-            <a:endParaRPr lang="en-US" sz="900" dirty="0"/>
+            <a:endParaRPr lang="en-US" sz="850" dirty="0"/>
           </a:p>
         </p:txBody>
       </p:sp>
@@ -4424,12 +4645,12 @@
         </p:nvSpPr>
         <p:spPr>
           <a:xfrm>
-            <a:off x="365760" y="1920240"/>
-            <a:ext cx="4023360" cy="594360"/>
+            <a:off x="365760" y="1682496"/>
+            <a:ext cx="4023360" cy="493776"/>
           </a:xfrm>
           <a:prstGeom prst="roundRect">
             <a:avLst>
-              <a:gd name="adj" fmla="val 12308"/>
+              <a:gd name="adj" fmla="val 14815"/>
             </a:avLst>
           </a:prstGeom>
           <a:solidFill>
@@ -4458,12 +4679,12 @@
         </p:nvSpPr>
         <p:spPr>
           <a:xfrm>
-            <a:off x="365760" y="1920240"/>
-            <a:ext cx="365760" cy="594360"/>
+            <a:off x="365760" y="1682496"/>
+            <a:ext cx="347472" cy="493776"/>
           </a:xfrm>
           <a:prstGeom prst="roundRect">
             <a:avLst>
-              <a:gd name="adj" fmla="val 20000"/>
+              <a:gd name="adj" fmla="val 21053"/>
             </a:avLst>
           </a:prstGeom>
           <a:solidFill>
@@ -4485,8 +4706,8 @@
         </p:nvSpPr>
         <p:spPr>
           <a:xfrm>
-            <a:off x="365760" y="1920240"/>
-            <a:ext cx="365760" cy="594360"/>
+            <a:off x="365760" y="1682496"/>
+            <a:ext cx="347472" cy="493776"/>
           </a:xfrm>
           <a:prstGeom prst="rect">
             <a:avLst/>
@@ -4524,24 +4745,24 @@
         </p:nvSpPr>
         <p:spPr>
           <a:xfrm>
-            <a:off x="804672" y="1956816"/>
-            <a:ext cx="2286000" cy="274320"/>
-          </a:xfrm>
-          <a:prstGeom prst="rect">
-            <a:avLst/>
-          </a:prstGeom>
-          <a:noFill/>
-          <a:ln/>
-        </p:spPr>
-        <p:txBody>
-          <a:bodyPr wrap="square" lIns="0" tIns="0" rIns="0" bIns="0" rtlCol="0" anchor="ctr"/>
-          <a:lstStyle/>
-          <a:p>
-            <a:pPr indent="0" marL="0">
-              <a:buNone/>
-            </a:pPr>
-            <a:r>
-              <a:rPr lang="en-US" sz="1050" b="1" dirty="0">
+            <a:off x="786384" y="1709928"/>
+            <a:ext cx="2286000" cy="228600"/>
+          </a:xfrm>
+          <a:prstGeom prst="rect">
+            <a:avLst/>
+          </a:prstGeom>
+          <a:noFill/>
+          <a:ln/>
+        </p:spPr>
+        <p:txBody>
+          <a:bodyPr wrap="square" lIns="0" tIns="0" rIns="0" bIns="0" rtlCol="0" anchor="ctr"/>
+          <a:lstStyle/>
+          <a:p>
+            <a:pPr indent="0" marL="0">
+              <a:buNone/>
+            </a:pPr>
+            <a:r>
+              <a:rPr lang="en-US" sz="1000" b="1" dirty="0">
                 <a:solidFill>
                   <a:srgbClr val="1A1A18"/>
                 </a:solidFill>
@@ -4551,7 +4772,7 @@
               </a:rPr>
               <a:t>Phone → tel: link</a:t>
             </a:r>
-            <a:endParaRPr lang="en-US" sz="1050" dirty="0"/>
+            <a:endParaRPr lang="en-US" sz="1000" dirty="0"/>
           </a:p>
         </p:txBody>
       </p:sp>
@@ -4563,24 +4784,24 @@
         </p:nvSpPr>
         <p:spPr>
           <a:xfrm>
-            <a:off x="804672" y="2212848"/>
-            <a:ext cx="3474720" cy="256032"/>
-          </a:xfrm>
-          <a:prstGeom prst="rect">
-            <a:avLst/>
-          </a:prstGeom>
-          <a:noFill/>
-          <a:ln/>
-        </p:spPr>
-        <p:txBody>
-          <a:bodyPr wrap="square" lIns="0" tIns="0" rIns="0" bIns="0" rtlCol="0" anchor="ctr"/>
-          <a:lstStyle/>
-          <a:p>
-            <a:pPr indent="0" marL="0">
-              <a:buNone/>
-            </a:pPr>
-            <a:r>
-              <a:rPr lang="en-US" sz="900" dirty="0">
+            <a:off x="786384" y="1938528"/>
+            <a:ext cx="3474720" cy="201168"/>
+          </a:xfrm>
+          <a:prstGeom prst="rect">
+            <a:avLst/>
+          </a:prstGeom>
+          <a:noFill/>
+          <a:ln/>
+        </p:spPr>
+        <p:txBody>
+          <a:bodyPr wrap="square" lIns="0" tIns="0" rIns="0" bIns="0" rtlCol="0" anchor="ctr"/>
+          <a:lstStyle/>
+          <a:p>
+            <a:pPr indent="0" marL="0">
+              <a:buNone/>
+            </a:pPr>
+            <a:r>
+              <a:rPr lang="en-US" sz="850" dirty="0">
                 <a:solidFill>
                   <a:srgbClr val="5A5952"/>
                 </a:solidFill>
@@ -4590,7 +4811,7 @@
               </a:rPr>
               <a:t>Fax numbers excluded</a:t>
             </a:r>
-            <a:endParaRPr lang="en-US" sz="900" dirty="0"/>
+            <a:endParaRPr lang="en-US" sz="850" dirty="0"/>
           </a:p>
         </p:txBody>
       </p:sp>
@@ -4602,12 +4823,12 @@
         </p:nvSpPr>
         <p:spPr>
           <a:xfrm>
-            <a:off x="365760" y="2606040"/>
-            <a:ext cx="4023360" cy="594360"/>
+            <a:off x="365760" y="2249424"/>
+            <a:ext cx="4023360" cy="493776"/>
           </a:xfrm>
           <a:prstGeom prst="roundRect">
             <a:avLst>
-              <a:gd name="adj" fmla="val 12308"/>
+              <a:gd name="adj" fmla="val 14815"/>
             </a:avLst>
           </a:prstGeom>
           <a:solidFill>
@@ -4636,12 +4857,12 @@
         </p:nvSpPr>
         <p:spPr>
           <a:xfrm>
-            <a:off x="365760" y="2606040"/>
-            <a:ext cx="365760" cy="594360"/>
+            <a:off x="365760" y="2249424"/>
+            <a:ext cx="347472" cy="493776"/>
           </a:xfrm>
           <a:prstGeom prst="roundRect">
             <a:avLst>
-              <a:gd name="adj" fmla="val 20000"/>
+              <a:gd name="adj" fmla="val 21053"/>
             </a:avLst>
           </a:prstGeom>
           <a:solidFill>
@@ -4663,8 +4884,8 @@
         </p:nvSpPr>
         <p:spPr>
           <a:xfrm>
-            <a:off x="365760" y="2606040"/>
-            <a:ext cx="365760" cy="594360"/>
+            <a:off x="365760" y="2249424"/>
+            <a:ext cx="347472" cy="493776"/>
           </a:xfrm>
           <a:prstGeom prst="rect">
             <a:avLst/>
@@ -4702,24 +4923,24 @@
         </p:nvSpPr>
         <p:spPr>
           <a:xfrm>
-            <a:off x="804672" y="2642616"/>
-            <a:ext cx="2286000" cy="274320"/>
-          </a:xfrm>
-          <a:prstGeom prst="rect">
-            <a:avLst/>
-          </a:prstGeom>
-          <a:noFill/>
-          <a:ln/>
-        </p:spPr>
-        <p:txBody>
-          <a:bodyPr wrap="square" lIns="0" tIns="0" rIns="0" bIns="0" rtlCol="0" anchor="ctr"/>
-          <a:lstStyle/>
-          <a:p>
-            <a:pPr indent="0" marL="0">
-              <a:buNone/>
-            </a:pPr>
-            <a:r>
-              <a:rPr lang="en-US" sz="1050" b="1" dirty="0">
+            <a:off x="786384" y="2276856"/>
+            <a:ext cx="2286000" cy="228600"/>
+          </a:xfrm>
+          <a:prstGeom prst="rect">
+            <a:avLst/>
+          </a:prstGeom>
+          <a:noFill/>
+          <a:ln/>
+        </p:spPr>
+        <p:txBody>
+          <a:bodyPr wrap="square" lIns="0" tIns="0" rIns="0" bIns="0" rtlCol="0" anchor="ctr"/>
+          <a:lstStyle/>
+          <a:p>
+            <a:pPr indent="0" marL="0">
+              <a:buNone/>
+            </a:pPr>
+            <a:r>
+              <a:rPr lang="en-US" sz="1000" b="1" dirty="0">
                 <a:solidFill>
                   <a:srgbClr val="1A1A18"/>
                 </a:solidFill>
@@ -4729,7 +4950,7 @@
               </a:rPr>
               <a:t>Sup/Sub → Unicode</a:t>
             </a:r>
-            <a:endParaRPr lang="en-US" sz="1050" dirty="0"/>
+            <a:endParaRPr lang="en-US" sz="1000" dirty="0"/>
           </a:p>
         </p:txBody>
       </p:sp>
@@ -4741,24 +4962,24 @@
         </p:nvSpPr>
         <p:spPr>
           <a:xfrm>
-            <a:off x="804672" y="2898648"/>
-            <a:ext cx="3474720" cy="256032"/>
-          </a:xfrm>
-          <a:prstGeom prst="rect">
-            <a:avLst/>
-          </a:prstGeom>
-          <a:noFill/>
-          <a:ln/>
-        </p:spPr>
-        <p:txBody>
-          <a:bodyPr wrap="square" lIns="0" tIns="0" rIns="0" bIns="0" rtlCol="0" anchor="ctr"/>
-          <a:lstStyle/>
-          <a:p>
-            <a:pPr indent="0" marL="0">
-              <a:buNone/>
-            </a:pPr>
-            <a:r>
-              <a:rPr lang="en-US" sz="900" dirty="0">
+            <a:off x="786384" y="2505456"/>
+            <a:ext cx="3474720" cy="201168"/>
+          </a:xfrm>
+          <a:prstGeom prst="rect">
+            <a:avLst/>
+          </a:prstGeom>
+          <a:noFill/>
+          <a:ln/>
+        </p:spPr>
+        <p:txBody>
+          <a:bodyPr wrap="square" lIns="0" tIns="0" rIns="0" bIns="0" rtlCol="0" anchor="ctr"/>
+          <a:lstStyle/>
+          <a:p>
+            <a:pPr indent="0" marL="0">
+              <a:buNone/>
+            </a:pPr>
+            <a:r>
+              <a:rPr lang="en-US" sz="850" dirty="0">
                 <a:solidFill>
                   <a:srgbClr val="5A5952"/>
                 </a:solidFill>
@@ -4768,7 +4989,7 @@
               </a:rPr>
               <a:t>&lt;sup&gt;TM&lt;/sup&gt; → &amp;trade;</a:t>
             </a:r>
-            <a:endParaRPr lang="en-US" sz="900" dirty="0"/>
+            <a:endParaRPr lang="en-US" sz="850" dirty="0"/>
           </a:p>
         </p:txBody>
       </p:sp>
@@ -4780,12 +5001,12 @@
         </p:nvSpPr>
         <p:spPr>
           <a:xfrm>
-            <a:off x="365760" y="3291840"/>
-            <a:ext cx="4023360" cy="594360"/>
+            <a:off x="365760" y="2816352"/>
+            <a:ext cx="4023360" cy="493776"/>
           </a:xfrm>
           <a:prstGeom prst="roundRect">
             <a:avLst>
-              <a:gd name="adj" fmla="val 12308"/>
+              <a:gd name="adj" fmla="val 14815"/>
             </a:avLst>
           </a:prstGeom>
           <a:solidFill>
@@ -4814,12 +5035,12 @@
         </p:nvSpPr>
         <p:spPr>
           <a:xfrm>
-            <a:off x="365760" y="3291840"/>
-            <a:ext cx="365760" cy="594360"/>
+            <a:off x="365760" y="2816352"/>
+            <a:ext cx="347472" cy="493776"/>
           </a:xfrm>
           <a:prstGeom prst="roundRect">
             <a:avLst>
-              <a:gd name="adj" fmla="val 20000"/>
+              <a:gd name="adj" fmla="val 21053"/>
             </a:avLst>
           </a:prstGeom>
           <a:solidFill>
@@ -4841,8 +5062,8 @@
         </p:nvSpPr>
         <p:spPr>
           <a:xfrm>
-            <a:off x="365760" y="3291840"/>
-            <a:ext cx="365760" cy="594360"/>
+            <a:off x="365760" y="2816352"/>
+            <a:ext cx="347472" cy="493776"/>
           </a:xfrm>
           <a:prstGeom prst="rect">
             <a:avLst/>
@@ -4880,24 +5101,24 @@
         </p:nvSpPr>
         <p:spPr>
           <a:xfrm>
-            <a:off x="804672" y="3328416"/>
-            <a:ext cx="2286000" cy="274320"/>
-          </a:xfrm>
-          <a:prstGeom prst="rect">
-            <a:avLst/>
-          </a:prstGeom>
-          <a:noFill/>
-          <a:ln/>
-        </p:spPr>
-        <p:txBody>
-          <a:bodyPr wrap="square" lIns="0" tIns="0" rIns="0" bIns="0" rtlCol="0" anchor="ctr"/>
-          <a:lstStyle/>
-          <a:p>
-            <a:pPr indent="0" marL="0">
-              <a:buNone/>
-            </a:pPr>
-            <a:r>
-              <a:rPr lang="en-US" sz="1050" b="1" dirty="0">
+            <a:off x="786384" y="2843784"/>
+            <a:ext cx="2286000" cy="228600"/>
+          </a:xfrm>
+          <a:prstGeom prst="rect">
+            <a:avLst/>
+          </a:prstGeom>
+          <a:noFill/>
+          <a:ln/>
+        </p:spPr>
+        <p:txBody>
+          <a:bodyPr wrap="square" lIns="0" tIns="0" rIns="0" bIns="0" rtlCol="0" anchor="ctr"/>
+          <a:lstStyle/>
+          <a:p>
+            <a:pPr indent="0" marL="0">
+              <a:buNone/>
+            </a:pPr>
+            <a:r>
+              <a:rPr lang="en-US" sz="1000" b="1" dirty="0">
                 <a:solidFill>
                   <a:srgbClr val="1A1A18"/>
                 </a:solidFill>
@@ -4907,7 +5128,7 @@
               </a:rPr>
               <a:t>b → strong</a:t>
             </a:r>
-            <a:endParaRPr lang="en-US" sz="1050" dirty="0"/>
+            <a:endParaRPr lang="en-US" sz="1000" dirty="0"/>
           </a:p>
         </p:txBody>
       </p:sp>
@@ -4919,24 +5140,24 @@
         </p:nvSpPr>
         <p:spPr>
           <a:xfrm>
-            <a:off x="804672" y="3584448"/>
-            <a:ext cx="3474720" cy="256032"/>
-          </a:xfrm>
-          <a:prstGeom prst="rect">
-            <a:avLst/>
-          </a:prstGeom>
-          <a:noFill/>
-          <a:ln/>
-        </p:spPr>
-        <p:txBody>
-          <a:bodyPr wrap="square" lIns="0" tIns="0" rIns="0" bIns="0" rtlCol="0" anchor="ctr"/>
-          <a:lstStyle/>
-          <a:p>
-            <a:pPr indent="0" marL="0">
-              <a:buNone/>
-            </a:pPr>
-            <a:r>
-              <a:rPr lang="en-US" sz="900" dirty="0">
+            <a:off x="786384" y="3072384"/>
+            <a:ext cx="3474720" cy="201168"/>
+          </a:xfrm>
+          <a:prstGeom prst="rect">
+            <a:avLst/>
+          </a:prstGeom>
+          <a:noFill/>
+          <a:ln/>
+        </p:spPr>
+        <p:txBody>
+          <a:bodyPr wrap="square" lIns="0" tIns="0" rIns="0" bIns="0" rtlCol="0" anchor="ctr"/>
+          <a:lstStyle/>
+          <a:p>
+            <a:pPr indent="0" marL="0">
+              <a:buNone/>
+            </a:pPr>
+            <a:r>
+              <a:rPr lang="en-US" sz="850" dirty="0">
                 <a:solidFill>
                   <a:srgbClr val="5A5952"/>
                 </a:solidFill>
@@ -4946,7 +5167,7 @@
               </a:rPr>
               <a:t>&lt;b&gt; becomes &lt;strong&gt;</a:t>
             </a:r>
-            <a:endParaRPr lang="en-US" sz="900" dirty="0"/>
+            <a:endParaRPr lang="en-US" sz="850" dirty="0"/>
           </a:p>
         </p:txBody>
       </p:sp>
@@ -4958,12 +5179,12 @@
         </p:nvSpPr>
         <p:spPr>
           <a:xfrm>
-            <a:off x="365760" y="3977640"/>
-            <a:ext cx="4023360" cy="594360"/>
+            <a:off x="365760" y="3383280"/>
+            <a:ext cx="4023360" cy="493776"/>
           </a:xfrm>
           <a:prstGeom prst="roundRect">
             <a:avLst>
-              <a:gd name="adj" fmla="val 12308"/>
+              <a:gd name="adj" fmla="val 14815"/>
             </a:avLst>
           </a:prstGeom>
           <a:solidFill>
@@ -4992,12 +5213,12 @@
         </p:nvSpPr>
         <p:spPr>
           <a:xfrm>
-            <a:off x="365760" y="3977640"/>
-            <a:ext cx="365760" cy="594360"/>
+            <a:off x="365760" y="3383280"/>
+            <a:ext cx="347472" cy="493776"/>
           </a:xfrm>
           <a:prstGeom prst="roundRect">
             <a:avLst>
-              <a:gd name="adj" fmla="val 20000"/>
+              <a:gd name="adj" fmla="val 21053"/>
             </a:avLst>
           </a:prstGeom>
           <a:solidFill>
@@ -5019,8 +5240,8 @@
         </p:nvSpPr>
         <p:spPr>
           <a:xfrm>
-            <a:off x="365760" y="3977640"/>
-            <a:ext cx="365760" cy="594360"/>
+            <a:off x="365760" y="3383280"/>
+            <a:ext cx="347472" cy="493776"/>
           </a:xfrm>
           <a:prstGeom prst="rect">
             <a:avLst/>
@@ -5058,24 +5279,24 @@
         </p:nvSpPr>
         <p:spPr>
           <a:xfrm>
-            <a:off x="804672" y="4014216"/>
-            <a:ext cx="2286000" cy="274320"/>
-          </a:xfrm>
-          <a:prstGeom prst="rect">
-            <a:avLst/>
-          </a:prstGeom>
-          <a:noFill/>
-          <a:ln/>
-        </p:spPr>
-        <p:txBody>
-          <a:bodyPr wrap="square" lIns="0" tIns="0" rIns="0" bIns="0" rtlCol="0" anchor="ctr"/>
-          <a:lstStyle/>
-          <a:p>
-            <a:pPr indent="0" marL="0">
-              <a:buNone/>
-            </a:pPr>
-            <a:r>
-              <a:rPr lang="en-US" sz="1050" b="1" dirty="0">
+            <a:off x="786384" y="3410712"/>
+            <a:ext cx="2286000" cy="228600"/>
+          </a:xfrm>
+          <a:prstGeom prst="rect">
+            <a:avLst/>
+          </a:prstGeom>
+          <a:noFill/>
+          <a:ln/>
+        </p:spPr>
+        <p:txBody>
+          <a:bodyPr wrap="square" lIns="0" tIns="0" rIns="0" bIns="0" rtlCol="0" anchor="ctr"/>
+          <a:lstStyle/>
+          <a:p>
+            <a:pPr indent="0" marL="0">
+              <a:buNone/>
+            </a:pPr>
+            <a:r>
+              <a:rPr lang="en-US" sz="1000" b="1" dirty="0">
                 <a:solidFill>
                   <a:srgbClr val="1A1A18"/>
                 </a:solidFill>
@@ -5085,7 +5306,7 @@
               </a:rPr>
               <a:t>i/em → strong</a:t>
             </a:r>
-            <a:endParaRPr lang="en-US" sz="1050" dirty="0"/>
+            <a:endParaRPr lang="en-US" sz="1000" dirty="0"/>
           </a:p>
         </p:txBody>
       </p:sp>
@@ -5097,24 +5318,24 @@
         </p:nvSpPr>
         <p:spPr>
           <a:xfrm>
-            <a:off x="804672" y="4270248"/>
-            <a:ext cx="3474720" cy="256032"/>
-          </a:xfrm>
-          <a:prstGeom prst="rect">
-            <a:avLst/>
-          </a:prstGeom>
-          <a:noFill/>
-          <a:ln/>
-        </p:spPr>
-        <p:txBody>
-          <a:bodyPr wrap="square" lIns="0" tIns="0" rIns="0" bIns="0" rtlCol="0" anchor="ctr"/>
-          <a:lstStyle/>
-          <a:p>
-            <a:pPr indent="0" marL="0">
-              <a:buNone/>
-            </a:pPr>
-            <a:r>
-              <a:rPr lang="en-US" sz="900" dirty="0">
+            <a:off x="786384" y="3639312"/>
+            <a:ext cx="3474720" cy="201168"/>
+          </a:xfrm>
+          <a:prstGeom prst="rect">
+            <a:avLst/>
+          </a:prstGeom>
+          <a:noFill/>
+          <a:ln/>
+        </p:spPr>
+        <p:txBody>
+          <a:bodyPr wrap="square" lIns="0" tIns="0" rIns="0" bIns="0" rtlCol="0" anchor="ctr"/>
+          <a:lstStyle/>
+          <a:p>
+            <a:pPr indent="0" marL="0">
+              <a:buNone/>
+            </a:pPr>
+            <a:r>
+              <a:rPr lang="en-US" sz="850" dirty="0">
                 <a:solidFill>
                   <a:srgbClr val="5A5952"/>
                 </a:solidFill>
@@ -5124,7 +5345,7 @@
               </a:rPr>
               <a:t>Short italic → bold</a:t>
             </a:r>
-            <a:endParaRPr lang="en-US" sz="900" dirty="0"/>
+            <a:endParaRPr lang="en-US" sz="850" dirty="0"/>
           </a:p>
         </p:txBody>
       </p:sp>
@@ -5136,12 +5357,12 @@
         </p:nvSpPr>
         <p:spPr>
           <a:xfrm>
-            <a:off x="4663440" y="1234440"/>
-            <a:ext cx="4023360" cy="594360"/>
+            <a:off x="365760" y="3950208"/>
+            <a:ext cx="4023360" cy="493776"/>
           </a:xfrm>
           <a:prstGeom prst="roundRect">
             <a:avLst>
-              <a:gd name="adj" fmla="val 12308"/>
+              <a:gd name="adj" fmla="val 14815"/>
             </a:avLst>
           </a:prstGeom>
           <a:solidFill>
@@ -5170,12 +5391,12 @@
         </p:nvSpPr>
         <p:spPr>
           <a:xfrm>
-            <a:off x="4663440" y="1234440"/>
-            <a:ext cx="365760" cy="594360"/>
+            <a:off x="365760" y="3950208"/>
+            <a:ext cx="347472" cy="493776"/>
           </a:xfrm>
           <a:prstGeom prst="roundRect">
             <a:avLst>
-              <a:gd name="adj" fmla="val 20000"/>
+              <a:gd name="adj" fmla="val 21053"/>
             </a:avLst>
           </a:prstGeom>
           <a:solidFill>
@@ -5197,8 +5418,8 @@
         </p:nvSpPr>
         <p:spPr>
           <a:xfrm>
-            <a:off x="4663440" y="1234440"/>
-            <a:ext cx="365760" cy="594360"/>
+            <a:off x="365760" y="3950208"/>
+            <a:ext cx="347472" cy="493776"/>
           </a:xfrm>
           <a:prstGeom prst="rect">
             <a:avLst/>
@@ -5236,24 +5457,24 @@
         </p:nvSpPr>
         <p:spPr>
           <a:xfrm>
-            <a:off x="5102352" y="1271016"/>
-            <a:ext cx="2286000" cy="274320"/>
-          </a:xfrm>
-          <a:prstGeom prst="rect">
-            <a:avLst/>
-          </a:prstGeom>
-          <a:noFill/>
-          <a:ln/>
-        </p:spPr>
-        <p:txBody>
-          <a:bodyPr wrap="square" lIns="0" tIns="0" rIns="0" bIns="0" rtlCol="0" anchor="ctr"/>
-          <a:lstStyle/>
-          <a:p>
-            <a:pPr indent="0" marL="0">
-              <a:buNone/>
-            </a:pPr>
-            <a:r>
-              <a:rPr lang="en-US" sz="1050" b="1" dirty="0">
+            <a:off x="786384" y="3977640"/>
+            <a:ext cx="2286000" cy="228600"/>
+          </a:xfrm>
+          <a:prstGeom prst="rect">
+            <a:avLst/>
+          </a:prstGeom>
+          <a:noFill/>
+          <a:ln/>
+        </p:spPr>
+        <p:txBody>
+          <a:bodyPr wrap="square" lIns="0" tIns="0" rIns="0" bIns="0" rtlCol="0" anchor="ctr"/>
+          <a:lstStyle/>
+          <a:p>
+            <a:pPr indent="0" marL="0">
+              <a:buNone/>
+            </a:pPr>
+            <a:r>
+              <a:rPr lang="en-US" sz="1000" b="1" dirty="0">
                 <a:solidFill>
                   <a:srgbClr val="1A1A18"/>
                 </a:solidFill>
@@ -5263,7 +5484,7 @@
               </a:rPr>
               <a:t>Remove underline</a:t>
             </a:r>
-            <a:endParaRPr lang="en-US" sz="1050" dirty="0"/>
+            <a:endParaRPr lang="en-US" sz="1000" dirty="0"/>
           </a:p>
         </p:txBody>
       </p:sp>
@@ -5275,24 +5496,24 @@
         </p:nvSpPr>
         <p:spPr>
           <a:xfrm>
-            <a:off x="5102352" y="1527048"/>
-            <a:ext cx="3474720" cy="256032"/>
-          </a:xfrm>
-          <a:prstGeom prst="rect">
-            <a:avLst/>
-          </a:prstGeom>
-          <a:noFill/>
-          <a:ln/>
-        </p:spPr>
-        <p:txBody>
-          <a:bodyPr wrap="square" lIns="0" tIns="0" rIns="0" bIns="0" rtlCol="0" anchor="ctr"/>
-          <a:lstStyle/>
-          <a:p>
-            <a:pPr indent="0" marL="0">
-              <a:buNone/>
-            </a:pPr>
-            <a:r>
-              <a:rPr lang="en-US" sz="900" dirty="0">
+            <a:off x="786384" y="4206240"/>
+            <a:ext cx="3474720" cy="201168"/>
+          </a:xfrm>
+          <a:prstGeom prst="rect">
+            <a:avLst/>
+          </a:prstGeom>
+          <a:noFill/>
+          <a:ln/>
+        </p:spPr>
+        <p:txBody>
+          <a:bodyPr wrap="square" lIns="0" tIns="0" rIns="0" bIns="0" rtlCol="0" anchor="ctr"/>
+          <a:lstStyle/>
+          <a:p>
+            <a:pPr indent="0" marL="0">
+              <a:buNone/>
+            </a:pPr>
+            <a:r>
+              <a:rPr lang="en-US" sz="850" dirty="0">
                 <a:solidFill>
                   <a:srgbClr val="5A5952"/>
                 </a:solidFill>
@@ -5302,7 +5523,7 @@
               </a:rPr>
               <a:t>&lt;u&gt; unwrapped, text kept</a:t>
             </a:r>
-            <a:endParaRPr lang="en-US" sz="900" dirty="0"/>
+            <a:endParaRPr lang="en-US" sz="850" dirty="0"/>
           </a:p>
         </p:txBody>
       </p:sp>
@@ -5314,12 +5535,12 @@
         </p:nvSpPr>
         <p:spPr>
           <a:xfrm>
-            <a:off x="4663440" y="1920240"/>
-            <a:ext cx="4023360" cy="594360"/>
+            <a:off x="4663440" y="1115568"/>
+            <a:ext cx="4023360" cy="493776"/>
           </a:xfrm>
           <a:prstGeom prst="roundRect">
             <a:avLst>
-              <a:gd name="adj" fmla="val 12308"/>
+              <a:gd name="adj" fmla="val 14815"/>
             </a:avLst>
           </a:prstGeom>
           <a:solidFill>
@@ -5348,12 +5569,12 @@
         </p:nvSpPr>
         <p:spPr>
           <a:xfrm>
-            <a:off x="4663440" y="1920240"/>
-            <a:ext cx="365760" cy="594360"/>
+            <a:off x="4663440" y="1115568"/>
+            <a:ext cx="347472" cy="493776"/>
           </a:xfrm>
           <a:prstGeom prst="roundRect">
             <a:avLst>
-              <a:gd name="adj" fmla="val 20000"/>
+              <a:gd name="adj" fmla="val 21053"/>
             </a:avLst>
           </a:prstGeom>
           <a:solidFill>
@@ -5375,8 +5596,8 @@
         </p:nvSpPr>
         <p:spPr>
           <a:xfrm>
-            <a:off x="4663440" y="1920240"/>
-            <a:ext cx="365760" cy="594360"/>
+            <a:off x="4663440" y="1115568"/>
+            <a:ext cx="347472" cy="493776"/>
           </a:xfrm>
           <a:prstGeom prst="rect">
             <a:avLst/>
@@ -5414,24 +5635,24 @@
         </p:nvSpPr>
         <p:spPr>
           <a:xfrm>
-            <a:off x="5102352" y="1956816"/>
-            <a:ext cx="2286000" cy="274320"/>
-          </a:xfrm>
-          <a:prstGeom prst="rect">
-            <a:avLst/>
-          </a:prstGeom>
-          <a:noFill/>
-          <a:ln/>
-        </p:spPr>
-        <p:txBody>
-          <a:bodyPr wrap="square" lIns="0" tIns="0" rIns="0" bIns="0" rtlCol="0" anchor="ctr"/>
-          <a:lstStyle/>
-          <a:p>
-            <a:pPr indent="0" marL="0">
-              <a:buNone/>
-            </a:pPr>
-            <a:r>
-              <a:rPr lang="en-US" sz="1050" b="1" dirty="0">
+            <a:off x="5084064" y="1143000"/>
+            <a:ext cx="2286000" cy="228600"/>
+          </a:xfrm>
+          <a:prstGeom prst="rect">
+            <a:avLst/>
+          </a:prstGeom>
+          <a:noFill/>
+          <a:ln/>
+        </p:spPr>
+        <p:txBody>
+          <a:bodyPr wrap="square" lIns="0" tIns="0" rIns="0" bIns="0" rtlCol="0" anchor="ctr"/>
+          <a:lstStyle/>
+          <a:p>
+            <a:pPr indent="0" marL="0">
+              <a:buNone/>
+            </a:pPr>
+            <a:r>
+              <a:rPr lang="en-US" sz="1000" b="1" dirty="0">
                 <a:solidFill>
                   <a:srgbClr val="1A1A18"/>
                 </a:solidFill>
@@ -5441,7 +5662,7 @@
               </a:rPr>
               <a:t>Strip MSO junk</a:t>
             </a:r>
-            <a:endParaRPr lang="en-US" sz="1050" dirty="0"/>
+            <a:endParaRPr lang="en-US" sz="1000" dirty="0"/>
           </a:p>
         </p:txBody>
       </p:sp>
@@ -5453,24 +5674,24 @@
         </p:nvSpPr>
         <p:spPr>
           <a:xfrm>
-            <a:off x="5102352" y="2212848"/>
-            <a:ext cx="3474720" cy="256032"/>
-          </a:xfrm>
-          <a:prstGeom prst="rect">
-            <a:avLst/>
-          </a:prstGeom>
-          <a:noFill/>
-          <a:ln/>
-        </p:spPr>
-        <p:txBody>
-          <a:bodyPr wrap="square" lIns="0" tIns="0" rIns="0" bIns="0" rtlCol="0" anchor="ctr"/>
-          <a:lstStyle/>
-          <a:p>
-            <a:pPr indent="0" marL="0">
-              <a:buNone/>
-            </a:pPr>
-            <a:r>
-              <a:rPr lang="en-US" sz="900" dirty="0">
+            <a:off x="5084064" y="1371600"/>
+            <a:ext cx="3474720" cy="201168"/>
+          </a:xfrm>
+          <a:prstGeom prst="rect">
+            <a:avLst/>
+          </a:prstGeom>
+          <a:noFill/>
+          <a:ln/>
+        </p:spPr>
+        <p:txBody>
+          <a:bodyPr wrap="square" lIns="0" tIns="0" rIns="0" bIns="0" rtlCol="0" anchor="ctr"/>
+          <a:lstStyle/>
+          <a:p>
+            <a:pPr indent="0" marL="0">
+              <a:buNone/>
+            </a:pPr>
+            <a:r>
+              <a:rPr lang="en-US" sz="850" dirty="0">
                 <a:solidFill>
                   <a:srgbClr val="5A5952"/>
                 </a:solidFill>
@@ -5480,7 +5701,7 @@
               </a:rPr>
               <a:t>&lt;xml&gt;, &lt;!--[if mso]--&gt; removed</a:t>
             </a:r>
-            <a:endParaRPr lang="en-US" sz="900" dirty="0"/>
+            <a:endParaRPr lang="en-US" sz="850" dirty="0"/>
           </a:p>
         </p:txBody>
       </p:sp>
@@ -5492,12 +5713,12 @@
         </p:nvSpPr>
         <p:spPr>
           <a:xfrm>
-            <a:off x="4663440" y="2606040"/>
-            <a:ext cx="4023360" cy="594360"/>
+            <a:off x="4663440" y="1682496"/>
+            <a:ext cx="4023360" cy="493776"/>
           </a:xfrm>
           <a:prstGeom prst="roundRect">
             <a:avLst>
-              <a:gd name="adj" fmla="val 12308"/>
+              <a:gd name="adj" fmla="val 14815"/>
             </a:avLst>
           </a:prstGeom>
           <a:solidFill>
@@ -5526,12 +5747,12 @@
         </p:nvSpPr>
         <p:spPr>
           <a:xfrm>
-            <a:off x="4663440" y="2606040"/>
-            <a:ext cx="365760" cy="594360"/>
+            <a:off x="4663440" y="1682496"/>
+            <a:ext cx="347472" cy="493776"/>
           </a:xfrm>
           <a:prstGeom prst="roundRect">
             <a:avLst>
-              <a:gd name="adj" fmla="val 20000"/>
+              <a:gd name="adj" fmla="val 21053"/>
             </a:avLst>
           </a:prstGeom>
           <a:solidFill>
@@ -5553,8 +5774,8 @@
         </p:nvSpPr>
         <p:spPr>
           <a:xfrm>
-            <a:off x="4663440" y="2606040"/>
-            <a:ext cx="365760" cy="594360"/>
+            <a:off x="4663440" y="1682496"/>
+            <a:ext cx="347472" cy="493776"/>
           </a:xfrm>
           <a:prstGeom prst="rect">
             <a:avLst/>
@@ -5592,24 +5813,24 @@
         </p:nvSpPr>
         <p:spPr>
           <a:xfrm>
-            <a:off x="5102352" y="2642616"/>
-            <a:ext cx="2286000" cy="274320"/>
-          </a:xfrm>
-          <a:prstGeom prst="rect">
-            <a:avLst/>
-          </a:prstGeom>
-          <a:noFill/>
-          <a:ln/>
-        </p:spPr>
-        <p:txBody>
-          <a:bodyPr wrap="square" lIns="0" tIns="0" rIns="0" bIns="0" rtlCol="0" anchor="ctr"/>
-          <a:lstStyle/>
-          <a:p>
-            <a:pPr indent="0" marL="0">
-              <a:buNone/>
-            </a:pPr>
-            <a:r>
-              <a:rPr lang="en-US" sz="1050" b="1" dirty="0">
+            <a:off x="5084064" y="1709928"/>
+            <a:ext cx="2286000" cy="228600"/>
+          </a:xfrm>
+          <a:prstGeom prst="rect">
+            <a:avLst/>
+          </a:prstGeom>
+          <a:noFill/>
+          <a:ln/>
+        </p:spPr>
+        <p:txBody>
+          <a:bodyPr wrap="square" lIns="0" tIns="0" rIns="0" bIns="0" rtlCol="0" anchor="ctr"/>
+          <a:lstStyle/>
+          <a:p>
+            <a:pPr indent="0" marL="0">
+              <a:buNone/>
+            </a:pPr>
+            <a:r>
+              <a:rPr lang="en-US" sz="1000" b="1" dirty="0">
                 <a:solidFill>
                   <a:srgbClr val="1A1A18"/>
                 </a:solidFill>
@@ -5619,7 +5840,7 @@
               </a:rPr>
               <a:t>Symbol entities</a:t>
             </a:r>
-            <a:endParaRPr lang="en-US" sz="1050" dirty="0"/>
+            <a:endParaRPr lang="en-US" sz="1000" dirty="0"/>
           </a:p>
         </p:txBody>
       </p:sp>
@@ -5631,24 +5852,24 @@
         </p:nvSpPr>
         <p:spPr>
           <a:xfrm>
-            <a:off x="5102352" y="2898648"/>
-            <a:ext cx="3474720" cy="256032"/>
-          </a:xfrm>
-          <a:prstGeom prst="rect">
-            <a:avLst/>
-          </a:prstGeom>
-          <a:noFill/>
-          <a:ln/>
-        </p:spPr>
-        <p:txBody>
-          <a:bodyPr wrap="square" lIns="0" tIns="0" rIns="0" bIns="0" rtlCol="0" anchor="ctr"/>
-          <a:lstStyle/>
-          <a:p>
-            <a:pPr indent="0" marL="0">
-              <a:buNone/>
-            </a:pPr>
-            <a:r>
-              <a:rPr lang="en-US" sz="900" dirty="0">
+            <a:off x="5084064" y="1938528"/>
+            <a:ext cx="3474720" cy="201168"/>
+          </a:xfrm>
+          <a:prstGeom prst="rect">
+            <a:avLst/>
+          </a:prstGeom>
+          <a:noFill/>
+          <a:ln/>
+        </p:spPr>
+        <p:txBody>
+          <a:bodyPr wrap="square" lIns="0" tIns="0" rIns="0" bIns="0" rtlCol="0" anchor="ctr"/>
+          <a:lstStyle/>
+          <a:p>
+            <a:pPr indent="0" marL="0">
+              <a:buNone/>
+            </a:pPr>
+            <a:r>
+              <a:rPr lang="en-US" sz="850" dirty="0">
                 <a:solidFill>
                   <a:srgbClr val="5A5952"/>
                 </a:solidFill>
@@ -5658,7 +5879,7 @@
               </a:rPr>
               <a:t>(C)(TM)(R) → &amp;copy;&amp;trade;&amp;reg;</a:t>
             </a:r>
-            <a:endParaRPr lang="en-US" sz="900" dirty="0"/>
+            <a:endParaRPr lang="en-US" sz="850" dirty="0"/>
           </a:p>
         </p:txBody>
       </p:sp>
@@ -5670,12 +5891,12 @@
         </p:nvSpPr>
         <p:spPr>
           <a:xfrm>
-            <a:off x="4663440" y="3291840"/>
-            <a:ext cx="4023360" cy="594360"/>
+            <a:off x="4663440" y="2249424"/>
+            <a:ext cx="4023360" cy="493776"/>
           </a:xfrm>
           <a:prstGeom prst="roundRect">
             <a:avLst>
-              <a:gd name="adj" fmla="val 12308"/>
+              <a:gd name="adj" fmla="val 14815"/>
             </a:avLst>
           </a:prstGeom>
           <a:solidFill>
@@ -5704,12 +5925,12 @@
         </p:nvSpPr>
         <p:spPr>
           <a:xfrm>
-            <a:off x="4663440" y="3291840"/>
-            <a:ext cx="365760" cy="594360"/>
+            <a:off x="4663440" y="2249424"/>
+            <a:ext cx="347472" cy="493776"/>
           </a:xfrm>
           <a:prstGeom prst="roundRect">
             <a:avLst>
-              <a:gd name="adj" fmla="val 20000"/>
+              <a:gd name="adj" fmla="val 21053"/>
             </a:avLst>
           </a:prstGeom>
           <a:solidFill>
@@ -5731,8 +5952,8 @@
         </p:nvSpPr>
         <p:spPr>
           <a:xfrm>
-            <a:off x="4663440" y="3291840"/>
-            <a:ext cx="365760" cy="594360"/>
+            <a:off x="4663440" y="2249424"/>
+            <a:ext cx="347472" cy="493776"/>
           </a:xfrm>
           <a:prstGeom prst="rect">
             <a:avLst/>
@@ -5770,24 +5991,24 @@
         </p:nvSpPr>
         <p:spPr>
           <a:xfrm>
-            <a:off x="5102352" y="3328416"/>
-            <a:ext cx="2286000" cy="274320"/>
-          </a:xfrm>
-          <a:prstGeom prst="rect">
-            <a:avLst/>
-          </a:prstGeom>
-          <a:noFill/>
-          <a:ln/>
-        </p:spPr>
-        <p:txBody>
-          <a:bodyPr wrap="square" lIns="0" tIns="0" rIns="0" bIns="0" rtlCol="0" anchor="ctr"/>
-          <a:lstStyle/>
-          <a:p>
-            <a:pPr indent="0" marL="0">
-              <a:buNone/>
-            </a:pPr>
-            <a:r>
-              <a:rPr lang="en-US" sz="1050" b="1" dirty="0">
+            <a:off x="5084064" y="2276856"/>
+            <a:ext cx="2286000" cy="228600"/>
+          </a:xfrm>
+          <a:prstGeom prst="rect">
+            <a:avLst/>
+          </a:prstGeom>
+          <a:noFill/>
+          <a:ln/>
+        </p:spPr>
+        <p:txBody>
+          <a:bodyPr wrap="square" lIns="0" tIns="0" rIns="0" bIns="0" rtlCol="0" anchor="ctr"/>
+          <a:lstStyle/>
+          <a:p>
+            <a:pPr indent="0" marL="0">
+              <a:buNone/>
+            </a:pPr>
+            <a:r>
+              <a:rPr lang="en-US" sz="1000" b="1" dirty="0">
                 <a:solidFill>
                   <a:srgbClr val="1A1A18"/>
                 </a:solidFill>
@@ -5797,7 +6018,7 @@
               </a:rPr>
               <a:t>Table scope</a:t>
             </a:r>
-            <a:endParaRPr lang="en-US" sz="1050" dirty="0"/>
+            <a:endParaRPr lang="en-US" sz="1000" dirty="0"/>
           </a:p>
         </p:txBody>
       </p:sp>
@@ -5809,24 +6030,24 @@
         </p:nvSpPr>
         <p:spPr>
           <a:xfrm>
-            <a:off x="5102352" y="3584448"/>
-            <a:ext cx="3474720" cy="256032"/>
-          </a:xfrm>
-          <a:prstGeom prst="rect">
-            <a:avLst/>
-          </a:prstGeom>
-          <a:noFill/>
-          <a:ln/>
-        </p:spPr>
-        <p:txBody>
-          <a:bodyPr wrap="square" lIns="0" tIns="0" rIns="0" bIns="0" rtlCol="0" anchor="ctr"/>
-          <a:lstStyle/>
-          <a:p>
-            <a:pPr indent="0" marL="0">
-              <a:buNone/>
-            </a:pPr>
-            <a:r>
-              <a:rPr lang="en-US" sz="900" dirty="0">
+            <a:off x="5084064" y="2505456"/>
+            <a:ext cx="3474720" cy="201168"/>
+          </a:xfrm>
+          <a:prstGeom prst="rect">
+            <a:avLst/>
+          </a:prstGeom>
+          <a:noFill/>
+          <a:ln/>
+        </p:spPr>
+        <p:txBody>
+          <a:bodyPr wrap="square" lIns="0" tIns="0" rIns="0" bIns="0" rtlCol="0" anchor="ctr"/>
+          <a:lstStyle/>
+          <a:p>
+            <a:pPr indent="0" marL="0">
+              <a:buNone/>
+            </a:pPr>
+            <a:r>
+              <a:rPr lang="en-US" sz="850" dirty="0">
                 <a:solidFill>
                   <a:srgbClr val="5A5952"/>
                 </a:solidFill>
@@ -5836,7 +6057,7 @@
               </a:rPr>
               <a:t>Bold row → &lt;th scope="col"&gt;</a:t>
             </a:r>
-            <a:endParaRPr lang="en-US" sz="900" dirty="0"/>
+            <a:endParaRPr lang="en-US" sz="850" dirty="0"/>
           </a:p>
         </p:txBody>
       </p:sp>
@@ -5848,12 +6069,12 @@
         </p:nvSpPr>
         <p:spPr>
           <a:xfrm>
-            <a:off x="4663440" y="3977640"/>
-            <a:ext cx="4023360" cy="594360"/>
+            <a:off x="4663440" y="2816352"/>
+            <a:ext cx="4023360" cy="493776"/>
           </a:xfrm>
           <a:prstGeom prst="roundRect">
             <a:avLst>
-              <a:gd name="adj" fmla="val 12308"/>
+              <a:gd name="adj" fmla="val 14815"/>
             </a:avLst>
           </a:prstGeom>
           <a:solidFill>
@@ -5882,12 +6103,12 @@
         </p:nvSpPr>
         <p:spPr>
           <a:xfrm>
-            <a:off x="4663440" y="3977640"/>
-            <a:ext cx="365760" cy="594360"/>
+            <a:off x="4663440" y="2816352"/>
+            <a:ext cx="347472" cy="493776"/>
           </a:xfrm>
           <a:prstGeom prst="roundRect">
             <a:avLst>
-              <a:gd name="adj" fmla="val 20000"/>
+              <a:gd name="adj" fmla="val 21053"/>
             </a:avLst>
           </a:prstGeom>
           <a:solidFill>
@@ -5909,8 +6130,8 @@
         </p:nvSpPr>
         <p:spPr>
           <a:xfrm>
-            <a:off x="4663440" y="3977640"/>
-            <a:ext cx="365760" cy="594360"/>
+            <a:off x="4663440" y="2816352"/>
+            <a:ext cx="347472" cy="493776"/>
           </a:xfrm>
           <a:prstGeom prst="rect">
             <a:avLst/>
@@ -5948,24 +6169,24 @@
         </p:nvSpPr>
         <p:spPr>
           <a:xfrm>
-            <a:off x="5102352" y="4014216"/>
-            <a:ext cx="2286000" cy="274320"/>
-          </a:xfrm>
-          <a:prstGeom prst="rect">
-            <a:avLst/>
-          </a:prstGeom>
-          <a:noFill/>
-          <a:ln/>
-        </p:spPr>
-        <p:txBody>
-          <a:bodyPr wrap="square" lIns="0" tIns="0" rIns="0" bIns="0" rtlCol="0" anchor="ctr"/>
-          <a:lstStyle/>
-          <a:p>
-            <a:pPr indent="0" marL="0">
-              <a:buNone/>
-            </a:pPr>
-            <a:r>
-              <a:rPr lang="en-US" sz="1050" b="1" dirty="0">
+            <a:off x="5084064" y="2843784"/>
+            <a:ext cx="2286000" cy="228600"/>
+          </a:xfrm>
+          <a:prstGeom prst="rect">
+            <a:avLst/>
+          </a:prstGeom>
+          <a:noFill/>
+          <a:ln/>
+        </p:spPr>
+        <p:txBody>
+          <a:bodyPr wrap="square" lIns="0" tIns="0" rIns="0" bIns="0" rtlCol="0" anchor="ctr"/>
+          <a:lstStyle/>
+          <a:p>
+            <a:pPr indent="0" marL="0">
+              <a:buNone/>
+            </a:pPr>
+            <a:r>
+              <a:rPr lang="en-US" sz="1000" b="1" dirty="0">
                 <a:solidFill>
                   <a:srgbClr val="1A1A18"/>
                 </a:solidFill>
@@ -5975,7 +6196,7 @@
               </a:rPr>
               <a:t>Bluecard®</a:t>
             </a:r>
-            <a:endParaRPr lang="en-US" sz="1050" dirty="0"/>
+            <a:endParaRPr lang="en-US" sz="1000" dirty="0"/>
           </a:p>
         </p:txBody>
       </p:sp>
@@ -5987,24 +6208,24 @@
         </p:nvSpPr>
         <p:spPr>
           <a:xfrm>
-            <a:off x="5102352" y="4270248"/>
-            <a:ext cx="3474720" cy="256032"/>
-          </a:xfrm>
-          <a:prstGeom prst="rect">
-            <a:avLst/>
-          </a:prstGeom>
-          <a:noFill/>
-          <a:ln/>
-        </p:spPr>
-        <p:txBody>
-          <a:bodyPr wrap="square" lIns="0" tIns="0" rIns="0" bIns="0" rtlCol="0" anchor="ctr"/>
-          <a:lstStyle/>
-          <a:p>
-            <a:pPr indent="0" marL="0">
-              <a:buNone/>
-            </a:pPr>
-            <a:r>
-              <a:rPr lang="en-US" sz="900" dirty="0">
+            <a:off x="5084064" y="3072384"/>
+            <a:ext cx="3474720" cy="201168"/>
+          </a:xfrm>
+          <a:prstGeom prst="rect">
+            <a:avLst/>
+          </a:prstGeom>
+          <a:noFill/>
+          <a:ln/>
+        </p:spPr>
+        <p:txBody>
+          <a:bodyPr wrap="square" lIns="0" tIns="0" rIns="0" bIns="0" rtlCol="0" anchor="ctr"/>
+          <a:lstStyle/>
+          <a:p>
+            <a:pPr indent="0" marL="0">
+              <a:buNone/>
+            </a:pPr>
+            <a:r>
+              <a:rPr lang="en-US" sz="850" dirty="0">
                 <a:solidFill>
                   <a:srgbClr val="5A5952"/>
                 </a:solidFill>
@@ -6014,7 +6235,7 @@
               </a:rPr>
               <a:t>Bluecard → Bluecard&amp;reg;</a:t>
             </a:r>
-            <a:endParaRPr lang="en-US" sz="900" dirty="0"/>
+            <a:endParaRPr lang="en-US" sz="850" dirty="0"/>
           </a:p>
         </p:txBody>
       </p:sp>
@@ -6026,12 +6247,46 @@
         </p:nvSpPr>
         <p:spPr>
           <a:xfrm>
-            <a:off x="365760" y="4663440"/>
-            <a:ext cx="8412480" cy="320040"/>
+            <a:off x="4663440" y="3383280"/>
+            <a:ext cx="4023360" cy="493776"/>
           </a:xfrm>
           <a:prstGeom prst="roundRect">
             <a:avLst>
-              <a:gd name="adj" fmla="val 22857"/>
+              <a:gd name="adj" fmla="val 14815"/>
+            </a:avLst>
+          </a:prstGeom>
+          <a:solidFill>
+            <a:srgbClr val="FFFFFF"/>
+          </a:solidFill>
+          <a:ln w="12700">
+            <a:solidFill>
+              <a:srgbClr val="E2E0D8"/>
+            </a:solidFill>
+            <a:prstDash val="solid"/>
+          </a:ln>
+          <a:effectLst>
+            <a:outerShdw sx="100000" sy="100000" kx="0" ky="0" algn="bl" rotWithShape="0" blurRad="101600" dist="38100" dir="2700000">
+              <a:srgbClr val="000000">
+                <a:alpha val="10000"/>
+              </a:srgbClr>
+            </a:outerShdw>
+          </a:effectLst>
+        </p:spPr>
+      </p:sp>
+      <p:sp>
+        <p:nvSpPr>
+          <p:cNvPr id="55" name="Shape 53"/>
+          <p:cNvSpPr/>
+          <p:nvPr/>
+        </p:nvSpPr>
+        <p:spPr>
+          <a:xfrm>
+            <a:off x="4663440" y="3383280"/>
+            <a:ext cx="347472" cy="493776"/>
+          </a:xfrm>
+          <a:prstGeom prst="roundRect">
+            <a:avLst>
+              <a:gd name="adj" fmla="val 21053"/>
             </a:avLst>
           </a:prstGeom>
           <a:solidFill>
@@ -6047,40 +6302,362 @@
       </p:sp>
       <p:sp>
         <p:nvSpPr>
-          <p:cNvPr id="55" name="Text 53"/>
-          <p:cNvSpPr/>
-          <p:nvPr/>
-        </p:nvSpPr>
-        <p:spPr>
-          <a:xfrm>
-            <a:off x="457200" y="4663440"/>
-            <a:ext cx="8229600" cy="320040"/>
-          </a:xfrm>
-          <a:prstGeom prst="rect">
-            <a:avLst/>
-          </a:prstGeom>
-          <a:noFill/>
-          <a:ln/>
-        </p:spPr>
-        <p:txBody>
-          <a:bodyPr wrap="square" lIns="0" tIns="0" rIns="0" bIns="0" rtlCol="0" anchor="ctr"/>
-          <a:lstStyle/>
-          <a:p>
-            <a:pPr indent="0" marL="0">
-              <a:buNone/>
-            </a:pPr>
-            <a:r>
-              <a:rPr lang="en-US" sz="1000" dirty="0">
-                <a:solidFill>
-                  <a:srgbClr val="A8D5A2"/>
+          <p:cNvPr id="56" name="Text 54"/>
+          <p:cNvSpPr/>
+          <p:nvPr/>
+        </p:nvSpPr>
+        <p:spPr>
+          <a:xfrm>
+            <a:off x="4663440" y="3383280"/>
+            <a:ext cx="347472" cy="493776"/>
+          </a:xfrm>
+          <a:prstGeom prst="rect">
+            <a:avLst/>
+          </a:prstGeom>
+          <a:noFill/>
+          <a:ln/>
+        </p:spPr>
+        <p:txBody>
+          <a:bodyPr wrap="square" lIns="0" tIns="0" rIns="0" bIns="0" rtlCol="0" anchor="ctr"/>
+          <a:lstStyle/>
+          <a:p>
+            <a:pPr algn="ctr" indent="0" marL="0">
+              <a:buNone/>
+            </a:pPr>
+            <a:r>
+              <a:rPr lang="en-US" sz="800" b="1" dirty="0">
+                <a:solidFill>
+                  <a:srgbClr val="FFFFFF"/>
                 </a:solidFill>
                 <a:latin typeface="Courier New" pitchFamily="34" charset="0"/>
                 <a:ea typeface="Courier New" pitchFamily="34" charset="-122"/>
                 <a:cs typeface="Courier New" pitchFamily="34" charset="-120"/>
               </a:rPr>
-              <a:t>Rule 11 — &amp;nbsp; → regular space    |    Rule C — Consecutive &lt;strong&gt; merging: nested &amp; adjacent tags collapsed into one</a:t>
+              <a:t>11</a:t>
+            </a:r>
+            <a:endParaRPr lang="en-US" sz="800" dirty="0"/>
+          </a:p>
+        </p:txBody>
+      </p:sp>
+      <p:sp>
+        <p:nvSpPr>
+          <p:cNvPr id="57" name="Text 55"/>
+          <p:cNvSpPr/>
+          <p:nvPr/>
+        </p:nvSpPr>
+        <p:spPr>
+          <a:xfrm>
+            <a:off x="5084064" y="3410712"/>
+            <a:ext cx="2286000" cy="228600"/>
+          </a:xfrm>
+          <a:prstGeom prst="rect">
+            <a:avLst/>
+          </a:prstGeom>
+          <a:noFill/>
+          <a:ln/>
+        </p:spPr>
+        <p:txBody>
+          <a:bodyPr wrap="square" lIns="0" tIns="0" rIns="0" bIns="0" rtlCol="0" anchor="ctr"/>
+          <a:lstStyle/>
+          <a:p>
+            <a:pPr indent="0" marL="0">
+              <a:buNone/>
+            </a:pPr>
+            <a:r>
+              <a:rPr lang="en-US" sz="1000" b="1" dirty="0">
+                <a:solidFill>
+                  <a:srgbClr val="1A1A18"/>
+                </a:solidFill>
+                <a:latin typeface="Calibri" pitchFamily="34" charset="0"/>
+                <a:ea typeface="Calibri" pitchFamily="34" charset="-122"/>
+                <a:cs typeface="Calibri" pitchFamily="34" charset="-120"/>
+              </a:rPr>
+              <a:t>Remove &amp;nbsp;</a:t>
             </a:r>
             <a:endParaRPr lang="en-US" sz="1000" dirty="0"/>
+          </a:p>
+        </p:txBody>
+      </p:sp>
+      <p:sp>
+        <p:nvSpPr>
+          <p:cNvPr id="58" name="Text 56"/>
+          <p:cNvSpPr/>
+          <p:nvPr/>
+        </p:nvSpPr>
+        <p:spPr>
+          <a:xfrm>
+            <a:off x="5084064" y="3639312"/>
+            <a:ext cx="3474720" cy="201168"/>
+          </a:xfrm>
+          <a:prstGeom prst="rect">
+            <a:avLst/>
+          </a:prstGeom>
+          <a:noFill/>
+          <a:ln/>
+        </p:spPr>
+        <p:txBody>
+          <a:bodyPr wrap="square" lIns="0" tIns="0" rIns="0" bIns="0" rtlCol="0" anchor="ctr"/>
+          <a:lstStyle/>
+          <a:p>
+            <a:pPr indent="0" marL="0">
+              <a:buNone/>
+            </a:pPr>
+            <a:r>
+              <a:rPr lang="en-US" sz="850" dirty="0">
+                <a:solidFill>
+                  <a:srgbClr val="5A5952"/>
+                </a:solidFill>
+                <a:latin typeface="Courier New" pitchFamily="34" charset="0"/>
+                <a:ea typeface="Courier New" pitchFamily="34" charset="-122"/>
+                <a:cs typeface="Courier New" pitchFamily="34" charset="-120"/>
+              </a:rPr>
+              <a:t>&amp;nbsp; → regular space</a:t>
+            </a:r>
+            <a:endParaRPr lang="en-US" sz="850" dirty="0"/>
+          </a:p>
+        </p:txBody>
+      </p:sp>
+      <p:sp>
+        <p:nvSpPr>
+          <p:cNvPr id="59" name="Shape 57"/>
+          <p:cNvSpPr/>
+          <p:nvPr/>
+        </p:nvSpPr>
+        <p:spPr>
+          <a:xfrm>
+            <a:off x="4663440" y="3950208"/>
+            <a:ext cx="4023360" cy="493776"/>
+          </a:xfrm>
+          <a:prstGeom prst="roundRect">
+            <a:avLst>
+              <a:gd name="adj" fmla="val 14815"/>
+            </a:avLst>
+          </a:prstGeom>
+          <a:solidFill>
+            <a:srgbClr val="FFFFFF"/>
+          </a:solidFill>
+          <a:ln w="12700">
+            <a:solidFill>
+              <a:srgbClr val="E2E0D8"/>
+            </a:solidFill>
+            <a:prstDash val="solid"/>
+          </a:ln>
+          <a:effectLst>
+            <a:outerShdw sx="100000" sy="100000" kx="0" ky="0" algn="bl" rotWithShape="0" blurRad="101600" dist="38100" dir="2700000">
+              <a:srgbClr val="000000">
+                <a:alpha val="10000"/>
+              </a:srgbClr>
+            </a:outerShdw>
+          </a:effectLst>
+        </p:spPr>
+      </p:sp>
+      <p:sp>
+        <p:nvSpPr>
+          <p:cNvPr id="60" name="Shape 58"/>
+          <p:cNvSpPr/>
+          <p:nvPr/>
+        </p:nvSpPr>
+        <p:spPr>
+          <a:xfrm>
+            <a:off x="4663440" y="3950208"/>
+            <a:ext cx="347472" cy="493776"/>
+          </a:xfrm>
+          <a:prstGeom prst="roundRect">
+            <a:avLst>
+              <a:gd name="adj" fmla="val 21053"/>
+            </a:avLst>
+          </a:prstGeom>
+          <a:solidFill>
+            <a:srgbClr val="9B2C2C"/>
+          </a:solidFill>
+          <a:ln w="12700">
+            <a:solidFill>
+              <a:srgbClr val="9B2C2C"/>
+            </a:solidFill>
+            <a:prstDash val="solid"/>
+          </a:ln>
+        </p:spPr>
+      </p:sp>
+      <p:sp>
+        <p:nvSpPr>
+          <p:cNvPr id="61" name="Text 59"/>
+          <p:cNvSpPr/>
+          <p:nvPr/>
+        </p:nvSpPr>
+        <p:spPr>
+          <a:xfrm>
+            <a:off x="4663440" y="3950208"/>
+            <a:ext cx="347472" cy="493776"/>
+          </a:xfrm>
+          <a:prstGeom prst="rect">
+            <a:avLst/>
+          </a:prstGeom>
+          <a:noFill/>
+          <a:ln/>
+        </p:spPr>
+        <p:txBody>
+          <a:bodyPr wrap="square" lIns="0" tIns="0" rIns="0" bIns="0" rtlCol="0" anchor="ctr"/>
+          <a:lstStyle/>
+          <a:p>
+            <a:pPr algn="ctr" indent="0" marL="0">
+              <a:buNone/>
+            </a:pPr>
+            <a:r>
+              <a:rPr lang="en-US" sz="800" b="1" dirty="0">
+                <a:solidFill>
+                  <a:srgbClr val="FFFFFF"/>
+                </a:solidFill>
+                <a:latin typeface="Courier New" pitchFamily="34" charset="0"/>
+                <a:ea typeface="Courier New" pitchFamily="34" charset="-122"/>
+                <a:cs typeface="Courier New" pitchFamily="34" charset="-120"/>
+              </a:rPr>
+              <a:t>D</a:t>
+            </a:r>
+            <a:endParaRPr lang="en-US" sz="800" dirty="0"/>
+          </a:p>
+        </p:txBody>
+      </p:sp>
+      <p:sp>
+        <p:nvSpPr>
+          <p:cNvPr id="62" name="Text 60"/>
+          <p:cNvSpPr/>
+          <p:nvPr/>
+        </p:nvSpPr>
+        <p:spPr>
+          <a:xfrm>
+            <a:off x="5084064" y="3977640"/>
+            <a:ext cx="2286000" cy="228600"/>
+          </a:xfrm>
+          <a:prstGeom prst="rect">
+            <a:avLst/>
+          </a:prstGeom>
+          <a:noFill/>
+          <a:ln/>
+        </p:spPr>
+        <p:txBody>
+          <a:bodyPr wrap="square" lIns="0" tIns="0" rIns="0" bIns="0" rtlCol="0" anchor="ctr"/>
+          <a:lstStyle/>
+          <a:p>
+            <a:pPr indent="0" marL="0">
+              <a:buNone/>
+            </a:pPr>
+            <a:r>
+              <a:rPr lang="en-US" sz="1000" b="1" dirty="0">
+                <a:solidFill>
+                  <a:srgbClr val="1A1A18"/>
+                </a:solidFill>
+                <a:latin typeface="Calibri" pitchFamily="34" charset="0"/>
+                <a:ea typeface="Calibri" pitchFamily="34" charset="-122"/>
+                <a:cs typeface="Calibri" pitchFamily="34" charset="-120"/>
+              </a:rPr>
+              <a:t>Remove strikethrough</a:t>
+            </a:r>
+            <a:endParaRPr lang="en-US" sz="1000" dirty="0"/>
+          </a:p>
+        </p:txBody>
+      </p:sp>
+      <p:sp>
+        <p:nvSpPr>
+          <p:cNvPr id="63" name="Text 61"/>
+          <p:cNvSpPr/>
+          <p:nvPr/>
+        </p:nvSpPr>
+        <p:spPr>
+          <a:xfrm>
+            <a:off x="5084064" y="4206240"/>
+            <a:ext cx="3474720" cy="201168"/>
+          </a:xfrm>
+          <a:prstGeom prst="rect">
+            <a:avLst/>
+          </a:prstGeom>
+          <a:noFill/>
+          <a:ln/>
+        </p:spPr>
+        <p:txBody>
+          <a:bodyPr wrap="square" lIns="0" tIns="0" rIns="0" bIns="0" rtlCol="0" anchor="ctr"/>
+          <a:lstStyle/>
+          <a:p>
+            <a:pPr indent="0" marL="0">
+              <a:buNone/>
+            </a:pPr>
+            <a:r>
+              <a:rPr lang="en-US" sz="850" dirty="0">
+                <a:solidFill>
+                  <a:srgbClr val="5A5952"/>
+                </a:solidFill>
+                <a:latin typeface="Courier New" pitchFamily="34" charset="0"/>
+                <a:ea typeface="Courier New" pitchFamily="34" charset="-122"/>
+                <a:cs typeface="Courier New" pitchFamily="34" charset="-120"/>
+              </a:rPr>
+              <a:t>&lt;s&gt;/&lt;del&gt;/~~text~~ and content removed</a:t>
+            </a:r>
+            <a:endParaRPr lang="en-US" sz="850" dirty="0"/>
+          </a:p>
+        </p:txBody>
+      </p:sp>
+      <p:sp>
+        <p:nvSpPr>
+          <p:cNvPr id="64" name="Shape 62"/>
+          <p:cNvSpPr/>
+          <p:nvPr/>
+        </p:nvSpPr>
+        <p:spPr>
+          <a:xfrm>
+            <a:off x="365760" y="4663440"/>
+            <a:ext cx="8412480" cy="329184"/>
+          </a:xfrm>
+          <a:prstGeom prst="roundRect">
+            <a:avLst>
+              <a:gd name="adj" fmla="val 22222"/>
+            </a:avLst>
+          </a:prstGeom>
+          <a:solidFill>
+            <a:srgbClr val="1A1A18"/>
+          </a:solidFill>
+          <a:ln w="12700">
+            <a:solidFill>
+              <a:srgbClr val="1A1A18"/>
+            </a:solidFill>
+            <a:prstDash val="solid"/>
+          </a:ln>
+        </p:spPr>
+      </p:sp>
+      <p:sp>
+        <p:nvSpPr>
+          <p:cNvPr id="65" name="Text 63"/>
+          <p:cNvSpPr/>
+          <p:nvPr/>
+        </p:nvSpPr>
+        <p:spPr>
+          <a:xfrm>
+            <a:off x="457200" y="4663440"/>
+            <a:ext cx="8229600" cy="329184"/>
+          </a:xfrm>
+          <a:prstGeom prst="rect">
+            <a:avLst/>
+          </a:prstGeom>
+          <a:noFill/>
+          <a:ln/>
+        </p:spPr>
+        <p:txBody>
+          <a:bodyPr wrap="square" lIns="0" tIns="0" rIns="0" bIns="0" rtlCol="0" anchor="ctr"/>
+          <a:lstStyle/>
+          <a:p>
+            <a:pPr indent="0" marL="0">
+              <a:buNone/>
+            </a:pPr>
+            <a:r>
+              <a:rPr lang="en-US" sz="850" dirty="0">
+                <a:solidFill>
+                  <a:srgbClr val="A8D5A2"/>
+                </a:solidFill>
+                <a:latin typeface="Courier New" pitchFamily="34" charset="0"/>
+                <a:ea typeface="Courier New" pitchFamily="34" charset="-122"/>
+                <a:cs typeface="Courier New" pitchFamily="34" charset="-120"/>
+              </a:rPr>
+              <a:t>Rule E — &lt;strong&gt; wraps &lt;a&gt;    |    Rule C — Adjacent/nested &lt;strong&gt; merged    |    Rule F — file:// URLs fixed to https://</a:t>
+            </a:r>
+            <a:endParaRPr lang="en-US" sz="850" dirty="0"/>
           </a:p>
         </p:txBody>
       </p:sp>
@@ -8652,6 +9229,1020 @@
         </p:nvSpPr>
         <p:spPr>
           <a:xfrm>
+            <a:off x="457200" y="256032"/>
+            <a:ext cx="8229600" cy="457200"/>
+          </a:xfrm>
+          <a:prstGeom prst="rect">
+            <a:avLst/>
+          </a:prstGeom>
+          <a:noFill/>
+          <a:ln/>
+        </p:spPr>
+        <p:txBody>
+          <a:bodyPr wrap="square" lIns="0" tIns="0" rIns="0" bIns="0" rtlCol="0" anchor="ctr"/>
+          <a:lstStyle/>
+          <a:p>
+            <a:pPr indent="0" marL="0">
+              <a:buNone/>
+            </a:pPr>
+            <a:r>
+              <a:rPr lang="en-US" sz="2600" b="1" dirty="0">
+                <a:solidFill>
+                  <a:srgbClr val="1A1A18"/>
+                </a:solidFill>
+                <a:latin typeface="Calibri" pitchFamily="34" charset="0"/>
+                <a:ea typeface="Calibri" pitchFamily="34" charset="-122"/>
+                <a:cs typeface="Calibri" pitchFamily="34" charset="-120"/>
+              </a:rPr>
+              <a:t>Three New Rules: D, E &amp; F</a:t>
+            </a:r>
+            <a:endParaRPr lang="en-US" sz="2600" dirty="0"/>
+          </a:p>
+        </p:txBody>
+      </p:sp>
+      <p:sp>
+        <p:nvSpPr>
+          <p:cNvPr id="3" name="Shape 1"/>
+          <p:cNvSpPr/>
+          <p:nvPr/>
+        </p:nvSpPr>
+        <p:spPr>
+          <a:xfrm>
+            <a:off x="365760" y="804672"/>
+            <a:ext cx="8412480" cy="1371600"/>
+          </a:xfrm>
+          <a:prstGeom prst="roundRect">
+            <a:avLst>
+              <a:gd name="adj" fmla="val 6667"/>
+            </a:avLst>
+          </a:prstGeom>
+          <a:solidFill>
+            <a:srgbClr val="FFF0F0"/>
+          </a:solidFill>
+          <a:ln w="19050">
+            <a:solidFill>
+              <a:srgbClr val="F4CCCC"/>
+            </a:solidFill>
+            <a:prstDash val="solid"/>
+          </a:ln>
+        </p:spPr>
+      </p:sp>
+      <p:sp>
+        <p:nvSpPr>
+          <p:cNvPr id="4" name="Shape 2"/>
+          <p:cNvSpPr/>
+          <p:nvPr/>
+        </p:nvSpPr>
+        <p:spPr>
+          <a:xfrm>
+            <a:off x="365760" y="804672"/>
+            <a:ext cx="457200" cy="1371600"/>
+          </a:xfrm>
+          <a:prstGeom prst="roundRect">
+            <a:avLst>
+              <a:gd name="adj" fmla="val 20000"/>
+            </a:avLst>
+          </a:prstGeom>
+          <a:solidFill>
+            <a:srgbClr val="9B2C2C"/>
+          </a:solidFill>
+          <a:ln w="12700">
+            <a:solidFill>
+              <a:srgbClr val="9B2C2C"/>
+            </a:solidFill>
+            <a:prstDash val="solid"/>
+          </a:ln>
+        </p:spPr>
+      </p:sp>
+      <p:sp>
+        <p:nvSpPr>
+          <p:cNvPr id="5" name="Text 3"/>
+          <p:cNvSpPr/>
+          <p:nvPr/>
+        </p:nvSpPr>
+        <p:spPr>
+          <a:xfrm>
+            <a:off x="365760" y="804672"/>
+            <a:ext cx="457200" cy="1371600"/>
+          </a:xfrm>
+          <a:prstGeom prst="rect">
+            <a:avLst/>
+          </a:prstGeom>
+          <a:noFill/>
+          <a:ln/>
+        </p:spPr>
+        <p:txBody>
+          <a:bodyPr wrap="square" lIns="0" tIns="0" rIns="0" bIns="0" rtlCol="0" anchor="ctr"/>
+          <a:lstStyle/>
+          <a:p>
+            <a:pPr algn="ctr" indent="0" marL="0">
+              <a:buNone/>
+            </a:pPr>
+            <a:r>
+              <a:rPr lang="en-US" sz="1400" b="1" dirty="0">
+                <a:solidFill>
+                  <a:srgbClr val="FFFFFF"/>
+                </a:solidFill>
+                <a:latin typeface="Courier New" pitchFamily="34" charset="0"/>
+                <a:ea typeface="Courier New" pitchFamily="34" charset="-122"/>
+                <a:cs typeface="Courier New" pitchFamily="34" charset="-120"/>
+              </a:rPr>
+              <a:t>D</a:t>
+            </a:r>
+            <a:endParaRPr lang="en-US" sz="1400" dirty="0"/>
+          </a:p>
+        </p:txBody>
+      </p:sp>
+      <p:sp>
+        <p:nvSpPr>
+          <p:cNvPr id="6" name="Text 4"/>
+          <p:cNvSpPr/>
+          <p:nvPr/>
+        </p:nvSpPr>
+        <p:spPr>
+          <a:xfrm>
+            <a:off x="960120" y="850392"/>
+            <a:ext cx="3657600" cy="292608"/>
+          </a:xfrm>
+          <a:prstGeom prst="rect">
+            <a:avLst/>
+          </a:prstGeom>
+          <a:noFill/>
+          <a:ln/>
+        </p:spPr>
+        <p:txBody>
+          <a:bodyPr wrap="square" lIns="0" tIns="0" rIns="0" bIns="0" rtlCol="0" anchor="ctr"/>
+          <a:lstStyle/>
+          <a:p>
+            <a:pPr indent="0" marL="0">
+              <a:buNone/>
+            </a:pPr>
+            <a:r>
+              <a:rPr lang="en-US" sz="1300" b="1" dirty="0">
+                <a:solidFill>
+                  <a:srgbClr val="9B2C2C"/>
+                </a:solidFill>
+                <a:latin typeface="Calibri" pitchFamily="34" charset="0"/>
+                <a:ea typeface="Calibri" pitchFamily="34" charset="-122"/>
+                <a:cs typeface="Calibri" pitchFamily="34" charset="-120"/>
+              </a:rPr>
+              <a:t>Remove Strikethrough Text</a:t>
+            </a:r>
+            <a:endParaRPr lang="en-US" sz="1300" dirty="0"/>
+          </a:p>
+        </p:txBody>
+      </p:sp>
+      <p:sp>
+        <p:nvSpPr>
+          <p:cNvPr id="7" name="Text 5"/>
+          <p:cNvSpPr/>
+          <p:nvPr/>
+        </p:nvSpPr>
+        <p:spPr>
+          <a:xfrm>
+            <a:off x="960120" y="1143000"/>
+            <a:ext cx="7589520" cy="256032"/>
+          </a:xfrm>
+          <a:prstGeom prst="rect">
+            <a:avLst/>
+          </a:prstGeom>
+          <a:noFill/>
+          <a:ln/>
+        </p:spPr>
+        <p:txBody>
+          <a:bodyPr wrap="square" lIns="0" tIns="0" rIns="0" bIns="0" rtlCol="0" anchor="ctr"/>
+          <a:lstStyle/>
+          <a:p>
+            <a:pPr indent="0" marL="0">
+              <a:buNone/>
+            </a:pPr>
+            <a:r>
+              <a:rPr lang="en-US" sz="1050" dirty="0">
+                <a:solidFill>
+                  <a:srgbClr val="5A5952"/>
+                </a:solidFill>
+                <a:latin typeface="Calibri" pitchFamily="34" charset="0"/>
+                <a:ea typeface="Calibri" pitchFamily="34" charset="-122"/>
+                <a:cs typeface="Calibri" pitchFamily="34" charset="-120"/>
+              </a:rPr>
+              <a:t>Tags AND their text content are deleted entirely — not just unstyled.</a:t>
+            </a:r>
+            <a:endParaRPr lang="en-US" sz="1050" dirty="0"/>
+          </a:p>
+        </p:txBody>
+      </p:sp>
+      <p:sp>
+        <p:nvSpPr>
+          <p:cNvPr id="8" name="Shape 6"/>
+          <p:cNvSpPr/>
+          <p:nvPr/>
+        </p:nvSpPr>
+        <p:spPr>
+          <a:xfrm>
+            <a:off x="960120" y="1417320"/>
+            <a:ext cx="3474720" cy="594360"/>
+          </a:xfrm>
+          <a:prstGeom prst="roundRect">
+            <a:avLst>
+              <a:gd name="adj" fmla="val 10769"/>
+            </a:avLst>
+          </a:prstGeom>
+          <a:solidFill>
+            <a:srgbClr val="1A1A18"/>
+          </a:solidFill>
+          <a:ln w="12700">
+            <a:solidFill>
+              <a:srgbClr val="1A1A18"/>
+            </a:solidFill>
+            <a:prstDash val="solid"/>
+          </a:ln>
+        </p:spPr>
+      </p:sp>
+      <p:sp>
+        <p:nvSpPr>
+          <p:cNvPr id="9" name="Text 7"/>
+          <p:cNvSpPr/>
+          <p:nvPr/>
+        </p:nvSpPr>
+        <p:spPr>
+          <a:xfrm>
+            <a:off x="1051560" y="1444752"/>
+            <a:ext cx="3291840" cy="530352"/>
+          </a:xfrm>
+          <a:prstGeom prst="rect">
+            <a:avLst/>
+          </a:prstGeom>
+          <a:noFill/>
+          <a:ln/>
+        </p:spPr>
+        <p:txBody>
+          <a:bodyPr wrap="square" lIns="0" tIns="0" rIns="0" bIns="0" rtlCol="0" anchor="ctr"/>
+          <a:lstStyle/>
+          <a:p>
+            <a:pPr indent="0" marL="0">
+              <a:buNone/>
+            </a:pPr>
+            <a:r>
+              <a:rPr lang="en-US" sz="850" dirty="0">
+                <a:solidFill>
+                  <a:srgbClr val="F87171"/>
+                </a:solidFill>
+                <a:latin typeface="Courier New" pitchFamily="34" charset="0"/>
+                <a:ea typeface="Courier New" pitchFamily="34" charset="-122"/>
+                <a:cs typeface="Courier New" pitchFamily="34" charset="-120"/>
+              </a:rPr>
+              <a:t>Input:   &lt;s&gt;discontinued&lt;/s&gt; product</a:t>
+            </a:r>
+            <a:endParaRPr lang="en-US" sz="850" dirty="0"/>
+          </a:p>
+          <a:p>
+            <a:pPr indent="0" marL="0">
+              <a:buNone/>
+            </a:pPr>
+            <a:r>
+              <a:rPr lang="en-US" sz="850" dirty="0">
+                <a:solidFill>
+                  <a:srgbClr val="F87171"/>
+                </a:solidFill>
+                <a:latin typeface="Courier New" pitchFamily="34" charset="0"/>
+                <a:ea typeface="Courier New" pitchFamily="34" charset="-122"/>
+                <a:cs typeface="Courier New" pitchFamily="34" charset="-120"/>
+              </a:rPr>
+              <a:t>         ~~removed feature~~</a:t>
+            </a:r>
+            <a:endParaRPr lang="en-US" sz="850" dirty="0"/>
+          </a:p>
+        </p:txBody>
+      </p:sp>
+      <p:sp>
+        <p:nvSpPr>
+          <p:cNvPr id="10" name="Shape 8"/>
+          <p:cNvSpPr/>
+          <p:nvPr/>
+        </p:nvSpPr>
+        <p:spPr>
+          <a:xfrm>
+            <a:off x="4709160" y="1417320"/>
+            <a:ext cx="3886200" cy="594360"/>
+          </a:xfrm>
+          <a:prstGeom prst="roundRect">
+            <a:avLst>
+              <a:gd name="adj" fmla="val 10769"/>
+            </a:avLst>
+          </a:prstGeom>
+          <a:solidFill>
+            <a:srgbClr val="1A1A18"/>
+          </a:solidFill>
+          <a:ln w="12700">
+            <a:solidFill>
+              <a:srgbClr val="1A1A18"/>
+            </a:solidFill>
+            <a:prstDash val="solid"/>
+          </a:ln>
+        </p:spPr>
+      </p:sp>
+      <p:sp>
+        <p:nvSpPr>
+          <p:cNvPr id="11" name="Text 9"/>
+          <p:cNvSpPr/>
+          <p:nvPr/>
+        </p:nvSpPr>
+        <p:spPr>
+          <a:xfrm>
+            <a:off x="4800600" y="1444752"/>
+            <a:ext cx="3703320" cy="530352"/>
+          </a:xfrm>
+          <a:prstGeom prst="rect">
+            <a:avLst/>
+          </a:prstGeom>
+          <a:noFill/>
+          <a:ln/>
+        </p:spPr>
+        <p:txBody>
+          <a:bodyPr wrap="square" lIns="0" tIns="0" rIns="0" bIns="0" rtlCol="0" anchor="ctr"/>
+          <a:lstStyle/>
+          <a:p>
+            <a:pPr indent="0" marL="0">
+              <a:buNone/>
+            </a:pPr>
+            <a:r>
+              <a:rPr lang="en-US" sz="850" dirty="0">
+                <a:solidFill>
+                  <a:srgbClr val="A8D5A2"/>
+                </a:solidFill>
+                <a:latin typeface="Courier New" pitchFamily="34" charset="0"/>
+                <a:ea typeface="Courier New" pitchFamily="34" charset="-122"/>
+                <a:cs typeface="Courier New" pitchFamily="34" charset="-120"/>
+              </a:rPr>
+              <a:t>Output:  product</a:t>
+            </a:r>
+            <a:endParaRPr lang="en-US" sz="850" dirty="0"/>
+          </a:p>
+          <a:p>
+            <a:pPr indent="0" marL="0">
+              <a:buNone/>
+            </a:pPr>
+            <a:r>
+              <a:rPr lang="en-US" sz="850" dirty="0">
+                <a:solidFill>
+                  <a:srgbClr val="A8D5A2"/>
+                </a:solidFill>
+                <a:latin typeface="Courier New" pitchFamily="34" charset="0"/>
+                <a:ea typeface="Courier New" pitchFamily="34" charset="-122"/>
+                <a:cs typeface="Courier New" pitchFamily="34" charset="-120"/>
+              </a:rPr>
+              <a:t>         (text removed)</a:t>
+            </a:r>
+            <a:endParaRPr lang="en-US" sz="850" dirty="0"/>
+          </a:p>
+        </p:txBody>
+      </p:sp>
+      <p:sp>
+        <p:nvSpPr>
+          <p:cNvPr id="12" name="Shape 10"/>
+          <p:cNvSpPr/>
+          <p:nvPr/>
+        </p:nvSpPr>
+        <p:spPr>
+          <a:xfrm>
+            <a:off x="365760" y="2240280"/>
+            <a:ext cx="8412480" cy="1371600"/>
+          </a:xfrm>
+          <a:prstGeom prst="roundRect">
+            <a:avLst>
+              <a:gd name="adj" fmla="val 6667"/>
+            </a:avLst>
+          </a:prstGeom>
+          <a:solidFill>
+            <a:srgbClr val="F3EEFB"/>
+          </a:solidFill>
+          <a:ln w="19050">
+            <a:solidFill>
+              <a:srgbClr val="D4B8F5"/>
+            </a:solidFill>
+            <a:prstDash val="solid"/>
+          </a:ln>
+        </p:spPr>
+      </p:sp>
+      <p:sp>
+        <p:nvSpPr>
+          <p:cNvPr id="13" name="Shape 11"/>
+          <p:cNvSpPr/>
+          <p:nvPr/>
+        </p:nvSpPr>
+        <p:spPr>
+          <a:xfrm>
+            <a:off x="365760" y="2240280"/>
+            <a:ext cx="457200" cy="1371600"/>
+          </a:xfrm>
+          <a:prstGeom prst="roundRect">
+            <a:avLst>
+              <a:gd name="adj" fmla="val 20000"/>
+            </a:avLst>
+          </a:prstGeom>
+          <a:solidFill>
+            <a:srgbClr val="6B3FA0"/>
+          </a:solidFill>
+          <a:ln w="12700">
+            <a:solidFill>
+              <a:srgbClr val="6B3FA0"/>
+            </a:solidFill>
+            <a:prstDash val="solid"/>
+          </a:ln>
+        </p:spPr>
+      </p:sp>
+      <p:sp>
+        <p:nvSpPr>
+          <p:cNvPr id="14" name="Text 12"/>
+          <p:cNvSpPr/>
+          <p:nvPr/>
+        </p:nvSpPr>
+        <p:spPr>
+          <a:xfrm>
+            <a:off x="365760" y="2240280"/>
+            <a:ext cx="457200" cy="1371600"/>
+          </a:xfrm>
+          <a:prstGeom prst="rect">
+            <a:avLst/>
+          </a:prstGeom>
+          <a:noFill/>
+          <a:ln/>
+        </p:spPr>
+        <p:txBody>
+          <a:bodyPr wrap="square" lIns="0" tIns="0" rIns="0" bIns="0" rtlCol="0" anchor="ctr"/>
+          <a:lstStyle/>
+          <a:p>
+            <a:pPr algn="ctr" indent="0" marL="0">
+              <a:buNone/>
+            </a:pPr>
+            <a:r>
+              <a:rPr lang="en-US" sz="1400" b="1" dirty="0">
+                <a:solidFill>
+                  <a:srgbClr val="FFFFFF"/>
+                </a:solidFill>
+                <a:latin typeface="Courier New" pitchFamily="34" charset="0"/>
+                <a:ea typeface="Courier New" pitchFamily="34" charset="-122"/>
+                <a:cs typeface="Courier New" pitchFamily="34" charset="-120"/>
+              </a:rPr>
+              <a:t>E</a:t>
+            </a:r>
+            <a:endParaRPr lang="en-US" sz="1400" dirty="0"/>
+          </a:p>
+        </p:txBody>
+      </p:sp>
+      <p:sp>
+        <p:nvSpPr>
+          <p:cNvPr id="15" name="Text 13"/>
+          <p:cNvSpPr/>
+          <p:nvPr/>
+        </p:nvSpPr>
+        <p:spPr>
+          <a:xfrm>
+            <a:off x="960120" y="2286000"/>
+            <a:ext cx="4572000" cy="292608"/>
+          </a:xfrm>
+          <a:prstGeom prst="rect">
+            <a:avLst/>
+          </a:prstGeom>
+          <a:noFill/>
+          <a:ln/>
+        </p:spPr>
+        <p:txBody>
+          <a:bodyPr wrap="square" lIns="0" tIns="0" rIns="0" bIns="0" rtlCol="0" anchor="ctr"/>
+          <a:lstStyle/>
+          <a:p>
+            <a:pPr indent="0" marL="0">
+              <a:buNone/>
+            </a:pPr>
+            <a:r>
+              <a:rPr lang="en-US" sz="1300" b="1" dirty="0">
+                <a:solidFill>
+                  <a:srgbClr val="6B3FA0"/>
+                </a:solidFill>
+                <a:latin typeface="Calibri" pitchFamily="34" charset="0"/>
+                <a:ea typeface="Calibri" pitchFamily="34" charset="-122"/>
+                <a:cs typeface="Calibri" pitchFamily="34" charset="-120"/>
+              </a:rPr>
+              <a:t>&lt;strong&gt; Always Wraps &lt;a&gt;</a:t>
+            </a:r>
+            <a:endParaRPr lang="en-US" sz="1300" dirty="0"/>
+          </a:p>
+        </p:txBody>
+      </p:sp>
+      <p:sp>
+        <p:nvSpPr>
+          <p:cNvPr id="16" name="Text 14"/>
+          <p:cNvSpPr/>
+          <p:nvPr/>
+        </p:nvSpPr>
+        <p:spPr>
+          <a:xfrm>
+            <a:off x="960120" y="2578608"/>
+            <a:ext cx="7589520" cy="256032"/>
+          </a:xfrm>
+          <a:prstGeom prst="rect">
+            <a:avLst/>
+          </a:prstGeom>
+          <a:noFill/>
+          <a:ln/>
+        </p:spPr>
+        <p:txBody>
+          <a:bodyPr wrap="square" lIns="0" tIns="0" rIns="0" bIns="0" rtlCol="0" anchor="ctr"/>
+          <a:lstStyle/>
+          <a:p>
+            <a:pPr indent="0" marL="0">
+              <a:buNone/>
+            </a:pPr>
+            <a:r>
+              <a:rPr lang="en-US" sz="1050" dirty="0">
+                <a:solidFill>
+                  <a:srgbClr val="5A5952"/>
+                </a:solidFill>
+                <a:latin typeface="Calibri" pitchFamily="34" charset="0"/>
+                <a:ea typeface="Calibri" pitchFamily="34" charset="-122"/>
+                <a:cs typeface="Calibri" pitchFamily="34" charset="-120"/>
+              </a:rPr>
+              <a:t>Correct nesting order: the bold element contains the link, not the other way around.</a:t>
+            </a:r>
+            <a:endParaRPr lang="en-US" sz="1050" dirty="0"/>
+          </a:p>
+        </p:txBody>
+      </p:sp>
+      <p:sp>
+        <p:nvSpPr>
+          <p:cNvPr id="17" name="Shape 15"/>
+          <p:cNvSpPr/>
+          <p:nvPr/>
+        </p:nvSpPr>
+        <p:spPr>
+          <a:xfrm>
+            <a:off x="960120" y="2852928"/>
+            <a:ext cx="3474720" cy="594360"/>
+          </a:xfrm>
+          <a:prstGeom prst="roundRect">
+            <a:avLst>
+              <a:gd name="adj" fmla="val 10769"/>
+            </a:avLst>
+          </a:prstGeom>
+          <a:solidFill>
+            <a:srgbClr val="1A1A18"/>
+          </a:solidFill>
+          <a:ln w="12700">
+            <a:solidFill>
+              <a:srgbClr val="1A1A18"/>
+            </a:solidFill>
+            <a:prstDash val="solid"/>
+          </a:ln>
+        </p:spPr>
+      </p:sp>
+      <p:sp>
+        <p:nvSpPr>
+          <p:cNvPr id="18" name="Text 16"/>
+          <p:cNvSpPr/>
+          <p:nvPr/>
+        </p:nvSpPr>
+        <p:spPr>
+          <a:xfrm>
+            <a:off x="1051560" y="2880360"/>
+            <a:ext cx="3291840" cy="530352"/>
+          </a:xfrm>
+          <a:prstGeom prst="rect">
+            <a:avLst/>
+          </a:prstGeom>
+          <a:noFill/>
+          <a:ln/>
+        </p:spPr>
+        <p:txBody>
+          <a:bodyPr wrap="square" lIns="0" tIns="0" rIns="0" bIns="0" rtlCol="0" anchor="ctr"/>
+          <a:lstStyle/>
+          <a:p>
+            <a:pPr indent="0" marL="0">
+              <a:buNone/>
+            </a:pPr>
+            <a:r>
+              <a:rPr lang="en-US" sz="850" dirty="0">
+                <a:solidFill>
+                  <a:srgbClr val="F87171"/>
+                </a:solidFill>
+                <a:latin typeface="Courier New" pitchFamily="34" charset="0"/>
+                <a:ea typeface="Courier New" pitchFamily="34" charset="-122"/>
+                <a:cs typeface="Courier New" pitchFamily="34" charset="-120"/>
+              </a:rPr>
+              <a:t>✗  &lt;a href="..."&gt;&lt;strong&gt;Link&lt;/strong&gt;&lt;/a&gt;</a:t>
+            </a:r>
+            <a:endParaRPr lang="en-US" sz="850" dirty="0"/>
+          </a:p>
+        </p:txBody>
+      </p:sp>
+      <p:sp>
+        <p:nvSpPr>
+          <p:cNvPr id="19" name="Shape 17"/>
+          <p:cNvSpPr/>
+          <p:nvPr/>
+        </p:nvSpPr>
+        <p:spPr>
+          <a:xfrm>
+            <a:off x="4709160" y="2852928"/>
+            <a:ext cx="3886200" cy="594360"/>
+          </a:xfrm>
+          <a:prstGeom prst="roundRect">
+            <a:avLst>
+              <a:gd name="adj" fmla="val 10769"/>
+            </a:avLst>
+          </a:prstGeom>
+          <a:solidFill>
+            <a:srgbClr val="1A1A18"/>
+          </a:solidFill>
+          <a:ln w="12700">
+            <a:solidFill>
+              <a:srgbClr val="1A1A18"/>
+            </a:solidFill>
+            <a:prstDash val="solid"/>
+          </a:ln>
+        </p:spPr>
+      </p:sp>
+      <p:sp>
+        <p:nvSpPr>
+          <p:cNvPr id="20" name="Text 18"/>
+          <p:cNvSpPr/>
+          <p:nvPr/>
+        </p:nvSpPr>
+        <p:spPr>
+          <a:xfrm>
+            <a:off x="4800600" y="2880360"/>
+            <a:ext cx="3703320" cy="530352"/>
+          </a:xfrm>
+          <a:prstGeom prst="rect">
+            <a:avLst/>
+          </a:prstGeom>
+          <a:noFill/>
+          <a:ln/>
+        </p:spPr>
+        <p:txBody>
+          <a:bodyPr wrap="square" lIns="0" tIns="0" rIns="0" bIns="0" rtlCol="0" anchor="ctr"/>
+          <a:lstStyle/>
+          <a:p>
+            <a:pPr indent="0" marL="0">
+              <a:buNone/>
+            </a:pPr>
+            <a:r>
+              <a:rPr lang="en-US" sz="850" dirty="0">
+                <a:solidFill>
+                  <a:srgbClr val="A8D5A2"/>
+                </a:solidFill>
+                <a:latin typeface="Courier New" pitchFamily="34" charset="0"/>
+                <a:ea typeface="Courier New" pitchFamily="34" charset="-122"/>
+                <a:cs typeface="Courier New" pitchFamily="34" charset="-120"/>
+              </a:rPr>
+              <a:t>✓  &lt;strong&gt;&lt;a href="..."&gt;Link&lt;/a&gt;&lt;/strong&gt;</a:t>
+            </a:r>
+            <a:endParaRPr lang="en-US" sz="850" dirty="0"/>
+          </a:p>
+        </p:txBody>
+      </p:sp>
+      <p:sp>
+        <p:nvSpPr>
+          <p:cNvPr id="21" name="Shape 19"/>
+          <p:cNvSpPr/>
+          <p:nvPr/>
+        </p:nvSpPr>
+        <p:spPr>
+          <a:xfrm>
+            <a:off x="365760" y="3675888"/>
+            <a:ext cx="8412480" cy="1234440"/>
+          </a:xfrm>
+          <a:prstGeom prst="roundRect">
+            <a:avLst>
+              <a:gd name="adj" fmla="val 7407"/>
+            </a:avLst>
+          </a:prstGeom>
+          <a:solidFill>
+            <a:srgbClr val="FFF8EE"/>
+          </a:solidFill>
+          <a:ln w="19050">
+            <a:solidFill>
+              <a:srgbClr val="FBBF7A"/>
+            </a:solidFill>
+            <a:prstDash val="solid"/>
+          </a:ln>
+        </p:spPr>
+      </p:sp>
+      <p:sp>
+        <p:nvSpPr>
+          <p:cNvPr id="22" name="Shape 20"/>
+          <p:cNvSpPr/>
+          <p:nvPr/>
+        </p:nvSpPr>
+        <p:spPr>
+          <a:xfrm>
+            <a:off x="365760" y="3675888"/>
+            <a:ext cx="457200" cy="1234440"/>
+          </a:xfrm>
+          <a:prstGeom prst="roundRect">
+            <a:avLst>
+              <a:gd name="adj" fmla="val 20000"/>
+            </a:avLst>
+          </a:prstGeom>
+          <a:solidFill>
+            <a:srgbClr val="D97706"/>
+          </a:solidFill>
+          <a:ln w="12700">
+            <a:solidFill>
+              <a:srgbClr val="D97706"/>
+            </a:solidFill>
+            <a:prstDash val="solid"/>
+          </a:ln>
+        </p:spPr>
+      </p:sp>
+      <p:sp>
+        <p:nvSpPr>
+          <p:cNvPr id="23" name="Text 21"/>
+          <p:cNvSpPr/>
+          <p:nvPr/>
+        </p:nvSpPr>
+        <p:spPr>
+          <a:xfrm>
+            <a:off x="365760" y="3675888"/>
+            <a:ext cx="457200" cy="1234440"/>
+          </a:xfrm>
+          <a:prstGeom prst="rect">
+            <a:avLst/>
+          </a:prstGeom>
+          <a:noFill/>
+          <a:ln/>
+        </p:spPr>
+        <p:txBody>
+          <a:bodyPr wrap="square" lIns="0" tIns="0" rIns="0" bIns="0" rtlCol="0" anchor="ctr"/>
+          <a:lstStyle/>
+          <a:p>
+            <a:pPr algn="ctr" indent="0" marL="0">
+              <a:buNone/>
+            </a:pPr>
+            <a:r>
+              <a:rPr lang="en-US" sz="1400" b="1" dirty="0">
+                <a:solidFill>
+                  <a:srgbClr val="FFFFFF"/>
+                </a:solidFill>
+                <a:latin typeface="Courier New" pitchFamily="34" charset="0"/>
+                <a:ea typeface="Courier New" pitchFamily="34" charset="-122"/>
+                <a:cs typeface="Courier New" pitchFamily="34" charset="-120"/>
+              </a:rPr>
+              <a:t>F</a:t>
+            </a:r>
+            <a:endParaRPr lang="en-US" sz="1400" dirty="0"/>
+          </a:p>
+        </p:txBody>
+      </p:sp>
+      <p:sp>
+        <p:nvSpPr>
+          <p:cNvPr id="24" name="Text 22"/>
+          <p:cNvSpPr/>
+          <p:nvPr/>
+        </p:nvSpPr>
+        <p:spPr>
+          <a:xfrm>
+            <a:off x="960120" y="3721608"/>
+            <a:ext cx="3657600" cy="292608"/>
+          </a:xfrm>
+          <a:prstGeom prst="rect">
+            <a:avLst/>
+          </a:prstGeom>
+          <a:noFill/>
+          <a:ln/>
+        </p:spPr>
+        <p:txBody>
+          <a:bodyPr wrap="square" lIns="0" tIns="0" rIns="0" bIns="0" rtlCol="0" anchor="ctr"/>
+          <a:lstStyle/>
+          <a:p>
+            <a:pPr indent="0" marL="0">
+              <a:buNone/>
+            </a:pPr>
+            <a:r>
+              <a:rPr lang="en-US" sz="1300" b="1" dirty="0">
+                <a:solidFill>
+                  <a:srgbClr val="D97706"/>
+                </a:solidFill>
+                <a:latin typeface="Calibri" pitchFamily="34" charset="0"/>
+                <a:ea typeface="Calibri" pitchFamily="34" charset="-122"/>
+                <a:cs typeface="Calibri" pitchFamily="34" charset="-120"/>
+              </a:rPr>
+              <a:t>Fix file:// URLs</a:t>
+            </a:r>
+            <a:endParaRPr lang="en-US" sz="1300" dirty="0"/>
+          </a:p>
+        </p:txBody>
+      </p:sp>
+      <p:sp>
+        <p:nvSpPr>
+          <p:cNvPr id="25" name="Text 23"/>
+          <p:cNvSpPr/>
+          <p:nvPr/>
+        </p:nvSpPr>
+        <p:spPr>
+          <a:xfrm>
+            <a:off x="960120" y="4005072"/>
+            <a:ext cx="7589520" cy="256032"/>
+          </a:xfrm>
+          <a:prstGeom prst="rect">
+            <a:avLst/>
+          </a:prstGeom>
+          <a:noFill/>
+          <a:ln/>
+        </p:spPr>
+        <p:txBody>
+          <a:bodyPr wrap="square" lIns="0" tIns="0" rIns="0" bIns="0" rtlCol="0" anchor="ctr"/>
+          <a:lstStyle/>
+          <a:p>
+            <a:pPr indent="0" marL="0">
+              <a:buNone/>
+            </a:pPr>
+            <a:r>
+              <a:rPr lang="en-US" sz="1050" dirty="0">
+                <a:solidFill>
+                  <a:srgbClr val="5A5952"/>
+                </a:solidFill>
+                <a:latin typeface="Calibri" pitchFamily="34" charset="0"/>
+                <a:ea typeface="Calibri" pitchFamily="34" charset="-122"/>
+                <a:cs typeface="Calibri" pitchFamily="34" charset="-120"/>
+              </a:rPr>
+              <a:t>Broken local file:// paths are reconstructed as https:// using the hostname found in the path.</a:t>
+            </a:r>
+            <a:endParaRPr lang="en-US" sz="1050" dirty="0"/>
+          </a:p>
+        </p:txBody>
+      </p:sp>
+      <p:sp>
+        <p:nvSpPr>
+          <p:cNvPr id="26" name="Shape 24"/>
+          <p:cNvSpPr/>
+          <p:nvPr/>
+        </p:nvSpPr>
+        <p:spPr>
+          <a:xfrm>
+            <a:off x="960120" y="4279392"/>
+            <a:ext cx="3474720" cy="502920"/>
+          </a:xfrm>
+          <a:prstGeom prst="roundRect">
+            <a:avLst>
+              <a:gd name="adj" fmla="val 12727"/>
+            </a:avLst>
+          </a:prstGeom>
+          <a:solidFill>
+            <a:srgbClr val="1A1A18"/>
+          </a:solidFill>
+          <a:ln w="12700">
+            <a:solidFill>
+              <a:srgbClr val="1A1A18"/>
+            </a:solidFill>
+            <a:prstDash val="solid"/>
+          </a:ln>
+        </p:spPr>
+      </p:sp>
+      <p:sp>
+        <p:nvSpPr>
+          <p:cNvPr id="27" name="Text 25"/>
+          <p:cNvSpPr/>
+          <p:nvPr/>
+        </p:nvSpPr>
+        <p:spPr>
+          <a:xfrm>
+            <a:off x="1051560" y="4306824"/>
+            <a:ext cx="3291840" cy="438912"/>
+          </a:xfrm>
+          <a:prstGeom prst="rect">
+            <a:avLst/>
+          </a:prstGeom>
+          <a:noFill/>
+          <a:ln/>
+        </p:spPr>
+        <p:txBody>
+          <a:bodyPr wrap="square" lIns="0" tIns="0" rIns="0" bIns="0" rtlCol="0" anchor="ctr"/>
+          <a:lstStyle/>
+          <a:p>
+            <a:pPr indent="0" marL="0">
+              <a:buNone/>
+            </a:pPr>
+            <a:r>
+              <a:rPr lang="en-US" sz="800" dirty="0">
+                <a:solidFill>
+                  <a:srgbClr val="F87171"/>
+                </a:solidFill>
+                <a:latin typeface="Courier New" pitchFamily="34" charset="0"/>
+                <a:ea typeface="Courier New" pitchFamily="34" charset="-122"/>
+                <a:cs typeface="Courier New" pitchFamily="34" charset="-120"/>
+              </a:rPr>
+              <a:t>href="file://www.google.com/search"</a:t>
+            </a:r>
+            <a:endParaRPr lang="en-US" sz="800" dirty="0"/>
+          </a:p>
+        </p:txBody>
+      </p:sp>
+      <p:sp>
+        <p:nvSpPr>
+          <p:cNvPr id="28" name="Shape 26"/>
+          <p:cNvSpPr/>
+          <p:nvPr/>
+        </p:nvSpPr>
+        <p:spPr>
+          <a:xfrm>
+            <a:off x="4709160" y="4279392"/>
+            <a:ext cx="3886200" cy="502920"/>
+          </a:xfrm>
+          <a:prstGeom prst="roundRect">
+            <a:avLst>
+              <a:gd name="adj" fmla="val 12727"/>
+            </a:avLst>
+          </a:prstGeom>
+          <a:solidFill>
+            <a:srgbClr val="1A1A18"/>
+          </a:solidFill>
+          <a:ln w="12700">
+            <a:solidFill>
+              <a:srgbClr val="1A1A18"/>
+            </a:solidFill>
+            <a:prstDash val="solid"/>
+          </a:ln>
+        </p:spPr>
+      </p:sp>
+      <p:sp>
+        <p:nvSpPr>
+          <p:cNvPr id="29" name="Text 27"/>
+          <p:cNvSpPr/>
+          <p:nvPr/>
+        </p:nvSpPr>
+        <p:spPr>
+          <a:xfrm>
+            <a:off x="4800600" y="4306824"/>
+            <a:ext cx="3703320" cy="438912"/>
+          </a:xfrm>
+          <a:prstGeom prst="rect">
+            <a:avLst/>
+          </a:prstGeom>
+          <a:noFill/>
+          <a:ln/>
+        </p:spPr>
+        <p:txBody>
+          <a:bodyPr wrap="square" lIns="0" tIns="0" rIns="0" bIns="0" rtlCol="0" anchor="ctr"/>
+          <a:lstStyle/>
+          <a:p>
+            <a:pPr indent="0" marL="0">
+              <a:buNone/>
+            </a:pPr>
+            <a:r>
+              <a:rPr lang="en-US" sz="800" dirty="0">
+                <a:solidFill>
+                  <a:srgbClr val="A8D5A2"/>
+                </a:solidFill>
+                <a:latin typeface="Courier New" pitchFamily="34" charset="0"/>
+                <a:ea typeface="Courier New" pitchFamily="34" charset="-122"/>
+                <a:cs typeface="Courier New" pitchFamily="34" charset="-120"/>
+              </a:rPr>
+              <a:t>href="https://www.google.com/search"</a:t>
+            </a:r>
+            <a:endParaRPr lang="en-US" sz="800" dirty="0"/>
+          </a:p>
+        </p:txBody>
+      </p:sp>
+    </p:spTree>
+  </p:cSld>
+  <p:clrMapOvr>
+    <a:masterClrMapping/>
+  </p:clrMapOvr>
+</p:sld>
+</file>
+
+<file path=ppt/slides/slide8.xml><?xml version="1.0" encoding="utf-8"?>
+<p:sld xmlns:a="http://schemas.openxmlformats.org/drawingml/2006/main" xmlns:r="http://schemas.openxmlformats.org/officeDocument/2006/relationships" xmlns:p="http://schemas.openxmlformats.org/presentationml/2006/main">
+  <p:cSld name="Slide 8">
+    <p:bg>
+      <p:bgPr>
+        <a:solidFill>
+          <a:srgbClr val="FFFFFF"/>
+        </a:solidFill>
+      </p:bgPr>
+    </p:bg>
+    <p:spTree>
+      <p:nvGrpSpPr>
+        <p:cNvPr id="1" name=""/>
+        <p:cNvGrpSpPr/>
+        <p:nvPr/>
+      </p:nvGrpSpPr>
+      <p:grpSpPr>
+        <a:xfrm>
+          <a:off x="0" y="0"/>
+          <a:ext cx="0" cy="0"/>
+          <a:chOff x="0" y="0"/>
+          <a:chExt cx="0" cy="0"/>
+        </a:xfrm>
+      </p:grpSpPr>
+      <p:sp>
+        <p:nvSpPr>
+          <p:cNvPr id="2" name="Text 0"/>
+          <p:cNvSpPr/>
+          <p:nvPr/>
+        </p:nvSpPr>
+        <p:spPr>
+          <a:xfrm>
             <a:off x="457200" y="274320"/>
             <a:ext cx="8229600" cy="502920"/>
           </a:xfrm>
@@ -8828,7 +10419,7 @@
                 <a:ea typeface="Calibri" pitchFamily="34" charset="-122"/>
                 <a:cs typeface="Calibri" pitchFamily="34" charset="-120"/>
               </a:rPr>
-              <a:t>Converts Word documents to clean HTML, then our rules normalise the output.</a:t>
+              <a:t>Converts Word documents to clean HTML, then 14 rules normalise the output.</a:t>
             </a:r>
             <a:endParaRPr lang="en-US" sz="900" dirty="0"/>
           </a:p>
@@ -8979,7 +10570,7 @@
                 <a:ea typeface="Calibri" pitchFamily="34" charset="-122"/>
                 <a:cs typeface="Calibri" pitchFamily="34" charset="-120"/>
               </a:rPr>
-              <a:t>Reads .xlsx, .xls and .csv files. All sheets converted to HTML tables.</a:t>
+              <a:t>Reads .xlsx, .xls and .csv. All sheets converted to HTML tables.</a:t>
             </a:r>
             <a:endParaRPr lang="en-US" sz="900" dirty="0"/>
           </a:p>
@@ -9130,7 +10721,7 @@
                 <a:ea typeface="Calibri" pitchFamily="34" charset="-122"/>
                 <a:cs typeface="Calibri" pitchFamily="34" charset="-120"/>
               </a:rPr>
-              <a:t>Native browser API. sanitizeEditorHtml() normalises the output before rules run.</a:t>
+              <a:t>Native browser API. sanitizeEditorHtml() normalises output before rules run.</a:t>
             </a:r>
             <a:endParaRPr lang="en-US" sz="900" dirty="0"/>
           </a:p>
@@ -9583,7 +11174,7 @@
                 <a:ea typeface="Calibri" pitchFamily="34" charset="-122"/>
                 <a:cs typeface="Calibri" pitchFamily="34" charset="-120"/>
               </a:rPr>
-              <a:t>All libraries are bundled locally. Works fully offline once downloaded.</a:t>
+              <a:t>All libraries bundled locally. Works fully offline once downloaded.</a:t>
             </a:r>
             <a:endParaRPr lang="en-US" sz="900" dirty="0"/>
           </a:p>
@@ -9597,9 +11188,9 @@
 </p:sld>
 </file>
 
-<file path=ppt/slides/slide8.xml><?xml version="1.0" encoding="utf-8"?>
+<file path=ppt/slides/slide9.xml><?xml version="1.0" encoding="utf-8"?>
 <p:sld xmlns:a="http://schemas.openxmlformats.org/drawingml/2006/main" xmlns:r="http://schemas.openxmlformats.org/officeDocument/2006/relationships" xmlns:p="http://schemas.openxmlformats.org/presentationml/2006/main">
-  <p:cSld name="Slide 8">
+  <p:cSld name="Slide 9">
     <p:bg>
       <p:bgPr>
         <a:solidFill>
@@ -10191,7 +11782,7 @@
                   <a:srgbClr val="000000"/>
                 </a:solidFill>
               </a:rPr>
-              <a:t>🔗</a:t>
+              <a:t>🚫</a:t>
             </a:r>
             <a:endParaRPr lang="en-US" sz="1800" dirty="0"/>
           </a:p>
@@ -10230,7 +11821,7 @@
                 <a:ea typeface="Calibri" pitchFamily="34" charset="-122"/>
                 <a:cs typeface="Calibri" pitchFamily="34" charset="-120"/>
               </a:rPr>
-              <a:t>Phone links, fax excluded</a:t>
+              <a:t>Strikethrough text removed entirely</a:t>
             </a:r>
             <a:endParaRPr lang="en-US" sz="1000" dirty="0"/>
           </a:p>
@@ -10293,7 +11884,7 @@
                   <a:srgbClr val="000000"/>
                 </a:solidFill>
               </a:rPr>
-              <a:t>🚫</a:t>
+              <a:t>🔗</a:t>
             </a:r>
             <a:endParaRPr lang="en-US" sz="1800" dirty="0"/>
           </a:p>
@@ -10332,7 +11923,7 @@
                 <a:ea typeface="Calibri" pitchFamily="34" charset="-122"/>
                 <a:cs typeface="Calibri" pitchFamily="34" charset="-120"/>
               </a:rPr>
-              <a:t>No styles in output — pure HTML tags</a:t>
+              <a:t>strong wraps a · file:// URLs fixed</a:t>
             </a:r>
             <a:endParaRPr lang="en-US" sz="1000" dirty="0"/>
           </a:p>

--- a/dochtml-demo.pptx
+++ b/dochtml-demo.pptx
@@ -4,6 +4,9 @@
   <p:sldMasterIdLst>
     <p:sldMasterId id="2147483648" r:id="rId1"/>
   </p:sldMasterIdLst>
+  <p:notesMasterIdLst>
+    <p:notesMasterId r:id="rId12"/>
+  </p:notesMasterIdLst>
   <p:sldIdLst>
     <p:sldId id="256" r:id="rId2"/>
     <p:sldId id="257" r:id="rId3"/>
@@ -12,13 +15,11 @@
     <p:sldId id="260" r:id="rId6"/>
     <p:sldId id="261" r:id="rId7"/>
     <p:sldId id="262" r:id="rId8"/>
-    <p:sldId id="263" r:id="rId9"/>
-    <p:sldId id="264" r:id="rId10"/>
+    <p:sldId id="265" r:id="rId9"/>
+    <p:sldId id="263" r:id="rId10"/>
+    <p:sldId id="264" r:id="rId11"/>
   </p:sldIdLst>
-  <p:notesMasterIdLst>
-    <p:notesMasterId r:id="rId11"/>
-  </p:notesMasterIdLst>
-  <p:sldSz cx="9144000" cy="5143500"/>
+  <p:sldSz cx="9144000" cy="5143500" type="screen16x9"/>
   <p:notesSz cx="5143500" cy="9144000"/>
   <p:defaultTextStyle>
     <a:lvl1pPr marL="0" algn="l" defTabSz="914400" rtl="0" eaLnBrk="1" latinLnBrk="0" hangingPunct="1">
@@ -112,6 +113,11 @@
       </a:defRPr>
     </a:lvl9pPr>
   </p:defaultTextStyle>
+  <p:extLst>
+    <p:ext uri="{EFAFB233-063F-42B5-8137-9DF3F51BA10A}">
+      <p15:sldGuideLst xmlns:p15="http://schemas.microsoft.com/office/powerpoint/2012/main"/>
+    </p:ext>
+  </p:extLst>
 </p:presentation>
 </file>
 
@@ -137,234 +143,10 @@
           <a:chExt cx="0" cy="0"/>
         </a:xfrm>
       </p:grpSpPr>
-      <p:sp>
-        <p:nvSpPr>
-          <p:cNvPr id="2" name="Header Placeholder 1"/>
-          <p:cNvSpPr>
-            <a:spLocks noGrp="1"/>
-          </p:cNvSpPr>
-          <p:nvPr>
-            <p:ph type="hdr" sz="quarter"/>
-          </p:nvPr>
-        </p:nvSpPr>
-        <p:spPr>
-          <a:xfrm>
-            <a:off x="0" y="0"/>
-            <a:ext cx="2971800" cy="458788"/>
-          </a:xfrm>
-          <a:prstGeom prst="rect">
-            <a:avLst/>
-          </a:prstGeom>
-        </p:spPr>
-        <p:txBody>
-          <a:bodyPr vert="horz" lIns="91440" tIns="45720" rIns="91440" bIns="45720" rtlCol="0"/>
-          <a:lstStyle>
-            <a:lvl1pPr algn="l">
-              <a:defRPr sz="1200"/>
-            </a:lvl1pPr>
-          </a:lstStyle>
-          <a:p>
-            <a:endParaRPr lang="en-US"/>
-          </a:p>
-        </p:txBody>
-      </p:sp>
-      <p:sp>
-        <p:nvSpPr>
-          <p:cNvPr id="3" name="Date Placeholder 2"/>
-          <p:cNvSpPr>
-            <a:spLocks noGrp="1"/>
-          </p:cNvSpPr>
-          <p:nvPr>
-            <p:ph type="dt" idx="1"/>
-          </p:nvPr>
-        </p:nvSpPr>
-        <p:spPr>
-          <a:xfrm>
-            <a:off x="3884613" y="0"/>
-            <a:ext cx="2971800" cy="458788"/>
-          </a:xfrm>
-          <a:prstGeom prst="rect">
-            <a:avLst/>
-          </a:prstGeom>
-        </p:spPr>
-        <p:txBody>
-          <a:bodyPr vert="horz" lIns="91440" tIns="45720" rIns="91440" bIns="45720" rtlCol="0"/>
-          <a:lstStyle>
-            <a:lvl1pPr algn="r">
-              <a:defRPr sz="1200"/>
-            </a:lvl1pPr>
-          </a:lstStyle>
-          <a:p>
-            <a:fld id="{5282F153-3F37-0F45-9E97-73ACFA13230C}" type="datetimeFigureOut">
-              <a:rPr lang="en-US"/>
-              <a:t>7/23/19</a:t>
-            </a:fld>
-            <a:endParaRPr lang="en-US"/>
-          </a:p>
-        </p:txBody>
-      </p:sp>
-      <p:sp>
-        <p:nvSpPr>
-          <p:cNvPr id="4" name="Slide Image Placeholder 3"/>
-          <p:cNvSpPr>
-            <a:spLocks noGrp="1" noRot="1" noChangeAspect="1"/>
-          </p:cNvSpPr>
-          <p:nvPr>
-            <p:ph type="sldImg" idx="2"/>
-          </p:nvPr>
-        </p:nvSpPr>
-        <p:spPr>
-          <a:xfrm>
-            <a:off x="685800" y="1143000"/>
-            <a:ext cx="5486400" cy="3086100"/>
-          </a:xfrm>
-          <a:prstGeom prst="rect">
-            <a:avLst/>
-          </a:prstGeom>
-          <a:noFill/>
-          <a:ln w="12700">
-            <a:solidFill>
-              <a:prstClr val="black"/>
-            </a:solidFill>
-          </a:ln>
-        </p:spPr>
-        <p:txBody>
-          <a:bodyPr vert="horz" lIns="91440" tIns="45720" rIns="91440" bIns="45720" rtlCol="0" anchor="ctr"/>
-          <a:lstStyle/>
-          <a:p>
-            <a:endParaRPr lang="en-US"/>
-          </a:p>
-        </p:txBody>
-      </p:sp>
-      <p:sp>
-        <p:nvSpPr>
-          <p:cNvPr id="5" name="Notes Placeholder 4"/>
-          <p:cNvSpPr>
-            <a:spLocks noGrp="1"/>
-          </p:cNvSpPr>
-          <p:nvPr>
-            <p:ph type="body" sz="quarter" idx="3"/>
-          </p:nvPr>
-        </p:nvSpPr>
-        <p:spPr>
-          <a:xfrm>
-            <a:off x="685800" y="4400550"/>
-            <a:ext cx="5486400" cy="3600450"/>
-          </a:xfrm>
-          <a:prstGeom prst="rect">
-            <a:avLst/>
-          </a:prstGeom>
-        </p:spPr>
-        <p:txBody>
-          <a:bodyPr vert="horz" lIns="91440" tIns="45720" rIns="91440" bIns="45720" rtlCol="0"/>
-          <a:lstStyle/>
-          <a:p>
-            <a:pPr lvl="0"/>
-            <a:r>
-              <a:rPr lang="en-US"/>
-              <a:t>Click to edit Master text styles</a:t>
-            </a:r>
-          </a:p>
-          <a:p>
-            <a:pPr lvl="1"/>
-            <a:r>
-              <a:rPr lang="en-US"/>
-              <a:t>Second level</a:t>
-            </a:r>
-          </a:p>
-          <a:p>
-            <a:pPr lvl="2"/>
-            <a:r>
-              <a:rPr lang="en-US"/>
-              <a:t>Third level</a:t>
-            </a:r>
-          </a:p>
-          <a:p>
-            <a:pPr lvl="3"/>
-            <a:r>
-              <a:rPr lang="en-US"/>
-              <a:t>Fourth level</a:t>
-            </a:r>
-          </a:p>
-          <a:p>
-            <a:pPr lvl="4"/>
-            <a:r>
-              <a:rPr lang="en-US"/>
-              <a:t>Fifth level</a:t>
-            </a:r>
-          </a:p>
-        </p:txBody>
-      </p:sp>
-      <p:sp>
-        <p:nvSpPr>
-          <p:cNvPr id="6" name="Footer Placeholder 5"/>
-          <p:cNvSpPr>
-            <a:spLocks noGrp="1"/>
-          </p:cNvSpPr>
-          <p:nvPr>
-            <p:ph type="ftr" sz="quarter" idx="4"/>
-          </p:nvPr>
-        </p:nvSpPr>
-        <p:spPr>
-          <a:xfrm>
-            <a:off x="0" y="8685213"/>
-            <a:ext cx="2971800" cy="458787"/>
-          </a:xfrm>
-          <a:prstGeom prst="rect">
-            <a:avLst/>
-          </a:prstGeom>
-        </p:spPr>
-        <p:txBody>
-          <a:bodyPr vert="horz" lIns="91440" tIns="45720" rIns="91440" bIns="45720" rtlCol="0" anchor="b"/>
-          <a:lstStyle>
-            <a:lvl1pPr algn="l">
-              <a:defRPr sz="1200"/>
-            </a:lvl1pPr>
-          </a:lstStyle>
-          <a:p>
-            <a:endParaRPr lang="en-US"/>
-          </a:p>
-        </p:txBody>
-      </p:sp>
-      <p:sp>
-        <p:nvSpPr>
-          <p:cNvPr id="7" name="Slide Number Placeholder 6"/>
-          <p:cNvSpPr>
-            <a:spLocks noGrp="1"/>
-          </p:cNvSpPr>
-          <p:nvPr>
-            <p:ph type="sldNum" sz="quarter" idx="5"/>
-          </p:nvPr>
-        </p:nvSpPr>
-        <p:spPr>
-          <a:xfrm>
-            <a:off x="3884613" y="8685213"/>
-            <a:ext cx="2971800" cy="458787"/>
-          </a:xfrm>
-          <a:prstGeom prst="rect">
-            <a:avLst/>
-          </a:prstGeom>
-        </p:spPr>
-        <p:txBody>
-          <a:bodyPr vert="horz" lIns="91440" tIns="45720" rIns="91440" bIns="45720" rtlCol="0" anchor="b"/>
-          <a:lstStyle>
-            <a:lvl1pPr algn="r">
-              <a:defRPr sz="1200"/>
-            </a:lvl1pPr>
-          </a:lstStyle>
-          <a:p>
-            <a:fld id="{CE5E9CC1-C706-0F49-92D6-E571CC5EEA8F}" type="slidenum">
-              <a:rPr lang="en-US"/>
-              <a:t>‹#›</a:t>
-            </a:fld>
-            <a:endParaRPr lang="en-US"/>
-          </a:p>
-        </p:txBody>
-      </p:sp>
     </p:spTree>
     <p:extLst>
       <p:ext uri="{BB962C8B-B14F-4D97-AF65-F5344CB8AC3E}">
-        <p14:creationId xmlns:p14="http://schemas.microsoft.com/office/powerpoint/2010/main" val="1024086991"/>
+        <p14:creationId xmlns:p14="http://schemas.microsoft.com/office/powerpoint/2010/main" val="1993953821"/>
       </p:ext>
     </p:extLst>
   </p:cSld>
@@ -508,10 +290,6 @@
           <a:bodyPr/>
           <a:lstStyle/>
           <a:p>
-            <a:r>
-              <a:rPr lang="en-US" dirty="0"/>
-              <a:t/>
-            </a:r>
             <a:endParaRPr lang="en-US" dirty="0"/>
           </a:p>
         </p:txBody>
@@ -596,10 +374,6 @@
           <a:bodyPr/>
           <a:lstStyle/>
           <a:p>
-            <a:r>
-              <a:rPr lang="en-US" dirty="0"/>
-              <a:t/>
-            </a:r>
             <a:endParaRPr lang="en-US" dirty="0"/>
           </a:p>
         </p:txBody>
@@ -684,10 +458,6 @@
           <a:bodyPr/>
           <a:lstStyle/>
           <a:p>
-            <a:r>
-              <a:rPr lang="en-US" dirty="0"/>
-              <a:t/>
-            </a:r>
             <a:endParaRPr lang="en-US" dirty="0"/>
           </a:p>
         </p:txBody>
@@ -772,10 +542,6 @@
           <a:bodyPr/>
           <a:lstStyle/>
           <a:p>
-            <a:r>
-              <a:rPr lang="en-US" dirty="0"/>
-              <a:t/>
-            </a:r>
             <a:endParaRPr lang="en-US" dirty="0"/>
           </a:p>
         </p:txBody>
@@ -860,10 +626,6 @@
           <a:bodyPr/>
           <a:lstStyle/>
           <a:p>
-            <a:r>
-              <a:rPr lang="en-US" dirty="0"/>
-              <a:t/>
-            </a:r>
             <a:endParaRPr lang="en-US" dirty="0"/>
           </a:p>
         </p:txBody>
@@ -948,10 +710,6 @@
           <a:bodyPr/>
           <a:lstStyle/>
           <a:p>
-            <a:r>
-              <a:rPr lang="en-US" dirty="0"/>
-              <a:t/>
-            </a:r>
             <a:endParaRPr lang="en-US" dirty="0"/>
           </a:p>
         </p:txBody>
@@ -1036,10 +794,6 @@
           <a:bodyPr/>
           <a:lstStyle/>
           <a:p>
-            <a:r>
-              <a:rPr lang="en-US" dirty="0"/>
-              <a:t/>
-            </a:r>
             <a:endParaRPr lang="en-US" dirty="0"/>
           </a:p>
         </p:txBody>
@@ -1124,10 +878,6 @@
           <a:bodyPr/>
           <a:lstStyle/>
           <a:p>
-            <a:r>
-              <a:rPr lang="en-US" dirty="0"/>
-              <a:t/>
-            </a:r>
             <a:endParaRPr lang="en-US" dirty="0"/>
           </a:p>
         </p:txBody>
@@ -1149,7 +899,7 @@
           <a:p>
             <a:fld id="{F7021451-1387-4CA6-816F-3879F97B5CBC}" type="slidenum">
               <a:rPr lang="en-US"/>
-              <a:t>8</a:t>
+              <a:t>9</a:t>
             </a:fld>
             <a:endParaRPr lang="en-US"/>
           </a:p>
@@ -1212,10 +962,6 @@
           <a:bodyPr/>
           <a:lstStyle/>
           <a:p>
-            <a:r>
-              <a:rPr lang="en-US" dirty="0"/>
-              <a:t/>
-            </a:r>
             <a:endParaRPr lang="en-US" dirty="0"/>
           </a:p>
         </p:txBody>
@@ -1237,7 +983,7 @@
           <a:p>
             <a:fld id="{F7021451-1387-4CA6-816F-3879F97B5CBC}" type="slidenum">
               <a:rPr lang="en-US"/>
-              <a:t>9</a:t>
+              <a:t>10</a:t>
             </a:fld>
             <a:endParaRPr lang="en-US"/>
           </a:p>
@@ -1289,6 +1035,11 @@
 <file path=ppt/slideMasters/slideMaster1.xml><?xml version="1.0" encoding="utf-8"?>
 <p:sldMaster xmlns:a="http://schemas.openxmlformats.org/drawingml/2006/main" xmlns:r="http://schemas.openxmlformats.org/officeDocument/2006/relationships" xmlns:p="http://schemas.openxmlformats.org/presentationml/2006/main">
   <p:cSld>
+    <p:bg>
+      <p:bgRef idx="1001">
+        <a:schemeClr val="bg1"/>
+      </p:bgRef>
+    </p:bg>
     <p:spTree>
       <p:nvGrpSpPr>
         <p:cNvPr id="1" name=""/>
@@ -1571,6 +1322,7 @@
         <a:solidFill>
           <a:srgbClr val="1A1A18"/>
         </a:solidFill>
+        <a:effectLst/>
       </p:bgPr>
     </p:bg>
     <p:spTree>
@@ -1589,60 +1341,6 @@
       </p:grpSpPr>
       <p:sp>
         <p:nvSpPr>
-          <p:cNvPr id="2" name="Shape 0"/>
-          <p:cNvSpPr/>
-          <p:nvPr/>
-        </p:nvSpPr>
-        <p:spPr>
-          <a:xfrm>
-            <a:off x="7132320" y="-1097280"/>
-            <a:ext cx="3657600" cy="3657600"/>
-          </a:xfrm>
-          <a:prstGeom prst="ellipse">
-            <a:avLst/>
-          </a:prstGeom>
-          <a:solidFill>
-            <a:srgbClr val="2D6A4F">
-              <a:alpha val="25000"/>
-            </a:srgbClr>
-          </a:solidFill>
-          <a:ln w="12700">
-            <a:solidFill>
-              <a:srgbClr val="2D6A4F"/>
-            </a:solidFill>
-            <a:prstDash val="solid"/>
-          </a:ln>
-        </p:spPr>
-      </p:sp>
-      <p:sp>
-        <p:nvSpPr>
-          <p:cNvPr id="3" name="Shape 1"/>
-          <p:cNvSpPr/>
-          <p:nvPr/>
-        </p:nvSpPr>
-        <p:spPr>
-          <a:xfrm>
-            <a:off x="7772400" y="-457200"/>
-            <a:ext cx="2286000" cy="2286000"/>
-          </a:xfrm>
-          <a:prstGeom prst="ellipse">
-            <a:avLst/>
-          </a:prstGeom>
-          <a:solidFill>
-            <a:srgbClr val="6B3FA0">
-              <a:alpha val="30000"/>
-            </a:srgbClr>
-          </a:solidFill>
-          <a:ln w="12700">
-            <a:solidFill>
-              <a:srgbClr val="6B3FA0"/>
-            </a:solidFill>
-            <a:prstDash val="solid"/>
-          </a:ln>
-        </p:spPr>
-      </p:sp>
-      <p:sp>
-        <p:nvSpPr>
           <p:cNvPr id="4" name="Text 2"/>
           <p:cNvSpPr/>
           <p:nvPr/>
@@ -1662,7 +1360,7 @@
           <a:bodyPr wrap="square" lIns="0" tIns="0" rIns="0" bIns="0" rtlCol="0" anchor="ctr"/>
           <a:lstStyle/>
           <a:p>
-            <a:pPr indent="0" marL="0">
+            <a:pPr marL="0" indent="0">
               <a:buNone/>
             </a:pPr>
             <a:r>
@@ -1701,7 +1399,7 @@
           <a:bodyPr wrap="square" lIns="0" tIns="0" rIns="0" bIns="0" rtlCol="0" anchor="ctr"/>
           <a:lstStyle/>
           <a:p>
-            <a:pPr indent="0" marL="0">
+            <a:pPr marL="0" indent="0">
               <a:buNone/>
             </a:pPr>
             <a:r>
@@ -1740,7 +1438,7 @@
           <a:bodyPr wrap="square" lIns="0" tIns="0" rIns="0" bIns="0" rtlCol="0" anchor="ctr"/>
           <a:lstStyle/>
           <a:p>
-            <a:pPr indent="0" marL="0">
+            <a:pPr marL="0" indent="0">
               <a:buNone/>
             </a:pPr>
             <a:r>
@@ -1779,7 +1477,7 @@
           <a:bodyPr wrap="square" lIns="0" tIns="0" rIns="0" bIns="0" rtlCol="0" anchor="ctr"/>
           <a:lstStyle/>
           <a:p>
-            <a:pPr indent="0" marL="0">
+            <a:pPr marL="0" indent="0">
               <a:buNone/>
             </a:pPr>
             <a:r>
@@ -1847,7 +1545,7 @@
           <a:bodyPr wrap="square" lIns="0" tIns="0" rIns="0" bIns="0" rtlCol="0" anchor="ctr"/>
           <a:lstStyle/>
           <a:p>
-            <a:pPr algn="ctr" indent="0" marL="0">
+            <a:pPr marL="0" indent="0" algn="ctr">
               <a:buNone/>
             </a:pPr>
             <a:r>
@@ -1915,7 +1613,7 @@
           <a:bodyPr wrap="square" lIns="0" tIns="0" rIns="0" bIns="0" rtlCol="0" anchor="ctr"/>
           <a:lstStyle/>
           <a:p>
-            <a:pPr algn="ctr" indent="0" marL="0">
+            <a:pPr marL="0" indent="0" algn="ctr">
               <a:buNone/>
             </a:pPr>
             <a:r>
@@ -1983,7 +1681,7 @@
           <a:bodyPr wrap="square" lIns="0" tIns="0" rIns="0" bIns="0" rtlCol="0" anchor="ctr"/>
           <a:lstStyle/>
           <a:p>
-            <a:pPr algn="ctr" indent="0" marL="0">
+            <a:pPr marL="0" indent="0" algn="ctr">
               <a:buNone/>
             </a:pPr>
             <a:r>
@@ -2022,7 +1720,7 @@
           <a:bodyPr wrap="square" lIns="0" tIns="0" rIns="0" bIns="0" rtlCol="0" anchor="ctr"/>
           <a:lstStyle/>
           <a:p>
-            <a:pPr algn="ctr" indent="0" marL="0">
+            <a:pPr marL="0" indent="0" algn="ctr">
               <a:buNone/>
             </a:pPr>
             <a:r>
@@ -2037,6 +1735,887 @@
               <a:t>100% browser-side  ·  No server upload  ·  Semantic HTML5</a:t>
             </a:r>
             <a:endParaRPr lang="en-US" sz="1000" dirty="0"/>
+          </a:p>
+        </p:txBody>
+      </p:sp>
+    </p:spTree>
+  </p:cSld>
+  <p:clrMapOvr>
+    <a:masterClrMapping/>
+  </p:clrMapOvr>
+</p:sld>
+</file>
+
+<file path=ppt/slides/slide10.xml><?xml version="1.0" encoding="utf-8"?>
+<p:sld xmlns:a="http://schemas.openxmlformats.org/drawingml/2006/main" xmlns:r="http://schemas.openxmlformats.org/officeDocument/2006/relationships" xmlns:p="http://schemas.openxmlformats.org/presentationml/2006/main">
+  <p:cSld name="Slide 9">
+    <p:bg>
+      <p:bgPr>
+        <a:solidFill>
+          <a:srgbClr val="1A1A18"/>
+        </a:solidFill>
+        <a:effectLst/>
+      </p:bgPr>
+    </p:bg>
+    <p:spTree>
+      <p:nvGrpSpPr>
+        <p:cNvPr id="1" name=""/>
+        <p:cNvGrpSpPr/>
+        <p:nvPr/>
+      </p:nvGrpSpPr>
+      <p:grpSpPr>
+        <a:xfrm>
+          <a:off x="0" y="0"/>
+          <a:ext cx="0" cy="0"/>
+          <a:chOff x="0" y="0"/>
+          <a:chExt cx="0" cy="0"/>
+        </a:xfrm>
+      </p:grpSpPr>
+      <p:sp>
+        <p:nvSpPr>
+          <p:cNvPr id="3" name="Text 1"/>
+          <p:cNvSpPr/>
+          <p:nvPr/>
+        </p:nvSpPr>
+        <p:spPr>
+          <a:xfrm>
+            <a:off x="914400" y="457200"/>
+            <a:ext cx="7315200" cy="640080"/>
+          </a:xfrm>
+          <a:prstGeom prst="rect">
+            <a:avLst/>
+          </a:prstGeom>
+          <a:noFill/>
+          <a:ln/>
+        </p:spPr>
+        <p:txBody>
+          <a:bodyPr wrap="square" lIns="0" tIns="0" rIns="0" bIns="0" rtlCol="0" anchor="ctr"/>
+          <a:lstStyle/>
+          <a:p>
+            <a:pPr marL="0" indent="0" algn="ctr">
+              <a:buNone/>
+            </a:pPr>
+            <a:r>
+              <a:rPr lang="en-US" sz="3400" b="1" dirty="0">
+                <a:solidFill>
+                  <a:srgbClr val="FFFFFF"/>
+                </a:solidFill>
+                <a:latin typeface="Calibri" pitchFamily="34" charset="0"/>
+                <a:ea typeface="Calibri" pitchFamily="34" charset="-122"/>
+                <a:cs typeface="Calibri" pitchFamily="34" charset="-120"/>
+              </a:rPr>
+              <a:t>Ready to Use</a:t>
+            </a:r>
+            <a:endParaRPr lang="en-US" sz="3400" dirty="0"/>
+          </a:p>
+        </p:txBody>
+      </p:sp>
+      <p:sp>
+        <p:nvSpPr>
+          <p:cNvPr id="4" name="Text 2"/>
+          <p:cNvSpPr/>
+          <p:nvPr/>
+        </p:nvSpPr>
+        <p:spPr>
+          <a:xfrm>
+            <a:off x="914400" y="1143000"/>
+            <a:ext cx="7315200" cy="365760"/>
+          </a:xfrm>
+          <a:prstGeom prst="rect">
+            <a:avLst/>
+          </a:prstGeom>
+          <a:noFill/>
+          <a:ln/>
+        </p:spPr>
+        <p:txBody>
+          <a:bodyPr wrap="square" lIns="0" tIns="0" rIns="0" bIns="0" rtlCol="0" anchor="ctr"/>
+          <a:lstStyle/>
+          <a:p>
+            <a:pPr marL="0" indent="0" algn="ctr">
+              <a:buNone/>
+            </a:pPr>
+            <a:r>
+              <a:rPr lang="en-US" sz="1300" dirty="0">
+                <a:solidFill>
+                  <a:srgbClr val="9A9890"/>
+                </a:solidFill>
+                <a:latin typeface="Calibri" pitchFamily="34" charset="0"/>
+                <a:ea typeface="Calibri" pitchFamily="34" charset="-122"/>
+                <a:cs typeface="Calibri" pitchFamily="34" charset="-120"/>
+              </a:rPr>
+              <a:t>All files run locally — open index.html and start converting.</a:t>
+            </a:r>
+            <a:endParaRPr lang="en-US" sz="1300" dirty="0"/>
+          </a:p>
+        </p:txBody>
+      </p:sp>
+      <p:sp>
+        <p:nvSpPr>
+          <p:cNvPr id="5" name="Shape 3"/>
+          <p:cNvSpPr/>
+          <p:nvPr/>
+        </p:nvSpPr>
+        <p:spPr>
+          <a:xfrm>
+            <a:off x="731520" y="1600200"/>
+            <a:ext cx="2468880" cy="713232"/>
+          </a:xfrm>
+          <a:prstGeom prst="roundRect">
+            <a:avLst>
+              <a:gd name="adj" fmla="val 12821"/>
+            </a:avLst>
+          </a:prstGeom>
+          <a:solidFill>
+            <a:srgbClr val="252523"/>
+          </a:solidFill>
+          <a:ln w="12700">
+            <a:solidFill>
+              <a:srgbClr val="3D3D39"/>
+            </a:solidFill>
+            <a:prstDash val="solid"/>
+          </a:ln>
+        </p:spPr>
+      </p:sp>
+      <p:sp>
+        <p:nvSpPr>
+          <p:cNvPr id="6" name="Text 4"/>
+          <p:cNvSpPr/>
+          <p:nvPr/>
+        </p:nvSpPr>
+        <p:spPr>
+          <a:xfrm>
+            <a:off x="841248" y="1691639"/>
+            <a:ext cx="411480" cy="502920"/>
+          </a:xfrm>
+          <a:prstGeom prst="rect">
+            <a:avLst/>
+          </a:prstGeom>
+          <a:noFill/>
+          <a:ln/>
+        </p:spPr>
+        <p:txBody>
+          <a:bodyPr wrap="square" lIns="0" tIns="0" rIns="0" bIns="0" rtlCol="0" anchor="ctr"/>
+          <a:lstStyle/>
+          <a:p>
+            <a:pPr marL="0" indent="0" algn="ctr">
+              <a:buNone/>
+            </a:pPr>
+            <a:r>
+              <a:rPr lang="en-US" sz="1800" dirty="0">
+                <a:solidFill>
+                  <a:srgbClr val="000000"/>
+                </a:solidFill>
+              </a:rPr>
+              <a:t>📄</a:t>
+            </a:r>
+            <a:endParaRPr lang="en-US" sz="1800" dirty="0"/>
+          </a:p>
+        </p:txBody>
+      </p:sp>
+      <p:sp>
+        <p:nvSpPr>
+          <p:cNvPr id="7" name="Text 5"/>
+          <p:cNvSpPr/>
+          <p:nvPr/>
+        </p:nvSpPr>
+        <p:spPr>
+          <a:xfrm>
+            <a:off x="1261872" y="1709928"/>
+            <a:ext cx="1810512" cy="502920"/>
+          </a:xfrm>
+          <a:prstGeom prst="rect">
+            <a:avLst/>
+          </a:prstGeom>
+          <a:noFill/>
+          <a:ln/>
+        </p:spPr>
+        <p:txBody>
+          <a:bodyPr wrap="square" lIns="0" tIns="0" rIns="0" bIns="0" rtlCol="0" anchor="ctr"/>
+          <a:lstStyle/>
+          <a:p>
+            <a:pPr marL="0" indent="0">
+              <a:buNone/>
+            </a:pPr>
+            <a:r>
+              <a:rPr lang="en-US" sz="1000" dirty="0">
+                <a:solidFill>
+                  <a:srgbClr val="D0CFC8"/>
+                </a:solidFill>
+                <a:latin typeface="Calibri" pitchFamily="34" charset="0"/>
+                <a:ea typeface="Calibri" pitchFamily="34" charset="-122"/>
+                <a:cs typeface="Calibri" pitchFamily="34" charset="-120"/>
+              </a:rPr>
+              <a:t>DOCX upload via Mammoth.js</a:t>
+            </a:r>
+            <a:endParaRPr lang="en-US" sz="1000" dirty="0"/>
+          </a:p>
+        </p:txBody>
+      </p:sp>
+      <p:sp>
+        <p:nvSpPr>
+          <p:cNvPr id="8" name="Shape 6"/>
+          <p:cNvSpPr/>
+          <p:nvPr/>
+        </p:nvSpPr>
+        <p:spPr>
+          <a:xfrm>
+            <a:off x="3474720" y="1600200"/>
+            <a:ext cx="2468880" cy="713232"/>
+          </a:xfrm>
+          <a:prstGeom prst="roundRect">
+            <a:avLst>
+              <a:gd name="adj" fmla="val 12821"/>
+            </a:avLst>
+          </a:prstGeom>
+          <a:solidFill>
+            <a:srgbClr val="252523"/>
+          </a:solidFill>
+          <a:ln w="12700">
+            <a:solidFill>
+              <a:srgbClr val="3D3D39"/>
+            </a:solidFill>
+            <a:prstDash val="solid"/>
+          </a:ln>
+        </p:spPr>
+      </p:sp>
+      <p:sp>
+        <p:nvSpPr>
+          <p:cNvPr id="9" name="Text 7"/>
+          <p:cNvSpPr/>
+          <p:nvPr/>
+        </p:nvSpPr>
+        <p:spPr>
+          <a:xfrm>
+            <a:off x="3584448" y="1691639"/>
+            <a:ext cx="411480" cy="502920"/>
+          </a:xfrm>
+          <a:prstGeom prst="rect">
+            <a:avLst/>
+          </a:prstGeom>
+          <a:noFill/>
+          <a:ln/>
+        </p:spPr>
+        <p:txBody>
+          <a:bodyPr wrap="square" lIns="0" tIns="0" rIns="0" bIns="0" rtlCol="0" anchor="ctr"/>
+          <a:lstStyle/>
+          <a:p>
+            <a:pPr marL="0" indent="0" algn="ctr">
+              <a:buNone/>
+            </a:pPr>
+            <a:r>
+              <a:rPr lang="en-US" sz="1800" dirty="0">
+                <a:solidFill>
+                  <a:srgbClr val="000000"/>
+                </a:solidFill>
+              </a:rPr>
+              <a:t>📊</a:t>
+            </a:r>
+            <a:endParaRPr lang="en-US" sz="1800" dirty="0"/>
+          </a:p>
+        </p:txBody>
+      </p:sp>
+      <p:sp>
+        <p:nvSpPr>
+          <p:cNvPr id="10" name="Text 8"/>
+          <p:cNvSpPr/>
+          <p:nvPr/>
+        </p:nvSpPr>
+        <p:spPr>
+          <a:xfrm>
+            <a:off x="4005072" y="1709928"/>
+            <a:ext cx="1810512" cy="502920"/>
+          </a:xfrm>
+          <a:prstGeom prst="rect">
+            <a:avLst/>
+          </a:prstGeom>
+          <a:noFill/>
+          <a:ln/>
+        </p:spPr>
+        <p:txBody>
+          <a:bodyPr wrap="square" lIns="0" tIns="0" rIns="0" bIns="0" rtlCol="0" anchor="ctr"/>
+          <a:lstStyle/>
+          <a:p>
+            <a:pPr marL="0" indent="0">
+              <a:buNone/>
+            </a:pPr>
+            <a:r>
+              <a:rPr lang="en-US" sz="1000" dirty="0">
+                <a:solidFill>
+                  <a:srgbClr val="D0CFC8"/>
+                </a:solidFill>
+                <a:latin typeface="Calibri" pitchFamily="34" charset="0"/>
+                <a:ea typeface="Calibri" pitchFamily="34" charset="-122"/>
+                <a:cs typeface="Calibri" pitchFamily="34" charset="-120"/>
+              </a:rPr>
+              <a:t>Excel &amp; CSV via SheetJS</a:t>
+            </a:r>
+            <a:endParaRPr lang="en-US" sz="1000" dirty="0"/>
+          </a:p>
+        </p:txBody>
+      </p:sp>
+      <p:sp>
+        <p:nvSpPr>
+          <p:cNvPr id="11" name="Shape 9"/>
+          <p:cNvSpPr/>
+          <p:nvPr/>
+        </p:nvSpPr>
+        <p:spPr>
+          <a:xfrm>
+            <a:off x="6217920" y="1600200"/>
+            <a:ext cx="2468880" cy="713232"/>
+          </a:xfrm>
+          <a:prstGeom prst="roundRect">
+            <a:avLst>
+              <a:gd name="adj" fmla="val 12821"/>
+            </a:avLst>
+          </a:prstGeom>
+          <a:solidFill>
+            <a:srgbClr val="252523"/>
+          </a:solidFill>
+          <a:ln w="12700">
+            <a:solidFill>
+              <a:srgbClr val="3D3D39"/>
+            </a:solidFill>
+            <a:prstDash val="solid"/>
+          </a:ln>
+        </p:spPr>
+      </p:sp>
+      <p:sp>
+        <p:nvSpPr>
+          <p:cNvPr id="12" name="Text 10"/>
+          <p:cNvSpPr/>
+          <p:nvPr/>
+        </p:nvSpPr>
+        <p:spPr>
+          <a:xfrm>
+            <a:off x="6327648" y="1691639"/>
+            <a:ext cx="411480" cy="502920"/>
+          </a:xfrm>
+          <a:prstGeom prst="rect">
+            <a:avLst/>
+          </a:prstGeom>
+          <a:noFill/>
+          <a:ln/>
+        </p:spPr>
+        <p:txBody>
+          <a:bodyPr wrap="square" lIns="0" tIns="0" rIns="0" bIns="0" rtlCol="0" anchor="ctr"/>
+          <a:lstStyle/>
+          <a:p>
+            <a:pPr marL="0" indent="0" algn="ctr">
+              <a:buNone/>
+            </a:pPr>
+            <a:r>
+              <a:rPr lang="en-US" sz="1800" dirty="0">
+                <a:solidFill>
+                  <a:srgbClr val="000000"/>
+                </a:solidFill>
+              </a:rPr>
+              <a:t>✏️</a:t>
+            </a:r>
+            <a:endParaRPr lang="en-US" sz="1800" dirty="0"/>
+          </a:p>
+        </p:txBody>
+      </p:sp>
+      <p:sp>
+        <p:nvSpPr>
+          <p:cNvPr id="13" name="Text 11"/>
+          <p:cNvSpPr/>
+          <p:nvPr/>
+        </p:nvSpPr>
+        <p:spPr>
+          <a:xfrm>
+            <a:off x="6748272" y="1709928"/>
+            <a:ext cx="1810512" cy="502920"/>
+          </a:xfrm>
+          <a:prstGeom prst="rect">
+            <a:avLst/>
+          </a:prstGeom>
+          <a:noFill/>
+          <a:ln/>
+        </p:spPr>
+        <p:txBody>
+          <a:bodyPr wrap="square" lIns="0" tIns="0" rIns="0" bIns="0" rtlCol="0" anchor="ctr"/>
+          <a:lstStyle/>
+          <a:p>
+            <a:pPr marL="0" indent="0">
+              <a:buNone/>
+            </a:pPr>
+            <a:r>
+              <a:rPr lang="en-US" sz="1000" dirty="0">
+                <a:solidFill>
+                  <a:srgbClr val="D0CFC8"/>
+                </a:solidFill>
+                <a:latin typeface="Calibri" pitchFamily="34" charset="0"/>
+                <a:ea typeface="Calibri" pitchFamily="34" charset="-122"/>
+                <a:cs typeface="Calibri" pitchFamily="34" charset="-120"/>
+              </a:rPr>
+              <a:t>Rich text editor with full toolbar</a:t>
+            </a:r>
+            <a:endParaRPr lang="en-US" sz="1000" dirty="0"/>
+          </a:p>
+        </p:txBody>
+      </p:sp>
+      <p:sp>
+        <p:nvSpPr>
+          <p:cNvPr id="14" name="Shape 12"/>
+          <p:cNvSpPr/>
+          <p:nvPr/>
+        </p:nvSpPr>
+        <p:spPr>
+          <a:xfrm>
+            <a:off x="731520" y="2331720"/>
+            <a:ext cx="2468880" cy="713232"/>
+          </a:xfrm>
+          <a:prstGeom prst="roundRect">
+            <a:avLst>
+              <a:gd name="adj" fmla="val 12821"/>
+            </a:avLst>
+          </a:prstGeom>
+          <a:solidFill>
+            <a:srgbClr val="252523"/>
+          </a:solidFill>
+          <a:ln w="12700">
+            <a:solidFill>
+              <a:srgbClr val="3D3D39"/>
+            </a:solidFill>
+            <a:prstDash val="solid"/>
+          </a:ln>
+        </p:spPr>
+      </p:sp>
+      <p:sp>
+        <p:nvSpPr>
+          <p:cNvPr id="15" name="Text 13"/>
+          <p:cNvSpPr/>
+          <p:nvPr/>
+        </p:nvSpPr>
+        <p:spPr>
+          <a:xfrm>
+            <a:off x="841248" y="2423160"/>
+            <a:ext cx="411480" cy="502920"/>
+          </a:xfrm>
+          <a:prstGeom prst="rect">
+            <a:avLst/>
+          </a:prstGeom>
+          <a:noFill/>
+          <a:ln/>
+        </p:spPr>
+        <p:txBody>
+          <a:bodyPr wrap="square" lIns="0" tIns="0" rIns="0" bIns="0" rtlCol="0" anchor="ctr"/>
+          <a:lstStyle/>
+          <a:p>
+            <a:pPr marL="0" indent="0" algn="ctr">
+              <a:buNone/>
+            </a:pPr>
+            <a:r>
+              <a:rPr lang="en-US" sz="1800" dirty="0">
+                <a:solidFill>
+                  <a:srgbClr val="000000"/>
+                </a:solidFill>
+              </a:rPr>
+              <a:t>🏷️</a:t>
+            </a:r>
+            <a:endParaRPr lang="en-US" sz="1800" dirty="0"/>
+          </a:p>
+        </p:txBody>
+      </p:sp>
+      <p:sp>
+        <p:nvSpPr>
+          <p:cNvPr id="16" name="Text 14"/>
+          <p:cNvSpPr/>
+          <p:nvPr/>
+        </p:nvSpPr>
+        <p:spPr>
+          <a:xfrm>
+            <a:off x="1261872" y="2441448"/>
+            <a:ext cx="1810512" cy="502920"/>
+          </a:xfrm>
+          <a:prstGeom prst="rect">
+            <a:avLst/>
+          </a:prstGeom>
+          <a:noFill/>
+          <a:ln/>
+        </p:spPr>
+        <p:txBody>
+          <a:bodyPr wrap="square" lIns="0" tIns="0" rIns="0" bIns="0" rtlCol="0" anchor="ctr"/>
+          <a:lstStyle/>
+          <a:p>
+            <a:pPr marL="0" indent="0">
+              <a:buNone/>
+            </a:pPr>
+            <a:r>
+              <a:rPr lang="en-US" sz="1000" dirty="0">
+                <a:solidFill>
+                  <a:srgbClr val="D0CFC8"/>
+                </a:solidFill>
+                <a:latin typeface="Calibri" pitchFamily="34" charset="0"/>
+                <a:ea typeface="Calibri" pitchFamily="34" charset="-122"/>
+                <a:cs typeface="Calibri" pitchFamily="34" charset="-120"/>
+              </a:rPr>
+              <a:t>Bold row → semantic th scope="col"</a:t>
+            </a:r>
+            <a:endParaRPr lang="en-US" sz="1000" dirty="0"/>
+          </a:p>
+        </p:txBody>
+      </p:sp>
+      <p:sp>
+        <p:nvSpPr>
+          <p:cNvPr id="17" name="Shape 15"/>
+          <p:cNvSpPr/>
+          <p:nvPr/>
+        </p:nvSpPr>
+        <p:spPr>
+          <a:xfrm>
+            <a:off x="3474720" y="2331720"/>
+            <a:ext cx="2468880" cy="713232"/>
+          </a:xfrm>
+          <a:prstGeom prst="roundRect">
+            <a:avLst>
+              <a:gd name="adj" fmla="val 12821"/>
+            </a:avLst>
+          </a:prstGeom>
+          <a:solidFill>
+            <a:srgbClr val="252523"/>
+          </a:solidFill>
+          <a:ln w="12700">
+            <a:solidFill>
+              <a:srgbClr val="3D3D39"/>
+            </a:solidFill>
+            <a:prstDash val="solid"/>
+          </a:ln>
+        </p:spPr>
+      </p:sp>
+      <p:sp>
+        <p:nvSpPr>
+          <p:cNvPr id="18" name="Text 16"/>
+          <p:cNvSpPr/>
+          <p:nvPr/>
+        </p:nvSpPr>
+        <p:spPr>
+          <a:xfrm>
+            <a:off x="3584448" y="2423160"/>
+            <a:ext cx="411480" cy="502920"/>
+          </a:xfrm>
+          <a:prstGeom prst="rect">
+            <a:avLst/>
+          </a:prstGeom>
+          <a:noFill/>
+          <a:ln/>
+        </p:spPr>
+        <p:txBody>
+          <a:bodyPr wrap="square" lIns="0" tIns="0" rIns="0" bIns="0" rtlCol="0" anchor="ctr"/>
+          <a:lstStyle/>
+          <a:p>
+            <a:pPr marL="0" indent="0" algn="ctr">
+              <a:buNone/>
+            </a:pPr>
+            <a:r>
+              <a:rPr lang="en-US" sz="1800" dirty="0">
+                <a:solidFill>
+                  <a:srgbClr val="000000"/>
+                </a:solidFill>
+              </a:rPr>
+              <a:t>🚫</a:t>
+            </a:r>
+            <a:endParaRPr lang="en-US" sz="1800" dirty="0"/>
+          </a:p>
+        </p:txBody>
+      </p:sp>
+      <p:sp>
+        <p:nvSpPr>
+          <p:cNvPr id="19" name="Text 17"/>
+          <p:cNvSpPr/>
+          <p:nvPr/>
+        </p:nvSpPr>
+        <p:spPr>
+          <a:xfrm>
+            <a:off x="4005072" y="2441448"/>
+            <a:ext cx="1810512" cy="502920"/>
+          </a:xfrm>
+          <a:prstGeom prst="rect">
+            <a:avLst/>
+          </a:prstGeom>
+          <a:noFill/>
+          <a:ln/>
+        </p:spPr>
+        <p:txBody>
+          <a:bodyPr wrap="square" lIns="0" tIns="0" rIns="0" bIns="0" rtlCol="0" anchor="ctr"/>
+          <a:lstStyle/>
+          <a:p>
+            <a:pPr marL="0" indent="0">
+              <a:buNone/>
+            </a:pPr>
+            <a:r>
+              <a:rPr lang="en-US" sz="1000" dirty="0">
+                <a:solidFill>
+                  <a:srgbClr val="D0CFC8"/>
+                </a:solidFill>
+                <a:latin typeface="Calibri" pitchFamily="34" charset="0"/>
+                <a:ea typeface="Calibri" pitchFamily="34" charset="-122"/>
+                <a:cs typeface="Calibri" pitchFamily="34" charset="-120"/>
+              </a:rPr>
+              <a:t>Strikethrough text removed entirely</a:t>
+            </a:r>
+            <a:endParaRPr lang="en-US" sz="1000" dirty="0"/>
+          </a:p>
+        </p:txBody>
+      </p:sp>
+      <p:sp>
+        <p:nvSpPr>
+          <p:cNvPr id="20" name="Shape 18"/>
+          <p:cNvSpPr/>
+          <p:nvPr/>
+        </p:nvSpPr>
+        <p:spPr>
+          <a:xfrm>
+            <a:off x="6217920" y="2331720"/>
+            <a:ext cx="2468880" cy="713232"/>
+          </a:xfrm>
+          <a:prstGeom prst="roundRect">
+            <a:avLst>
+              <a:gd name="adj" fmla="val 12821"/>
+            </a:avLst>
+          </a:prstGeom>
+          <a:solidFill>
+            <a:srgbClr val="252523"/>
+          </a:solidFill>
+          <a:ln w="12700">
+            <a:solidFill>
+              <a:srgbClr val="3D3D39"/>
+            </a:solidFill>
+            <a:prstDash val="solid"/>
+          </a:ln>
+        </p:spPr>
+      </p:sp>
+      <p:sp>
+        <p:nvSpPr>
+          <p:cNvPr id="21" name="Text 19"/>
+          <p:cNvSpPr/>
+          <p:nvPr/>
+        </p:nvSpPr>
+        <p:spPr>
+          <a:xfrm>
+            <a:off x="6327648" y="2423160"/>
+            <a:ext cx="411480" cy="502920"/>
+          </a:xfrm>
+          <a:prstGeom prst="rect">
+            <a:avLst/>
+          </a:prstGeom>
+          <a:noFill/>
+          <a:ln/>
+        </p:spPr>
+        <p:txBody>
+          <a:bodyPr wrap="square" lIns="0" tIns="0" rIns="0" bIns="0" rtlCol="0" anchor="ctr"/>
+          <a:lstStyle/>
+          <a:p>
+            <a:pPr marL="0" indent="0" algn="ctr">
+              <a:buNone/>
+            </a:pPr>
+            <a:r>
+              <a:rPr lang="en-US" sz="1800" dirty="0">
+                <a:solidFill>
+                  <a:srgbClr val="000000"/>
+                </a:solidFill>
+              </a:rPr>
+              <a:t>🔗</a:t>
+            </a:r>
+            <a:endParaRPr lang="en-US" sz="1800" dirty="0"/>
+          </a:p>
+        </p:txBody>
+      </p:sp>
+      <p:sp>
+        <p:nvSpPr>
+          <p:cNvPr id="22" name="Text 20"/>
+          <p:cNvSpPr/>
+          <p:nvPr/>
+        </p:nvSpPr>
+        <p:spPr>
+          <a:xfrm>
+            <a:off x="6748272" y="2441448"/>
+            <a:ext cx="1810512" cy="502920"/>
+          </a:xfrm>
+          <a:prstGeom prst="rect">
+            <a:avLst/>
+          </a:prstGeom>
+          <a:noFill/>
+          <a:ln/>
+        </p:spPr>
+        <p:txBody>
+          <a:bodyPr wrap="square" lIns="0" tIns="0" rIns="0" bIns="0" rtlCol="0" anchor="ctr"/>
+          <a:lstStyle/>
+          <a:p>
+            <a:pPr marL="0" indent="0">
+              <a:buNone/>
+            </a:pPr>
+            <a:r>
+              <a:rPr lang="en-US" sz="1000" dirty="0">
+                <a:solidFill>
+                  <a:srgbClr val="D0CFC8"/>
+                </a:solidFill>
+                <a:latin typeface="Calibri" pitchFamily="34" charset="0"/>
+                <a:ea typeface="Calibri" pitchFamily="34" charset="-122"/>
+                <a:cs typeface="Calibri" pitchFamily="34" charset="-120"/>
+              </a:rPr>
+              <a:t>strong wraps a · file:// URLs fixed</a:t>
+            </a:r>
+            <a:endParaRPr lang="en-US" sz="1000" dirty="0"/>
+          </a:p>
+        </p:txBody>
+      </p:sp>
+      <p:sp>
+        <p:nvSpPr>
+          <p:cNvPr id="23" name="Text 21"/>
+          <p:cNvSpPr/>
+          <p:nvPr/>
+        </p:nvSpPr>
+        <p:spPr>
+          <a:xfrm>
+            <a:off x="457200" y="4681728"/>
+            <a:ext cx="8229600" cy="320040"/>
+          </a:xfrm>
+          <a:prstGeom prst="rect">
+            <a:avLst/>
+          </a:prstGeom>
+          <a:noFill/>
+          <a:ln/>
+        </p:spPr>
+        <p:txBody>
+          <a:bodyPr wrap="square" lIns="0" tIns="0" rIns="0" bIns="0" rtlCol="0" anchor="ctr"/>
+          <a:lstStyle/>
+          <a:p>
+            <a:pPr marL="0" indent="0" algn="ctr">
+              <a:buNone/>
+            </a:pPr>
+            <a:r>
+              <a:rPr lang="en-US" sz="950" dirty="0">
+                <a:solidFill>
+                  <a:srgbClr val="5A5952"/>
+                </a:solidFill>
+                <a:latin typeface="Courier New" pitchFamily="34" charset="0"/>
+                <a:ea typeface="Courier New" pitchFamily="34" charset="-122"/>
+                <a:cs typeface="Courier New" pitchFamily="34" charset="-120"/>
+              </a:rPr>
+              <a:t>Files required: index.html  ·  app.js  ·  style.css  ·  mammoth.min.js  ·  xlsx.min.js</a:t>
+            </a:r>
+            <a:endParaRPr lang="en-US" sz="950" dirty="0"/>
+          </a:p>
+        </p:txBody>
+      </p:sp>
+      <p:sp>
+        <p:nvSpPr>
+          <p:cNvPr id="24" name="Rounded Rectangle 23"/>
+          <p:cNvSpPr/>
+          <p:nvPr/>
+        </p:nvSpPr>
+        <p:spPr>
+          <a:xfrm>
+            <a:off x="1874519" y="3136392"/>
+            <a:ext cx="5394960" cy="713232"/>
+          </a:xfrm>
+          <a:prstGeom prst="roundRect">
+            <a:avLst>
+              <a:gd name="adj" fmla="val 10000"/>
+            </a:avLst>
+          </a:prstGeom>
+          <a:solidFill>
+            <a:srgbClr val="252523"/>
+          </a:solidFill>
+          <a:ln w="12700">
+            <a:solidFill>
+              <a:srgbClr val="3D3D39"/>
+            </a:solidFill>
+          </a:ln>
+          <a:effectLst/>
+        </p:spPr>
+        <p:style>
+          <a:lnRef idx="1">
+            <a:schemeClr val="accent1"/>
+          </a:lnRef>
+          <a:fillRef idx="3">
+            <a:schemeClr val="accent1"/>
+          </a:fillRef>
+          <a:effectRef idx="2">
+            <a:schemeClr val="accent1"/>
+          </a:effectRef>
+          <a:fontRef idx="minor">
+            <a:schemeClr val="lt1"/>
+          </a:fontRef>
+        </p:style>
+        <p:txBody>
+          <a:bodyPr rtlCol="0" anchor="ctr"/>
+          <a:lstStyle/>
+          <a:p>
+            <a:pPr algn="ctr"/>
+            <a:endParaRPr/>
+          </a:p>
+        </p:txBody>
+      </p:sp>
+      <p:sp>
+        <p:nvSpPr>
+          <p:cNvPr id="25" name="TextBox 24"/>
+          <p:cNvSpPr txBox="1"/>
+          <p:nvPr/>
+        </p:nvSpPr>
+        <p:spPr>
+          <a:xfrm>
+            <a:off x="2011680" y="3227832"/>
+            <a:ext cx="411480" cy="502920"/>
+          </a:xfrm>
+          <a:prstGeom prst="rect">
+            <a:avLst/>
+          </a:prstGeom>
+          <a:noFill/>
+        </p:spPr>
+        <p:txBody>
+          <a:bodyPr wrap="square" lIns="0" tIns="0" rIns="0" bIns="0" anchor="ctr">
+            <a:spAutoFit/>
+          </a:bodyPr>
+          <a:lstStyle/>
+          <a:p>
+            <a:pPr algn="l"/>
+            <a:r>
+              <a:rPr sz="1800" b="0">
+                <a:solidFill>
+                  <a:srgbClr val="1A1A18"/>
+                </a:solidFill>
+                <a:latin typeface="Calibri"/>
+              </a:rPr>
+              <a:t>🧪</a:t>
+            </a:r>
+          </a:p>
+        </p:txBody>
+      </p:sp>
+      <p:sp>
+        <p:nvSpPr>
+          <p:cNvPr id="26" name="TextBox 25"/>
+          <p:cNvSpPr txBox="1"/>
+          <p:nvPr/>
+        </p:nvSpPr>
+        <p:spPr>
+          <a:xfrm>
+            <a:off x="2514600" y="3227832"/>
+            <a:ext cx="4572000" cy="502920"/>
+          </a:xfrm>
+          <a:prstGeom prst="rect">
+            <a:avLst/>
+          </a:prstGeom>
+          <a:noFill/>
+        </p:spPr>
+        <p:txBody>
+          <a:bodyPr wrap="square" lIns="0" tIns="0" rIns="0" bIns="0" anchor="ctr">
+            <a:spAutoFit/>
+          </a:bodyPr>
+          <a:lstStyle/>
+          <a:p>
+            <a:pPr algn="l"/>
+            <a:r>
+              <a:rPr sz="1000" b="0">
+                <a:solidFill>
+                  <a:srgbClr val="D0CFC8"/>
+                </a:solidFill>
+                <a:latin typeface="Calibri"/>
+              </a:rPr>
+              <a:t>21 automated checks · line-numbered test report</a:t>
+            </a:r>
           </a:p>
         </p:txBody>
       </p:sp>
@@ -2056,6 +2635,7 @@
         <a:solidFill>
           <a:srgbClr val="F7F6F3"/>
         </a:solidFill>
+        <a:effectLst/>
       </p:bgPr>
     </p:bg>
     <p:spTree>
@@ -2093,7 +2673,7 @@
           <a:bodyPr wrap="square" lIns="0" tIns="0" rIns="0" bIns="0" rtlCol="0" anchor="ctr"/>
           <a:lstStyle/>
           <a:p>
-            <a:pPr indent="0" marL="0">
+            <a:pPr marL="0" indent="0">
               <a:buNone/>
             </a:pPr>
             <a:r>
@@ -2132,7 +2712,7 @@
           <a:bodyPr wrap="square" lIns="0" tIns="0" rIns="0" bIns="0" rtlCol="0" anchor="ctr"/>
           <a:lstStyle/>
           <a:p>
-            <a:pPr indent="0" marL="0">
+            <a:pPr marL="0" indent="0">
               <a:buNone/>
             </a:pPr>
             <a:r>
@@ -2198,7 +2778,7 @@
           <a:bodyPr wrap="square" lIns="0" tIns="0" rIns="0" bIns="0" rtlCol="0" anchor="ctr"/>
           <a:lstStyle/>
           <a:p>
-            <a:pPr indent="0" marL="0">
+            <a:pPr marL="0" indent="0">
               <a:buNone/>
             </a:pPr>
             <a:r>
@@ -2264,7 +2844,7 @@
           <a:bodyPr wrap="square" lIns="0" tIns="0" rIns="0" bIns="0" rtlCol="0" anchor="ctr"/>
           <a:lstStyle/>
           <a:p>
-            <a:pPr indent="0" marL="0">
+            <a:pPr marL="0" indent="0">
               <a:buNone/>
             </a:pPr>
             <a:r>
@@ -2330,7 +2910,7 @@
           <a:bodyPr wrap="square" lIns="0" tIns="0" rIns="0" bIns="0" rtlCol="0" anchor="ctr"/>
           <a:lstStyle/>
           <a:p>
-            <a:pPr indent="0" marL="0">
+            <a:pPr marL="0" indent="0">
               <a:buNone/>
             </a:pPr>
             <a:r>
@@ -2396,7 +2976,7 @@
           <a:bodyPr wrap="square" lIns="0" tIns="0" rIns="0" bIns="0" rtlCol="0" anchor="ctr"/>
           <a:lstStyle/>
           <a:p>
-            <a:pPr indent="0" marL="0">
+            <a:pPr marL="0" indent="0">
               <a:buNone/>
             </a:pPr>
             <a:r>
@@ -2462,7 +3042,7 @@
           <a:bodyPr wrap="square" lIns="0" tIns="0" rIns="0" bIns="0" rtlCol="0" anchor="ctr"/>
           <a:lstStyle/>
           <a:p>
-            <a:pPr indent="0" marL="0">
+            <a:pPr marL="0" indent="0">
               <a:buNone/>
             </a:pPr>
             <a:r>
@@ -2501,7 +3081,7 @@
           <a:bodyPr wrap="square" lIns="0" tIns="0" rIns="0" bIns="0" rtlCol="0" anchor="ctr"/>
           <a:lstStyle/>
           <a:p>
-            <a:pPr indent="0" marL="0">
+            <a:pPr marL="0" indent="0">
               <a:buNone/>
             </a:pPr>
             <a:r>
@@ -2567,7 +3147,7 @@
           <a:bodyPr wrap="square" lIns="0" tIns="0" rIns="0" bIns="0" rtlCol="0" anchor="ctr"/>
           <a:lstStyle/>
           <a:p>
-            <a:pPr indent="0" marL="0">
+            <a:pPr marL="0" indent="0">
               <a:buNone/>
             </a:pPr>
             <a:r>
@@ -2633,7 +3213,7 @@
           <a:bodyPr wrap="square" lIns="0" tIns="0" rIns="0" bIns="0" rtlCol="0" anchor="ctr"/>
           <a:lstStyle/>
           <a:p>
-            <a:pPr indent="0" marL="0">
+            <a:pPr marL="0" indent="0">
               <a:buNone/>
             </a:pPr>
             <a:r>
@@ -2699,7 +3279,7 @@
           <a:bodyPr wrap="square" lIns="0" tIns="0" rIns="0" bIns="0" rtlCol="0" anchor="ctr"/>
           <a:lstStyle/>
           <a:p>
-            <a:pPr indent="0" marL="0">
+            <a:pPr marL="0" indent="0">
               <a:buNone/>
             </a:pPr>
             <a:r>
@@ -2765,7 +3345,7 @@
           <a:bodyPr wrap="square" lIns="0" tIns="0" rIns="0" bIns="0" rtlCol="0" anchor="ctr"/>
           <a:lstStyle/>
           <a:p>
-            <a:pPr indent="0" marL="0">
+            <a:pPr marL="0" indent="0">
               <a:buNone/>
             </a:pPr>
             <a:r>
@@ -2831,7 +3411,7 @@
           <a:bodyPr wrap="square" lIns="0" tIns="0" rIns="0" bIns="0" rtlCol="0" anchor="ctr"/>
           <a:lstStyle/>
           <a:p>
-            <a:pPr indent="0" marL="0">
+            <a:pPr marL="0" indent="0">
               <a:buNone/>
             </a:pPr>
             <a:r>
@@ -2897,7 +3477,7 @@
           <a:bodyPr wrap="square" lIns="0" tIns="0" rIns="0" bIns="0" rtlCol="0" anchor="ctr"/>
           <a:lstStyle/>
           <a:p>
-            <a:pPr indent="0" marL="0">
+            <a:pPr marL="0" indent="0">
               <a:buNone/>
             </a:pPr>
             <a:r>
@@ -2963,7 +3543,7 @@
           <a:bodyPr wrap="square" lIns="0" tIns="0" rIns="0" bIns="0" rtlCol="0" anchor="ctr"/>
           <a:lstStyle/>
           <a:p>
-            <a:pPr indent="0" marL="0">
+            <a:pPr marL="0" indent="0">
               <a:buNone/>
             </a:pPr>
             <a:r>
@@ -3029,7 +3609,7 @@
           <a:bodyPr wrap="square" lIns="0" tIns="0" rIns="0" bIns="0" rtlCol="0" anchor="ctr"/>
           <a:lstStyle/>
           <a:p>
-            <a:pPr indent="0" marL="0">
+            <a:pPr marL="0" indent="0">
               <a:buNone/>
             </a:pPr>
             <a:r>
@@ -3063,6 +3643,7 @@
         <a:solidFill>
           <a:srgbClr val="FFFFFF"/>
         </a:solidFill>
+        <a:effectLst/>
       </p:bgPr>
     </p:bg>
     <p:spTree>
@@ -3100,7 +3681,7 @@
           <a:bodyPr wrap="square" lIns="0" tIns="0" rIns="0" bIns="0" rtlCol="0" anchor="ctr"/>
           <a:lstStyle/>
           <a:p>
-            <a:pPr indent="0" marL="0">
+            <a:pPr marL="0" indent="0">
               <a:buNone/>
             </a:pPr>
             <a:r>
@@ -3144,7 +3725,7 @@
             <a:prstDash val="solid"/>
           </a:ln>
           <a:effectLst>
-            <a:outerShdw sx="100000" sy="100000" kx="0" ky="0" algn="bl" rotWithShape="0" blurRad="101600" dist="38100" dir="2700000">
+            <a:outerShdw blurRad="101600" dist="38100" dir="2700000" algn="bl" rotWithShape="0">
               <a:srgbClr val="000000">
                 <a:alpha val="10000"/>
               </a:srgbClr>
@@ -3173,7 +3754,7 @@
           <a:bodyPr wrap="square" lIns="0" tIns="0" rIns="0" bIns="0" rtlCol="0" anchor="ctr"/>
           <a:lstStyle/>
           <a:p>
-            <a:pPr algn="ctr" indent="0" marL="0">
+            <a:pPr marL="0" indent="0" algn="ctr">
               <a:buNone/>
             </a:pPr>
             <a:r>
@@ -3212,7 +3793,7 @@
           <a:bodyPr wrap="square" lIns="0" tIns="0" rIns="0" bIns="0" rtlCol="0" anchor="ctr"/>
           <a:lstStyle/>
           <a:p>
-            <a:pPr indent="0" marL="0">
+            <a:pPr marL="0" indent="0">
               <a:buNone/>
             </a:pPr>
             <a:r>
@@ -3251,7 +3832,7 @@
           <a:bodyPr wrap="square" lIns="0" tIns="0" rIns="0" bIns="0" rtlCol="0" anchor="ctr"/>
           <a:lstStyle/>
           <a:p>
-            <a:pPr indent="0" marL="0">
+            <a:pPr marL="0" indent="0">
               <a:buNone/>
             </a:pPr>
             <a:r>
@@ -3290,7 +3871,7 @@
           <a:bodyPr wrap="square" lIns="0" tIns="0" rIns="0" bIns="0" rtlCol="0" anchor="ctr"/>
           <a:lstStyle/>
           <a:p>
-            <a:pPr indent="0" marL="0">
+            <a:pPr marL="0" indent="0">
               <a:buNone/>
             </a:pPr>
             <a:r>
@@ -3329,7 +3910,7 @@
           <a:bodyPr wrap="square" lIns="0" tIns="0" rIns="0" bIns="0" rtlCol="0" anchor="ctr"/>
           <a:lstStyle/>
           <a:p>
-            <a:pPr algn="ctr" indent="0" marL="0">
+            <a:pPr marL="0" indent="0" algn="ctr">
               <a:buNone/>
             </a:pPr>
             <a:r>
@@ -3373,7 +3954,7 @@
             <a:prstDash val="solid"/>
           </a:ln>
           <a:effectLst>
-            <a:outerShdw sx="100000" sy="100000" kx="0" ky="0" algn="bl" rotWithShape="0" blurRad="101600" dist="38100" dir="2700000">
+            <a:outerShdw blurRad="101600" dist="38100" dir="2700000" algn="bl" rotWithShape="0">
               <a:srgbClr val="000000">
                 <a:alpha val="10000"/>
               </a:srgbClr>
@@ -3402,7 +3983,7 @@
           <a:bodyPr wrap="square" lIns="0" tIns="0" rIns="0" bIns="0" rtlCol="0" anchor="ctr"/>
           <a:lstStyle/>
           <a:p>
-            <a:pPr algn="ctr" indent="0" marL="0">
+            <a:pPr marL="0" indent="0" algn="ctr">
               <a:buNone/>
             </a:pPr>
             <a:r>
@@ -3441,7 +4022,7 @@
           <a:bodyPr wrap="square" lIns="0" tIns="0" rIns="0" bIns="0" rtlCol="0" anchor="ctr"/>
           <a:lstStyle/>
           <a:p>
-            <a:pPr indent="0" marL="0">
+            <a:pPr marL="0" indent="0">
               <a:buNone/>
             </a:pPr>
             <a:r>
@@ -3480,7 +4061,7 @@
           <a:bodyPr wrap="square" lIns="0" tIns="0" rIns="0" bIns="0" rtlCol="0" anchor="ctr"/>
           <a:lstStyle/>
           <a:p>
-            <a:pPr indent="0" marL="0">
+            <a:pPr marL="0" indent="0">
               <a:buNone/>
             </a:pPr>
             <a:r>
@@ -3519,7 +4100,7 @@
           <a:bodyPr wrap="square" lIns="0" tIns="0" rIns="0" bIns="0" rtlCol="0" anchor="ctr"/>
           <a:lstStyle/>
           <a:p>
-            <a:pPr indent="0" marL="0">
+            <a:pPr marL="0" indent="0">
               <a:buNone/>
             </a:pPr>
             <a:r>
@@ -3558,7 +4139,7 @@
           <a:bodyPr wrap="square" lIns="0" tIns="0" rIns="0" bIns="0" rtlCol="0" anchor="ctr"/>
           <a:lstStyle/>
           <a:p>
-            <a:pPr algn="ctr" indent="0" marL="0">
+            <a:pPr marL="0" indent="0" algn="ctr">
               <a:buNone/>
             </a:pPr>
             <a:r>
@@ -3602,7 +4183,7 @@
             <a:prstDash val="solid"/>
           </a:ln>
           <a:effectLst>
-            <a:outerShdw sx="100000" sy="100000" kx="0" ky="0" algn="bl" rotWithShape="0" blurRad="101600" dist="38100" dir="2700000">
+            <a:outerShdw blurRad="101600" dist="38100" dir="2700000" algn="bl" rotWithShape="0">
               <a:srgbClr val="000000">
                 <a:alpha val="10000"/>
               </a:srgbClr>
@@ -3631,7 +4212,7 @@
           <a:bodyPr wrap="square" lIns="0" tIns="0" rIns="0" bIns="0" rtlCol="0" anchor="ctr"/>
           <a:lstStyle/>
           <a:p>
-            <a:pPr algn="ctr" indent="0" marL="0">
+            <a:pPr marL="0" indent="0" algn="ctr">
               <a:buNone/>
             </a:pPr>
             <a:r>
@@ -3670,7 +4251,7 @@
           <a:bodyPr wrap="square" lIns="0" tIns="0" rIns="0" bIns="0" rtlCol="0" anchor="ctr"/>
           <a:lstStyle/>
           <a:p>
-            <a:pPr indent="0" marL="0">
+            <a:pPr marL="0" indent="0">
               <a:buNone/>
             </a:pPr>
             <a:r>
@@ -3709,7 +4290,7 @@
           <a:bodyPr wrap="square" lIns="0" tIns="0" rIns="0" bIns="0" rtlCol="0" anchor="ctr"/>
           <a:lstStyle/>
           <a:p>
-            <a:pPr indent="0" marL="0">
+            <a:pPr marL="0" indent="0">
               <a:buNone/>
             </a:pPr>
             <a:r>
@@ -3748,7 +4329,7 @@
           <a:bodyPr wrap="square" lIns="0" tIns="0" rIns="0" bIns="0" rtlCol="0" anchor="ctr"/>
           <a:lstStyle/>
           <a:p>
-            <a:pPr indent="0" marL="0">
+            <a:pPr marL="0" indent="0">
               <a:buNone/>
             </a:pPr>
             <a:r>
@@ -3787,7 +4368,7 @@
           <a:bodyPr wrap="square" lIns="0" tIns="0" rIns="0" bIns="0" rtlCol="0" anchor="ctr"/>
           <a:lstStyle/>
           <a:p>
-            <a:pPr algn="ctr" indent="0" marL="0">
+            <a:pPr marL="0" indent="0" algn="ctr">
               <a:buNone/>
             </a:pPr>
             <a:r>
@@ -3831,7 +4412,7 @@
             <a:prstDash val="solid"/>
           </a:ln>
           <a:effectLst>
-            <a:outerShdw sx="100000" sy="100000" kx="0" ky="0" algn="bl" rotWithShape="0" blurRad="101600" dist="38100" dir="2700000">
+            <a:outerShdw blurRad="101600" dist="38100" dir="2700000" algn="bl" rotWithShape="0">
               <a:srgbClr val="000000">
                 <a:alpha val="10000"/>
               </a:srgbClr>
@@ -3860,7 +4441,7 @@
           <a:bodyPr wrap="square" lIns="0" tIns="0" rIns="0" bIns="0" rtlCol="0" anchor="ctr"/>
           <a:lstStyle/>
           <a:p>
-            <a:pPr algn="ctr" indent="0" marL="0">
+            <a:pPr marL="0" indent="0" algn="ctr">
               <a:buNone/>
             </a:pPr>
             <a:r>
@@ -3899,7 +4480,7 @@
           <a:bodyPr wrap="square" lIns="0" tIns="0" rIns="0" bIns="0" rtlCol="0" anchor="ctr"/>
           <a:lstStyle/>
           <a:p>
-            <a:pPr indent="0" marL="0">
+            <a:pPr marL="0" indent="0">
               <a:buNone/>
             </a:pPr>
             <a:r>
@@ -3938,7 +4519,7 @@
           <a:bodyPr wrap="square" lIns="0" tIns="0" rIns="0" bIns="0" rtlCol="0" anchor="ctr"/>
           <a:lstStyle/>
           <a:p>
-            <a:pPr indent="0" marL="0">
+            <a:pPr marL="0" indent="0">
               <a:buNone/>
             </a:pPr>
             <a:r>
@@ -3977,7 +4558,7 @@
           <a:bodyPr wrap="square" lIns="0" tIns="0" rIns="0" bIns="0" rtlCol="0" anchor="ctr"/>
           <a:lstStyle/>
           <a:p>
-            <a:pPr indent="0" marL="0">
+            <a:pPr marL="0" indent="0">
               <a:buNone/>
             </a:pPr>
             <a:r>
@@ -4043,7 +4624,7 @@
           <a:bodyPr wrap="square" lIns="0" tIns="0" rIns="0" bIns="0" rtlCol="0" anchor="ctr"/>
           <a:lstStyle/>
           <a:p>
-            <a:pPr algn="ctr" indent="0" marL="0">
+            <a:pPr marL="0" indent="0" algn="ctr">
               <a:buNone/>
             </a:pPr>
             <a:r>
@@ -4082,7 +4663,7 @@
           <a:bodyPr wrap="square" lIns="0" tIns="0" rIns="0" bIns="0" rtlCol="0" anchor="ctr"/>
           <a:lstStyle/>
           <a:p>
-            <a:pPr algn="ctr" indent="0" marL="0">
+            <a:pPr marL="0" indent="0" algn="ctr">
               <a:buNone/>
             </a:pPr>
             <a:r>
@@ -4148,7 +4729,7 @@
           <a:bodyPr wrap="square" lIns="0" tIns="0" rIns="0" bIns="0" rtlCol="0" anchor="ctr"/>
           <a:lstStyle/>
           <a:p>
-            <a:pPr algn="ctr" indent="0" marL="0">
+            <a:pPr marL="0" indent="0" algn="ctr">
               <a:buNone/>
             </a:pPr>
             <a:r>
@@ -4187,7 +4768,7 @@
           <a:bodyPr wrap="square" lIns="0" tIns="0" rIns="0" bIns="0" rtlCol="0" anchor="ctr"/>
           <a:lstStyle/>
           <a:p>
-            <a:pPr algn="ctr" indent="0" marL="0">
+            <a:pPr marL="0" indent="0" algn="ctr">
               <a:buNone/>
             </a:pPr>
             <a:r>
@@ -4253,7 +4834,7 @@
           <a:bodyPr wrap="square" lIns="0" tIns="0" rIns="0" bIns="0" rtlCol="0" anchor="ctr"/>
           <a:lstStyle/>
           <a:p>
-            <a:pPr algn="ctr" indent="0" marL="0">
+            <a:pPr marL="0" indent="0" algn="ctr">
               <a:buNone/>
             </a:pPr>
             <a:r>
@@ -4292,7 +4873,7 @@
           <a:bodyPr wrap="square" lIns="0" tIns="0" rIns="0" bIns="0" rtlCol="0" anchor="ctr"/>
           <a:lstStyle/>
           <a:p>
-            <a:pPr algn="ctr" indent="0" marL="0">
+            <a:pPr marL="0" indent="0" algn="ctr">
               <a:buNone/>
             </a:pPr>
             <a:r>
@@ -4331,7 +4912,7 @@
           <a:bodyPr wrap="square" lIns="0" tIns="0" rIns="0" bIns="0" rtlCol="0" anchor="ctr"/>
           <a:lstStyle/>
           <a:p>
-            <a:pPr algn="ctr" indent="0" marL="0">
+            <a:pPr marL="0" indent="0" algn="ctr">
               <a:buNone/>
             </a:pPr>
             <a:r>
@@ -4365,6 +4946,7 @@
         <a:solidFill>
           <a:srgbClr val="F7F6F3"/>
         </a:solidFill>
+        <a:effectLst/>
       </p:bgPr>
     </p:bg>
     <p:spTree>
@@ -4402,7 +4984,7 @@
           <a:bodyPr wrap="square" lIns="0" tIns="0" rIns="0" bIns="0" rtlCol="0" anchor="ctr"/>
           <a:lstStyle/>
           <a:p>
-            <a:pPr indent="0" marL="0">
+            <a:pPr marL="0" indent="0">
               <a:buNone/>
             </a:pPr>
             <a:r>
@@ -4441,7 +5023,7 @@
           <a:bodyPr wrap="square" lIns="0" tIns="0" rIns="0" bIns="0" rtlCol="0" anchor="ctr"/>
           <a:lstStyle/>
           <a:p>
-            <a:pPr indent="0" marL="0">
+            <a:pPr marL="0" indent="0">
               <a:buNone/>
             </a:pPr>
             <a:r>
@@ -4485,7 +5067,7 @@
             <a:prstDash val="solid"/>
           </a:ln>
           <a:effectLst>
-            <a:outerShdw sx="100000" sy="100000" kx="0" ky="0" algn="bl" rotWithShape="0" blurRad="101600" dist="38100" dir="2700000">
+            <a:outerShdw blurRad="101600" dist="38100" dir="2700000" algn="bl" rotWithShape="0">
               <a:srgbClr val="000000">
                 <a:alpha val="10000"/>
               </a:srgbClr>
@@ -4541,7 +5123,7 @@
           <a:bodyPr wrap="square" lIns="0" tIns="0" rIns="0" bIns="0" rtlCol="0" anchor="ctr"/>
           <a:lstStyle/>
           <a:p>
-            <a:pPr algn="ctr" indent="0" marL="0">
+            <a:pPr marL="0" indent="0" algn="ctr">
               <a:buNone/>
             </a:pPr>
             <a:r>
@@ -4580,7 +5162,7 @@
           <a:bodyPr wrap="square" lIns="0" tIns="0" rIns="0" bIns="0" rtlCol="0" anchor="ctr"/>
           <a:lstStyle/>
           <a:p>
-            <a:pPr indent="0" marL="0">
+            <a:pPr marL="0" indent="0">
               <a:buNone/>
             </a:pPr>
             <a:r>
@@ -4619,7 +5201,7 @@
           <a:bodyPr wrap="square" lIns="0" tIns="0" rIns="0" bIns="0" rtlCol="0" anchor="ctr"/>
           <a:lstStyle/>
           <a:p>
-            <a:pPr indent="0" marL="0">
+            <a:pPr marL="0" indent="0">
               <a:buNone/>
             </a:pPr>
             <a:r>
@@ -4663,7 +5245,7 @@
             <a:prstDash val="solid"/>
           </a:ln>
           <a:effectLst>
-            <a:outerShdw sx="100000" sy="100000" kx="0" ky="0" algn="bl" rotWithShape="0" blurRad="101600" dist="38100" dir="2700000">
+            <a:outerShdw blurRad="101600" dist="38100" dir="2700000" algn="bl" rotWithShape="0">
               <a:srgbClr val="000000">
                 <a:alpha val="10000"/>
               </a:srgbClr>
@@ -4719,7 +5301,7 @@
           <a:bodyPr wrap="square" lIns="0" tIns="0" rIns="0" bIns="0" rtlCol="0" anchor="ctr"/>
           <a:lstStyle/>
           <a:p>
-            <a:pPr algn="ctr" indent="0" marL="0">
+            <a:pPr marL="0" indent="0" algn="ctr">
               <a:buNone/>
             </a:pPr>
             <a:r>
@@ -4758,7 +5340,7 @@
           <a:bodyPr wrap="square" lIns="0" tIns="0" rIns="0" bIns="0" rtlCol="0" anchor="ctr"/>
           <a:lstStyle/>
           <a:p>
-            <a:pPr indent="0" marL="0">
+            <a:pPr marL="0" indent="0">
               <a:buNone/>
             </a:pPr>
             <a:r>
@@ -4797,7 +5379,7 @@
           <a:bodyPr wrap="square" lIns="0" tIns="0" rIns="0" bIns="0" rtlCol="0" anchor="ctr"/>
           <a:lstStyle/>
           <a:p>
-            <a:pPr indent="0" marL="0">
+            <a:pPr marL="0" indent="0">
               <a:buNone/>
             </a:pPr>
             <a:r>
@@ -4841,7 +5423,7 @@
             <a:prstDash val="solid"/>
           </a:ln>
           <a:effectLst>
-            <a:outerShdw sx="100000" sy="100000" kx="0" ky="0" algn="bl" rotWithShape="0" blurRad="101600" dist="38100" dir="2700000">
+            <a:outerShdw blurRad="101600" dist="38100" dir="2700000" algn="bl" rotWithShape="0">
               <a:srgbClr val="000000">
                 <a:alpha val="10000"/>
               </a:srgbClr>
@@ -4897,7 +5479,7 @@
           <a:bodyPr wrap="square" lIns="0" tIns="0" rIns="0" bIns="0" rtlCol="0" anchor="ctr"/>
           <a:lstStyle/>
           <a:p>
-            <a:pPr algn="ctr" indent="0" marL="0">
+            <a:pPr marL="0" indent="0" algn="ctr">
               <a:buNone/>
             </a:pPr>
             <a:r>
@@ -4936,7 +5518,7 @@
           <a:bodyPr wrap="square" lIns="0" tIns="0" rIns="0" bIns="0" rtlCol="0" anchor="ctr"/>
           <a:lstStyle/>
           <a:p>
-            <a:pPr indent="0" marL="0">
+            <a:pPr marL="0" indent="0">
               <a:buNone/>
             </a:pPr>
             <a:r>
@@ -4975,7 +5557,7 @@
           <a:bodyPr wrap="square" lIns="0" tIns="0" rIns="0" bIns="0" rtlCol="0" anchor="ctr"/>
           <a:lstStyle/>
           <a:p>
-            <a:pPr indent="0" marL="0">
+            <a:pPr marL="0" indent="0">
               <a:buNone/>
             </a:pPr>
             <a:r>
@@ -5019,7 +5601,7 @@
             <a:prstDash val="solid"/>
           </a:ln>
           <a:effectLst>
-            <a:outerShdw sx="100000" sy="100000" kx="0" ky="0" algn="bl" rotWithShape="0" blurRad="101600" dist="38100" dir="2700000">
+            <a:outerShdw blurRad="101600" dist="38100" dir="2700000" algn="bl" rotWithShape="0">
               <a:srgbClr val="000000">
                 <a:alpha val="10000"/>
               </a:srgbClr>
@@ -5075,7 +5657,7 @@
           <a:bodyPr wrap="square" lIns="0" tIns="0" rIns="0" bIns="0" rtlCol="0" anchor="ctr"/>
           <a:lstStyle/>
           <a:p>
-            <a:pPr algn="ctr" indent="0" marL="0">
+            <a:pPr marL="0" indent="0" algn="ctr">
               <a:buNone/>
             </a:pPr>
             <a:r>
@@ -5114,7 +5696,7 @@
           <a:bodyPr wrap="square" lIns="0" tIns="0" rIns="0" bIns="0" rtlCol="0" anchor="ctr"/>
           <a:lstStyle/>
           <a:p>
-            <a:pPr indent="0" marL="0">
+            <a:pPr marL="0" indent="0">
               <a:buNone/>
             </a:pPr>
             <a:r>
@@ -5153,7 +5735,7 @@
           <a:bodyPr wrap="square" lIns="0" tIns="0" rIns="0" bIns="0" rtlCol="0" anchor="ctr"/>
           <a:lstStyle/>
           <a:p>
-            <a:pPr indent="0" marL="0">
+            <a:pPr marL="0" indent="0">
               <a:buNone/>
             </a:pPr>
             <a:r>
@@ -5197,7 +5779,7 @@
             <a:prstDash val="solid"/>
           </a:ln>
           <a:effectLst>
-            <a:outerShdw sx="100000" sy="100000" kx="0" ky="0" algn="bl" rotWithShape="0" blurRad="101600" dist="38100" dir="2700000">
+            <a:outerShdw blurRad="101600" dist="38100" dir="2700000" algn="bl" rotWithShape="0">
               <a:srgbClr val="000000">
                 <a:alpha val="10000"/>
               </a:srgbClr>
@@ -5253,7 +5835,7 @@
           <a:bodyPr wrap="square" lIns="0" tIns="0" rIns="0" bIns="0" rtlCol="0" anchor="ctr"/>
           <a:lstStyle/>
           <a:p>
-            <a:pPr algn="ctr" indent="0" marL="0">
+            <a:pPr marL="0" indent="0" algn="ctr">
               <a:buNone/>
             </a:pPr>
             <a:r>
@@ -5292,7 +5874,7 @@
           <a:bodyPr wrap="square" lIns="0" tIns="0" rIns="0" bIns="0" rtlCol="0" anchor="ctr"/>
           <a:lstStyle/>
           <a:p>
-            <a:pPr indent="0" marL="0">
+            <a:pPr marL="0" indent="0">
               <a:buNone/>
             </a:pPr>
             <a:r>
@@ -5331,7 +5913,7 @@
           <a:bodyPr wrap="square" lIns="0" tIns="0" rIns="0" bIns="0" rtlCol="0" anchor="ctr"/>
           <a:lstStyle/>
           <a:p>
-            <a:pPr indent="0" marL="0">
+            <a:pPr marL="0" indent="0">
               <a:buNone/>
             </a:pPr>
             <a:r>
@@ -5375,7 +5957,7 @@
             <a:prstDash val="solid"/>
           </a:ln>
           <a:effectLst>
-            <a:outerShdw sx="100000" sy="100000" kx="0" ky="0" algn="bl" rotWithShape="0" blurRad="101600" dist="38100" dir="2700000">
+            <a:outerShdw blurRad="101600" dist="38100" dir="2700000" algn="bl" rotWithShape="0">
               <a:srgbClr val="000000">
                 <a:alpha val="10000"/>
               </a:srgbClr>
@@ -5431,7 +6013,7 @@
           <a:bodyPr wrap="square" lIns="0" tIns="0" rIns="0" bIns="0" rtlCol="0" anchor="ctr"/>
           <a:lstStyle/>
           <a:p>
-            <a:pPr algn="ctr" indent="0" marL="0">
+            <a:pPr marL="0" indent="0" algn="ctr">
               <a:buNone/>
             </a:pPr>
             <a:r>
@@ -5470,7 +6052,7 @@
           <a:bodyPr wrap="square" lIns="0" tIns="0" rIns="0" bIns="0" rtlCol="0" anchor="ctr"/>
           <a:lstStyle/>
           <a:p>
-            <a:pPr indent="0" marL="0">
+            <a:pPr marL="0" indent="0">
               <a:buNone/>
             </a:pPr>
             <a:r>
@@ -5509,7 +6091,7 @@
           <a:bodyPr wrap="square" lIns="0" tIns="0" rIns="0" bIns="0" rtlCol="0" anchor="ctr"/>
           <a:lstStyle/>
           <a:p>
-            <a:pPr indent="0" marL="0">
+            <a:pPr marL="0" indent="0">
               <a:buNone/>
             </a:pPr>
             <a:r>
@@ -5553,7 +6135,7 @@
             <a:prstDash val="solid"/>
           </a:ln>
           <a:effectLst>
-            <a:outerShdw sx="100000" sy="100000" kx="0" ky="0" algn="bl" rotWithShape="0" blurRad="101600" dist="38100" dir="2700000">
+            <a:outerShdw blurRad="101600" dist="38100" dir="2700000" algn="bl" rotWithShape="0">
               <a:srgbClr val="000000">
                 <a:alpha val="10000"/>
               </a:srgbClr>
@@ -5609,7 +6191,7 @@
           <a:bodyPr wrap="square" lIns="0" tIns="0" rIns="0" bIns="0" rtlCol="0" anchor="ctr"/>
           <a:lstStyle/>
           <a:p>
-            <a:pPr algn="ctr" indent="0" marL="0">
+            <a:pPr marL="0" indent="0" algn="ctr">
               <a:buNone/>
             </a:pPr>
             <a:r>
@@ -5648,7 +6230,7 @@
           <a:bodyPr wrap="square" lIns="0" tIns="0" rIns="0" bIns="0" rtlCol="0" anchor="ctr"/>
           <a:lstStyle/>
           <a:p>
-            <a:pPr indent="0" marL="0">
+            <a:pPr marL="0" indent="0">
               <a:buNone/>
             </a:pPr>
             <a:r>
@@ -5687,7 +6269,7 @@
           <a:bodyPr wrap="square" lIns="0" tIns="0" rIns="0" bIns="0" rtlCol="0" anchor="ctr"/>
           <a:lstStyle/>
           <a:p>
-            <a:pPr indent="0" marL="0">
+            <a:pPr marL="0" indent="0">
               <a:buNone/>
             </a:pPr>
             <a:r>
@@ -5731,7 +6313,7 @@
             <a:prstDash val="solid"/>
           </a:ln>
           <a:effectLst>
-            <a:outerShdw sx="100000" sy="100000" kx="0" ky="0" algn="bl" rotWithShape="0" blurRad="101600" dist="38100" dir="2700000">
+            <a:outerShdw blurRad="101600" dist="38100" dir="2700000" algn="bl" rotWithShape="0">
               <a:srgbClr val="000000">
                 <a:alpha val="10000"/>
               </a:srgbClr>
@@ -5787,7 +6369,7 @@
           <a:bodyPr wrap="square" lIns="0" tIns="0" rIns="0" bIns="0" rtlCol="0" anchor="ctr"/>
           <a:lstStyle/>
           <a:p>
-            <a:pPr algn="ctr" indent="0" marL="0">
+            <a:pPr marL="0" indent="0" algn="ctr">
               <a:buNone/>
             </a:pPr>
             <a:r>
@@ -5826,7 +6408,7 @@
           <a:bodyPr wrap="square" lIns="0" tIns="0" rIns="0" bIns="0" rtlCol="0" anchor="ctr"/>
           <a:lstStyle/>
           <a:p>
-            <a:pPr indent="0" marL="0">
+            <a:pPr marL="0" indent="0">
               <a:buNone/>
             </a:pPr>
             <a:r>
@@ -5865,7 +6447,7 @@
           <a:bodyPr wrap="square" lIns="0" tIns="0" rIns="0" bIns="0" rtlCol="0" anchor="ctr"/>
           <a:lstStyle/>
           <a:p>
-            <a:pPr indent="0" marL="0">
+            <a:pPr marL="0" indent="0">
               <a:buNone/>
             </a:pPr>
             <a:r>
@@ -5909,7 +6491,7 @@
             <a:prstDash val="solid"/>
           </a:ln>
           <a:effectLst>
-            <a:outerShdw sx="100000" sy="100000" kx="0" ky="0" algn="bl" rotWithShape="0" blurRad="101600" dist="38100" dir="2700000">
+            <a:outerShdw blurRad="101600" dist="38100" dir="2700000" algn="bl" rotWithShape="0">
               <a:srgbClr val="000000">
                 <a:alpha val="10000"/>
               </a:srgbClr>
@@ -5965,7 +6547,7 @@
           <a:bodyPr wrap="square" lIns="0" tIns="0" rIns="0" bIns="0" rtlCol="0" anchor="ctr"/>
           <a:lstStyle/>
           <a:p>
-            <a:pPr algn="ctr" indent="0" marL="0">
+            <a:pPr marL="0" indent="0" algn="ctr">
               <a:buNone/>
             </a:pPr>
             <a:r>
@@ -6004,7 +6586,7 @@
           <a:bodyPr wrap="square" lIns="0" tIns="0" rIns="0" bIns="0" rtlCol="0" anchor="ctr"/>
           <a:lstStyle/>
           <a:p>
-            <a:pPr indent="0" marL="0">
+            <a:pPr marL="0" indent="0">
               <a:buNone/>
             </a:pPr>
             <a:r>
@@ -6043,7 +6625,7 @@
           <a:bodyPr wrap="square" lIns="0" tIns="0" rIns="0" bIns="0" rtlCol="0" anchor="ctr"/>
           <a:lstStyle/>
           <a:p>
-            <a:pPr indent="0" marL="0">
+            <a:pPr marL="0" indent="0">
               <a:buNone/>
             </a:pPr>
             <a:r>
@@ -6087,7 +6669,7 @@
             <a:prstDash val="solid"/>
           </a:ln>
           <a:effectLst>
-            <a:outerShdw sx="100000" sy="100000" kx="0" ky="0" algn="bl" rotWithShape="0" blurRad="101600" dist="38100" dir="2700000">
+            <a:outerShdw blurRad="101600" dist="38100" dir="2700000" algn="bl" rotWithShape="0">
               <a:srgbClr val="000000">
                 <a:alpha val="10000"/>
               </a:srgbClr>
@@ -6143,7 +6725,7 @@
           <a:bodyPr wrap="square" lIns="0" tIns="0" rIns="0" bIns="0" rtlCol="0" anchor="ctr"/>
           <a:lstStyle/>
           <a:p>
-            <a:pPr algn="ctr" indent="0" marL="0">
+            <a:pPr marL="0" indent="0" algn="ctr">
               <a:buNone/>
             </a:pPr>
             <a:r>
@@ -6182,7 +6764,7 @@
           <a:bodyPr wrap="square" lIns="0" tIns="0" rIns="0" bIns="0" rtlCol="0" anchor="ctr"/>
           <a:lstStyle/>
           <a:p>
-            <a:pPr indent="0" marL="0">
+            <a:pPr marL="0" indent="0">
               <a:buNone/>
             </a:pPr>
             <a:r>
@@ -6221,7 +6803,7 @@
           <a:bodyPr wrap="square" lIns="0" tIns="0" rIns="0" bIns="0" rtlCol="0" anchor="ctr"/>
           <a:lstStyle/>
           <a:p>
-            <a:pPr indent="0" marL="0">
+            <a:pPr marL="0" indent="0">
               <a:buNone/>
             </a:pPr>
             <a:r>
@@ -6265,7 +6847,7 @@
             <a:prstDash val="solid"/>
           </a:ln>
           <a:effectLst>
-            <a:outerShdw sx="100000" sy="100000" kx="0" ky="0" algn="bl" rotWithShape="0" blurRad="101600" dist="38100" dir="2700000">
+            <a:outerShdw blurRad="101600" dist="38100" dir="2700000" algn="bl" rotWithShape="0">
               <a:srgbClr val="000000">
                 <a:alpha val="10000"/>
               </a:srgbClr>
@@ -6321,7 +6903,7 @@
           <a:bodyPr wrap="square" lIns="0" tIns="0" rIns="0" bIns="0" rtlCol="0" anchor="ctr"/>
           <a:lstStyle/>
           <a:p>
-            <a:pPr algn="ctr" indent="0" marL="0">
+            <a:pPr marL="0" indent="0" algn="ctr">
               <a:buNone/>
             </a:pPr>
             <a:r>
@@ -6360,7 +6942,7 @@
           <a:bodyPr wrap="square" lIns="0" tIns="0" rIns="0" bIns="0" rtlCol="0" anchor="ctr"/>
           <a:lstStyle/>
           <a:p>
-            <a:pPr indent="0" marL="0">
+            <a:pPr marL="0" indent="0">
               <a:buNone/>
             </a:pPr>
             <a:r>
@@ -6399,7 +6981,7 @@
           <a:bodyPr wrap="square" lIns="0" tIns="0" rIns="0" bIns="0" rtlCol="0" anchor="ctr"/>
           <a:lstStyle/>
           <a:p>
-            <a:pPr indent="0" marL="0">
+            <a:pPr marL="0" indent="0">
               <a:buNone/>
             </a:pPr>
             <a:r>
@@ -6443,7 +7025,7 @@
             <a:prstDash val="solid"/>
           </a:ln>
           <a:effectLst>
-            <a:outerShdw sx="100000" sy="100000" kx="0" ky="0" algn="bl" rotWithShape="0" blurRad="101600" dist="38100" dir="2700000">
+            <a:outerShdw blurRad="101600" dist="38100" dir="2700000" algn="bl" rotWithShape="0">
               <a:srgbClr val="000000">
                 <a:alpha val="10000"/>
               </a:srgbClr>
@@ -6499,7 +7081,7 @@
           <a:bodyPr wrap="square" lIns="0" tIns="0" rIns="0" bIns="0" rtlCol="0" anchor="ctr"/>
           <a:lstStyle/>
           <a:p>
-            <a:pPr algn="ctr" indent="0" marL="0">
+            <a:pPr marL="0" indent="0" algn="ctr">
               <a:buNone/>
             </a:pPr>
             <a:r>
@@ -6538,7 +7120,7 @@
           <a:bodyPr wrap="square" lIns="0" tIns="0" rIns="0" bIns="0" rtlCol="0" anchor="ctr"/>
           <a:lstStyle/>
           <a:p>
-            <a:pPr indent="0" marL="0">
+            <a:pPr marL="0" indent="0">
               <a:buNone/>
             </a:pPr>
             <a:r>
@@ -6577,7 +7159,7 @@
           <a:bodyPr wrap="square" lIns="0" tIns="0" rIns="0" bIns="0" rtlCol="0" anchor="ctr"/>
           <a:lstStyle/>
           <a:p>
-            <a:pPr indent="0" marL="0">
+            <a:pPr marL="0" indent="0">
               <a:buNone/>
             </a:pPr>
             <a:r>
@@ -6643,7 +7225,7 @@
           <a:bodyPr wrap="square" lIns="0" tIns="0" rIns="0" bIns="0" rtlCol="0" anchor="ctr"/>
           <a:lstStyle/>
           <a:p>
-            <a:pPr indent="0" marL="0">
+            <a:pPr marL="0" indent="0">
               <a:buNone/>
             </a:pPr>
             <a:r>
@@ -6677,6 +7259,7 @@
         <a:solidFill>
           <a:srgbClr val="FFFFFF"/>
         </a:solidFill>
+        <a:effectLst/>
       </p:bgPr>
     </p:bg>
     <p:spTree>
@@ -6714,7 +7297,7 @@
           <a:bodyPr wrap="square" lIns="0" tIns="0" rIns="0" bIns="0" rtlCol="0" anchor="ctr"/>
           <a:lstStyle/>
           <a:p>
-            <a:pPr indent="0" marL="0">
+            <a:pPr marL="0" indent="0">
               <a:buNone/>
             </a:pPr>
             <a:r>
@@ -6753,7 +7336,7 @@
           <a:bodyPr wrap="square" lIns="0" tIns="0" rIns="0" bIns="0" rtlCol="0" anchor="ctr"/>
           <a:lstStyle/>
           <a:p>
-            <a:pPr indent="0" marL="0">
+            <a:pPr marL="0" indent="0">
               <a:buNone/>
             </a:pPr>
             <a:r>
@@ -6819,7 +7402,7 @@
           <a:bodyPr wrap="square" lIns="0" tIns="0" rIns="0" bIns="0" rtlCol="0" anchor="ctr"/>
           <a:lstStyle/>
           <a:p>
-            <a:pPr indent="0" marL="0">
+            <a:pPr marL="0" indent="0">
               <a:buNone/>
             </a:pPr>
             <a:r>
@@ -6858,7 +7441,7 @@
           <a:bodyPr wrap="square" lIns="0" tIns="0" rIns="0" bIns="0" rtlCol="0" anchor="ctr"/>
           <a:lstStyle/>
           <a:p>
-            <a:pPr indent="0" marL="0">
+            <a:pPr marL="0" indent="0">
               <a:buNone/>
             </a:pPr>
             <a:r>
@@ -6924,7 +7507,7 @@
           <a:bodyPr wrap="square" lIns="0" tIns="0" rIns="0" bIns="0" rtlCol="0" anchor="ctr"/>
           <a:lstStyle/>
           <a:p>
-            <a:pPr indent="0" marL="0">
+            <a:pPr marL="0" indent="0">
               <a:buNone/>
             </a:pPr>
             <a:r>
@@ -6963,7 +7546,7 @@
           <a:bodyPr wrap="square" lIns="0" tIns="0" rIns="0" bIns="0" rtlCol="0" anchor="ctr"/>
           <a:lstStyle/>
           <a:p>
-            <a:pPr indent="0" marL="0">
+            <a:pPr marL="0" indent="0">
               <a:buNone/>
             </a:pPr>
             <a:r>
@@ -7029,7 +7612,7 @@
           <a:bodyPr wrap="square" lIns="0" tIns="0" rIns="0" bIns="0" rtlCol="0" anchor="ctr"/>
           <a:lstStyle/>
           <a:p>
-            <a:pPr indent="0" marL="0">
+            <a:pPr marL="0" indent="0">
               <a:buNone/>
             </a:pPr>
             <a:r>
@@ -7068,7 +7651,7 @@
           <a:bodyPr wrap="square" lIns="0" tIns="0" rIns="0" bIns="0" rtlCol="0" anchor="ctr"/>
           <a:lstStyle/>
           <a:p>
-            <a:pPr indent="0" marL="0">
+            <a:pPr marL="0" indent="0">
               <a:buNone/>
             </a:pPr>
             <a:r>
@@ -7134,7 +7717,7 @@
           <a:bodyPr wrap="square" lIns="0" tIns="0" rIns="0" bIns="0" rtlCol="0" anchor="ctr"/>
           <a:lstStyle/>
           <a:p>
-            <a:pPr indent="0" marL="0">
+            <a:pPr marL="0" indent="0">
               <a:buNone/>
             </a:pPr>
             <a:r>
@@ -7173,7 +7756,7 @@
           <a:bodyPr wrap="square" lIns="0" tIns="0" rIns="0" bIns="0" rtlCol="0" anchor="ctr"/>
           <a:lstStyle/>
           <a:p>
-            <a:pPr indent="0" marL="0">
+            <a:pPr marL="0" indent="0">
               <a:buNone/>
             </a:pPr>
             <a:r>
@@ -7239,7 +7822,7 @@
           <a:bodyPr wrap="square" lIns="0" tIns="0" rIns="0" bIns="0" rtlCol="0" anchor="ctr"/>
           <a:lstStyle/>
           <a:p>
-            <a:pPr indent="0" marL="0">
+            <a:pPr marL="0" indent="0">
               <a:buNone/>
             </a:pPr>
             <a:r>
@@ -7278,7 +7861,7 @@
           <a:bodyPr wrap="square" lIns="0" tIns="0" rIns="0" bIns="0" rtlCol="0" anchor="ctr"/>
           <a:lstStyle/>
           <a:p>
-            <a:pPr indent="0" marL="0">
+            <a:pPr marL="0" indent="0">
               <a:buNone/>
             </a:pPr>
             <a:r>
@@ -7344,7 +7927,7 @@
           <a:bodyPr wrap="square" lIns="0" tIns="0" rIns="0" bIns="0" rtlCol="0" anchor="ctr"/>
           <a:lstStyle/>
           <a:p>
-            <a:pPr indent="0" marL="0">
+            <a:pPr marL="0" indent="0">
               <a:buNone/>
             </a:pPr>
             <a:r>
@@ -7383,7 +7966,7 @@
           <a:bodyPr wrap="square" lIns="0" tIns="0" rIns="0" bIns="0" rtlCol="0" anchor="ctr"/>
           <a:lstStyle/>
           <a:p>
-            <a:pPr indent="0" marL="0">
+            <a:pPr marL="0" indent="0">
               <a:buNone/>
             </a:pPr>
             <a:r>
@@ -7449,7 +8032,7 @@
           <a:bodyPr wrap="square" lIns="0" tIns="0" rIns="0" bIns="0" rtlCol="0" anchor="ctr"/>
           <a:lstStyle/>
           <a:p>
-            <a:pPr indent="0" marL="0">
+            <a:pPr marL="0" indent="0">
               <a:buNone/>
             </a:pPr>
             <a:r>
@@ -7488,7 +8071,7 @@
           <a:bodyPr wrap="square" lIns="0" tIns="0" rIns="0" bIns="0" rtlCol="0" anchor="ctr"/>
           <a:lstStyle/>
           <a:p>
-            <a:pPr indent="0" marL="0">
+            <a:pPr marL="0" indent="0">
               <a:buNone/>
             </a:pPr>
             <a:r>
@@ -7527,7 +8110,7 @@
           <a:bodyPr wrap="square" lIns="0" tIns="0" rIns="0" bIns="0" rtlCol="0" anchor="ctr"/>
           <a:lstStyle/>
           <a:p>
-            <a:pPr indent="0" marL="0">
+            <a:pPr marL="0" indent="0">
               <a:buNone/>
             </a:pPr>
             <a:r>
@@ -7593,7 +8176,7 @@
           <a:bodyPr wrap="square" lIns="0" tIns="0" rIns="0" bIns="0" rtlCol="0" anchor="ctr"/>
           <a:lstStyle/>
           <a:p>
-            <a:pPr indent="0" marL="0">
+            <a:pPr marL="0" indent="0">
               <a:buNone/>
             </a:pPr>
             <a:r>
@@ -7632,7 +8215,7 @@
           <a:bodyPr wrap="square" lIns="0" tIns="0" rIns="0" bIns="0" rtlCol="0" anchor="ctr"/>
           <a:lstStyle/>
           <a:p>
-            <a:pPr indent="0" marL="0">
+            <a:pPr marL="0" indent="0">
               <a:buNone/>
             </a:pPr>
             <a:r>
@@ -7698,7 +8281,7 @@
           <a:bodyPr wrap="square" lIns="0" tIns="0" rIns="0" bIns="0" rtlCol="0" anchor="ctr"/>
           <a:lstStyle/>
           <a:p>
-            <a:pPr indent="0" marL="0">
+            <a:pPr marL="0" indent="0">
               <a:buNone/>
             </a:pPr>
             <a:r>
@@ -7737,7 +8320,7 @@
           <a:bodyPr wrap="square" lIns="0" tIns="0" rIns="0" bIns="0" rtlCol="0" anchor="ctr"/>
           <a:lstStyle/>
           <a:p>
-            <a:pPr indent="0" marL="0">
+            <a:pPr marL="0" indent="0">
               <a:buNone/>
             </a:pPr>
             <a:r>
@@ -7803,7 +8386,7 @@
           <a:bodyPr wrap="square" lIns="0" tIns="0" rIns="0" bIns="0" rtlCol="0" anchor="ctr"/>
           <a:lstStyle/>
           <a:p>
-            <a:pPr indent="0" marL="0">
+            <a:pPr marL="0" indent="0">
               <a:buNone/>
             </a:pPr>
             <a:r>
@@ -7842,7 +8425,7 @@
           <a:bodyPr wrap="square" lIns="0" tIns="0" rIns="0" bIns="0" rtlCol="0" anchor="ctr"/>
           <a:lstStyle/>
           <a:p>
-            <a:pPr indent="0" marL="0">
+            <a:pPr marL="0" indent="0">
               <a:buNone/>
             </a:pPr>
             <a:r>
@@ -7908,7 +8491,7 @@
           <a:bodyPr wrap="square" lIns="0" tIns="0" rIns="0" bIns="0" rtlCol="0" anchor="ctr"/>
           <a:lstStyle/>
           <a:p>
-            <a:pPr indent="0" marL="0">
+            <a:pPr marL="0" indent="0">
               <a:buNone/>
             </a:pPr>
             <a:r>
@@ -7947,7 +8530,7 @@
           <a:bodyPr wrap="square" lIns="0" tIns="0" rIns="0" bIns="0" rtlCol="0" anchor="ctr"/>
           <a:lstStyle/>
           <a:p>
-            <a:pPr indent="0" marL="0">
+            <a:pPr marL="0" indent="0">
               <a:buNone/>
             </a:pPr>
             <a:r>
@@ -8013,7 +8596,7 @@
           <a:bodyPr wrap="square" lIns="0" tIns="0" rIns="0" bIns="0" rtlCol="0" anchor="ctr"/>
           <a:lstStyle/>
           <a:p>
-            <a:pPr indent="0" marL="0">
+            <a:pPr marL="0" indent="0">
               <a:buNone/>
             </a:pPr>
             <a:r>
@@ -8052,7 +8635,7 @@
           <a:bodyPr wrap="square" lIns="0" tIns="0" rIns="0" bIns="0" rtlCol="0" anchor="ctr"/>
           <a:lstStyle/>
           <a:p>
-            <a:pPr indent="0" marL="0">
+            <a:pPr marL="0" indent="0">
               <a:buNone/>
             </a:pPr>
             <a:r>
@@ -8118,7 +8701,7 @@
           <a:bodyPr wrap="square" lIns="0" tIns="0" rIns="0" bIns="0" rtlCol="0" anchor="ctr"/>
           <a:lstStyle/>
           <a:p>
-            <a:pPr indent="0" marL="0">
+            <a:pPr marL="0" indent="0">
               <a:buNone/>
             </a:pPr>
             <a:r>
@@ -8157,7 +8740,7 @@
           <a:bodyPr wrap="square" lIns="0" tIns="0" rIns="0" bIns="0" rtlCol="0" anchor="ctr"/>
           <a:lstStyle/>
           <a:p>
-            <a:pPr indent="0" marL="0">
+            <a:pPr marL="0" indent="0">
               <a:buNone/>
             </a:pPr>
             <a:r>
@@ -8223,7 +8806,7 @@
           <a:bodyPr wrap="square" lIns="0" tIns="0" rIns="0" bIns="0" rtlCol="0" anchor="ctr"/>
           <a:lstStyle/>
           <a:p>
-            <a:pPr indent="0" marL="0">
+            <a:pPr marL="0" indent="0">
               <a:buNone/>
             </a:pPr>
             <a:r>
@@ -8262,7 +8845,7 @@
           <a:bodyPr wrap="square" lIns="0" tIns="0" rIns="0" bIns="0" rtlCol="0" anchor="ctr"/>
           <a:lstStyle/>
           <a:p>
-            <a:pPr indent="0" marL="0">
+            <a:pPr marL="0" indent="0">
               <a:buNone/>
             </a:pPr>
             <a:r>
@@ -8296,6 +8879,7 @@
         <a:solidFill>
           <a:srgbClr val="F7F6F3"/>
         </a:solidFill>
+        <a:effectLst/>
       </p:bgPr>
     </p:bg>
     <p:spTree>
@@ -8333,7 +8917,7 @@
           <a:bodyPr wrap="square" lIns="0" tIns="0" rIns="0" bIns="0" rtlCol="0" anchor="ctr"/>
           <a:lstStyle/>
           <a:p>
-            <a:pPr indent="0" marL="0">
+            <a:pPr marL="0" indent="0">
               <a:buNone/>
             </a:pPr>
             <a:r>
@@ -8372,7 +8956,7 @@
           <a:bodyPr wrap="square" lIns="0" tIns="0" rIns="0" bIns="0" rtlCol="0" anchor="ctr"/>
           <a:lstStyle/>
           <a:p>
-            <a:pPr indent="0" marL="0">
+            <a:pPr marL="0" indent="0">
               <a:buNone/>
             </a:pPr>
             <a:r>
@@ -8411,7 +8995,7 @@
           <a:bodyPr wrap="square" lIns="0" tIns="0" rIns="0" bIns="0" rtlCol="0" anchor="ctr"/>
           <a:lstStyle/>
           <a:p>
-            <a:pPr indent="0" marL="0">
+            <a:pPr marL="0" indent="0">
               <a:buNone/>
             </a:pPr>
             <a:r>
@@ -8477,7 +9061,7 @@
           <a:bodyPr wrap="square" lIns="0" tIns="0" rIns="0" bIns="0" rtlCol="0" anchor="t"/>
           <a:lstStyle/>
           <a:p>
-            <a:pPr indent="0" marL="0">
+            <a:pPr marL="0" indent="0">
               <a:buNone/>
             </a:pPr>
             <a:r>
@@ -8494,7 +9078,7 @@
             <a:endParaRPr lang="en-US" sz="900" dirty="0"/>
           </a:p>
           <a:p>
-            <a:pPr indent="0" marL="0">
+            <a:pPr marL="0" indent="0">
               <a:buNone/>
             </a:pPr>
             <a:r>
@@ -8511,7 +9095,7 @@
             <a:endParaRPr lang="en-US" sz="900" dirty="0"/>
           </a:p>
           <a:p>
-            <a:pPr indent="0" marL="0">
+            <a:pPr marL="0" indent="0">
               <a:buNone/>
             </a:pPr>
             <a:r>
@@ -8528,7 +9112,7 @@
             <a:endParaRPr lang="en-US" sz="900" dirty="0"/>
           </a:p>
           <a:p>
-            <a:pPr indent="0" marL="0">
+            <a:pPr marL="0" indent="0">
               <a:buNone/>
             </a:pPr>
             <a:r>
@@ -8545,7 +9129,7 @@
             <a:endParaRPr lang="en-US" sz="900" dirty="0"/>
           </a:p>
           <a:p>
-            <a:pPr indent="0" marL="0">
+            <a:pPr marL="0" indent="0">
               <a:buNone/>
             </a:pPr>
             <a:r>
@@ -8562,7 +9146,7 @@
             <a:endParaRPr lang="en-US" sz="900" dirty="0"/>
           </a:p>
           <a:p>
-            <a:pPr indent="0" marL="0">
+            <a:pPr marL="0" indent="0">
               <a:buNone/>
             </a:pPr>
             <a:r>
@@ -8579,7 +9163,7 @@
             <a:endParaRPr lang="en-US" sz="900" dirty="0"/>
           </a:p>
           <a:p>
-            <a:pPr indent="0" marL="0">
+            <a:pPr marL="0" indent="0">
               <a:buNone/>
             </a:pPr>
             <a:r>
@@ -8596,7 +9180,7 @@
             <a:endParaRPr lang="en-US" sz="900" dirty="0"/>
           </a:p>
           <a:p>
-            <a:pPr indent="0" marL="0">
+            <a:pPr marL="0" indent="0">
               <a:buNone/>
             </a:pPr>
             <a:r>
@@ -8613,7 +9197,7 @@
             <a:endParaRPr lang="en-US" sz="900" dirty="0"/>
           </a:p>
           <a:p>
-            <a:pPr indent="0" marL="0">
+            <a:pPr marL="0" indent="0">
               <a:buNone/>
             </a:pPr>
             <a:r>
@@ -8630,7 +9214,7 @@
             <a:endParaRPr lang="en-US" sz="900" dirty="0"/>
           </a:p>
           <a:p>
-            <a:pPr indent="0" marL="0">
+            <a:pPr marL="0" indent="0">
               <a:buNone/>
             </a:pPr>
             <a:r>
@@ -8647,7 +9231,7 @@
             <a:endParaRPr lang="en-US" sz="900" dirty="0"/>
           </a:p>
           <a:p>
-            <a:pPr indent="0" marL="0">
+            <a:pPr marL="0" indent="0">
               <a:buNone/>
             </a:pPr>
             <a:r>
@@ -8664,7 +9248,7 @@
             <a:endParaRPr lang="en-US" sz="900" dirty="0"/>
           </a:p>
           <a:p>
-            <a:pPr indent="0" marL="0">
+            <a:pPr marL="0" indent="0">
               <a:buNone/>
             </a:pPr>
             <a:r>
@@ -8703,7 +9287,7 @@
           <a:bodyPr wrap="square" lIns="0" tIns="0" rIns="0" bIns="0" rtlCol="0" anchor="ctr"/>
           <a:lstStyle/>
           <a:p>
-            <a:pPr algn="ctr" indent="0" marL="0">
+            <a:pPr marL="0" indent="0" algn="ctr">
               <a:buNone/>
             </a:pPr>
             <a:r>
@@ -8742,7 +9326,7 @@
           <a:bodyPr wrap="square" lIns="0" tIns="0" rIns="0" bIns="0" rtlCol="0" anchor="ctr"/>
           <a:lstStyle/>
           <a:p>
-            <a:pPr indent="0" marL="0">
+            <a:pPr marL="0" indent="0">
               <a:buNone/>
             </a:pPr>
             <a:r>
@@ -8808,7 +9392,7 @@
           <a:bodyPr wrap="square" lIns="0" tIns="0" rIns="0" bIns="0" rtlCol="0" anchor="t"/>
           <a:lstStyle/>
           <a:p>
-            <a:pPr indent="0" marL="0">
+            <a:pPr marL="0" indent="0">
               <a:buNone/>
             </a:pPr>
             <a:r>
@@ -8825,7 +9409,7 @@
             <a:endParaRPr lang="en-US" sz="900" dirty="0"/>
           </a:p>
           <a:p>
-            <a:pPr indent="0" marL="0">
+            <a:pPr marL="0" indent="0">
               <a:buNone/>
             </a:pPr>
             <a:r>
@@ -8842,7 +9426,7 @@
             <a:endParaRPr lang="en-US" sz="900" dirty="0"/>
           </a:p>
           <a:p>
-            <a:pPr indent="0" marL="0">
+            <a:pPr marL="0" indent="0">
               <a:buNone/>
             </a:pPr>
             <a:r>
@@ -8859,7 +9443,7 @@
             <a:endParaRPr lang="en-US" sz="900" dirty="0"/>
           </a:p>
           <a:p>
-            <a:pPr indent="0" marL="0">
+            <a:pPr marL="0" indent="0">
               <a:buNone/>
             </a:pPr>
             <a:r>
@@ -8876,7 +9460,7 @@
             <a:endParaRPr lang="en-US" sz="900" dirty="0"/>
           </a:p>
           <a:p>
-            <a:pPr indent="0" marL="0">
+            <a:pPr marL="0" indent="0">
               <a:buNone/>
             </a:pPr>
             <a:r>
@@ -8893,7 +9477,7 @@
             <a:endParaRPr lang="en-US" sz="900" dirty="0"/>
           </a:p>
           <a:p>
-            <a:pPr indent="0" marL="0">
+            <a:pPr marL="0" indent="0">
               <a:buNone/>
             </a:pPr>
             <a:r>
@@ -8910,7 +9494,7 @@
             <a:endParaRPr lang="en-US" sz="900" dirty="0"/>
           </a:p>
           <a:p>
-            <a:pPr indent="0" marL="0">
+            <a:pPr marL="0" indent="0">
               <a:buNone/>
             </a:pPr>
             <a:r>
@@ -8927,7 +9511,7 @@
             <a:endParaRPr lang="en-US" sz="900" dirty="0"/>
           </a:p>
           <a:p>
-            <a:pPr indent="0" marL="0">
+            <a:pPr marL="0" indent="0">
               <a:buNone/>
             </a:pPr>
             <a:r>
@@ -8944,7 +9528,7 @@
             <a:endParaRPr lang="en-US" sz="900" dirty="0"/>
           </a:p>
           <a:p>
-            <a:pPr indent="0" marL="0">
+            <a:pPr marL="0" indent="0">
               <a:buNone/>
             </a:pPr>
             <a:r>
@@ -8961,7 +9545,7 @@
             <a:endParaRPr lang="en-US" sz="900" dirty="0"/>
           </a:p>
           <a:p>
-            <a:pPr indent="0" marL="0">
+            <a:pPr marL="0" indent="0">
               <a:buNone/>
             </a:pPr>
             <a:r>
@@ -8978,7 +9562,7 @@
             <a:endParaRPr lang="en-US" sz="900" dirty="0"/>
           </a:p>
           <a:p>
-            <a:pPr indent="0" marL="0">
+            <a:pPr marL="0" indent="0">
               <a:buNone/>
             </a:pPr>
             <a:r>
@@ -8995,7 +9579,7 @@
             <a:endParaRPr lang="en-US" sz="900" dirty="0"/>
           </a:p>
           <a:p>
-            <a:pPr indent="0" marL="0">
+            <a:pPr marL="0" indent="0">
               <a:buNone/>
             </a:pPr>
             <a:r>
@@ -9012,7 +9596,7 @@
             <a:endParaRPr lang="en-US" sz="900" dirty="0"/>
           </a:p>
           <a:p>
-            <a:pPr indent="0" marL="0">
+            <a:pPr marL="0" indent="0">
               <a:buNone/>
             </a:pPr>
             <a:r>
@@ -9029,7 +9613,7 @@
             <a:endParaRPr lang="en-US" sz="900" dirty="0"/>
           </a:p>
           <a:p>
-            <a:pPr indent="0" marL="0">
+            <a:pPr marL="0" indent="0">
               <a:buNone/>
             </a:pPr>
             <a:r>
@@ -9046,7 +9630,7 @@
             <a:endParaRPr lang="en-US" sz="900" dirty="0"/>
           </a:p>
           <a:p>
-            <a:pPr indent="0" marL="0">
+            <a:pPr marL="0" indent="0">
               <a:buNone/>
             </a:pPr>
             <a:r>
@@ -9063,7 +9647,7 @@
             <a:endParaRPr lang="en-US" sz="900" dirty="0"/>
           </a:p>
           <a:p>
-            <a:pPr indent="0" marL="0">
+            <a:pPr marL="0" indent="0">
               <a:buNone/>
             </a:pPr>
             <a:r>
@@ -9129,7 +9713,7 @@
           <a:bodyPr wrap="square" lIns="0" tIns="0" rIns="0" bIns="0" rtlCol="0" anchor="ctr"/>
           <a:lstStyle/>
           <a:p>
-            <a:pPr indent="0" marL="0">
+            <a:pPr marL="0" indent="0">
               <a:buNone/>
             </a:pPr>
             <a:r>
@@ -9143,9 +9727,6 @@
               </a:rPr>
               <a:t>Decision Rule:  </a:t>
             </a:r>
-            <a:pPr indent="0" marL="0">
-              <a:buNone/>
-            </a:pPr>
             <a:r>
               <a:rPr lang="en-US" sz="1000" dirty="0">
                 <a:solidFill>
@@ -9157,9 +9738,6 @@
               </a:rPr>
               <a:t>ALL cells in first row are bold  →  </a:t>
             </a:r>
-            <a:pPr indent="0" marL="0">
-              <a:buNone/>
-            </a:pPr>
             <a:r>
               <a:rPr lang="en-US" sz="1000" dirty="0">
                 <a:solidFill>
@@ -9171,9 +9749,6 @@
               </a:rPr>
               <a:t>&lt;th scope="col"&gt; + &lt;thead&gt;/&lt;tbody&gt;</a:t>
             </a:r>
-            <a:pPr indent="0" marL="0">
-              <a:buNone/>
-            </a:pPr>
             <a:r>
               <a:rPr lang="en-US" sz="1000" dirty="0">
                 <a:solidFill>
@@ -9205,6 +9780,7 @@
         <a:solidFill>
           <a:srgbClr val="FFFFFF"/>
         </a:solidFill>
+        <a:effectLst/>
       </p:bgPr>
     </p:bg>
     <p:spTree>
@@ -9242,7 +9818,7 @@
           <a:bodyPr wrap="square" lIns="0" tIns="0" rIns="0" bIns="0" rtlCol="0" anchor="ctr"/>
           <a:lstStyle/>
           <a:p>
-            <a:pPr indent="0" marL="0">
+            <a:pPr marL="0" indent="0">
               <a:buNone/>
             </a:pPr>
             <a:r>
@@ -9335,7 +9911,7 @@
           <a:bodyPr wrap="square" lIns="0" tIns="0" rIns="0" bIns="0" rtlCol="0" anchor="ctr"/>
           <a:lstStyle/>
           <a:p>
-            <a:pPr algn="ctr" indent="0" marL="0">
+            <a:pPr marL="0" indent="0" algn="ctr">
               <a:buNone/>
             </a:pPr>
             <a:r>
@@ -9374,7 +9950,7 @@
           <a:bodyPr wrap="square" lIns="0" tIns="0" rIns="0" bIns="0" rtlCol="0" anchor="ctr"/>
           <a:lstStyle/>
           <a:p>
-            <a:pPr indent="0" marL="0">
+            <a:pPr marL="0" indent="0">
               <a:buNone/>
             </a:pPr>
             <a:r>
@@ -9413,7 +9989,7 @@
           <a:bodyPr wrap="square" lIns="0" tIns="0" rIns="0" bIns="0" rtlCol="0" anchor="ctr"/>
           <a:lstStyle/>
           <a:p>
-            <a:pPr indent="0" marL="0">
+            <a:pPr marL="0" indent="0">
               <a:buNone/>
             </a:pPr>
             <a:r>
@@ -9479,7 +10055,7 @@
           <a:bodyPr wrap="square" lIns="0" tIns="0" rIns="0" bIns="0" rtlCol="0" anchor="ctr"/>
           <a:lstStyle/>
           <a:p>
-            <a:pPr indent="0" marL="0">
+            <a:pPr marL="0" indent="0">
               <a:buNone/>
             </a:pPr>
             <a:r>
@@ -9496,7 +10072,7 @@
             <a:endParaRPr lang="en-US" sz="850" dirty="0"/>
           </a:p>
           <a:p>
-            <a:pPr indent="0" marL="0">
+            <a:pPr marL="0" indent="0">
               <a:buNone/>
             </a:pPr>
             <a:r>
@@ -9562,7 +10138,7 @@
           <a:bodyPr wrap="square" lIns="0" tIns="0" rIns="0" bIns="0" rtlCol="0" anchor="ctr"/>
           <a:lstStyle/>
           <a:p>
-            <a:pPr indent="0" marL="0">
+            <a:pPr marL="0" indent="0">
               <a:buNone/>
             </a:pPr>
             <a:r>
@@ -9579,7 +10155,7 @@
             <a:endParaRPr lang="en-US" sz="850" dirty="0"/>
           </a:p>
           <a:p>
-            <a:pPr indent="0" marL="0">
+            <a:pPr marL="0" indent="0">
               <a:buNone/>
             </a:pPr>
             <a:r>
@@ -9672,7 +10248,7 @@
           <a:bodyPr wrap="square" lIns="0" tIns="0" rIns="0" bIns="0" rtlCol="0" anchor="ctr"/>
           <a:lstStyle/>
           <a:p>
-            <a:pPr algn="ctr" indent="0" marL="0">
+            <a:pPr marL="0" indent="0" algn="ctr">
               <a:buNone/>
             </a:pPr>
             <a:r>
@@ -9711,7 +10287,7 @@
           <a:bodyPr wrap="square" lIns="0" tIns="0" rIns="0" bIns="0" rtlCol="0" anchor="ctr"/>
           <a:lstStyle/>
           <a:p>
-            <a:pPr indent="0" marL="0">
+            <a:pPr marL="0" indent="0">
               <a:buNone/>
             </a:pPr>
             <a:r>
@@ -9750,7 +10326,7 @@
           <a:bodyPr wrap="square" lIns="0" tIns="0" rIns="0" bIns="0" rtlCol="0" anchor="ctr"/>
           <a:lstStyle/>
           <a:p>
-            <a:pPr indent="0" marL="0">
+            <a:pPr marL="0" indent="0">
               <a:buNone/>
             </a:pPr>
             <a:r>
@@ -9816,7 +10392,7 @@
           <a:bodyPr wrap="square" lIns="0" tIns="0" rIns="0" bIns="0" rtlCol="0" anchor="ctr"/>
           <a:lstStyle/>
           <a:p>
-            <a:pPr indent="0" marL="0">
+            <a:pPr marL="0" indent="0">
               <a:buNone/>
             </a:pPr>
             <a:r>
@@ -9882,7 +10458,7 @@
           <a:bodyPr wrap="square" lIns="0" tIns="0" rIns="0" bIns="0" rtlCol="0" anchor="ctr"/>
           <a:lstStyle/>
           <a:p>
-            <a:pPr indent="0" marL="0">
+            <a:pPr marL="0" indent="0">
               <a:buNone/>
             </a:pPr>
             <a:r>
@@ -9975,7 +10551,7 @@
           <a:bodyPr wrap="square" lIns="0" tIns="0" rIns="0" bIns="0" rtlCol="0" anchor="ctr"/>
           <a:lstStyle/>
           <a:p>
-            <a:pPr algn="ctr" indent="0" marL="0">
+            <a:pPr marL="0" indent="0" algn="ctr">
               <a:buNone/>
             </a:pPr>
             <a:r>
@@ -10014,7 +10590,7 @@
           <a:bodyPr wrap="square" lIns="0" tIns="0" rIns="0" bIns="0" rtlCol="0" anchor="ctr"/>
           <a:lstStyle/>
           <a:p>
-            <a:pPr indent="0" marL="0">
+            <a:pPr marL="0" indent="0">
               <a:buNone/>
             </a:pPr>
             <a:r>
@@ -10053,7 +10629,7 @@
           <a:bodyPr wrap="square" lIns="0" tIns="0" rIns="0" bIns="0" rtlCol="0" anchor="ctr"/>
           <a:lstStyle/>
           <a:p>
-            <a:pPr indent="0" marL="0">
+            <a:pPr marL="0" indent="0">
               <a:buNone/>
             </a:pPr>
             <a:r>
@@ -10119,7 +10695,7 @@
           <a:bodyPr wrap="square" lIns="0" tIns="0" rIns="0" bIns="0" rtlCol="0" anchor="ctr"/>
           <a:lstStyle/>
           <a:p>
-            <a:pPr indent="0" marL="0">
+            <a:pPr marL="0" indent="0">
               <a:buNone/>
             </a:pPr>
             <a:r>
@@ -10185,7 +10761,7 @@
           <a:bodyPr wrap="square" lIns="0" tIns="0" rIns="0" bIns="0" rtlCol="0" anchor="ctr"/>
           <a:lstStyle/>
           <a:p>
-            <a:pPr indent="0" marL="0">
+            <a:pPr marL="0" indent="0">
               <a:buNone/>
             </a:pPr>
             <a:r>
@@ -10213,12 +10789,13 @@
 
 <file path=ppt/slides/slide8.xml><?xml version="1.0" encoding="utf-8"?>
 <p:sld xmlns:a="http://schemas.openxmlformats.org/drawingml/2006/main" xmlns:r="http://schemas.openxmlformats.org/officeDocument/2006/relationships" xmlns:p="http://schemas.openxmlformats.org/presentationml/2006/main">
-  <p:cSld name="Slide 8">
+  <p:cSld>
     <p:bg>
       <p:bgPr>
         <a:solidFill>
-          <a:srgbClr val="FFFFFF"/>
+          <a:srgbClr val="F7F6F3"/>
         </a:solidFill>
+        <a:effectLst/>
       </p:bgPr>
     </p:bg>
     <p:spTree>
@@ -10237,946 +10814,2021 @@
       </p:grpSpPr>
       <p:sp>
         <p:nvSpPr>
-          <p:cNvPr id="2" name="Text 0"/>
-          <p:cNvSpPr/>
-          <p:nvPr/>
-        </p:nvSpPr>
-        <p:spPr>
-          <a:xfrm>
-            <a:off x="457200" y="274320"/>
-            <a:ext cx="8229600" cy="502920"/>
-          </a:xfrm>
-          <a:prstGeom prst="rect">
-            <a:avLst/>
-          </a:prstGeom>
-          <a:noFill/>
-          <a:ln/>
-        </p:spPr>
-        <p:txBody>
-          <a:bodyPr wrap="square" lIns="0" tIns="0" rIns="0" bIns="0" rtlCol="0" anchor="ctr"/>
-          <a:lstStyle/>
-          <a:p>
-            <a:pPr indent="0" marL="0">
-              <a:buNone/>
-            </a:pPr>
-            <a:r>
-              <a:rPr lang="en-US" sz="2800" b="1" dirty="0">
+          <p:cNvPr id="2" name="TextBox 1"/>
+          <p:cNvSpPr txBox="1"/>
+          <p:nvPr/>
+        </p:nvSpPr>
+        <p:spPr>
+          <a:xfrm>
+            <a:off x="457200" y="256032"/>
+            <a:ext cx="8229600" cy="457200"/>
+          </a:xfrm>
+          <a:prstGeom prst="rect">
+            <a:avLst/>
+          </a:prstGeom>
+          <a:noFill/>
+        </p:spPr>
+        <p:txBody>
+          <a:bodyPr wrap="square" lIns="0" tIns="0" rIns="0" bIns="0" anchor="t">
+            <a:spAutoFit/>
+          </a:bodyPr>
+          <a:lstStyle/>
+          <a:p>
+            <a:pPr algn="l"/>
+            <a:r>
+              <a:rPr sz="2600" b="1" i="0">
                 <a:solidFill>
                   <a:srgbClr val="1A1A18"/>
                 </a:solidFill>
-                <a:latin typeface="Calibri" pitchFamily="34" charset="0"/>
-                <a:ea typeface="Calibri" pitchFamily="34" charset="-122"/>
-                <a:cs typeface="Calibri" pitchFamily="34" charset="-120"/>
-              </a:rPr>
-              <a:t>Technology Stack</a:t>
-            </a:r>
-            <a:endParaRPr lang="en-US" sz="2800" dirty="0"/>
-          </a:p>
-        </p:txBody>
-      </p:sp>
-      <p:sp>
-        <p:nvSpPr>
-          <p:cNvPr id="3" name="Shape 1"/>
-          <p:cNvSpPr/>
-          <p:nvPr/>
-        </p:nvSpPr>
-        <p:spPr>
-          <a:xfrm>
-            <a:off x="365760" y="960120"/>
-            <a:ext cx="2743200" cy="1691640"/>
+                <a:latin typeface="Calibri"/>
+              </a:rPr>
+              <a:t>Post-Conversion Test Report</a:t>
+            </a:r>
+          </a:p>
+        </p:txBody>
+      </p:sp>
+      <p:sp>
+        <p:nvSpPr>
+          <p:cNvPr id="3" name="TextBox 2"/>
+          <p:cNvSpPr txBox="1"/>
+          <p:nvPr/>
+        </p:nvSpPr>
+        <p:spPr>
+          <a:xfrm>
+            <a:off x="457200" y="749808"/>
+            <a:ext cx="8229600" cy="274320"/>
+          </a:xfrm>
+          <a:prstGeom prst="rect">
+            <a:avLst/>
+          </a:prstGeom>
+          <a:noFill/>
+        </p:spPr>
+        <p:txBody>
+          <a:bodyPr wrap="square" lIns="0" tIns="0" rIns="0" bIns="0" anchor="t">
+            <a:spAutoFit/>
+          </a:bodyPr>
+          <a:lstStyle/>
+          <a:p>
+            <a:pPr algn="l"/>
+            <a:r>
+              <a:rPr sz="1150" b="0" i="0">
+                <a:solidFill>
+                  <a:srgbClr val="5A5952"/>
+                </a:solidFill>
+                <a:latin typeface="Calibri"/>
+              </a:rPr>
+              <a:t>Every conversion automatically runs 21 checks — failures show the exact line number to fix.</a:t>
+            </a:r>
+          </a:p>
+        </p:txBody>
+      </p:sp>
+      <p:sp>
+        <p:nvSpPr>
+          <p:cNvPr id="4" name="Rounded Rectangle 3"/>
+          <p:cNvSpPr/>
+          <p:nvPr/>
+        </p:nvSpPr>
+        <p:spPr>
+          <a:xfrm>
+            <a:off x="365760" y="1143000"/>
+            <a:ext cx="8412480" cy="777240"/>
           </a:xfrm>
           <a:prstGeom prst="roundRect">
             <a:avLst>
-              <a:gd name="adj" fmla="val 5405"/>
+              <a:gd name="adj" fmla="val 8000"/>
             </a:avLst>
           </a:prstGeom>
           <a:solidFill>
-            <a:srgbClr val="EEF3FB"/>
+            <a:srgbClr val="FFFFFF"/>
           </a:solidFill>
-          <a:ln w="19050">
+          <a:ln w="12700">
             <a:solidFill>
-              <a:srgbClr val="2B579A"/>
+              <a:srgbClr val="E2E0D8"/>
             </a:solidFill>
-            <a:prstDash val="solid"/>
           </a:ln>
-          <a:effectLst>
-            <a:outerShdw sx="100000" sy="100000" kx="0" ky="0" algn="bl" rotWithShape="0" blurRad="101600" dist="38100" dir="2700000">
-              <a:srgbClr val="000000">
-                <a:alpha val="10000"/>
-              </a:srgbClr>
-            </a:outerShdw>
-          </a:effectLst>
-        </p:spPr>
-      </p:sp>
-      <p:sp>
-        <p:nvSpPr>
-          <p:cNvPr id="4" name="Text 2"/>
-          <p:cNvSpPr/>
-          <p:nvPr/>
-        </p:nvSpPr>
-        <p:spPr>
-          <a:xfrm>
-            <a:off x="502920" y="1069848"/>
-            <a:ext cx="2468880" cy="320040"/>
-          </a:xfrm>
-          <a:prstGeom prst="rect">
-            <a:avLst/>
-          </a:prstGeom>
-          <a:noFill/>
-          <a:ln/>
-        </p:spPr>
-        <p:txBody>
-          <a:bodyPr wrap="square" lIns="0" tIns="0" rIns="0" bIns="0" rtlCol="0" anchor="ctr"/>
-          <a:lstStyle/>
-          <a:p>
-            <a:pPr indent="0" marL="0">
-              <a:buNone/>
-            </a:pPr>
-            <a:r>
-              <a:rPr lang="en-US" sz="1200" b="1" dirty="0">
-                <a:solidFill>
-                  <a:srgbClr val="2B579A"/>
-                </a:solidFill>
-                <a:latin typeface="Courier New" pitchFamily="34" charset="0"/>
-                <a:ea typeface="Courier New" pitchFamily="34" charset="-122"/>
-                <a:cs typeface="Courier New" pitchFamily="34" charset="-120"/>
-              </a:rPr>
-              <a:t>Mammoth.js</a:t>
-            </a:r>
-            <a:endParaRPr lang="en-US" sz="1200" dirty="0"/>
-          </a:p>
-        </p:txBody>
-      </p:sp>
-      <p:sp>
-        <p:nvSpPr>
-          <p:cNvPr id="5" name="Text 3"/>
-          <p:cNvSpPr/>
-          <p:nvPr/>
-        </p:nvSpPr>
-        <p:spPr>
-          <a:xfrm>
-            <a:off x="502920" y="1399032"/>
-            <a:ext cx="2468880" cy="256032"/>
-          </a:xfrm>
-          <a:prstGeom prst="rect">
-            <a:avLst/>
-          </a:prstGeom>
-          <a:noFill/>
-          <a:ln/>
-        </p:spPr>
-        <p:txBody>
-          <a:bodyPr wrap="square" lIns="0" tIns="0" rIns="0" bIns="0" rtlCol="0" anchor="ctr"/>
-          <a:lstStyle/>
-          <a:p>
-            <a:pPr indent="0" marL="0">
-              <a:buNone/>
-            </a:pPr>
-            <a:r>
-              <a:rPr lang="en-US" sz="950" b="1" dirty="0">
+          <a:effectLst/>
+        </p:spPr>
+        <p:style>
+          <a:lnRef idx="1">
+            <a:schemeClr val="accent1"/>
+          </a:lnRef>
+          <a:fillRef idx="3">
+            <a:schemeClr val="accent1"/>
+          </a:fillRef>
+          <a:effectRef idx="2">
+            <a:schemeClr val="accent1"/>
+          </a:effectRef>
+          <a:fontRef idx="minor">
+            <a:schemeClr val="lt1"/>
+          </a:fontRef>
+        </p:style>
+        <p:txBody>
+          <a:bodyPr rtlCol="0" anchor="ctr"/>
+          <a:lstStyle/>
+          <a:p>
+            <a:pPr algn="ctr"/>
+            <a:endParaRPr/>
+          </a:p>
+        </p:txBody>
+      </p:sp>
+      <p:sp>
+        <p:nvSpPr>
+          <p:cNvPr id="5" name="TextBox 4"/>
+          <p:cNvSpPr txBox="1"/>
+          <p:nvPr/>
+        </p:nvSpPr>
+        <p:spPr>
+          <a:xfrm>
+            <a:off x="548640" y="1234440"/>
+            <a:ext cx="1280160" cy="365760"/>
+          </a:xfrm>
+          <a:prstGeom prst="rect">
+            <a:avLst/>
+          </a:prstGeom>
+          <a:noFill/>
+        </p:spPr>
+        <p:txBody>
+          <a:bodyPr wrap="square" lIns="0" tIns="0" rIns="0" bIns="0" anchor="t">
+            <a:spAutoFit/>
+          </a:bodyPr>
+          <a:lstStyle/>
+          <a:p>
+            <a:pPr algn="l"/>
+            <a:r>
+              <a:rPr sz="2400" b="1" i="0">
                 <a:solidFill>
                   <a:srgbClr val="1A1A18"/>
                 </a:solidFill>
-                <a:latin typeface="Calibri" pitchFamily="34" charset="0"/>
-                <a:ea typeface="Calibri" pitchFamily="34" charset="-122"/>
-                <a:cs typeface="Calibri" pitchFamily="34" charset="-120"/>
-              </a:rPr>
-              <a:t>DOCX → HTML conversion</a:t>
-            </a:r>
-            <a:endParaRPr lang="en-US" sz="950" dirty="0"/>
-          </a:p>
-        </p:txBody>
-      </p:sp>
-      <p:sp>
-        <p:nvSpPr>
-          <p:cNvPr id="6" name="Text 4"/>
-          <p:cNvSpPr/>
-          <p:nvPr/>
-        </p:nvSpPr>
-        <p:spPr>
-          <a:xfrm>
-            <a:off x="502920" y="1673352"/>
-            <a:ext cx="2468880" cy="777240"/>
-          </a:xfrm>
-          <a:prstGeom prst="rect">
-            <a:avLst/>
-          </a:prstGeom>
-          <a:noFill/>
-          <a:ln/>
-        </p:spPr>
-        <p:txBody>
-          <a:bodyPr wrap="square" lIns="0" tIns="0" rIns="0" bIns="0" rtlCol="0" anchor="ctr"/>
-          <a:lstStyle/>
-          <a:p>
-            <a:pPr indent="0" marL="0">
-              <a:buNone/>
-            </a:pPr>
-            <a:r>
-              <a:rPr lang="en-US" sz="900" dirty="0">
+                <a:latin typeface="Courier New"/>
+              </a:rPr>
+              <a:t>21</a:t>
+            </a:r>
+          </a:p>
+        </p:txBody>
+      </p:sp>
+      <p:sp>
+        <p:nvSpPr>
+          <p:cNvPr id="6" name="TextBox 5"/>
+          <p:cNvSpPr txBox="1"/>
+          <p:nvPr/>
+        </p:nvSpPr>
+        <p:spPr>
+          <a:xfrm>
+            <a:off x="548640" y="1627632"/>
+            <a:ext cx="1280160" cy="228600"/>
+          </a:xfrm>
+          <a:prstGeom prst="rect">
+            <a:avLst/>
+          </a:prstGeom>
+          <a:noFill/>
+        </p:spPr>
+        <p:txBody>
+          <a:bodyPr wrap="square" lIns="0" tIns="0" rIns="0" bIns="0" anchor="t">
+            <a:spAutoFit/>
+          </a:bodyPr>
+          <a:lstStyle/>
+          <a:p>
+            <a:pPr algn="l"/>
+            <a:r>
+              <a:rPr sz="800" b="0" i="0">
                 <a:solidFill>
                   <a:srgbClr val="5A5952"/>
                 </a:solidFill>
-                <a:latin typeface="Calibri" pitchFamily="34" charset="0"/>
-                <a:ea typeface="Calibri" pitchFamily="34" charset="-122"/>
-                <a:cs typeface="Calibri" pitchFamily="34" charset="-120"/>
-              </a:rPr>
-              <a:t>Converts Word documents to clean HTML, then 14 rules normalise the output.</a:t>
-            </a:r>
-            <a:endParaRPr lang="en-US" sz="900" dirty="0"/>
-          </a:p>
-        </p:txBody>
-      </p:sp>
-      <p:sp>
-        <p:nvSpPr>
-          <p:cNvPr id="7" name="Shape 5"/>
-          <p:cNvSpPr/>
-          <p:nvPr/>
-        </p:nvSpPr>
-        <p:spPr>
-          <a:xfrm>
-            <a:off x="3291840" y="960120"/>
-            <a:ext cx="2743200" cy="1691640"/>
+                <a:latin typeface="Calibri"/>
+              </a:rPr>
+              <a:t>TOTAL CHECKS</a:t>
+            </a:r>
+          </a:p>
+        </p:txBody>
+      </p:sp>
+      <p:sp>
+        <p:nvSpPr>
+          <p:cNvPr id="7" name="TextBox 6"/>
+          <p:cNvSpPr txBox="1"/>
+          <p:nvPr/>
+        </p:nvSpPr>
+        <p:spPr>
+          <a:xfrm>
+            <a:off x="1920240" y="1234440"/>
+            <a:ext cx="1280160" cy="365760"/>
+          </a:xfrm>
+          <a:prstGeom prst="rect">
+            <a:avLst/>
+          </a:prstGeom>
+          <a:noFill/>
+        </p:spPr>
+        <p:txBody>
+          <a:bodyPr wrap="square" lIns="0" tIns="0" rIns="0" bIns="0" anchor="t">
+            <a:spAutoFit/>
+          </a:bodyPr>
+          <a:lstStyle/>
+          <a:p>
+            <a:pPr algn="l"/>
+            <a:r>
+              <a:rPr sz="2400" b="1" i="0">
+                <a:solidFill>
+                  <a:srgbClr val="2D6A4F"/>
+                </a:solidFill>
+                <a:latin typeface="Courier New"/>
+              </a:rPr>
+              <a:t>19</a:t>
+            </a:r>
+          </a:p>
+        </p:txBody>
+      </p:sp>
+      <p:sp>
+        <p:nvSpPr>
+          <p:cNvPr id="8" name="TextBox 7"/>
+          <p:cNvSpPr txBox="1"/>
+          <p:nvPr/>
+        </p:nvSpPr>
+        <p:spPr>
+          <a:xfrm>
+            <a:off x="1920240" y="1627632"/>
+            <a:ext cx="1280160" cy="228600"/>
+          </a:xfrm>
+          <a:prstGeom prst="rect">
+            <a:avLst/>
+          </a:prstGeom>
+          <a:noFill/>
+        </p:spPr>
+        <p:txBody>
+          <a:bodyPr wrap="square" lIns="0" tIns="0" rIns="0" bIns="0" anchor="t">
+            <a:spAutoFit/>
+          </a:bodyPr>
+          <a:lstStyle/>
+          <a:p>
+            <a:pPr algn="l"/>
+            <a:r>
+              <a:rPr sz="800" b="0" i="0">
+                <a:solidFill>
+                  <a:srgbClr val="5A5952"/>
+                </a:solidFill>
+                <a:latin typeface="Calibri"/>
+              </a:rPr>
+              <a:t>PASSED</a:t>
+            </a:r>
+          </a:p>
+        </p:txBody>
+      </p:sp>
+      <p:sp>
+        <p:nvSpPr>
+          <p:cNvPr id="9" name="TextBox 8"/>
+          <p:cNvSpPr txBox="1"/>
+          <p:nvPr/>
+        </p:nvSpPr>
+        <p:spPr>
+          <a:xfrm>
+            <a:off x="3291840" y="1234440"/>
+            <a:ext cx="1280160" cy="365760"/>
+          </a:xfrm>
+          <a:prstGeom prst="rect">
+            <a:avLst/>
+          </a:prstGeom>
+          <a:noFill/>
+        </p:spPr>
+        <p:txBody>
+          <a:bodyPr wrap="square" lIns="0" tIns="0" rIns="0" bIns="0" anchor="t">
+            <a:spAutoFit/>
+          </a:bodyPr>
+          <a:lstStyle/>
+          <a:p>
+            <a:pPr algn="l"/>
+            <a:r>
+              <a:rPr sz="2400" b="1" i="0">
+                <a:solidFill>
+                  <a:srgbClr val="C84B31"/>
+                </a:solidFill>
+                <a:latin typeface="Courier New"/>
+              </a:rPr>
+              <a:t>2</a:t>
+            </a:r>
+          </a:p>
+        </p:txBody>
+      </p:sp>
+      <p:sp>
+        <p:nvSpPr>
+          <p:cNvPr id="10" name="TextBox 9"/>
+          <p:cNvSpPr txBox="1"/>
+          <p:nvPr/>
+        </p:nvSpPr>
+        <p:spPr>
+          <a:xfrm>
+            <a:off x="3291840" y="1627632"/>
+            <a:ext cx="1280160" cy="228600"/>
+          </a:xfrm>
+          <a:prstGeom prst="rect">
+            <a:avLst/>
+          </a:prstGeom>
+          <a:noFill/>
+        </p:spPr>
+        <p:txBody>
+          <a:bodyPr wrap="square" lIns="0" tIns="0" rIns="0" bIns="0" anchor="t">
+            <a:spAutoFit/>
+          </a:bodyPr>
+          <a:lstStyle/>
+          <a:p>
+            <a:pPr algn="l"/>
+            <a:r>
+              <a:rPr sz="800" b="0" i="0">
+                <a:solidFill>
+                  <a:srgbClr val="5A5952"/>
+                </a:solidFill>
+                <a:latin typeface="Calibri"/>
+              </a:rPr>
+              <a:t>FAILED</a:t>
+            </a:r>
+          </a:p>
+        </p:txBody>
+      </p:sp>
+      <p:sp>
+        <p:nvSpPr>
+          <p:cNvPr id="11" name="Rounded Rectangle 10"/>
+          <p:cNvSpPr/>
+          <p:nvPr/>
+        </p:nvSpPr>
+        <p:spPr>
+          <a:xfrm>
+            <a:off x="4846320" y="1417320"/>
+            <a:ext cx="3200400" cy="109728"/>
           </a:xfrm>
           <a:prstGeom prst="roundRect">
             <a:avLst>
-              <a:gd name="adj" fmla="val 5405"/>
+              <a:gd name="adj" fmla="val 8000"/>
             </a:avLst>
           </a:prstGeom>
           <a:solidFill>
-            <a:srgbClr val="EDF7F0"/>
+            <a:srgbClr val="E2E0D8"/>
           </a:solidFill>
-          <a:ln w="19050">
-            <a:solidFill>
-              <a:srgbClr val="2D6A4F"/>
-            </a:solidFill>
-            <a:prstDash val="solid"/>
+          <a:ln>
+            <a:noFill/>
           </a:ln>
-          <a:effectLst>
-            <a:outerShdw sx="100000" sy="100000" kx="0" ky="0" algn="bl" rotWithShape="0" blurRad="101600" dist="38100" dir="2700000">
-              <a:srgbClr val="000000">
-                <a:alpha val="10000"/>
-              </a:srgbClr>
-            </a:outerShdw>
-          </a:effectLst>
-        </p:spPr>
-      </p:sp>
-      <p:sp>
-        <p:nvSpPr>
-          <p:cNvPr id="8" name="Text 6"/>
-          <p:cNvSpPr/>
-          <p:nvPr/>
-        </p:nvSpPr>
-        <p:spPr>
-          <a:xfrm>
-            <a:off x="3429000" y="1069848"/>
-            <a:ext cx="2468880" cy="320040"/>
-          </a:xfrm>
-          <a:prstGeom prst="rect">
-            <a:avLst/>
-          </a:prstGeom>
-          <a:noFill/>
-          <a:ln/>
-        </p:spPr>
-        <p:txBody>
-          <a:bodyPr wrap="square" lIns="0" tIns="0" rIns="0" bIns="0" rtlCol="0" anchor="ctr"/>
-          <a:lstStyle/>
-          <a:p>
-            <a:pPr indent="0" marL="0">
-              <a:buNone/>
-            </a:pPr>
-            <a:r>
-              <a:rPr lang="en-US" sz="1200" b="1" dirty="0">
-                <a:solidFill>
-                  <a:srgbClr val="2D6A4F"/>
-                </a:solidFill>
-                <a:latin typeface="Courier New" pitchFamily="34" charset="0"/>
-                <a:ea typeface="Courier New" pitchFamily="34" charset="-122"/>
-                <a:cs typeface="Courier New" pitchFamily="34" charset="-120"/>
-              </a:rPr>
-              <a:t>SheetJS (xlsx)</a:t>
-            </a:r>
-            <a:endParaRPr lang="en-US" sz="1200" dirty="0"/>
-          </a:p>
-        </p:txBody>
-      </p:sp>
-      <p:sp>
-        <p:nvSpPr>
-          <p:cNvPr id="9" name="Text 7"/>
-          <p:cNvSpPr/>
-          <p:nvPr/>
-        </p:nvSpPr>
-        <p:spPr>
-          <a:xfrm>
-            <a:off x="3429000" y="1399032"/>
-            <a:ext cx="2468880" cy="256032"/>
-          </a:xfrm>
-          <a:prstGeom prst="rect">
-            <a:avLst/>
-          </a:prstGeom>
-          <a:noFill/>
-          <a:ln/>
-        </p:spPr>
-        <p:txBody>
-          <a:bodyPr wrap="square" lIns="0" tIns="0" rIns="0" bIns="0" rtlCol="0" anchor="ctr"/>
-          <a:lstStyle/>
-          <a:p>
-            <a:pPr indent="0" marL="0">
-              <a:buNone/>
-            </a:pPr>
-            <a:r>
-              <a:rPr lang="en-US" sz="950" b="1" dirty="0">
-                <a:solidFill>
-                  <a:srgbClr val="1A1A18"/>
-                </a:solidFill>
-                <a:latin typeface="Calibri" pitchFamily="34" charset="0"/>
-                <a:ea typeface="Calibri" pitchFamily="34" charset="-122"/>
-                <a:cs typeface="Calibri" pitchFamily="34" charset="-120"/>
-              </a:rPr>
-              <a:t>Excel / CSV parsing</a:t>
-            </a:r>
-            <a:endParaRPr lang="en-US" sz="950" dirty="0"/>
-          </a:p>
-        </p:txBody>
-      </p:sp>
-      <p:sp>
-        <p:nvSpPr>
-          <p:cNvPr id="10" name="Text 8"/>
-          <p:cNvSpPr/>
-          <p:nvPr/>
-        </p:nvSpPr>
-        <p:spPr>
-          <a:xfrm>
-            <a:off x="3429000" y="1673352"/>
-            <a:ext cx="2468880" cy="777240"/>
-          </a:xfrm>
-          <a:prstGeom prst="rect">
-            <a:avLst/>
-          </a:prstGeom>
-          <a:noFill/>
-          <a:ln/>
-        </p:spPr>
-        <p:txBody>
-          <a:bodyPr wrap="square" lIns="0" tIns="0" rIns="0" bIns="0" rtlCol="0" anchor="ctr"/>
-          <a:lstStyle/>
-          <a:p>
-            <a:pPr indent="0" marL="0">
-              <a:buNone/>
-            </a:pPr>
-            <a:r>
-              <a:rPr lang="en-US" sz="900" dirty="0">
-                <a:solidFill>
-                  <a:srgbClr val="5A5952"/>
-                </a:solidFill>
-                <a:latin typeface="Calibri" pitchFamily="34" charset="0"/>
-                <a:ea typeface="Calibri" pitchFamily="34" charset="-122"/>
-                <a:cs typeface="Calibri" pitchFamily="34" charset="-120"/>
-              </a:rPr>
-              <a:t>Reads .xlsx, .xls and .csv. All sheets converted to HTML tables.</a:t>
-            </a:r>
-            <a:endParaRPr lang="en-US" sz="900" dirty="0"/>
-          </a:p>
-        </p:txBody>
-      </p:sp>
-      <p:sp>
-        <p:nvSpPr>
-          <p:cNvPr id="11" name="Shape 9"/>
-          <p:cNvSpPr/>
-          <p:nvPr/>
-        </p:nvSpPr>
-        <p:spPr>
-          <a:xfrm>
-            <a:off x="6217920" y="960120"/>
-            <a:ext cx="2743200" cy="1691640"/>
+          <a:effectLst/>
+        </p:spPr>
+        <p:style>
+          <a:lnRef idx="1">
+            <a:schemeClr val="accent1"/>
+          </a:lnRef>
+          <a:fillRef idx="3">
+            <a:schemeClr val="accent1"/>
+          </a:fillRef>
+          <a:effectRef idx="2">
+            <a:schemeClr val="accent1"/>
+          </a:effectRef>
+          <a:fontRef idx="minor">
+            <a:schemeClr val="lt1"/>
+          </a:fontRef>
+        </p:style>
+        <p:txBody>
+          <a:bodyPr rtlCol="0" anchor="ctr"/>
+          <a:lstStyle/>
+          <a:p>
+            <a:pPr algn="ctr"/>
+            <a:endParaRPr/>
+          </a:p>
+        </p:txBody>
+      </p:sp>
+      <p:sp>
+        <p:nvSpPr>
+          <p:cNvPr id="12" name="Rounded Rectangle 11"/>
+          <p:cNvSpPr/>
+          <p:nvPr/>
+        </p:nvSpPr>
+        <p:spPr>
+          <a:xfrm>
+            <a:off x="4846320" y="1417320"/>
+            <a:ext cx="2880360" cy="109728"/>
           </a:xfrm>
           <a:prstGeom prst="roundRect">
             <a:avLst>
-              <a:gd name="adj" fmla="val 5405"/>
+              <a:gd name="adj" fmla="val 8000"/>
             </a:avLst>
           </a:prstGeom>
           <a:solidFill>
-            <a:srgbClr val="F3EEFB"/>
+            <a:srgbClr val="D97706"/>
           </a:solidFill>
-          <a:ln w="19050">
-            <a:solidFill>
-              <a:srgbClr val="6B3FA0"/>
-            </a:solidFill>
-            <a:prstDash val="solid"/>
+          <a:ln>
+            <a:noFill/>
           </a:ln>
-          <a:effectLst>
-            <a:outerShdw sx="100000" sy="100000" kx="0" ky="0" algn="bl" rotWithShape="0" blurRad="101600" dist="38100" dir="2700000">
-              <a:srgbClr val="000000">
-                <a:alpha val="10000"/>
-              </a:srgbClr>
-            </a:outerShdw>
-          </a:effectLst>
-        </p:spPr>
-      </p:sp>
-      <p:sp>
-        <p:nvSpPr>
-          <p:cNvPr id="12" name="Text 10"/>
-          <p:cNvSpPr/>
-          <p:nvPr/>
-        </p:nvSpPr>
-        <p:spPr>
-          <a:xfrm>
-            <a:off x="6355080" y="1069848"/>
-            <a:ext cx="2468880" cy="320040"/>
-          </a:xfrm>
-          <a:prstGeom prst="rect">
-            <a:avLst/>
-          </a:prstGeom>
-          <a:noFill/>
-          <a:ln/>
-        </p:spPr>
-        <p:txBody>
-          <a:bodyPr wrap="square" lIns="0" tIns="0" rIns="0" bIns="0" rtlCol="0" anchor="ctr"/>
-          <a:lstStyle/>
-          <a:p>
-            <a:pPr indent="0" marL="0">
-              <a:buNone/>
-            </a:pPr>
-            <a:r>
-              <a:rPr lang="en-US" sz="1200" b="1" dirty="0">
-                <a:solidFill>
-                  <a:srgbClr val="6B3FA0"/>
-                </a:solidFill>
-                <a:latin typeface="Courier New" pitchFamily="34" charset="0"/>
-                <a:ea typeface="Courier New" pitchFamily="34" charset="-122"/>
-                <a:cs typeface="Courier New" pitchFamily="34" charset="-120"/>
-              </a:rPr>
-              <a:t>contenteditable</a:t>
-            </a:r>
-            <a:endParaRPr lang="en-US" sz="1200" dirty="0"/>
-          </a:p>
-        </p:txBody>
-      </p:sp>
-      <p:sp>
-        <p:nvSpPr>
-          <p:cNvPr id="13" name="Text 11"/>
-          <p:cNvSpPr/>
-          <p:nvPr/>
-        </p:nvSpPr>
-        <p:spPr>
-          <a:xfrm>
-            <a:off x="6355080" y="1399032"/>
-            <a:ext cx="2468880" cy="256032"/>
-          </a:xfrm>
-          <a:prstGeom prst="rect">
-            <a:avLst/>
-          </a:prstGeom>
-          <a:noFill/>
-          <a:ln/>
-        </p:spPr>
-        <p:txBody>
-          <a:bodyPr wrap="square" lIns="0" tIns="0" rIns="0" bIns="0" rtlCol="0" anchor="ctr"/>
-          <a:lstStyle/>
-          <a:p>
-            <a:pPr indent="0" marL="0">
-              <a:buNone/>
-            </a:pPr>
-            <a:r>
-              <a:rPr lang="en-US" sz="950" b="1" dirty="0">
-                <a:solidFill>
-                  <a:srgbClr val="1A1A18"/>
-                </a:solidFill>
-                <a:latin typeface="Calibri" pitchFamily="34" charset="0"/>
-                <a:ea typeface="Calibri" pitchFamily="34" charset="-122"/>
-                <a:cs typeface="Calibri" pitchFamily="34" charset="-120"/>
-              </a:rPr>
-              <a:t>Browser rich text editor</a:t>
-            </a:r>
-            <a:endParaRPr lang="en-US" sz="950" dirty="0"/>
-          </a:p>
-        </p:txBody>
-      </p:sp>
-      <p:sp>
-        <p:nvSpPr>
-          <p:cNvPr id="14" name="Text 12"/>
-          <p:cNvSpPr/>
-          <p:nvPr/>
-        </p:nvSpPr>
-        <p:spPr>
-          <a:xfrm>
-            <a:off x="6355080" y="1673352"/>
-            <a:ext cx="2468880" cy="777240"/>
-          </a:xfrm>
-          <a:prstGeom prst="rect">
-            <a:avLst/>
-          </a:prstGeom>
-          <a:noFill/>
-          <a:ln/>
-        </p:spPr>
-        <p:txBody>
-          <a:bodyPr wrap="square" lIns="0" tIns="0" rIns="0" bIns="0" rtlCol="0" anchor="ctr"/>
-          <a:lstStyle/>
-          <a:p>
-            <a:pPr indent="0" marL="0">
-              <a:buNone/>
-            </a:pPr>
-            <a:r>
-              <a:rPr lang="en-US" sz="900" dirty="0">
+          <a:effectLst/>
+        </p:spPr>
+        <p:style>
+          <a:lnRef idx="1">
+            <a:schemeClr val="accent1"/>
+          </a:lnRef>
+          <a:fillRef idx="3">
+            <a:schemeClr val="accent1"/>
+          </a:fillRef>
+          <a:effectRef idx="2">
+            <a:schemeClr val="accent1"/>
+          </a:effectRef>
+          <a:fontRef idx="minor">
+            <a:schemeClr val="lt1"/>
+          </a:fontRef>
+        </p:style>
+        <p:txBody>
+          <a:bodyPr rtlCol="0" anchor="ctr"/>
+          <a:lstStyle/>
+          <a:p>
+            <a:pPr algn="ctr"/>
+            <a:endParaRPr/>
+          </a:p>
+        </p:txBody>
+      </p:sp>
+      <p:sp>
+        <p:nvSpPr>
+          <p:cNvPr id="13" name="TextBox 12"/>
+          <p:cNvSpPr txBox="1"/>
+          <p:nvPr/>
+        </p:nvSpPr>
+        <p:spPr>
+          <a:xfrm>
+            <a:off x="8183879" y="1280160"/>
+            <a:ext cx="548640" cy="365760"/>
+          </a:xfrm>
+          <a:prstGeom prst="rect">
+            <a:avLst/>
+          </a:prstGeom>
+          <a:noFill/>
+        </p:spPr>
+        <p:txBody>
+          <a:bodyPr wrap="square" lIns="0" tIns="0" rIns="0" bIns="0" anchor="t">
+            <a:spAutoFit/>
+          </a:bodyPr>
+          <a:lstStyle/>
+          <a:p>
+            <a:pPr algn="l"/>
+            <a:r>
+              <a:rPr sz="1400" b="1" i="0">
+                <a:solidFill>
+                  <a:srgbClr val="D97706"/>
+                </a:solidFill>
+                <a:latin typeface="Courier New"/>
+              </a:rPr>
+              <a:t>90%</a:t>
+            </a:r>
+          </a:p>
+        </p:txBody>
+      </p:sp>
+      <p:sp>
+        <p:nvSpPr>
+          <p:cNvPr id="14" name="TextBox 13"/>
+          <p:cNvSpPr txBox="1"/>
+          <p:nvPr/>
+        </p:nvSpPr>
+        <p:spPr>
+          <a:xfrm>
+            <a:off x="4846320" y="1627632"/>
+            <a:ext cx="3200400" cy="228600"/>
+          </a:xfrm>
+          <a:prstGeom prst="rect">
+            <a:avLst/>
+          </a:prstGeom>
+          <a:noFill/>
+        </p:spPr>
+        <p:txBody>
+          <a:bodyPr wrap="square" lIns="0" tIns="0" rIns="0" bIns="0" anchor="t">
+            <a:spAutoFit/>
+          </a:bodyPr>
+          <a:lstStyle/>
+          <a:p>
+            <a:pPr algn="l"/>
+            <a:r>
+              <a:rPr sz="800" b="0" i="0">
                 <a:solidFill>
                   <a:srgbClr val="5A5952"/>
                 </a:solidFill>
-                <a:latin typeface="Calibri" pitchFamily="34" charset="0"/>
-                <a:ea typeface="Calibri" pitchFamily="34" charset="-122"/>
-                <a:cs typeface="Calibri" pitchFamily="34" charset="-120"/>
-              </a:rPr>
-              <a:t>Native browser API. sanitizeEditorHtml() normalises output before rules run.</a:t>
-            </a:r>
-            <a:endParaRPr lang="en-US" sz="900" dirty="0"/>
-          </a:p>
-        </p:txBody>
-      </p:sp>
-      <p:sp>
-        <p:nvSpPr>
-          <p:cNvPr id="15" name="Shape 13"/>
-          <p:cNvSpPr/>
-          <p:nvPr/>
-        </p:nvSpPr>
-        <p:spPr>
-          <a:xfrm>
-            <a:off x="365760" y="2880360"/>
-            <a:ext cx="2743200" cy="1691640"/>
+                <a:latin typeface="Calibri"/>
+              </a:rPr>
+              <a:t>PASS RATE</a:t>
+            </a:r>
+          </a:p>
+        </p:txBody>
+      </p:sp>
+      <p:sp>
+        <p:nvSpPr>
+          <p:cNvPr id="15" name="Rounded Rectangle 14"/>
+          <p:cNvSpPr/>
+          <p:nvPr/>
+        </p:nvSpPr>
+        <p:spPr>
+          <a:xfrm>
+            <a:off x="365760" y="2103120"/>
+            <a:ext cx="5120640" cy="2514600"/>
           </a:xfrm>
           <a:prstGeom prst="roundRect">
             <a:avLst>
-              <a:gd name="adj" fmla="val 5405"/>
+              <a:gd name="adj" fmla="val 8000"/>
             </a:avLst>
           </a:prstGeom>
           <a:solidFill>
-            <a:srgbClr val="FFF8EE"/>
+            <a:srgbClr val="FFFFFF"/>
           </a:solidFill>
-          <a:ln w="19050">
+          <a:ln w="12700">
             <a:solidFill>
-              <a:srgbClr val="D97706"/>
+              <a:srgbClr val="E2E0D8"/>
             </a:solidFill>
-            <a:prstDash val="solid"/>
           </a:ln>
-          <a:effectLst>
-            <a:outerShdw sx="100000" sy="100000" kx="0" ky="0" algn="bl" rotWithShape="0" blurRad="101600" dist="38100" dir="2700000">
-              <a:srgbClr val="000000">
-                <a:alpha val="10000"/>
-              </a:srgbClr>
-            </a:outerShdw>
-          </a:effectLst>
-        </p:spPr>
-      </p:sp>
-      <p:sp>
-        <p:nvSpPr>
-          <p:cNvPr id="16" name="Text 14"/>
-          <p:cNvSpPr/>
-          <p:nvPr/>
-        </p:nvSpPr>
-        <p:spPr>
-          <a:xfrm>
-            <a:off x="502920" y="2990088"/>
-            <a:ext cx="2468880" cy="320040"/>
-          </a:xfrm>
-          <a:prstGeom prst="rect">
-            <a:avLst/>
-          </a:prstGeom>
-          <a:noFill/>
-          <a:ln/>
-        </p:spPr>
-        <p:txBody>
-          <a:bodyPr wrap="square" lIns="0" tIns="0" rIns="0" bIns="0" rtlCol="0" anchor="ctr"/>
-          <a:lstStyle/>
-          <a:p>
-            <a:pPr indent="0" marL="0">
-              <a:buNone/>
-            </a:pPr>
-            <a:r>
-              <a:rPr lang="en-US" sz="1200" b="1" dirty="0">
-                <a:solidFill>
-                  <a:srgbClr val="D97706"/>
-                </a:solidFill>
-                <a:latin typeface="Courier New" pitchFamily="34" charset="0"/>
-                <a:ea typeface="Courier New" pitchFamily="34" charset="-122"/>
-                <a:cs typeface="Courier New" pitchFamily="34" charset="-120"/>
-              </a:rPr>
-              <a:t>DOMParser</a:t>
-            </a:r>
-            <a:endParaRPr lang="en-US" sz="1200" dirty="0"/>
-          </a:p>
-        </p:txBody>
-      </p:sp>
-      <p:sp>
-        <p:nvSpPr>
-          <p:cNvPr id="17" name="Text 15"/>
-          <p:cNvSpPr/>
-          <p:nvPr/>
-        </p:nvSpPr>
-        <p:spPr>
-          <a:xfrm>
-            <a:off x="502920" y="3319272"/>
-            <a:ext cx="2468880" cy="256032"/>
-          </a:xfrm>
-          <a:prstGeom prst="rect">
-            <a:avLst/>
-          </a:prstGeom>
-          <a:noFill/>
-          <a:ln/>
-        </p:spPr>
-        <p:txBody>
-          <a:bodyPr wrap="square" lIns="0" tIns="0" rIns="0" bIns="0" rtlCol="0" anchor="ctr"/>
-          <a:lstStyle/>
-          <a:p>
-            <a:pPr indent="0" marL="0">
-              <a:buNone/>
-            </a:pPr>
-            <a:r>
-              <a:rPr lang="en-US" sz="950" b="1" dirty="0">
+          <a:effectLst/>
+        </p:spPr>
+        <p:style>
+          <a:lnRef idx="1">
+            <a:schemeClr val="accent1"/>
+          </a:lnRef>
+          <a:fillRef idx="3">
+            <a:schemeClr val="accent1"/>
+          </a:fillRef>
+          <a:effectRef idx="2">
+            <a:schemeClr val="accent1"/>
+          </a:effectRef>
+          <a:fontRef idx="minor">
+            <a:schemeClr val="lt1"/>
+          </a:fontRef>
+        </p:style>
+        <p:txBody>
+          <a:bodyPr rtlCol="0" anchor="ctr"/>
+          <a:lstStyle/>
+          <a:p>
+            <a:pPr algn="ctr"/>
+            <a:endParaRPr/>
+          </a:p>
+        </p:txBody>
+      </p:sp>
+      <p:sp>
+        <p:nvSpPr>
+          <p:cNvPr id="16" name="TextBox 15"/>
+          <p:cNvSpPr txBox="1"/>
+          <p:nvPr/>
+        </p:nvSpPr>
+        <p:spPr>
+          <a:xfrm>
+            <a:off x="502920" y="2212848"/>
+            <a:ext cx="274320" cy="274320"/>
+          </a:xfrm>
+          <a:prstGeom prst="rect">
+            <a:avLst/>
+          </a:prstGeom>
+          <a:noFill/>
+        </p:spPr>
+        <p:txBody>
+          <a:bodyPr wrap="square" lIns="0" tIns="0" rIns="0" bIns="0" anchor="t">
+            <a:spAutoFit/>
+          </a:bodyPr>
+          <a:lstStyle/>
+          <a:p>
+            <a:pPr algn="l"/>
+            <a:r>
+              <a:rPr sz="1200" b="1" i="0">
+                <a:solidFill>
+                  <a:srgbClr val="2D6A4F"/>
+                </a:solidFill>
+                <a:latin typeface="Calibri"/>
+              </a:rPr>
+              <a:t>✓</a:t>
+            </a:r>
+          </a:p>
+        </p:txBody>
+      </p:sp>
+      <p:sp>
+        <p:nvSpPr>
+          <p:cNvPr id="17" name="TextBox 16"/>
+          <p:cNvSpPr txBox="1"/>
+          <p:nvPr/>
+        </p:nvSpPr>
+        <p:spPr>
+          <a:xfrm>
+            <a:off x="822960" y="2212848"/>
+            <a:ext cx="3566160" cy="274320"/>
+          </a:xfrm>
+          <a:prstGeom prst="rect">
+            <a:avLst/>
+          </a:prstGeom>
+          <a:noFill/>
+        </p:spPr>
+        <p:txBody>
+          <a:bodyPr wrap="square" lIns="0" tIns="0" rIns="0" bIns="0" anchor="t">
+            <a:spAutoFit/>
+          </a:bodyPr>
+          <a:lstStyle/>
+          <a:p>
+            <a:pPr algn="l"/>
+            <a:r>
+              <a:rPr sz="1000" b="0" i="0">
                 <a:solidFill>
                   <a:srgbClr val="1A1A18"/>
                 </a:solidFill>
-                <a:latin typeface="Calibri" pitchFamily="34" charset="0"/>
-                <a:ea typeface="Calibri" pitchFamily="34" charset="-122"/>
-                <a:cs typeface="Calibri" pitchFamily="34" charset="-120"/>
-              </a:rPr>
-              <a:t>HTML transformation</a:t>
-            </a:r>
-            <a:endParaRPr lang="en-US" sz="950" dirty="0"/>
-          </a:p>
-        </p:txBody>
-      </p:sp>
-      <p:sp>
-        <p:nvSpPr>
-          <p:cNvPr id="18" name="Text 16"/>
-          <p:cNvSpPr/>
-          <p:nvPr/>
-        </p:nvSpPr>
-        <p:spPr>
-          <a:xfrm>
-            <a:off x="502920" y="3593592"/>
-            <a:ext cx="2468880" cy="777240"/>
-          </a:xfrm>
-          <a:prstGeom prst="rect">
-            <a:avLst/>
-          </a:prstGeom>
-          <a:noFill/>
-          <a:ln/>
-        </p:spPr>
-        <p:txBody>
-          <a:bodyPr wrap="square" lIns="0" tIns="0" rIns="0" bIns="0" rtlCol="0" anchor="ctr"/>
-          <a:lstStyle/>
-          <a:p>
-            <a:pPr indent="0" marL="0">
-              <a:buNone/>
-            </a:pPr>
-            <a:r>
-              <a:rPr lang="en-US" sz="900" dirty="0">
+                <a:latin typeface="Calibri"/>
+              </a:rPr>
+              <a:t>No &lt;h1&gt; tags in output (h1 → h2)</a:t>
+            </a:r>
+          </a:p>
+        </p:txBody>
+      </p:sp>
+      <p:sp>
+        <p:nvSpPr>
+          <p:cNvPr id="18" name="TextBox 17"/>
+          <p:cNvSpPr txBox="1"/>
+          <p:nvPr/>
+        </p:nvSpPr>
+        <p:spPr>
+          <a:xfrm>
+            <a:off x="4434840" y="2231136"/>
+            <a:ext cx="868680" cy="228600"/>
+          </a:xfrm>
+          <a:prstGeom prst="rect">
+            <a:avLst/>
+          </a:prstGeom>
+          <a:noFill/>
+        </p:spPr>
+        <p:txBody>
+          <a:bodyPr wrap="square" lIns="0" tIns="0" rIns="0" bIns="0" anchor="t">
+            <a:spAutoFit/>
+          </a:bodyPr>
+          <a:lstStyle/>
+          <a:p>
+            <a:pPr algn="l"/>
+            <a:r>
+              <a:rPr sz="850" b="0" i="0">
                 <a:solidFill>
                   <a:srgbClr val="5A5952"/>
                 </a:solidFill>
-                <a:latin typeface="Calibri" pitchFamily="34" charset="0"/>
-                <a:ea typeface="Calibri" pitchFamily="34" charset="-122"/>
-                <a:cs typeface="Calibri" pitchFamily="34" charset="-120"/>
-              </a:rPr>
-              <a:t>All DOM-based rules run in a detached document — never touches the live page.</a:t>
-            </a:r>
-            <a:endParaRPr lang="en-US" sz="900" dirty="0"/>
-          </a:p>
-        </p:txBody>
-      </p:sp>
-      <p:sp>
-        <p:nvSpPr>
-          <p:cNvPr id="19" name="Shape 17"/>
-          <p:cNvSpPr/>
-          <p:nvPr/>
-        </p:nvSpPr>
-        <p:spPr>
-          <a:xfrm>
-            <a:off x="3291840" y="2880360"/>
-            <a:ext cx="2743200" cy="1691640"/>
+                <a:latin typeface="Courier New"/>
+              </a:rPr>
+              <a:t>Rule 1</a:t>
+            </a:r>
+          </a:p>
+        </p:txBody>
+      </p:sp>
+      <p:sp>
+        <p:nvSpPr>
+          <p:cNvPr id="19" name="TextBox 18"/>
+          <p:cNvSpPr txBox="1"/>
+          <p:nvPr/>
+        </p:nvSpPr>
+        <p:spPr>
+          <a:xfrm>
+            <a:off x="502920" y="2528315"/>
+            <a:ext cx="274320" cy="274320"/>
+          </a:xfrm>
+          <a:prstGeom prst="rect">
+            <a:avLst/>
+          </a:prstGeom>
+          <a:noFill/>
+        </p:spPr>
+        <p:txBody>
+          <a:bodyPr wrap="square" lIns="0" tIns="0" rIns="0" bIns="0" anchor="t">
+            <a:spAutoFit/>
+          </a:bodyPr>
+          <a:lstStyle/>
+          <a:p>
+            <a:pPr algn="l"/>
+            <a:r>
+              <a:rPr sz="1200" b="1" i="0">
+                <a:solidFill>
+                  <a:srgbClr val="2D6A4F"/>
+                </a:solidFill>
+                <a:latin typeface="Calibri"/>
+              </a:rPr>
+              <a:t>✓</a:t>
+            </a:r>
+          </a:p>
+        </p:txBody>
+      </p:sp>
+      <p:sp>
+        <p:nvSpPr>
+          <p:cNvPr id="20" name="TextBox 19"/>
+          <p:cNvSpPr txBox="1"/>
+          <p:nvPr/>
+        </p:nvSpPr>
+        <p:spPr>
+          <a:xfrm>
+            <a:off x="822960" y="2528315"/>
+            <a:ext cx="3566160" cy="274320"/>
+          </a:xfrm>
+          <a:prstGeom prst="rect">
+            <a:avLst/>
+          </a:prstGeom>
+          <a:noFill/>
+        </p:spPr>
+        <p:txBody>
+          <a:bodyPr wrap="square" lIns="0" tIns="0" rIns="0" bIns="0" anchor="t">
+            <a:spAutoFit/>
+          </a:bodyPr>
+          <a:lstStyle/>
+          <a:p>
+            <a:pPr algn="l"/>
+            <a:r>
+              <a:rPr sz="1000" b="0" i="0">
+                <a:solidFill>
+                  <a:srgbClr val="1A1A18"/>
+                </a:solidFill>
+                <a:latin typeface="Calibri"/>
+              </a:rPr>
+              <a:t>No &lt;b&gt; tags in output (b → strong)</a:t>
+            </a:r>
+          </a:p>
+        </p:txBody>
+      </p:sp>
+      <p:sp>
+        <p:nvSpPr>
+          <p:cNvPr id="21" name="TextBox 20"/>
+          <p:cNvSpPr txBox="1"/>
+          <p:nvPr/>
+        </p:nvSpPr>
+        <p:spPr>
+          <a:xfrm>
+            <a:off x="4434840" y="2546603"/>
+            <a:ext cx="868680" cy="228600"/>
+          </a:xfrm>
+          <a:prstGeom prst="rect">
+            <a:avLst/>
+          </a:prstGeom>
+          <a:noFill/>
+        </p:spPr>
+        <p:txBody>
+          <a:bodyPr wrap="square" lIns="0" tIns="0" rIns="0" bIns="0" anchor="t">
+            <a:spAutoFit/>
+          </a:bodyPr>
+          <a:lstStyle/>
+          <a:p>
+            <a:pPr algn="l"/>
+            <a:r>
+              <a:rPr sz="850" b="0" i="0">
+                <a:solidFill>
+                  <a:srgbClr val="5A5952"/>
+                </a:solidFill>
+                <a:latin typeface="Courier New"/>
+              </a:rPr>
+              <a:t>Rule 4</a:t>
+            </a:r>
+          </a:p>
+        </p:txBody>
+      </p:sp>
+      <p:sp>
+        <p:nvSpPr>
+          <p:cNvPr id="22" name="TextBox 21"/>
+          <p:cNvSpPr txBox="1"/>
+          <p:nvPr/>
+        </p:nvSpPr>
+        <p:spPr>
+          <a:xfrm>
+            <a:off x="502920" y="2843783"/>
+            <a:ext cx="274320" cy="274320"/>
+          </a:xfrm>
+          <a:prstGeom prst="rect">
+            <a:avLst/>
+          </a:prstGeom>
+          <a:noFill/>
+        </p:spPr>
+        <p:txBody>
+          <a:bodyPr wrap="square" lIns="0" tIns="0" rIns="0" bIns="0" anchor="t">
+            <a:spAutoFit/>
+          </a:bodyPr>
+          <a:lstStyle/>
+          <a:p>
+            <a:pPr algn="l"/>
+            <a:r>
+              <a:rPr sz="1200" b="1" i="0">
+                <a:solidFill>
+                  <a:srgbClr val="2D6A4F"/>
+                </a:solidFill>
+                <a:latin typeface="Calibri"/>
+              </a:rPr>
+              <a:t>✓</a:t>
+            </a:r>
+          </a:p>
+        </p:txBody>
+      </p:sp>
+      <p:sp>
+        <p:nvSpPr>
+          <p:cNvPr id="23" name="TextBox 22"/>
+          <p:cNvSpPr txBox="1"/>
+          <p:nvPr/>
+        </p:nvSpPr>
+        <p:spPr>
+          <a:xfrm>
+            <a:off x="822960" y="2843783"/>
+            <a:ext cx="3566160" cy="274320"/>
+          </a:xfrm>
+          <a:prstGeom prst="rect">
+            <a:avLst/>
+          </a:prstGeom>
+          <a:noFill/>
+        </p:spPr>
+        <p:txBody>
+          <a:bodyPr wrap="square" lIns="0" tIns="0" rIns="0" bIns="0" anchor="t">
+            <a:spAutoFit/>
+          </a:bodyPr>
+          <a:lstStyle/>
+          <a:p>
+            <a:pPr algn="l"/>
+            <a:r>
+              <a:rPr sz="1000" b="0" i="0">
+                <a:solidFill>
+                  <a:srgbClr val="1A1A18"/>
+                </a:solidFill>
+                <a:latin typeface="Calibri"/>
+              </a:rPr>
+              <a:t>No &lt;u&gt; tags (underline removed)</a:t>
+            </a:r>
+          </a:p>
+        </p:txBody>
+      </p:sp>
+      <p:sp>
+        <p:nvSpPr>
+          <p:cNvPr id="24" name="TextBox 23"/>
+          <p:cNvSpPr txBox="1"/>
+          <p:nvPr/>
+        </p:nvSpPr>
+        <p:spPr>
+          <a:xfrm>
+            <a:off x="4434840" y="2862071"/>
+            <a:ext cx="868680" cy="228600"/>
+          </a:xfrm>
+          <a:prstGeom prst="rect">
+            <a:avLst/>
+          </a:prstGeom>
+          <a:noFill/>
+        </p:spPr>
+        <p:txBody>
+          <a:bodyPr wrap="square" lIns="0" tIns="0" rIns="0" bIns="0" anchor="t">
+            <a:spAutoFit/>
+          </a:bodyPr>
+          <a:lstStyle/>
+          <a:p>
+            <a:pPr algn="l"/>
+            <a:r>
+              <a:rPr sz="850" b="0" i="0">
+                <a:solidFill>
+                  <a:srgbClr val="5A5952"/>
+                </a:solidFill>
+                <a:latin typeface="Courier New"/>
+              </a:rPr>
+              <a:t>Rule 6</a:t>
+            </a:r>
+          </a:p>
+        </p:txBody>
+      </p:sp>
+      <p:sp>
+        <p:nvSpPr>
+          <p:cNvPr id="25" name="TextBox 24"/>
+          <p:cNvSpPr txBox="1"/>
+          <p:nvPr/>
+        </p:nvSpPr>
+        <p:spPr>
+          <a:xfrm>
+            <a:off x="502920" y="3159251"/>
+            <a:ext cx="274320" cy="274320"/>
+          </a:xfrm>
+          <a:prstGeom prst="rect">
+            <a:avLst/>
+          </a:prstGeom>
+          <a:noFill/>
+        </p:spPr>
+        <p:txBody>
+          <a:bodyPr wrap="square" lIns="0" tIns="0" rIns="0" bIns="0" anchor="t">
+            <a:spAutoFit/>
+          </a:bodyPr>
+          <a:lstStyle/>
+          <a:p>
+            <a:pPr algn="l"/>
+            <a:r>
+              <a:rPr sz="1200" b="1" i="0">
+                <a:solidFill>
+                  <a:srgbClr val="C84B31"/>
+                </a:solidFill>
+                <a:latin typeface="Calibri"/>
+              </a:rPr>
+              <a:t>✗</a:t>
+            </a:r>
+          </a:p>
+        </p:txBody>
+      </p:sp>
+      <p:sp>
+        <p:nvSpPr>
+          <p:cNvPr id="26" name="TextBox 25"/>
+          <p:cNvSpPr txBox="1"/>
+          <p:nvPr/>
+        </p:nvSpPr>
+        <p:spPr>
+          <a:xfrm>
+            <a:off x="822960" y="3159251"/>
+            <a:ext cx="3566160" cy="274320"/>
+          </a:xfrm>
+          <a:prstGeom prst="rect">
+            <a:avLst/>
+          </a:prstGeom>
+          <a:noFill/>
+        </p:spPr>
+        <p:txBody>
+          <a:bodyPr wrap="square" lIns="0" tIns="0" rIns="0" bIns="0" anchor="t">
+            <a:spAutoFit/>
+          </a:bodyPr>
+          <a:lstStyle/>
+          <a:p>
+            <a:pPr algn="l"/>
+            <a:r>
+              <a:rPr sz="1000" b="0" i="0">
+                <a:solidFill>
+                  <a:srgbClr val="1A1A18"/>
+                </a:solidFill>
+                <a:latin typeface="Calibri"/>
+              </a:rPr>
+              <a:t>No &amp;nbsp; entities in output</a:t>
+            </a:r>
+          </a:p>
+        </p:txBody>
+      </p:sp>
+      <p:sp>
+        <p:nvSpPr>
+          <p:cNvPr id="27" name="Rounded Rectangle 26"/>
+          <p:cNvSpPr/>
+          <p:nvPr/>
+        </p:nvSpPr>
+        <p:spPr>
+          <a:xfrm>
+            <a:off x="4434840" y="3177539"/>
+            <a:ext cx="777240" cy="219456"/>
           </a:xfrm>
           <a:prstGeom prst="roundRect">
             <a:avLst>
-              <a:gd name="adj" fmla="val 5405"/>
+              <a:gd name="adj" fmla="val 8000"/>
             </a:avLst>
           </a:prstGeom>
           <a:solidFill>
-            <a:srgbClr val="FFF0EE"/>
+            <a:srgbClr val="C84B31"/>
           </a:solidFill>
-          <a:ln w="19050">
-            <a:solidFill>
-              <a:srgbClr val="C84B31"/>
-            </a:solidFill>
-            <a:prstDash val="solid"/>
+          <a:ln>
+            <a:noFill/>
           </a:ln>
-          <a:effectLst>
-            <a:outerShdw sx="100000" sy="100000" kx="0" ky="0" algn="bl" rotWithShape="0" blurRad="101600" dist="38100" dir="2700000">
-              <a:srgbClr val="000000">
-                <a:alpha val="10000"/>
-              </a:srgbClr>
-            </a:outerShdw>
-          </a:effectLst>
-        </p:spPr>
-      </p:sp>
-      <p:sp>
-        <p:nvSpPr>
-          <p:cNvPr id="20" name="Text 18"/>
-          <p:cNvSpPr/>
-          <p:nvPr/>
-        </p:nvSpPr>
-        <p:spPr>
-          <a:xfrm>
-            <a:off x="3429000" y="2990088"/>
-            <a:ext cx="2468880" cy="320040"/>
-          </a:xfrm>
-          <a:prstGeom prst="rect">
-            <a:avLst/>
-          </a:prstGeom>
-          <a:noFill/>
-          <a:ln/>
-        </p:spPr>
-        <p:txBody>
-          <a:bodyPr wrap="square" lIns="0" tIns="0" rIns="0" bIns="0" rtlCol="0" anchor="ctr"/>
-          <a:lstStyle/>
-          <a:p>
-            <a:pPr indent="0" marL="0">
-              <a:buNone/>
-            </a:pPr>
-            <a:r>
-              <a:rPr lang="en-US" sz="1200" b="1" dirty="0">
+          <a:effectLst/>
+        </p:spPr>
+        <p:style>
+          <a:lnRef idx="1">
+            <a:schemeClr val="accent1"/>
+          </a:lnRef>
+          <a:fillRef idx="3">
+            <a:schemeClr val="accent1"/>
+          </a:fillRef>
+          <a:effectRef idx="2">
+            <a:schemeClr val="accent1"/>
+          </a:effectRef>
+          <a:fontRef idx="minor">
+            <a:schemeClr val="lt1"/>
+          </a:fontRef>
+        </p:style>
+        <p:txBody>
+          <a:bodyPr rtlCol="0" anchor="ctr"/>
+          <a:lstStyle/>
+          <a:p>
+            <a:pPr algn="ctr"/>
+            <a:endParaRPr/>
+          </a:p>
+        </p:txBody>
+      </p:sp>
+      <p:sp>
+        <p:nvSpPr>
+          <p:cNvPr id="28" name="TextBox 27"/>
+          <p:cNvSpPr txBox="1"/>
+          <p:nvPr/>
+        </p:nvSpPr>
+        <p:spPr>
+          <a:xfrm>
+            <a:off x="4434840" y="3204971"/>
+            <a:ext cx="777240" cy="182880"/>
+          </a:xfrm>
+          <a:prstGeom prst="rect">
+            <a:avLst/>
+          </a:prstGeom>
+          <a:noFill/>
+        </p:spPr>
+        <p:txBody>
+          <a:bodyPr wrap="square" lIns="0" tIns="0" rIns="0" bIns="0" anchor="t">
+            <a:spAutoFit/>
+          </a:bodyPr>
+          <a:lstStyle/>
+          <a:p>
+            <a:pPr algn="ctr"/>
+            <a:r>
+              <a:rPr sz="800" b="1" i="0">
+                <a:solidFill>
+                  <a:srgbClr val="FFFFFF"/>
+                </a:solidFill>
+                <a:latin typeface="Courier New"/>
+              </a:rPr>
+              <a:t>Line 14</a:t>
+            </a:r>
+          </a:p>
+        </p:txBody>
+      </p:sp>
+      <p:sp>
+        <p:nvSpPr>
+          <p:cNvPr id="29" name="TextBox 28"/>
+          <p:cNvSpPr txBox="1"/>
+          <p:nvPr/>
+        </p:nvSpPr>
+        <p:spPr>
+          <a:xfrm>
+            <a:off x="502920" y="3474719"/>
+            <a:ext cx="274320" cy="274320"/>
+          </a:xfrm>
+          <a:prstGeom prst="rect">
+            <a:avLst/>
+          </a:prstGeom>
+          <a:noFill/>
+        </p:spPr>
+        <p:txBody>
+          <a:bodyPr wrap="square" lIns="0" tIns="0" rIns="0" bIns="0" anchor="t">
+            <a:spAutoFit/>
+          </a:bodyPr>
+          <a:lstStyle/>
+          <a:p>
+            <a:pPr algn="l"/>
+            <a:r>
+              <a:rPr sz="1200" b="1" i="0">
+                <a:solidFill>
+                  <a:srgbClr val="2D6A4F"/>
+                </a:solidFill>
+                <a:latin typeface="Calibri"/>
+              </a:rPr>
+              <a:t>✓</a:t>
+            </a:r>
+          </a:p>
+        </p:txBody>
+      </p:sp>
+      <p:sp>
+        <p:nvSpPr>
+          <p:cNvPr id="30" name="TextBox 29"/>
+          <p:cNvSpPr txBox="1"/>
+          <p:nvPr/>
+        </p:nvSpPr>
+        <p:spPr>
+          <a:xfrm>
+            <a:off x="822960" y="3474719"/>
+            <a:ext cx="3566160" cy="274320"/>
+          </a:xfrm>
+          <a:prstGeom prst="rect">
+            <a:avLst/>
+          </a:prstGeom>
+          <a:noFill/>
+        </p:spPr>
+        <p:txBody>
+          <a:bodyPr wrap="square" lIns="0" tIns="0" rIns="0" bIns="0" anchor="t">
+            <a:spAutoFit/>
+          </a:bodyPr>
+          <a:lstStyle/>
+          <a:p>
+            <a:pPr algn="l"/>
+            <a:r>
+              <a:rPr sz="1000" b="0" i="0">
+                <a:solidFill>
+                  <a:srgbClr val="1A1A18"/>
+                </a:solidFill>
+                <a:latin typeface="Calibri"/>
+              </a:rPr>
+              <a:t>No &lt;s&gt;, &lt;del&gt;, &lt;strike&gt; tags</a:t>
+            </a:r>
+          </a:p>
+        </p:txBody>
+      </p:sp>
+      <p:sp>
+        <p:nvSpPr>
+          <p:cNvPr id="31" name="TextBox 30"/>
+          <p:cNvSpPr txBox="1"/>
+          <p:nvPr/>
+        </p:nvSpPr>
+        <p:spPr>
+          <a:xfrm>
+            <a:off x="4434840" y="3493007"/>
+            <a:ext cx="868680" cy="228600"/>
+          </a:xfrm>
+          <a:prstGeom prst="rect">
+            <a:avLst/>
+          </a:prstGeom>
+          <a:noFill/>
+        </p:spPr>
+        <p:txBody>
+          <a:bodyPr wrap="square" lIns="0" tIns="0" rIns="0" bIns="0" anchor="t">
+            <a:spAutoFit/>
+          </a:bodyPr>
+          <a:lstStyle/>
+          <a:p>
+            <a:pPr algn="l"/>
+            <a:r>
+              <a:rPr sz="850" b="0" i="0">
+                <a:solidFill>
+                  <a:srgbClr val="5A5952"/>
+                </a:solidFill>
+                <a:latin typeface="Courier New"/>
+              </a:rPr>
+              <a:t>Rule D</a:t>
+            </a:r>
+          </a:p>
+        </p:txBody>
+      </p:sp>
+      <p:sp>
+        <p:nvSpPr>
+          <p:cNvPr id="32" name="TextBox 31"/>
+          <p:cNvSpPr txBox="1"/>
+          <p:nvPr/>
+        </p:nvSpPr>
+        <p:spPr>
+          <a:xfrm>
+            <a:off x="502920" y="3790187"/>
+            <a:ext cx="274320" cy="274320"/>
+          </a:xfrm>
+          <a:prstGeom prst="rect">
+            <a:avLst/>
+          </a:prstGeom>
+          <a:noFill/>
+        </p:spPr>
+        <p:txBody>
+          <a:bodyPr wrap="square" lIns="0" tIns="0" rIns="0" bIns="0" anchor="t">
+            <a:spAutoFit/>
+          </a:bodyPr>
+          <a:lstStyle/>
+          <a:p>
+            <a:pPr algn="l"/>
+            <a:r>
+              <a:rPr sz="1200" b="1" i="0">
                 <a:solidFill>
                   <a:srgbClr val="C84B31"/>
                 </a:solidFill>
-                <a:latin typeface="Courier New" pitchFamily="34" charset="0"/>
-                <a:ea typeface="Courier New" pitchFamily="34" charset="-122"/>
-                <a:cs typeface="Courier New" pitchFamily="34" charset="-120"/>
-              </a:rPr>
-              <a:t>execCommand API</a:t>
-            </a:r>
-            <a:endParaRPr lang="en-US" sz="1200" dirty="0"/>
-          </a:p>
-        </p:txBody>
-      </p:sp>
-      <p:sp>
-        <p:nvSpPr>
-          <p:cNvPr id="21" name="Text 19"/>
-          <p:cNvSpPr/>
-          <p:nvPr/>
-        </p:nvSpPr>
-        <p:spPr>
-          <a:xfrm>
-            <a:off x="3429000" y="3319272"/>
-            <a:ext cx="2468880" cy="256032"/>
-          </a:xfrm>
-          <a:prstGeom prst="rect">
-            <a:avLst/>
-          </a:prstGeom>
-          <a:noFill/>
-          <a:ln/>
-        </p:spPr>
-        <p:txBody>
-          <a:bodyPr wrap="square" lIns="0" tIns="0" rIns="0" bIns="0" rtlCol="0" anchor="ctr"/>
-          <a:lstStyle/>
-          <a:p>
-            <a:pPr indent="0" marL="0">
-              <a:buNone/>
-            </a:pPr>
-            <a:r>
-              <a:rPr lang="en-US" sz="950" b="1" dirty="0">
+                <a:latin typeface="Calibri"/>
+              </a:rPr>
+              <a:t>✗</a:t>
+            </a:r>
+          </a:p>
+        </p:txBody>
+      </p:sp>
+      <p:sp>
+        <p:nvSpPr>
+          <p:cNvPr id="33" name="TextBox 32"/>
+          <p:cNvSpPr txBox="1"/>
+          <p:nvPr/>
+        </p:nvSpPr>
+        <p:spPr>
+          <a:xfrm>
+            <a:off x="822960" y="3790187"/>
+            <a:ext cx="3566160" cy="274320"/>
+          </a:xfrm>
+          <a:prstGeom prst="rect">
+            <a:avLst/>
+          </a:prstGeom>
+          <a:noFill/>
+        </p:spPr>
+        <p:txBody>
+          <a:bodyPr wrap="square" lIns="0" tIns="0" rIns="0" bIns="0" anchor="t">
+            <a:spAutoFit/>
+          </a:bodyPr>
+          <a:lstStyle/>
+          <a:p>
+            <a:pPr algn="l"/>
+            <a:r>
+              <a:rPr sz="1000" b="0" i="0">
                 <a:solidFill>
                   <a:srgbClr val="1A1A18"/>
                 </a:solidFill>
-                <a:latin typeface="Calibri" pitchFamily="34" charset="0"/>
-                <a:ea typeface="Calibri" pitchFamily="34" charset="-122"/>
-                <a:cs typeface="Calibri" pitchFamily="34" charset="-120"/>
-              </a:rPr>
-              <a:t>Toolbar formatting</a:t>
-            </a:r>
-            <a:endParaRPr lang="en-US" sz="950" dirty="0"/>
-          </a:p>
-        </p:txBody>
-      </p:sp>
-      <p:sp>
-        <p:nvSpPr>
-          <p:cNvPr id="22" name="Text 20"/>
-          <p:cNvSpPr/>
-          <p:nvPr/>
-        </p:nvSpPr>
-        <p:spPr>
-          <a:xfrm>
-            <a:off x="3429000" y="3593592"/>
-            <a:ext cx="2468880" cy="777240"/>
-          </a:xfrm>
-          <a:prstGeom prst="rect">
-            <a:avLst/>
-          </a:prstGeom>
-          <a:noFill/>
-          <a:ln/>
-        </p:spPr>
-        <p:txBody>
-          <a:bodyPr wrap="square" lIns="0" tIns="0" rIns="0" bIns="0" rtlCol="0" anchor="ctr"/>
-          <a:lstStyle/>
-          <a:p>
-            <a:pPr indent="0" marL="0">
-              <a:buNone/>
-            </a:pPr>
-            <a:r>
-              <a:rPr lang="en-US" sz="900" dirty="0">
-                <a:solidFill>
-                  <a:srgbClr val="5A5952"/>
-                </a:solidFill>
-                <a:latin typeface="Calibri" pitchFamily="34" charset="0"/>
-                <a:ea typeface="Calibri" pitchFamily="34" charset="-122"/>
-                <a:cs typeface="Calibri" pitchFamily="34" charset="-120"/>
-              </a:rPr>
-              <a:t>Bold, italic, alignment, lists, indent — standard browser formatting commands.</a:t>
-            </a:r>
-            <a:endParaRPr lang="en-US" sz="900" dirty="0"/>
-          </a:p>
-        </p:txBody>
-      </p:sp>
-      <p:sp>
-        <p:nvSpPr>
-          <p:cNvPr id="23" name="Shape 21"/>
-          <p:cNvSpPr/>
-          <p:nvPr/>
-        </p:nvSpPr>
-        <p:spPr>
-          <a:xfrm>
-            <a:off x="6217920" y="2880360"/>
-            <a:ext cx="2743200" cy="1691640"/>
+                <a:latin typeface="Calibri"/>
+              </a:rPr>
+              <a:t>No &lt;a&gt;&lt;strong&gt; nesting</a:t>
+            </a:r>
+          </a:p>
+        </p:txBody>
+      </p:sp>
+      <p:sp>
+        <p:nvSpPr>
+          <p:cNvPr id="34" name="Rounded Rectangle 33"/>
+          <p:cNvSpPr/>
+          <p:nvPr/>
+        </p:nvSpPr>
+        <p:spPr>
+          <a:xfrm>
+            <a:off x="4434840" y="3808475"/>
+            <a:ext cx="777240" cy="219456"/>
           </a:xfrm>
           <a:prstGeom prst="roundRect">
             <a:avLst>
-              <a:gd name="adj" fmla="val 5405"/>
+              <a:gd name="adj" fmla="val 8000"/>
             </a:avLst>
           </a:prstGeom>
           <a:solidFill>
-            <a:srgbClr val="EDF7F0"/>
+            <a:srgbClr val="C84B31"/>
           </a:solidFill>
-          <a:ln w="19050">
+          <a:ln>
+            <a:noFill/>
+          </a:ln>
+          <a:effectLst/>
+        </p:spPr>
+        <p:style>
+          <a:lnRef idx="1">
+            <a:schemeClr val="accent1"/>
+          </a:lnRef>
+          <a:fillRef idx="3">
+            <a:schemeClr val="accent1"/>
+          </a:fillRef>
+          <a:effectRef idx="2">
+            <a:schemeClr val="accent1"/>
+          </a:effectRef>
+          <a:fontRef idx="minor">
+            <a:schemeClr val="lt1"/>
+          </a:fontRef>
+        </p:style>
+        <p:txBody>
+          <a:bodyPr rtlCol="0" anchor="ctr"/>
+          <a:lstStyle/>
+          <a:p>
+            <a:pPr algn="ctr"/>
+            <a:endParaRPr/>
+          </a:p>
+        </p:txBody>
+      </p:sp>
+      <p:sp>
+        <p:nvSpPr>
+          <p:cNvPr id="35" name="TextBox 34"/>
+          <p:cNvSpPr txBox="1"/>
+          <p:nvPr/>
+        </p:nvSpPr>
+        <p:spPr>
+          <a:xfrm>
+            <a:off x="4434840" y="3835907"/>
+            <a:ext cx="777240" cy="182880"/>
+          </a:xfrm>
+          <a:prstGeom prst="rect">
+            <a:avLst/>
+          </a:prstGeom>
+          <a:noFill/>
+        </p:spPr>
+        <p:txBody>
+          <a:bodyPr wrap="square" lIns="0" tIns="0" rIns="0" bIns="0" anchor="t">
+            <a:spAutoFit/>
+          </a:bodyPr>
+          <a:lstStyle/>
+          <a:p>
+            <a:pPr algn="ctr"/>
+            <a:r>
+              <a:rPr sz="800" b="1" i="0">
+                <a:solidFill>
+                  <a:srgbClr val="FFFFFF"/>
+                </a:solidFill>
+                <a:latin typeface="Courier New"/>
+              </a:rPr>
+              <a:t>Line 27</a:t>
+            </a:r>
+          </a:p>
+        </p:txBody>
+      </p:sp>
+      <p:sp>
+        <p:nvSpPr>
+          <p:cNvPr id="36" name="TextBox 35"/>
+          <p:cNvSpPr txBox="1"/>
+          <p:nvPr/>
+        </p:nvSpPr>
+        <p:spPr>
+          <a:xfrm>
+            <a:off x="502920" y="4105655"/>
+            <a:ext cx="274320" cy="274320"/>
+          </a:xfrm>
+          <a:prstGeom prst="rect">
+            <a:avLst/>
+          </a:prstGeom>
+          <a:noFill/>
+        </p:spPr>
+        <p:txBody>
+          <a:bodyPr wrap="square" lIns="0" tIns="0" rIns="0" bIns="0" anchor="t">
+            <a:spAutoFit/>
+          </a:bodyPr>
+          <a:lstStyle/>
+          <a:p>
+            <a:pPr algn="l"/>
+            <a:r>
+              <a:rPr sz="1200" b="1" i="0">
+                <a:solidFill>
+                  <a:srgbClr val="2D6A4F"/>
+                </a:solidFill>
+                <a:latin typeface="Calibri"/>
+              </a:rPr>
+              <a:t>✓</a:t>
+            </a:r>
+          </a:p>
+        </p:txBody>
+      </p:sp>
+      <p:sp>
+        <p:nvSpPr>
+          <p:cNvPr id="37" name="TextBox 36"/>
+          <p:cNvSpPr txBox="1"/>
+          <p:nvPr/>
+        </p:nvSpPr>
+        <p:spPr>
+          <a:xfrm>
+            <a:off x="822960" y="4105655"/>
+            <a:ext cx="3566160" cy="274320"/>
+          </a:xfrm>
+          <a:prstGeom prst="rect">
+            <a:avLst/>
+          </a:prstGeom>
+          <a:noFill/>
+        </p:spPr>
+        <p:txBody>
+          <a:bodyPr wrap="square" lIns="0" tIns="0" rIns="0" bIns="0" anchor="t">
+            <a:spAutoFit/>
+          </a:bodyPr>
+          <a:lstStyle/>
+          <a:p>
+            <a:pPr algn="l"/>
+            <a:r>
+              <a:rPr sz="1000" b="0" i="0">
+                <a:solidFill>
+                  <a:srgbClr val="1A1A18"/>
+                </a:solidFill>
+                <a:latin typeface="Calibri"/>
+              </a:rPr>
+              <a:t>No file:// URLs in href</a:t>
+            </a:r>
+          </a:p>
+        </p:txBody>
+      </p:sp>
+      <p:sp>
+        <p:nvSpPr>
+          <p:cNvPr id="38" name="TextBox 37"/>
+          <p:cNvSpPr txBox="1"/>
+          <p:nvPr/>
+        </p:nvSpPr>
+        <p:spPr>
+          <a:xfrm>
+            <a:off x="4434840" y="4123943"/>
+            <a:ext cx="868680" cy="228600"/>
+          </a:xfrm>
+          <a:prstGeom prst="rect">
+            <a:avLst/>
+          </a:prstGeom>
+          <a:noFill/>
+        </p:spPr>
+        <p:txBody>
+          <a:bodyPr wrap="square" lIns="0" tIns="0" rIns="0" bIns="0" anchor="t">
+            <a:spAutoFit/>
+          </a:bodyPr>
+          <a:lstStyle/>
+          <a:p>
+            <a:pPr algn="l"/>
+            <a:r>
+              <a:rPr sz="850" b="0" i="0">
+                <a:solidFill>
+                  <a:srgbClr val="5A5952"/>
+                </a:solidFill>
+                <a:latin typeface="Courier New"/>
+              </a:rPr>
+              <a:t>Rule F</a:t>
+            </a:r>
+          </a:p>
+        </p:txBody>
+      </p:sp>
+      <p:sp>
+        <p:nvSpPr>
+          <p:cNvPr id="39" name="TextBox 38"/>
+          <p:cNvSpPr txBox="1"/>
+          <p:nvPr/>
+        </p:nvSpPr>
+        <p:spPr>
+          <a:xfrm>
+            <a:off x="502920" y="4421123"/>
+            <a:ext cx="274320" cy="274320"/>
+          </a:xfrm>
+          <a:prstGeom prst="rect">
+            <a:avLst/>
+          </a:prstGeom>
+          <a:noFill/>
+        </p:spPr>
+        <p:txBody>
+          <a:bodyPr wrap="square" lIns="0" tIns="0" rIns="0" bIns="0" anchor="t">
+            <a:spAutoFit/>
+          </a:bodyPr>
+          <a:lstStyle/>
+          <a:p>
+            <a:pPr algn="l"/>
+            <a:r>
+              <a:rPr sz="1200" b="1" i="0">
+                <a:solidFill>
+                  <a:srgbClr val="2D6A4F"/>
+                </a:solidFill>
+                <a:latin typeface="Calibri"/>
+              </a:rPr>
+              <a:t>✓</a:t>
+            </a:r>
+          </a:p>
+        </p:txBody>
+      </p:sp>
+      <p:sp>
+        <p:nvSpPr>
+          <p:cNvPr id="40" name="TextBox 39"/>
+          <p:cNvSpPr txBox="1"/>
+          <p:nvPr/>
+        </p:nvSpPr>
+        <p:spPr>
+          <a:xfrm>
+            <a:off x="822960" y="4421123"/>
+            <a:ext cx="3566160" cy="274320"/>
+          </a:xfrm>
+          <a:prstGeom prst="rect">
+            <a:avLst/>
+          </a:prstGeom>
+          <a:noFill/>
+        </p:spPr>
+        <p:txBody>
+          <a:bodyPr wrap="square" lIns="0" tIns="0" rIns="0" bIns="0" anchor="t">
+            <a:spAutoFit/>
+          </a:bodyPr>
+          <a:lstStyle/>
+          <a:p>
+            <a:pPr algn="l"/>
+            <a:r>
+              <a:rPr sz="1000" b="0" i="0">
+                <a:solidFill>
+                  <a:srgbClr val="1A1A18"/>
+                </a:solidFill>
+                <a:latin typeface="Calibri"/>
+              </a:rPr>
+              <a:t>No inline style= attributes</a:t>
+            </a:r>
+          </a:p>
+        </p:txBody>
+      </p:sp>
+      <p:sp>
+        <p:nvSpPr>
+          <p:cNvPr id="41" name="TextBox 40"/>
+          <p:cNvSpPr txBox="1"/>
+          <p:nvPr/>
+        </p:nvSpPr>
+        <p:spPr>
+          <a:xfrm>
+            <a:off x="4434840" y="4439411"/>
+            <a:ext cx="868680" cy="228600"/>
+          </a:xfrm>
+          <a:prstGeom prst="rect">
+            <a:avLst/>
+          </a:prstGeom>
+          <a:noFill/>
+        </p:spPr>
+        <p:txBody>
+          <a:bodyPr wrap="square" lIns="0" tIns="0" rIns="0" bIns="0" anchor="t">
+            <a:spAutoFit/>
+          </a:bodyPr>
+          <a:lstStyle/>
+          <a:p>
+            <a:pPr algn="l"/>
+            <a:r>
+              <a:rPr sz="850" b="0" i="0">
+                <a:solidFill>
+                  <a:srgbClr val="5A5952"/>
+                </a:solidFill>
+                <a:latin typeface="Courier New"/>
+              </a:rPr>
+              <a:t>General</a:t>
+            </a:r>
+          </a:p>
+        </p:txBody>
+      </p:sp>
+      <p:sp>
+        <p:nvSpPr>
+          <p:cNvPr id="42" name="Rounded Rectangle 41"/>
+          <p:cNvSpPr/>
+          <p:nvPr/>
+        </p:nvSpPr>
+        <p:spPr>
+          <a:xfrm>
+            <a:off x="365760" y="4736592"/>
+            <a:ext cx="2468880" cy="384048"/>
+          </a:xfrm>
+          <a:prstGeom prst="roundRect">
+            <a:avLst>
+              <a:gd name="adj" fmla="val 8000"/>
+            </a:avLst>
+          </a:prstGeom>
+          <a:solidFill>
+            <a:srgbClr val="2D6A4F"/>
+          </a:solidFill>
+          <a:ln>
+            <a:noFill/>
+          </a:ln>
+          <a:effectLst/>
+        </p:spPr>
+        <p:style>
+          <a:lnRef idx="1">
+            <a:schemeClr val="accent1"/>
+          </a:lnRef>
+          <a:fillRef idx="3">
+            <a:schemeClr val="accent1"/>
+          </a:fillRef>
+          <a:effectRef idx="2">
+            <a:schemeClr val="accent1"/>
+          </a:effectRef>
+          <a:fontRef idx="minor">
+            <a:schemeClr val="lt1"/>
+          </a:fontRef>
+        </p:style>
+        <p:txBody>
+          <a:bodyPr rtlCol="0" anchor="ctr"/>
+          <a:lstStyle/>
+          <a:p>
+            <a:pPr algn="ctr"/>
+            <a:endParaRPr/>
+          </a:p>
+        </p:txBody>
+      </p:sp>
+      <p:sp>
+        <p:nvSpPr>
+          <p:cNvPr id="43" name="TextBox 42"/>
+          <p:cNvSpPr txBox="1"/>
+          <p:nvPr/>
+        </p:nvSpPr>
+        <p:spPr>
+          <a:xfrm>
+            <a:off x="365760" y="4846320"/>
+            <a:ext cx="2468880" cy="228600"/>
+          </a:xfrm>
+          <a:prstGeom prst="rect">
+            <a:avLst/>
+          </a:prstGeom>
+          <a:noFill/>
+        </p:spPr>
+        <p:txBody>
+          <a:bodyPr wrap="square" lIns="0" tIns="0" rIns="0" bIns="0" anchor="t">
+            <a:spAutoFit/>
+          </a:bodyPr>
+          <a:lstStyle/>
+          <a:p>
+            <a:pPr algn="ctr"/>
+            <a:r>
+              <a:rPr sz="1000" b="1" i="0">
+                <a:solidFill>
+                  <a:srgbClr val="FFFFFF"/>
+                </a:solidFill>
+                <a:latin typeface="Calibri"/>
+              </a:rPr>
+              <a:t>⤓  Download Test Report (.html)</a:t>
+            </a:r>
+          </a:p>
+        </p:txBody>
+      </p:sp>
+      <p:sp>
+        <p:nvSpPr>
+          <p:cNvPr id="44" name="Rounded Rectangle 43"/>
+          <p:cNvSpPr/>
+          <p:nvPr/>
+        </p:nvSpPr>
+        <p:spPr>
+          <a:xfrm>
+            <a:off x="5623560" y="2103120"/>
+            <a:ext cx="3154680" cy="987552"/>
+          </a:xfrm>
+          <a:prstGeom prst="roundRect">
+            <a:avLst>
+              <a:gd name="adj" fmla="val 8000"/>
+            </a:avLst>
+          </a:prstGeom>
+          <a:solidFill>
+            <a:srgbClr val="FFFFFF"/>
+          </a:solidFill>
+          <a:ln w="12700">
             <a:solidFill>
-              <a:srgbClr val="2D6A4F"/>
+              <a:srgbClr val="E2E0D8"/>
             </a:solidFill>
-            <a:prstDash val="solid"/>
           </a:ln>
-          <a:effectLst>
-            <a:outerShdw sx="100000" sy="100000" kx="0" ky="0" algn="bl" rotWithShape="0" blurRad="101600" dist="38100" dir="2700000">
-              <a:srgbClr val="000000">
-                <a:alpha val="10000"/>
-              </a:srgbClr>
-            </a:outerShdw>
-          </a:effectLst>
-        </p:spPr>
-      </p:sp>
-      <p:sp>
-        <p:nvSpPr>
-          <p:cNvPr id="24" name="Text 22"/>
-          <p:cNvSpPr/>
-          <p:nvPr/>
-        </p:nvSpPr>
-        <p:spPr>
-          <a:xfrm>
-            <a:off x="6355080" y="2990088"/>
-            <a:ext cx="2468880" cy="320040"/>
-          </a:xfrm>
-          <a:prstGeom prst="rect">
-            <a:avLst/>
-          </a:prstGeom>
-          <a:noFill/>
-          <a:ln/>
-        </p:spPr>
-        <p:txBody>
-          <a:bodyPr wrap="square" lIns="0" tIns="0" rIns="0" bIns="0" rtlCol="0" anchor="ctr"/>
-          <a:lstStyle/>
-          <a:p>
-            <a:pPr indent="0" marL="0">
-              <a:buNone/>
-            </a:pPr>
-            <a:r>
-              <a:rPr lang="en-US" sz="1200" b="1" dirty="0">
-                <a:solidFill>
-                  <a:srgbClr val="2D6A4F"/>
-                </a:solidFill>
-                <a:latin typeface="Courier New" pitchFamily="34" charset="0"/>
-                <a:ea typeface="Courier New" pitchFamily="34" charset="-122"/>
-                <a:cs typeface="Courier New" pitchFamily="34" charset="-120"/>
-              </a:rPr>
-              <a:t>Zero dependencies</a:t>
-            </a:r>
-            <a:endParaRPr lang="en-US" sz="1200" dirty="0"/>
-          </a:p>
-        </p:txBody>
-      </p:sp>
-      <p:sp>
-        <p:nvSpPr>
-          <p:cNvPr id="25" name="Text 23"/>
-          <p:cNvSpPr/>
-          <p:nvPr/>
-        </p:nvSpPr>
-        <p:spPr>
-          <a:xfrm>
-            <a:off x="6355080" y="3319272"/>
-            <a:ext cx="2468880" cy="256032"/>
-          </a:xfrm>
-          <a:prstGeom prst="rect">
-            <a:avLst/>
-          </a:prstGeom>
-          <a:noFill/>
-          <a:ln/>
-        </p:spPr>
-        <p:txBody>
-          <a:bodyPr wrap="square" lIns="0" tIns="0" rIns="0" bIns="0" rtlCol="0" anchor="ctr"/>
-          <a:lstStyle/>
-          <a:p>
-            <a:pPr indent="0" marL="0">
-              <a:buNone/>
-            </a:pPr>
-            <a:r>
-              <a:rPr lang="en-US" sz="950" b="1" dirty="0">
+          <a:effectLst/>
+        </p:spPr>
+        <p:style>
+          <a:lnRef idx="1">
+            <a:schemeClr val="accent1"/>
+          </a:lnRef>
+          <a:fillRef idx="3">
+            <a:schemeClr val="accent1"/>
+          </a:fillRef>
+          <a:effectRef idx="2">
+            <a:schemeClr val="accent1"/>
+          </a:effectRef>
+          <a:fontRef idx="minor">
+            <a:schemeClr val="lt1"/>
+          </a:fontRef>
+        </p:style>
+        <p:txBody>
+          <a:bodyPr rtlCol="0" anchor="ctr"/>
+          <a:lstStyle/>
+          <a:p>
+            <a:pPr algn="ctr"/>
+            <a:endParaRPr/>
+          </a:p>
+        </p:txBody>
+      </p:sp>
+      <p:sp>
+        <p:nvSpPr>
+          <p:cNvPr id="45" name="TextBox 44"/>
+          <p:cNvSpPr txBox="1"/>
+          <p:nvPr/>
+        </p:nvSpPr>
+        <p:spPr>
+          <a:xfrm>
+            <a:off x="5760720" y="2194560"/>
+            <a:ext cx="457200" cy="365760"/>
+          </a:xfrm>
+          <a:prstGeom prst="rect">
+            <a:avLst/>
+          </a:prstGeom>
+          <a:noFill/>
+        </p:spPr>
+        <p:txBody>
+          <a:bodyPr wrap="square" lIns="0" tIns="0" rIns="0" bIns="0" anchor="t">
+            <a:spAutoFit/>
+          </a:bodyPr>
+          <a:lstStyle/>
+          <a:p>
+            <a:pPr algn="l"/>
+            <a:r>
+              <a:rPr sz="1800" b="0" i="0">
                 <a:solidFill>
                   <a:srgbClr val="1A1A18"/>
                 </a:solidFill>
-                <a:latin typeface="Calibri" pitchFamily="34" charset="0"/>
-                <a:ea typeface="Calibri" pitchFamily="34" charset="-122"/>
-                <a:cs typeface="Calibri" pitchFamily="34" charset="-120"/>
-              </a:rPr>
-              <a:t>No CDN, no framework</a:t>
-            </a:r>
-            <a:endParaRPr lang="en-US" sz="950" dirty="0"/>
-          </a:p>
-        </p:txBody>
-      </p:sp>
-      <p:sp>
-        <p:nvSpPr>
-          <p:cNvPr id="26" name="Text 24"/>
-          <p:cNvSpPr/>
-          <p:nvPr/>
-        </p:nvSpPr>
-        <p:spPr>
-          <a:xfrm>
-            <a:off x="6355080" y="3593592"/>
-            <a:ext cx="2468880" cy="777240"/>
-          </a:xfrm>
-          <a:prstGeom prst="rect">
-            <a:avLst/>
-          </a:prstGeom>
-          <a:noFill/>
-          <a:ln/>
-        </p:spPr>
-        <p:txBody>
-          <a:bodyPr wrap="square" lIns="0" tIns="0" rIns="0" bIns="0" rtlCol="0" anchor="ctr"/>
-          <a:lstStyle/>
-          <a:p>
-            <a:pPr indent="0" marL="0">
-              <a:buNone/>
-            </a:pPr>
-            <a:r>
-              <a:rPr lang="en-US" sz="900" dirty="0">
+                <a:latin typeface="Calibri"/>
+              </a:rPr>
+              <a:t>🧪</a:t>
+            </a:r>
+          </a:p>
+        </p:txBody>
+      </p:sp>
+      <p:sp>
+        <p:nvSpPr>
+          <p:cNvPr id="46" name="TextBox 45"/>
+          <p:cNvSpPr txBox="1"/>
+          <p:nvPr/>
+        </p:nvSpPr>
+        <p:spPr>
+          <a:xfrm>
+            <a:off x="6263640" y="2194560"/>
+            <a:ext cx="2377440" cy="274320"/>
+          </a:xfrm>
+          <a:prstGeom prst="rect">
+            <a:avLst/>
+          </a:prstGeom>
+          <a:noFill/>
+        </p:spPr>
+        <p:txBody>
+          <a:bodyPr wrap="square" lIns="0" tIns="0" rIns="0" bIns="0" anchor="t">
+            <a:spAutoFit/>
+          </a:bodyPr>
+          <a:lstStyle/>
+          <a:p>
+            <a:pPr algn="l"/>
+            <a:r>
+              <a:rPr sz="1100" b="1" i="0">
+                <a:solidFill>
+                  <a:srgbClr val="1A1A18"/>
+                </a:solidFill>
+                <a:latin typeface="Calibri"/>
+              </a:rPr>
+              <a:t>21 Automated Checks</a:t>
+            </a:r>
+          </a:p>
+        </p:txBody>
+      </p:sp>
+      <p:sp>
+        <p:nvSpPr>
+          <p:cNvPr id="47" name="TextBox 46"/>
+          <p:cNvSpPr txBox="1"/>
+          <p:nvPr/>
+        </p:nvSpPr>
+        <p:spPr>
+          <a:xfrm>
+            <a:off x="6263640" y="2468879"/>
+            <a:ext cx="2423160" cy="594360"/>
+          </a:xfrm>
+          <a:prstGeom prst="rect">
+            <a:avLst/>
+          </a:prstGeom>
+          <a:noFill/>
+        </p:spPr>
+        <p:txBody>
+          <a:bodyPr wrap="square" lIns="0" tIns="0" rIns="0" bIns="0" anchor="t">
+            <a:spAutoFit/>
+          </a:bodyPr>
+          <a:lstStyle/>
+          <a:p>
+            <a:pPr algn="l"/>
+            <a:r>
+              <a:rPr sz="850" b="0" i="0">
                 <a:solidFill>
                   <a:srgbClr val="5A5952"/>
                 </a:solidFill>
-                <a:latin typeface="Calibri" pitchFamily="34" charset="0"/>
-                <a:ea typeface="Calibri" pitchFamily="34" charset="-122"/>
-                <a:cs typeface="Calibri" pitchFamily="34" charset="-120"/>
-              </a:rPr>
-              <a:t>All libraries bundled locally. Works fully offline once downloaded.</a:t>
-            </a:r>
-            <a:endParaRPr lang="en-US" sz="900" dirty="0"/>
+                <a:latin typeface="Calibri"/>
+              </a:rPr>
+              <a:t>Covers all 14 conversion rules plus general checks: leftover styles, class attributes, tel: link format, and non-empty output.</a:t>
+            </a:r>
+          </a:p>
+        </p:txBody>
+      </p:sp>
+      <p:sp>
+        <p:nvSpPr>
+          <p:cNvPr id="48" name="Rounded Rectangle 47"/>
+          <p:cNvSpPr/>
+          <p:nvPr/>
+        </p:nvSpPr>
+        <p:spPr>
+          <a:xfrm>
+            <a:off x="5623560" y="3200400"/>
+            <a:ext cx="3154680" cy="987552"/>
+          </a:xfrm>
+          <a:prstGeom prst="roundRect">
+            <a:avLst>
+              <a:gd name="adj" fmla="val 8000"/>
+            </a:avLst>
+          </a:prstGeom>
+          <a:solidFill>
+            <a:srgbClr val="FFFFFF"/>
+          </a:solidFill>
+          <a:ln w="12700">
+            <a:solidFill>
+              <a:srgbClr val="E2E0D8"/>
+            </a:solidFill>
+          </a:ln>
+          <a:effectLst/>
+        </p:spPr>
+        <p:style>
+          <a:lnRef idx="1">
+            <a:schemeClr val="accent1"/>
+          </a:lnRef>
+          <a:fillRef idx="3">
+            <a:schemeClr val="accent1"/>
+          </a:fillRef>
+          <a:effectRef idx="2">
+            <a:schemeClr val="accent1"/>
+          </a:effectRef>
+          <a:fontRef idx="minor">
+            <a:schemeClr val="lt1"/>
+          </a:fontRef>
+        </p:style>
+        <p:txBody>
+          <a:bodyPr rtlCol="0" anchor="ctr"/>
+          <a:lstStyle/>
+          <a:p>
+            <a:pPr algn="ctr"/>
+            <a:endParaRPr/>
+          </a:p>
+        </p:txBody>
+      </p:sp>
+      <p:sp>
+        <p:nvSpPr>
+          <p:cNvPr id="49" name="TextBox 48"/>
+          <p:cNvSpPr txBox="1"/>
+          <p:nvPr/>
+        </p:nvSpPr>
+        <p:spPr>
+          <a:xfrm>
+            <a:off x="5760720" y="3291840"/>
+            <a:ext cx="457200" cy="365760"/>
+          </a:xfrm>
+          <a:prstGeom prst="rect">
+            <a:avLst/>
+          </a:prstGeom>
+          <a:noFill/>
+        </p:spPr>
+        <p:txBody>
+          <a:bodyPr wrap="square" lIns="0" tIns="0" rIns="0" bIns="0" anchor="t">
+            <a:spAutoFit/>
+          </a:bodyPr>
+          <a:lstStyle/>
+          <a:p>
+            <a:pPr algn="l"/>
+            <a:r>
+              <a:rPr sz="1800" b="0" i="0">
+                <a:solidFill>
+                  <a:srgbClr val="1A1A18"/>
+                </a:solidFill>
+                <a:latin typeface="Calibri"/>
+              </a:rPr>
+              <a:t>📍</a:t>
+            </a:r>
+          </a:p>
+        </p:txBody>
+      </p:sp>
+      <p:sp>
+        <p:nvSpPr>
+          <p:cNvPr id="50" name="TextBox 49"/>
+          <p:cNvSpPr txBox="1"/>
+          <p:nvPr/>
+        </p:nvSpPr>
+        <p:spPr>
+          <a:xfrm>
+            <a:off x="6263640" y="3291840"/>
+            <a:ext cx="2377440" cy="274320"/>
+          </a:xfrm>
+          <a:prstGeom prst="rect">
+            <a:avLst/>
+          </a:prstGeom>
+          <a:noFill/>
+        </p:spPr>
+        <p:txBody>
+          <a:bodyPr wrap="square" lIns="0" tIns="0" rIns="0" bIns="0" anchor="t">
+            <a:spAutoFit/>
+          </a:bodyPr>
+          <a:lstStyle/>
+          <a:p>
+            <a:pPr algn="l"/>
+            <a:r>
+              <a:rPr sz="1100" b="1" i="0">
+                <a:solidFill>
+                  <a:srgbClr val="1A1A18"/>
+                </a:solidFill>
+                <a:latin typeface="Calibri"/>
+              </a:rPr>
+              <a:t>Line-Numbered Errors</a:t>
+            </a:r>
+          </a:p>
+        </p:txBody>
+      </p:sp>
+      <p:sp>
+        <p:nvSpPr>
+          <p:cNvPr id="51" name="TextBox 50"/>
+          <p:cNvSpPr txBox="1"/>
+          <p:nvPr/>
+        </p:nvSpPr>
+        <p:spPr>
+          <a:xfrm>
+            <a:off x="6263640" y="3566160"/>
+            <a:ext cx="2423160" cy="594360"/>
+          </a:xfrm>
+          <a:prstGeom prst="rect">
+            <a:avLst/>
+          </a:prstGeom>
+          <a:noFill/>
+        </p:spPr>
+        <p:txBody>
+          <a:bodyPr wrap="square" lIns="0" tIns="0" rIns="0" bIns="0" anchor="t">
+            <a:spAutoFit/>
+          </a:bodyPr>
+          <a:lstStyle/>
+          <a:p>
+            <a:pPr algn="l"/>
+            <a:r>
+              <a:rPr sz="850" b="0" i="0">
+                <a:solidFill>
+                  <a:srgbClr val="5A5952"/>
+                </a:solidFill>
+                <a:latin typeface="Calibri"/>
+              </a:rPr>
+              <a:t>Every failed check points to the exact line number and code snippet in the converted HTML — no manual searching.</a:t>
+            </a:r>
+          </a:p>
+        </p:txBody>
+      </p:sp>
+      <p:sp>
+        <p:nvSpPr>
+          <p:cNvPr id="52" name="Rounded Rectangle 51"/>
+          <p:cNvSpPr/>
+          <p:nvPr/>
+        </p:nvSpPr>
+        <p:spPr>
+          <a:xfrm>
+            <a:off x="5623560" y="4297680"/>
+            <a:ext cx="3154680" cy="987552"/>
+          </a:xfrm>
+          <a:prstGeom prst="roundRect">
+            <a:avLst>
+              <a:gd name="adj" fmla="val 8000"/>
+            </a:avLst>
+          </a:prstGeom>
+          <a:solidFill>
+            <a:srgbClr val="FFFFFF"/>
+          </a:solidFill>
+          <a:ln w="12700">
+            <a:solidFill>
+              <a:srgbClr val="E2E0D8"/>
+            </a:solidFill>
+          </a:ln>
+          <a:effectLst/>
+        </p:spPr>
+        <p:style>
+          <a:lnRef idx="1">
+            <a:schemeClr val="accent1"/>
+          </a:lnRef>
+          <a:fillRef idx="3">
+            <a:schemeClr val="accent1"/>
+          </a:fillRef>
+          <a:effectRef idx="2">
+            <a:schemeClr val="accent1"/>
+          </a:effectRef>
+          <a:fontRef idx="minor">
+            <a:schemeClr val="lt1"/>
+          </a:fontRef>
+        </p:style>
+        <p:txBody>
+          <a:bodyPr rtlCol="0" anchor="ctr"/>
+          <a:lstStyle/>
+          <a:p>
+            <a:pPr algn="ctr"/>
+            <a:endParaRPr/>
+          </a:p>
+        </p:txBody>
+      </p:sp>
+      <p:sp>
+        <p:nvSpPr>
+          <p:cNvPr id="53" name="TextBox 52"/>
+          <p:cNvSpPr txBox="1"/>
+          <p:nvPr/>
+        </p:nvSpPr>
+        <p:spPr>
+          <a:xfrm>
+            <a:off x="5760720" y="4389120"/>
+            <a:ext cx="457200" cy="365760"/>
+          </a:xfrm>
+          <a:prstGeom prst="rect">
+            <a:avLst/>
+          </a:prstGeom>
+          <a:noFill/>
+        </p:spPr>
+        <p:txBody>
+          <a:bodyPr wrap="square" lIns="0" tIns="0" rIns="0" bIns="0" anchor="t">
+            <a:spAutoFit/>
+          </a:bodyPr>
+          <a:lstStyle/>
+          <a:p>
+            <a:pPr algn="l"/>
+            <a:r>
+              <a:rPr sz="1800" b="0" i="0">
+                <a:solidFill>
+                  <a:srgbClr val="1A1A18"/>
+                </a:solidFill>
+                <a:latin typeface="Calibri"/>
+              </a:rPr>
+              <a:t>📄</a:t>
+            </a:r>
+          </a:p>
+        </p:txBody>
+      </p:sp>
+      <p:sp>
+        <p:nvSpPr>
+          <p:cNvPr id="54" name="TextBox 53"/>
+          <p:cNvSpPr txBox="1"/>
+          <p:nvPr/>
+        </p:nvSpPr>
+        <p:spPr>
+          <a:xfrm>
+            <a:off x="6263640" y="4389120"/>
+            <a:ext cx="2377440" cy="274320"/>
+          </a:xfrm>
+          <a:prstGeom prst="rect">
+            <a:avLst/>
+          </a:prstGeom>
+          <a:noFill/>
+        </p:spPr>
+        <p:txBody>
+          <a:bodyPr wrap="square" lIns="0" tIns="0" rIns="0" bIns="0" anchor="t">
+            <a:spAutoFit/>
+          </a:bodyPr>
+          <a:lstStyle/>
+          <a:p>
+            <a:pPr algn="l"/>
+            <a:r>
+              <a:rPr sz="1100" b="1" i="0">
+                <a:solidFill>
+                  <a:srgbClr val="1A1A18"/>
+                </a:solidFill>
+                <a:latin typeface="Calibri"/>
+              </a:rPr>
+              <a:t>Standalone HTML Report</a:t>
+            </a:r>
+          </a:p>
+        </p:txBody>
+      </p:sp>
+      <p:sp>
+        <p:nvSpPr>
+          <p:cNvPr id="55" name="TextBox 54"/>
+          <p:cNvSpPr txBox="1"/>
+          <p:nvPr/>
+        </p:nvSpPr>
+        <p:spPr>
+          <a:xfrm>
+            <a:off x="6263640" y="4663440"/>
+            <a:ext cx="2423160" cy="594360"/>
+          </a:xfrm>
+          <a:prstGeom prst="rect">
+            <a:avLst/>
+          </a:prstGeom>
+          <a:noFill/>
+        </p:spPr>
+        <p:txBody>
+          <a:bodyPr wrap="square" lIns="0" tIns="0" rIns="0" bIns="0" anchor="t">
+            <a:spAutoFit/>
+          </a:bodyPr>
+          <a:lstStyle/>
+          <a:p>
+            <a:pPr algn="l"/>
+            <a:r>
+              <a:rPr sz="850" b="0" i="0">
+                <a:solidFill>
+                  <a:srgbClr val="5A5952"/>
+                </a:solidFill>
+                <a:latin typeface="Calibri"/>
+              </a:rPr>
+              <a:t>Self-contained report: scorecard, pass/fail breakdown grouped by rule, and the full converted HTML — ready to share.</a:t>
+            </a:r>
           </a:p>
         </p:txBody>
       </p:sp>
@@ -11190,12 +12842,13 @@
 
 <file path=ppt/slides/slide9.xml><?xml version="1.0" encoding="utf-8"?>
 <p:sld xmlns:a="http://schemas.openxmlformats.org/drawingml/2006/main" xmlns:r="http://schemas.openxmlformats.org/officeDocument/2006/relationships" xmlns:p="http://schemas.openxmlformats.org/presentationml/2006/main">
-  <p:cSld name="Slide 9">
+  <p:cSld name="Slide 8">
     <p:bg>
       <p:bgPr>
         <a:solidFill>
-          <a:srgbClr val="1A1A18"/>
+          <a:srgbClr val="FFFFFF"/>
         </a:solidFill>
+        <a:effectLst/>
       </p:bgPr>
     </p:bg>
     <p:spTree>
@@ -11214,757 +12867,946 @@
       </p:grpSpPr>
       <p:sp>
         <p:nvSpPr>
-          <p:cNvPr id="2" name="Shape 0"/>
-          <p:cNvSpPr/>
-          <p:nvPr/>
-        </p:nvSpPr>
-        <p:spPr>
-          <a:xfrm>
-            <a:off x="-914400" y="3200400"/>
-            <a:ext cx="4572000" cy="4572000"/>
-          </a:xfrm>
-          <a:prstGeom prst="ellipse">
-            <a:avLst/>
+          <p:cNvPr id="2" name="Text 0"/>
+          <p:cNvSpPr/>
+          <p:nvPr/>
+        </p:nvSpPr>
+        <p:spPr>
+          <a:xfrm>
+            <a:off x="457200" y="274320"/>
+            <a:ext cx="8229600" cy="502920"/>
+          </a:xfrm>
+          <a:prstGeom prst="rect">
+            <a:avLst/>
+          </a:prstGeom>
+          <a:noFill/>
+          <a:ln/>
+        </p:spPr>
+        <p:txBody>
+          <a:bodyPr wrap="square" lIns="0" tIns="0" rIns="0" bIns="0" rtlCol="0" anchor="ctr"/>
+          <a:lstStyle/>
+          <a:p>
+            <a:pPr marL="0" indent="0">
+              <a:buNone/>
+            </a:pPr>
+            <a:r>
+              <a:rPr lang="en-US" sz="2800" b="1" dirty="0">
+                <a:solidFill>
+                  <a:srgbClr val="1A1A18"/>
+                </a:solidFill>
+                <a:latin typeface="Calibri" pitchFamily="34" charset="0"/>
+                <a:ea typeface="Calibri" pitchFamily="34" charset="-122"/>
+                <a:cs typeface="Calibri" pitchFamily="34" charset="-120"/>
+              </a:rPr>
+              <a:t>Technology Stack</a:t>
+            </a:r>
+            <a:endParaRPr lang="en-US" sz="2800" dirty="0"/>
+          </a:p>
+        </p:txBody>
+      </p:sp>
+      <p:sp>
+        <p:nvSpPr>
+          <p:cNvPr id="3" name="Shape 1"/>
+          <p:cNvSpPr/>
+          <p:nvPr/>
+        </p:nvSpPr>
+        <p:spPr>
+          <a:xfrm>
+            <a:off x="365760" y="960120"/>
+            <a:ext cx="2743200" cy="1691640"/>
+          </a:xfrm>
+          <a:prstGeom prst="roundRect">
+            <a:avLst>
+              <a:gd name="adj" fmla="val 5405"/>
+            </a:avLst>
           </a:prstGeom>
           <a:solidFill>
-            <a:srgbClr val="2D6A4F">
-              <a:alpha val="20000"/>
-            </a:srgbClr>
+            <a:srgbClr val="EEF3FB"/>
           </a:solidFill>
-          <a:ln w="12700">
+          <a:ln w="19050">
+            <a:solidFill>
+              <a:srgbClr val="2B579A"/>
+            </a:solidFill>
+            <a:prstDash val="solid"/>
+          </a:ln>
+          <a:effectLst>
+            <a:outerShdw blurRad="101600" dist="38100" dir="2700000" algn="bl" rotWithShape="0">
+              <a:srgbClr val="000000">
+                <a:alpha val="10000"/>
+              </a:srgbClr>
+            </a:outerShdw>
+          </a:effectLst>
+        </p:spPr>
+      </p:sp>
+      <p:sp>
+        <p:nvSpPr>
+          <p:cNvPr id="4" name="Text 2"/>
+          <p:cNvSpPr/>
+          <p:nvPr/>
+        </p:nvSpPr>
+        <p:spPr>
+          <a:xfrm>
+            <a:off x="502920" y="1069848"/>
+            <a:ext cx="2468880" cy="320040"/>
+          </a:xfrm>
+          <a:prstGeom prst="rect">
+            <a:avLst/>
+          </a:prstGeom>
+          <a:noFill/>
+          <a:ln/>
+        </p:spPr>
+        <p:txBody>
+          <a:bodyPr wrap="square" lIns="0" tIns="0" rIns="0" bIns="0" rtlCol="0" anchor="ctr"/>
+          <a:lstStyle/>
+          <a:p>
+            <a:pPr marL="0" indent="0">
+              <a:buNone/>
+            </a:pPr>
+            <a:r>
+              <a:rPr lang="en-US" sz="1200" b="1" dirty="0">
+                <a:solidFill>
+                  <a:srgbClr val="2B579A"/>
+                </a:solidFill>
+                <a:latin typeface="Courier New" pitchFamily="34" charset="0"/>
+                <a:ea typeface="Courier New" pitchFamily="34" charset="-122"/>
+                <a:cs typeface="Courier New" pitchFamily="34" charset="-120"/>
+              </a:rPr>
+              <a:t>Mammoth.js</a:t>
+            </a:r>
+            <a:endParaRPr lang="en-US" sz="1200" dirty="0"/>
+          </a:p>
+        </p:txBody>
+      </p:sp>
+      <p:sp>
+        <p:nvSpPr>
+          <p:cNvPr id="5" name="Text 3"/>
+          <p:cNvSpPr/>
+          <p:nvPr/>
+        </p:nvSpPr>
+        <p:spPr>
+          <a:xfrm>
+            <a:off x="502920" y="1399032"/>
+            <a:ext cx="2468880" cy="256032"/>
+          </a:xfrm>
+          <a:prstGeom prst="rect">
+            <a:avLst/>
+          </a:prstGeom>
+          <a:noFill/>
+          <a:ln/>
+        </p:spPr>
+        <p:txBody>
+          <a:bodyPr wrap="square" lIns="0" tIns="0" rIns="0" bIns="0" rtlCol="0" anchor="ctr"/>
+          <a:lstStyle/>
+          <a:p>
+            <a:pPr marL="0" indent="0">
+              <a:buNone/>
+            </a:pPr>
+            <a:r>
+              <a:rPr lang="en-US" sz="950" b="1" dirty="0">
+                <a:solidFill>
+                  <a:srgbClr val="1A1A18"/>
+                </a:solidFill>
+                <a:latin typeface="Calibri" pitchFamily="34" charset="0"/>
+                <a:ea typeface="Calibri" pitchFamily="34" charset="-122"/>
+                <a:cs typeface="Calibri" pitchFamily="34" charset="-120"/>
+              </a:rPr>
+              <a:t>DOCX → HTML conversion</a:t>
+            </a:r>
+            <a:endParaRPr lang="en-US" sz="950" dirty="0"/>
+          </a:p>
+        </p:txBody>
+      </p:sp>
+      <p:sp>
+        <p:nvSpPr>
+          <p:cNvPr id="6" name="Text 4"/>
+          <p:cNvSpPr/>
+          <p:nvPr/>
+        </p:nvSpPr>
+        <p:spPr>
+          <a:xfrm>
+            <a:off x="502920" y="1673352"/>
+            <a:ext cx="2468880" cy="777240"/>
+          </a:xfrm>
+          <a:prstGeom prst="rect">
+            <a:avLst/>
+          </a:prstGeom>
+          <a:noFill/>
+          <a:ln/>
+        </p:spPr>
+        <p:txBody>
+          <a:bodyPr wrap="square" lIns="0" tIns="0" rIns="0" bIns="0" rtlCol="0" anchor="ctr"/>
+          <a:lstStyle/>
+          <a:p>
+            <a:pPr marL="0" indent="0">
+              <a:buNone/>
+            </a:pPr>
+            <a:r>
+              <a:rPr lang="en-US" sz="900" dirty="0">
+                <a:solidFill>
+                  <a:srgbClr val="5A5952"/>
+                </a:solidFill>
+                <a:latin typeface="Calibri" pitchFamily="34" charset="0"/>
+                <a:ea typeface="Calibri" pitchFamily="34" charset="-122"/>
+                <a:cs typeface="Calibri" pitchFamily="34" charset="-120"/>
+              </a:rPr>
+              <a:t>Converts Word documents to clean HTML, then 14 rules normalise the output.</a:t>
+            </a:r>
+            <a:endParaRPr lang="en-US" sz="900" dirty="0"/>
+          </a:p>
+        </p:txBody>
+      </p:sp>
+      <p:sp>
+        <p:nvSpPr>
+          <p:cNvPr id="7" name="Shape 5"/>
+          <p:cNvSpPr/>
+          <p:nvPr/>
+        </p:nvSpPr>
+        <p:spPr>
+          <a:xfrm>
+            <a:off x="3291840" y="960120"/>
+            <a:ext cx="2743200" cy="1691640"/>
+          </a:xfrm>
+          <a:prstGeom prst="roundRect">
+            <a:avLst>
+              <a:gd name="adj" fmla="val 5405"/>
+            </a:avLst>
+          </a:prstGeom>
+          <a:solidFill>
+            <a:srgbClr val="EDF7F0"/>
+          </a:solidFill>
+          <a:ln w="19050">
             <a:solidFill>
               <a:srgbClr val="2D6A4F"/>
             </a:solidFill>
             <a:prstDash val="solid"/>
           </a:ln>
-        </p:spPr>
-      </p:sp>
-      <p:sp>
-        <p:nvSpPr>
-          <p:cNvPr id="3" name="Text 1"/>
-          <p:cNvSpPr/>
-          <p:nvPr/>
-        </p:nvSpPr>
-        <p:spPr>
-          <a:xfrm>
-            <a:off x="914400" y="457200"/>
-            <a:ext cx="7315200" cy="640080"/>
-          </a:xfrm>
-          <a:prstGeom prst="rect">
-            <a:avLst/>
-          </a:prstGeom>
-          <a:noFill/>
-          <a:ln/>
-        </p:spPr>
-        <p:txBody>
-          <a:bodyPr wrap="square" lIns="0" tIns="0" rIns="0" bIns="0" rtlCol="0" anchor="ctr"/>
-          <a:lstStyle/>
-          <a:p>
-            <a:pPr algn="ctr" indent="0" marL="0">
-              <a:buNone/>
-            </a:pPr>
-            <a:r>
-              <a:rPr lang="en-US" sz="3400" b="1" dirty="0">
-                <a:solidFill>
-                  <a:srgbClr val="FFFFFF"/>
+          <a:effectLst>
+            <a:outerShdw blurRad="101600" dist="38100" dir="2700000" algn="bl" rotWithShape="0">
+              <a:srgbClr val="000000">
+                <a:alpha val="10000"/>
+              </a:srgbClr>
+            </a:outerShdw>
+          </a:effectLst>
+        </p:spPr>
+      </p:sp>
+      <p:sp>
+        <p:nvSpPr>
+          <p:cNvPr id="8" name="Text 6"/>
+          <p:cNvSpPr/>
+          <p:nvPr/>
+        </p:nvSpPr>
+        <p:spPr>
+          <a:xfrm>
+            <a:off x="3429000" y="1069848"/>
+            <a:ext cx="2468880" cy="320040"/>
+          </a:xfrm>
+          <a:prstGeom prst="rect">
+            <a:avLst/>
+          </a:prstGeom>
+          <a:noFill/>
+          <a:ln/>
+        </p:spPr>
+        <p:txBody>
+          <a:bodyPr wrap="square" lIns="0" tIns="0" rIns="0" bIns="0" rtlCol="0" anchor="ctr"/>
+          <a:lstStyle/>
+          <a:p>
+            <a:pPr marL="0" indent="0">
+              <a:buNone/>
+            </a:pPr>
+            <a:r>
+              <a:rPr lang="en-US" sz="1200" b="1" dirty="0">
+                <a:solidFill>
+                  <a:srgbClr val="2D6A4F"/>
+                </a:solidFill>
+                <a:latin typeface="Courier New" pitchFamily="34" charset="0"/>
+                <a:ea typeface="Courier New" pitchFamily="34" charset="-122"/>
+                <a:cs typeface="Courier New" pitchFamily="34" charset="-120"/>
+              </a:rPr>
+              <a:t>SheetJS (xlsx)</a:t>
+            </a:r>
+            <a:endParaRPr lang="en-US" sz="1200" dirty="0"/>
+          </a:p>
+        </p:txBody>
+      </p:sp>
+      <p:sp>
+        <p:nvSpPr>
+          <p:cNvPr id="9" name="Text 7"/>
+          <p:cNvSpPr/>
+          <p:nvPr/>
+        </p:nvSpPr>
+        <p:spPr>
+          <a:xfrm>
+            <a:off x="3429000" y="1399032"/>
+            <a:ext cx="2468880" cy="256032"/>
+          </a:xfrm>
+          <a:prstGeom prst="rect">
+            <a:avLst/>
+          </a:prstGeom>
+          <a:noFill/>
+          <a:ln/>
+        </p:spPr>
+        <p:txBody>
+          <a:bodyPr wrap="square" lIns="0" tIns="0" rIns="0" bIns="0" rtlCol="0" anchor="ctr"/>
+          <a:lstStyle/>
+          <a:p>
+            <a:pPr marL="0" indent="0">
+              <a:buNone/>
+            </a:pPr>
+            <a:r>
+              <a:rPr lang="en-US" sz="950" b="1" dirty="0">
+                <a:solidFill>
+                  <a:srgbClr val="1A1A18"/>
                 </a:solidFill>
                 <a:latin typeface="Calibri" pitchFamily="34" charset="0"/>
                 <a:ea typeface="Calibri" pitchFamily="34" charset="-122"/>
                 <a:cs typeface="Calibri" pitchFamily="34" charset="-120"/>
               </a:rPr>
-              <a:t>Ready to Use</a:t>
-            </a:r>
-            <a:endParaRPr lang="en-US" sz="3400" dirty="0"/>
-          </a:p>
-        </p:txBody>
-      </p:sp>
-      <p:sp>
-        <p:nvSpPr>
-          <p:cNvPr id="4" name="Text 2"/>
-          <p:cNvSpPr/>
-          <p:nvPr/>
-        </p:nvSpPr>
-        <p:spPr>
-          <a:xfrm>
-            <a:off x="914400" y="1143000"/>
-            <a:ext cx="7315200" cy="365760"/>
-          </a:xfrm>
-          <a:prstGeom prst="rect">
-            <a:avLst/>
-          </a:prstGeom>
-          <a:noFill/>
-          <a:ln/>
-        </p:spPr>
-        <p:txBody>
-          <a:bodyPr wrap="square" lIns="0" tIns="0" rIns="0" bIns="0" rtlCol="0" anchor="ctr"/>
-          <a:lstStyle/>
-          <a:p>
-            <a:pPr algn="ctr" indent="0" marL="0">
-              <a:buNone/>
-            </a:pPr>
-            <a:r>
-              <a:rPr lang="en-US" sz="1300" dirty="0">
-                <a:solidFill>
-                  <a:srgbClr val="9A9890"/>
+              <a:t>Excel / CSV parsing</a:t>
+            </a:r>
+            <a:endParaRPr lang="en-US" sz="950" dirty="0"/>
+          </a:p>
+        </p:txBody>
+      </p:sp>
+      <p:sp>
+        <p:nvSpPr>
+          <p:cNvPr id="10" name="Text 8"/>
+          <p:cNvSpPr/>
+          <p:nvPr/>
+        </p:nvSpPr>
+        <p:spPr>
+          <a:xfrm>
+            <a:off x="3429000" y="1673352"/>
+            <a:ext cx="2468880" cy="777240"/>
+          </a:xfrm>
+          <a:prstGeom prst="rect">
+            <a:avLst/>
+          </a:prstGeom>
+          <a:noFill/>
+          <a:ln/>
+        </p:spPr>
+        <p:txBody>
+          <a:bodyPr wrap="square" lIns="0" tIns="0" rIns="0" bIns="0" rtlCol="0" anchor="ctr"/>
+          <a:lstStyle/>
+          <a:p>
+            <a:pPr marL="0" indent="0">
+              <a:buNone/>
+            </a:pPr>
+            <a:r>
+              <a:rPr lang="en-US" sz="900" dirty="0">
+                <a:solidFill>
+                  <a:srgbClr val="5A5952"/>
                 </a:solidFill>
                 <a:latin typeface="Calibri" pitchFamily="34" charset="0"/>
                 <a:ea typeface="Calibri" pitchFamily="34" charset="-122"/>
                 <a:cs typeface="Calibri" pitchFamily="34" charset="-120"/>
               </a:rPr>
-              <a:t>All files run locally — open index.html and start converting.</a:t>
-            </a:r>
-            <a:endParaRPr lang="en-US" sz="1300" dirty="0"/>
-          </a:p>
-        </p:txBody>
-      </p:sp>
-      <p:sp>
-        <p:nvSpPr>
-          <p:cNvPr id="5" name="Shape 3"/>
-          <p:cNvSpPr/>
-          <p:nvPr/>
-        </p:nvSpPr>
-        <p:spPr>
-          <a:xfrm>
-            <a:off x="731520" y="1691640"/>
-            <a:ext cx="2468880" cy="713232"/>
+              <a:t>Reads .xlsx, .xls and .csv. All sheets converted to HTML tables.</a:t>
+            </a:r>
+            <a:endParaRPr lang="en-US" sz="900" dirty="0"/>
+          </a:p>
+        </p:txBody>
+      </p:sp>
+      <p:sp>
+        <p:nvSpPr>
+          <p:cNvPr id="11" name="Shape 9"/>
+          <p:cNvSpPr/>
+          <p:nvPr/>
+        </p:nvSpPr>
+        <p:spPr>
+          <a:xfrm>
+            <a:off x="6217920" y="960120"/>
+            <a:ext cx="2743200" cy="1691640"/>
           </a:xfrm>
           <a:prstGeom prst="roundRect">
             <a:avLst>
-              <a:gd name="adj" fmla="val 12821"/>
+              <a:gd name="adj" fmla="val 5405"/>
             </a:avLst>
           </a:prstGeom>
           <a:solidFill>
-            <a:srgbClr val="252523"/>
+            <a:srgbClr val="F3EEFB"/>
           </a:solidFill>
-          <a:ln w="12700">
+          <a:ln w="19050">
             <a:solidFill>
-              <a:srgbClr val="3D3D39"/>
+              <a:srgbClr val="6B3FA0"/>
             </a:solidFill>
             <a:prstDash val="solid"/>
           </a:ln>
-        </p:spPr>
-      </p:sp>
-      <p:sp>
-        <p:nvSpPr>
-          <p:cNvPr id="6" name="Text 4"/>
-          <p:cNvSpPr/>
-          <p:nvPr/>
-        </p:nvSpPr>
-        <p:spPr>
-          <a:xfrm>
-            <a:off x="841248" y="1783080"/>
-            <a:ext cx="411480" cy="502920"/>
-          </a:xfrm>
-          <a:prstGeom prst="rect">
-            <a:avLst/>
-          </a:prstGeom>
-          <a:noFill/>
-          <a:ln/>
-        </p:spPr>
-        <p:txBody>
-          <a:bodyPr wrap="square" lIns="0" tIns="0" rIns="0" bIns="0" rtlCol="0" anchor="ctr"/>
-          <a:lstStyle/>
-          <a:p>
-            <a:pPr algn="ctr" indent="0" marL="0">
-              <a:buNone/>
-            </a:pPr>
-            <a:r>
-              <a:rPr lang="en-US" sz="1800" dirty="0">
-                <a:solidFill>
-                  <a:srgbClr val="000000"/>
-                </a:solidFill>
-              </a:rPr>
-              <a:t>📄</a:t>
-            </a:r>
-            <a:endParaRPr lang="en-US" sz="1800" dirty="0"/>
-          </a:p>
-        </p:txBody>
-      </p:sp>
-      <p:sp>
-        <p:nvSpPr>
-          <p:cNvPr id="7" name="Text 5"/>
-          <p:cNvSpPr/>
-          <p:nvPr/>
-        </p:nvSpPr>
-        <p:spPr>
-          <a:xfrm>
-            <a:off x="1261872" y="1801368"/>
-            <a:ext cx="1810512" cy="502920"/>
-          </a:xfrm>
-          <a:prstGeom prst="rect">
-            <a:avLst/>
-          </a:prstGeom>
-          <a:noFill/>
-          <a:ln/>
-        </p:spPr>
-        <p:txBody>
-          <a:bodyPr wrap="square" lIns="0" tIns="0" rIns="0" bIns="0" rtlCol="0" anchor="ctr"/>
-          <a:lstStyle/>
-          <a:p>
-            <a:pPr indent="0" marL="0">
-              <a:buNone/>
-            </a:pPr>
-            <a:r>
-              <a:rPr lang="en-US" sz="1000" dirty="0">
-                <a:solidFill>
-                  <a:srgbClr val="D0CFC8"/>
+          <a:effectLst>
+            <a:outerShdw blurRad="101600" dist="38100" dir="2700000" algn="bl" rotWithShape="0">
+              <a:srgbClr val="000000">
+                <a:alpha val="10000"/>
+              </a:srgbClr>
+            </a:outerShdw>
+          </a:effectLst>
+        </p:spPr>
+      </p:sp>
+      <p:sp>
+        <p:nvSpPr>
+          <p:cNvPr id="12" name="Text 10"/>
+          <p:cNvSpPr/>
+          <p:nvPr/>
+        </p:nvSpPr>
+        <p:spPr>
+          <a:xfrm>
+            <a:off x="6355080" y="1069848"/>
+            <a:ext cx="2468880" cy="320040"/>
+          </a:xfrm>
+          <a:prstGeom prst="rect">
+            <a:avLst/>
+          </a:prstGeom>
+          <a:noFill/>
+          <a:ln/>
+        </p:spPr>
+        <p:txBody>
+          <a:bodyPr wrap="square" lIns="0" tIns="0" rIns="0" bIns="0" rtlCol="0" anchor="ctr"/>
+          <a:lstStyle/>
+          <a:p>
+            <a:pPr marL="0" indent="0">
+              <a:buNone/>
+            </a:pPr>
+            <a:r>
+              <a:rPr lang="en-US" sz="1200" b="1" dirty="0">
+                <a:solidFill>
+                  <a:srgbClr val="6B3FA0"/>
+                </a:solidFill>
+                <a:latin typeface="Courier New" pitchFamily="34" charset="0"/>
+                <a:ea typeface="Courier New" pitchFamily="34" charset="-122"/>
+                <a:cs typeface="Courier New" pitchFamily="34" charset="-120"/>
+              </a:rPr>
+              <a:t>contenteditable</a:t>
+            </a:r>
+            <a:endParaRPr lang="en-US" sz="1200" dirty="0"/>
+          </a:p>
+        </p:txBody>
+      </p:sp>
+      <p:sp>
+        <p:nvSpPr>
+          <p:cNvPr id="13" name="Text 11"/>
+          <p:cNvSpPr/>
+          <p:nvPr/>
+        </p:nvSpPr>
+        <p:spPr>
+          <a:xfrm>
+            <a:off x="6355080" y="1399032"/>
+            <a:ext cx="2468880" cy="256032"/>
+          </a:xfrm>
+          <a:prstGeom prst="rect">
+            <a:avLst/>
+          </a:prstGeom>
+          <a:noFill/>
+          <a:ln/>
+        </p:spPr>
+        <p:txBody>
+          <a:bodyPr wrap="square" lIns="0" tIns="0" rIns="0" bIns="0" rtlCol="0" anchor="ctr"/>
+          <a:lstStyle/>
+          <a:p>
+            <a:pPr marL="0" indent="0">
+              <a:buNone/>
+            </a:pPr>
+            <a:r>
+              <a:rPr lang="en-US" sz="950" b="1" dirty="0">
+                <a:solidFill>
+                  <a:srgbClr val="1A1A18"/>
                 </a:solidFill>
                 <a:latin typeface="Calibri" pitchFamily="34" charset="0"/>
                 <a:ea typeface="Calibri" pitchFamily="34" charset="-122"/>
                 <a:cs typeface="Calibri" pitchFamily="34" charset="-120"/>
               </a:rPr>
-              <a:t>DOCX upload via Mammoth.js</a:t>
-            </a:r>
-            <a:endParaRPr lang="en-US" sz="1000" dirty="0"/>
-          </a:p>
-        </p:txBody>
-      </p:sp>
-      <p:sp>
-        <p:nvSpPr>
-          <p:cNvPr id="8" name="Shape 6"/>
-          <p:cNvSpPr/>
-          <p:nvPr/>
-        </p:nvSpPr>
-        <p:spPr>
-          <a:xfrm>
-            <a:off x="3474720" y="1691640"/>
-            <a:ext cx="2468880" cy="713232"/>
+              <a:t>Browser rich text editor</a:t>
+            </a:r>
+            <a:endParaRPr lang="en-US" sz="950" dirty="0"/>
+          </a:p>
+        </p:txBody>
+      </p:sp>
+      <p:sp>
+        <p:nvSpPr>
+          <p:cNvPr id="14" name="Text 12"/>
+          <p:cNvSpPr/>
+          <p:nvPr/>
+        </p:nvSpPr>
+        <p:spPr>
+          <a:xfrm>
+            <a:off x="6355080" y="1673352"/>
+            <a:ext cx="2468880" cy="777240"/>
+          </a:xfrm>
+          <a:prstGeom prst="rect">
+            <a:avLst/>
+          </a:prstGeom>
+          <a:noFill/>
+          <a:ln/>
+        </p:spPr>
+        <p:txBody>
+          <a:bodyPr wrap="square" lIns="0" tIns="0" rIns="0" bIns="0" rtlCol="0" anchor="ctr"/>
+          <a:lstStyle/>
+          <a:p>
+            <a:pPr marL="0" indent="0">
+              <a:buNone/>
+            </a:pPr>
+            <a:r>
+              <a:rPr lang="en-US" sz="900" dirty="0">
+                <a:solidFill>
+                  <a:srgbClr val="5A5952"/>
+                </a:solidFill>
+                <a:latin typeface="Calibri" pitchFamily="34" charset="0"/>
+                <a:ea typeface="Calibri" pitchFamily="34" charset="-122"/>
+                <a:cs typeface="Calibri" pitchFamily="34" charset="-120"/>
+              </a:rPr>
+              <a:t>Native browser API. sanitizeEditorHtml() normalises output before rules run.</a:t>
+            </a:r>
+            <a:endParaRPr lang="en-US" sz="900" dirty="0"/>
+          </a:p>
+        </p:txBody>
+      </p:sp>
+      <p:sp>
+        <p:nvSpPr>
+          <p:cNvPr id="15" name="Shape 13"/>
+          <p:cNvSpPr/>
+          <p:nvPr/>
+        </p:nvSpPr>
+        <p:spPr>
+          <a:xfrm>
+            <a:off x="365760" y="2880360"/>
+            <a:ext cx="2743200" cy="1691640"/>
           </a:xfrm>
           <a:prstGeom prst="roundRect">
             <a:avLst>
-              <a:gd name="adj" fmla="val 12821"/>
+              <a:gd name="adj" fmla="val 5405"/>
             </a:avLst>
           </a:prstGeom>
           <a:solidFill>
-            <a:srgbClr val="252523"/>
+            <a:srgbClr val="FFF8EE"/>
           </a:solidFill>
-          <a:ln w="12700">
+          <a:ln w="19050">
             <a:solidFill>
-              <a:srgbClr val="3D3D39"/>
+              <a:srgbClr val="D97706"/>
             </a:solidFill>
             <a:prstDash val="solid"/>
           </a:ln>
-        </p:spPr>
-      </p:sp>
-      <p:sp>
-        <p:nvSpPr>
-          <p:cNvPr id="9" name="Text 7"/>
-          <p:cNvSpPr/>
-          <p:nvPr/>
-        </p:nvSpPr>
-        <p:spPr>
-          <a:xfrm>
-            <a:off x="3584448" y="1783080"/>
-            <a:ext cx="411480" cy="502920"/>
-          </a:xfrm>
-          <a:prstGeom prst="rect">
-            <a:avLst/>
-          </a:prstGeom>
-          <a:noFill/>
-          <a:ln/>
-        </p:spPr>
-        <p:txBody>
-          <a:bodyPr wrap="square" lIns="0" tIns="0" rIns="0" bIns="0" rtlCol="0" anchor="ctr"/>
-          <a:lstStyle/>
-          <a:p>
-            <a:pPr algn="ctr" indent="0" marL="0">
-              <a:buNone/>
-            </a:pPr>
-            <a:r>
-              <a:rPr lang="en-US" sz="1800" dirty="0">
-                <a:solidFill>
-                  <a:srgbClr val="000000"/>
-                </a:solidFill>
-              </a:rPr>
-              <a:t>📊</a:t>
-            </a:r>
-            <a:endParaRPr lang="en-US" sz="1800" dirty="0"/>
-          </a:p>
-        </p:txBody>
-      </p:sp>
-      <p:sp>
-        <p:nvSpPr>
-          <p:cNvPr id="10" name="Text 8"/>
-          <p:cNvSpPr/>
-          <p:nvPr/>
-        </p:nvSpPr>
-        <p:spPr>
-          <a:xfrm>
-            <a:off x="4005072" y="1801368"/>
-            <a:ext cx="1810512" cy="502920"/>
-          </a:xfrm>
-          <a:prstGeom prst="rect">
-            <a:avLst/>
-          </a:prstGeom>
-          <a:noFill/>
-          <a:ln/>
-        </p:spPr>
-        <p:txBody>
-          <a:bodyPr wrap="square" lIns="0" tIns="0" rIns="0" bIns="0" rtlCol="0" anchor="ctr"/>
-          <a:lstStyle/>
-          <a:p>
-            <a:pPr indent="0" marL="0">
-              <a:buNone/>
-            </a:pPr>
-            <a:r>
-              <a:rPr lang="en-US" sz="1000" dirty="0">
-                <a:solidFill>
-                  <a:srgbClr val="D0CFC8"/>
+          <a:effectLst>
+            <a:outerShdw blurRad="101600" dist="38100" dir="2700000" algn="bl" rotWithShape="0">
+              <a:srgbClr val="000000">
+                <a:alpha val="10000"/>
+              </a:srgbClr>
+            </a:outerShdw>
+          </a:effectLst>
+        </p:spPr>
+      </p:sp>
+      <p:sp>
+        <p:nvSpPr>
+          <p:cNvPr id="16" name="Text 14"/>
+          <p:cNvSpPr/>
+          <p:nvPr/>
+        </p:nvSpPr>
+        <p:spPr>
+          <a:xfrm>
+            <a:off x="502920" y="2990088"/>
+            <a:ext cx="2468880" cy="320040"/>
+          </a:xfrm>
+          <a:prstGeom prst="rect">
+            <a:avLst/>
+          </a:prstGeom>
+          <a:noFill/>
+          <a:ln/>
+        </p:spPr>
+        <p:txBody>
+          <a:bodyPr wrap="square" lIns="0" tIns="0" rIns="0" bIns="0" rtlCol="0" anchor="ctr"/>
+          <a:lstStyle/>
+          <a:p>
+            <a:pPr marL="0" indent="0">
+              <a:buNone/>
+            </a:pPr>
+            <a:r>
+              <a:rPr lang="en-US" sz="1200" b="1" dirty="0">
+                <a:solidFill>
+                  <a:srgbClr val="D97706"/>
+                </a:solidFill>
+                <a:latin typeface="Courier New" pitchFamily="34" charset="0"/>
+                <a:ea typeface="Courier New" pitchFamily="34" charset="-122"/>
+                <a:cs typeface="Courier New" pitchFamily="34" charset="-120"/>
+              </a:rPr>
+              <a:t>DOMParser</a:t>
+            </a:r>
+            <a:endParaRPr lang="en-US" sz="1200" dirty="0"/>
+          </a:p>
+        </p:txBody>
+      </p:sp>
+      <p:sp>
+        <p:nvSpPr>
+          <p:cNvPr id="17" name="Text 15"/>
+          <p:cNvSpPr/>
+          <p:nvPr/>
+        </p:nvSpPr>
+        <p:spPr>
+          <a:xfrm>
+            <a:off x="502920" y="3319272"/>
+            <a:ext cx="2468880" cy="256032"/>
+          </a:xfrm>
+          <a:prstGeom prst="rect">
+            <a:avLst/>
+          </a:prstGeom>
+          <a:noFill/>
+          <a:ln/>
+        </p:spPr>
+        <p:txBody>
+          <a:bodyPr wrap="square" lIns="0" tIns="0" rIns="0" bIns="0" rtlCol="0" anchor="ctr"/>
+          <a:lstStyle/>
+          <a:p>
+            <a:pPr marL="0" indent="0">
+              <a:buNone/>
+            </a:pPr>
+            <a:r>
+              <a:rPr lang="en-US" sz="950" b="1" dirty="0">
+                <a:solidFill>
+                  <a:srgbClr val="1A1A18"/>
                 </a:solidFill>
                 <a:latin typeface="Calibri" pitchFamily="34" charset="0"/>
                 <a:ea typeface="Calibri" pitchFamily="34" charset="-122"/>
                 <a:cs typeface="Calibri" pitchFamily="34" charset="-120"/>
               </a:rPr>
-              <a:t>Excel &amp; CSV via SheetJS</a:t>
-            </a:r>
-            <a:endParaRPr lang="en-US" sz="1000" dirty="0"/>
-          </a:p>
-        </p:txBody>
-      </p:sp>
-      <p:sp>
-        <p:nvSpPr>
-          <p:cNvPr id="11" name="Shape 9"/>
-          <p:cNvSpPr/>
-          <p:nvPr/>
-        </p:nvSpPr>
-        <p:spPr>
-          <a:xfrm>
-            <a:off x="6217920" y="1691640"/>
-            <a:ext cx="2468880" cy="713232"/>
+              <a:t>HTML transformation</a:t>
+            </a:r>
+            <a:endParaRPr lang="en-US" sz="950" dirty="0"/>
+          </a:p>
+        </p:txBody>
+      </p:sp>
+      <p:sp>
+        <p:nvSpPr>
+          <p:cNvPr id="18" name="Text 16"/>
+          <p:cNvSpPr/>
+          <p:nvPr/>
+        </p:nvSpPr>
+        <p:spPr>
+          <a:xfrm>
+            <a:off x="502920" y="3593592"/>
+            <a:ext cx="2468880" cy="777240"/>
+          </a:xfrm>
+          <a:prstGeom prst="rect">
+            <a:avLst/>
+          </a:prstGeom>
+          <a:noFill/>
+          <a:ln/>
+        </p:spPr>
+        <p:txBody>
+          <a:bodyPr wrap="square" lIns="0" tIns="0" rIns="0" bIns="0" rtlCol="0" anchor="ctr"/>
+          <a:lstStyle/>
+          <a:p>
+            <a:pPr marL="0" indent="0">
+              <a:buNone/>
+            </a:pPr>
+            <a:r>
+              <a:rPr lang="en-US" sz="900" dirty="0">
+                <a:solidFill>
+                  <a:srgbClr val="5A5952"/>
+                </a:solidFill>
+                <a:latin typeface="Calibri" pitchFamily="34" charset="0"/>
+                <a:ea typeface="Calibri" pitchFamily="34" charset="-122"/>
+                <a:cs typeface="Calibri" pitchFamily="34" charset="-120"/>
+              </a:rPr>
+              <a:t>All DOM-based rules run in a detached document — never touches the live page.</a:t>
+            </a:r>
+            <a:endParaRPr lang="en-US" sz="900" dirty="0"/>
+          </a:p>
+        </p:txBody>
+      </p:sp>
+      <p:sp>
+        <p:nvSpPr>
+          <p:cNvPr id="19" name="Shape 17"/>
+          <p:cNvSpPr/>
+          <p:nvPr/>
+        </p:nvSpPr>
+        <p:spPr>
+          <a:xfrm>
+            <a:off x="3291840" y="2880360"/>
+            <a:ext cx="2743200" cy="1691640"/>
           </a:xfrm>
           <a:prstGeom prst="roundRect">
             <a:avLst>
-              <a:gd name="adj" fmla="val 12821"/>
+              <a:gd name="adj" fmla="val 5405"/>
             </a:avLst>
           </a:prstGeom>
           <a:solidFill>
-            <a:srgbClr val="252523"/>
+            <a:srgbClr val="FFF0EE"/>
           </a:solidFill>
-          <a:ln w="12700">
+          <a:ln w="19050">
             <a:solidFill>
-              <a:srgbClr val="3D3D39"/>
+              <a:srgbClr val="C84B31"/>
             </a:solidFill>
             <a:prstDash val="solid"/>
           </a:ln>
-        </p:spPr>
-      </p:sp>
-      <p:sp>
-        <p:nvSpPr>
-          <p:cNvPr id="12" name="Text 10"/>
-          <p:cNvSpPr/>
-          <p:nvPr/>
-        </p:nvSpPr>
-        <p:spPr>
-          <a:xfrm>
-            <a:off x="6327648" y="1783080"/>
-            <a:ext cx="411480" cy="502920"/>
-          </a:xfrm>
-          <a:prstGeom prst="rect">
-            <a:avLst/>
-          </a:prstGeom>
-          <a:noFill/>
-          <a:ln/>
-        </p:spPr>
-        <p:txBody>
-          <a:bodyPr wrap="square" lIns="0" tIns="0" rIns="0" bIns="0" rtlCol="0" anchor="ctr"/>
-          <a:lstStyle/>
-          <a:p>
-            <a:pPr algn="ctr" indent="0" marL="0">
-              <a:buNone/>
-            </a:pPr>
-            <a:r>
-              <a:rPr lang="en-US" sz="1800" dirty="0">
-                <a:solidFill>
-                  <a:srgbClr val="000000"/>
-                </a:solidFill>
-              </a:rPr>
-              <a:t>✏️</a:t>
-            </a:r>
-            <a:endParaRPr lang="en-US" sz="1800" dirty="0"/>
-          </a:p>
-        </p:txBody>
-      </p:sp>
-      <p:sp>
-        <p:nvSpPr>
-          <p:cNvPr id="13" name="Text 11"/>
-          <p:cNvSpPr/>
-          <p:nvPr/>
-        </p:nvSpPr>
-        <p:spPr>
-          <a:xfrm>
-            <a:off x="6748272" y="1801368"/>
-            <a:ext cx="1810512" cy="502920"/>
-          </a:xfrm>
-          <a:prstGeom prst="rect">
-            <a:avLst/>
-          </a:prstGeom>
-          <a:noFill/>
-          <a:ln/>
-        </p:spPr>
-        <p:txBody>
-          <a:bodyPr wrap="square" lIns="0" tIns="0" rIns="0" bIns="0" rtlCol="0" anchor="ctr"/>
-          <a:lstStyle/>
-          <a:p>
-            <a:pPr indent="0" marL="0">
-              <a:buNone/>
-            </a:pPr>
-            <a:r>
-              <a:rPr lang="en-US" sz="1000" dirty="0">
-                <a:solidFill>
-                  <a:srgbClr val="D0CFC8"/>
+          <a:effectLst>
+            <a:outerShdw blurRad="101600" dist="38100" dir="2700000" algn="bl" rotWithShape="0">
+              <a:srgbClr val="000000">
+                <a:alpha val="10000"/>
+              </a:srgbClr>
+            </a:outerShdw>
+          </a:effectLst>
+        </p:spPr>
+      </p:sp>
+      <p:sp>
+        <p:nvSpPr>
+          <p:cNvPr id="20" name="Text 18"/>
+          <p:cNvSpPr/>
+          <p:nvPr/>
+        </p:nvSpPr>
+        <p:spPr>
+          <a:xfrm>
+            <a:off x="3429000" y="2990088"/>
+            <a:ext cx="2468880" cy="320040"/>
+          </a:xfrm>
+          <a:prstGeom prst="rect">
+            <a:avLst/>
+          </a:prstGeom>
+          <a:noFill/>
+          <a:ln/>
+        </p:spPr>
+        <p:txBody>
+          <a:bodyPr wrap="square" lIns="0" tIns="0" rIns="0" bIns="0" rtlCol="0" anchor="ctr"/>
+          <a:lstStyle/>
+          <a:p>
+            <a:pPr marL="0" indent="0">
+              <a:buNone/>
+            </a:pPr>
+            <a:r>
+              <a:rPr lang="en-US" sz="1200" b="1" dirty="0">
+                <a:solidFill>
+                  <a:srgbClr val="C84B31"/>
+                </a:solidFill>
+                <a:latin typeface="Courier New" pitchFamily="34" charset="0"/>
+                <a:ea typeface="Courier New" pitchFamily="34" charset="-122"/>
+                <a:cs typeface="Courier New" pitchFamily="34" charset="-120"/>
+              </a:rPr>
+              <a:t>execCommand API</a:t>
+            </a:r>
+            <a:endParaRPr lang="en-US" sz="1200" dirty="0"/>
+          </a:p>
+        </p:txBody>
+      </p:sp>
+      <p:sp>
+        <p:nvSpPr>
+          <p:cNvPr id="21" name="Text 19"/>
+          <p:cNvSpPr/>
+          <p:nvPr/>
+        </p:nvSpPr>
+        <p:spPr>
+          <a:xfrm>
+            <a:off x="3429000" y="3319272"/>
+            <a:ext cx="2468880" cy="256032"/>
+          </a:xfrm>
+          <a:prstGeom prst="rect">
+            <a:avLst/>
+          </a:prstGeom>
+          <a:noFill/>
+          <a:ln/>
+        </p:spPr>
+        <p:txBody>
+          <a:bodyPr wrap="square" lIns="0" tIns="0" rIns="0" bIns="0" rtlCol="0" anchor="ctr"/>
+          <a:lstStyle/>
+          <a:p>
+            <a:pPr marL="0" indent="0">
+              <a:buNone/>
+            </a:pPr>
+            <a:r>
+              <a:rPr lang="en-US" sz="950" b="1" dirty="0">
+                <a:solidFill>
+                  <a:srgbClr val="1A1A18"/>
                 </a:solidFill>
                 <a:latin typeface="Calibri" pitchFamily="34" charset="0"/>
                 <a:ea typeface="Calibri" pitchFamily="34" charset="-122"/>
                 <a:cs typeface="Calibri" pitchFamily="34" charset="-120"/>
               </a:rPr>
-              <a:t>Rich text editor with full toolbar</a:t>
-            </a:r>
-            <a:endParaRPr lang="en-US" sz="1000" dirty="0"/>
-          </a:p>
-        </p:txBody>
-      </p:sp>
-      <p:sp>
-        <p:nvSpPr>
-          <p:cNvPr id="14" name="Shape 12"/>
-          <p:cNvSpPr/>
-          <p:nvPr/>
-        </p:nvSpPr>
-        <p:spPr>
-          <a:xfrm>
-            <a:off x="731520" y="2606040"/>
-            <a:ext cx="2468880" cy="713232"/>
+              <a:t>Toolbar formatting</a:t>
+            </a:r>
+            <a:endParaRPr lang="en-US" sz="950" dirty="0"/>
+          </a:p>
+        </p:txBody>
+      </p:sp>
+      <p:sp>
+        <p:nvSpPr>
+          <p:cNvPr id="22" name="Text 20"/>
+          <p:cNvSpPr/>
+          <p:nvPr/>
+        </p:nvSpPr>
+        <p:spPr>
+          <a:xfrm>
+            <a:off x="3429000" y="3593592"/>
+            <a:ext cx="2468880" cy="777240"/>
+          </a:xfrm>
+          <a:prstGeom prst="rect">
+            <a:avLst/>
+          </a:prstGeom>
+          <a:noFill/>
+          <a:ln/>
+        </p:spPr>
+        <p:txBody>
+          <a:bodyPr wrap="square" lIns="0" tIns="0" rIns="0" bIns="0" rtlCol="0" anchor="ctr"/>
+          <a:lstStyle/>
+          <a:p>
+            <a:pPr marL="0" indent="0">
+              <a:buNone/>
+            </a:pPr>
+            <a:r>
+              <a:rPr lang="en-US" sz="900" dirty="0">
+                <a:solidFill>
+                  <a:srgbClr val="5A5952"/>
+                </a:solidFill>
+                <a:latin typeface="Calibri" pitchFamily="34" charset="0"/>
+                <a:ea typeface="Calibri" pitchFamily="34" charset="-122"/>
+                <a:cs typeface="Calibri" pitchFamily="34" charset="-120"/>
+              </a:rPr>
+              <a:t>Bold, italic, alignment, lists, indent — standard browser formatting commands.</a:t>
+            </a:r>
+            <a:endParaRPr lang="en-US" sz="900" dirty="0"/>
+          </a:p>
+        </p:txBody>
+      </p:sp>
+      <p:sp>
+        <p:nvSpPr>
+          <p:cNvPr id="23" name="Shape 21"/>
+          <p:cNvSpPr/>
+          <p:nvPr/>
+        </p:nvSpPr>
+        <p:spPr>
+          <a:xfrm>
+            <a:off x="6217920" y="2880360"/>
+            <a:ext cx="2743200" cy="1691640"/>
           </a:xfrm>
           <a:prstGeom prst="roundRect">
             <a:avLst>
-              <a:gd name="adj" fmla="val 12821"/>
+              <a:gd name="adj" fmla="val 5405"/>
             </a:avLst>
           </a:prstGeom>
           <a:solidFill>
-            <a:srgbClr val="252523"/>
+            <a:srgbClr val="EDF7F0"/>
           </a:solidFill>
-          <a:ln w="12700">
+          <a:ln w="19050">
             <a:solidFill>
-              <a:srgbClr val="3D3D39"/>
+              <a:srgbClr val="2D6A4F"/>
             </a:solidFill>
             <a:prstDash val="solid"/>
           </a:ln>
-        </p:spPr>
-      </p:sp>
-      <p:sp>
-        <p:nvSpPr>
-          <p:cNvPr id="15" name="Text 13"/>
-          <p:cNvSpPr/>
-          <p:nvPr/>
-        </p:nvSpPr>
-        <p:spPr>
-          <a:xfrm>
-            <a:off x="841248" y="2697480"/>
-            <a:ext cx="411480" cy="502920"/>
-          </a:xfrm>
-          <a:prstGeom prst="rect">
-            <a:avLst/>
-          </a:prstGeom>
-          <a:noFill/>
-          <a:ln/>
-        </p:spPr>
-        <p:txBody>
-          <a:bodyPr wrap="square" lIns="0" tIns="0" rIns="0" bIns="0" rtlCol="0" anchor="ctr"/>
-          <a:lstStyle/>
-          <a:p>
-            <a:pPr algn="ctr" indent="0" marL="0">
-              <a:buNone/>
-            </a:pPr>
-            <a:r>
-              <a:rPr lang="en-US" sz="1800" dirty="0">
-                <a:solidFill>
-                  <a:srgbClr val="000000"/>
-                </a:solidFill>
-              </a:rPr>
-              <a:t>🏷️</a:t>
-            </a:r>
-            <a:endParaRPr lang="en-US" sz="1800" dirty="0"/>
-          </a:p>
-        </p:txBody>
-      </p:sp>
-      <p:sp>
-        <p:nvSpPr>
-          <p:cNvPr id="16" name="Text 14"/>
-          <p:cNvSpPr/>
-          <p:nvPr/>
-        </p:nvSpPr>
-        <p:spPr>
-          <a:xfrm>
-            <a:off x="1261872" y="2715768"/>
-            <a:ext cx="1810512" cy="502920"/>
-          </a:xfrm>
-          <a:prstGeom prst="rect">
-            <a:avLst/>
-          </a:prstGeom>
-          <a:noFill/>
-          <a:ln/>
-        </p:spPr>
-        <p:txBody>
-          <a:bodyPr wrap="square" lIns="0" tIns="0" rIns="0" bIns="0" rtlCol="0" anchor="ctr"/>
-          <a:lstStyle/>
-          <a:p>
-            <a:pPr indent="0" marL="0">
-              <a:buNone/>
-            </a:pPr>
-            <a:r>
-              <a:rPr lang="en-US" sz="1000" dirty="0">
-                <a:solidFill>
-                  <a:srgbClr val="D0CFC8"/>
+          <a:effectLst>
+            <a:outerShdw blurRad="101600" dist="38100" dir="2700000" algn="bl" rotWithShape="0">
+              <a:srgbClr val="000000">
+                <a:alpha val="10000"/>
+              </a:srgbClr>
+            </a:outerShdw>
+          </a:effectLst>
+        </p:spPr>
+      </p:sp>
+      <p:sp>
+        <p:nvSpPr>
+          <p:cNvPr id="24" name="Text 22"/>
+          <p:cNvSpPr/>
+          <p:nvPr/>
+        </p:nvSpPr>
+        <p:spPr>
+          <a:xfrm>
+            <a:off x="6355080" y="2990088"/>
+            <a:ext cx="2468880" cy="320040"/>
+          </a:xfrm>
+          <a:prstGeom prst="rect">
+            <a:avLst/>
+          </a:prstGeom>
+          <a:noFill/>
+          <a:ln/>
+        </p:spPr>
+        <p:txBody>
+          <a:bodyPr wrap="square" lIns="0" tIns="0" rIns="0" bIns="0" rtlCol="0" anchor="ctr"/>
+          <a:lstStyle/>
+          <a:p>
+            <a:pPr marL="0" indent="0">
+              <a:buNone/>
+            </a:pPr>
+            <a:r>
+              <a:rPr lang="en-US" sz="1200" b="1" dirty="0">
+                <a:solidFill>
+                  <a:srgbClr val="2D6A4F"/>
+                </a:solidFill>
+                <a:latin typeface="Courier New" pitchFamily="34" charset="0"/>
+                <a:ea typeface="Courier New" pitchFamily="34" charset="-122"/>
+                <a:cs typeface="Courier New" pitchFamily="34" charset="-120"/>
+              </a:rPr>
+              <a:t>Zero dependencies</a:t>
+            </a:r>
+            <a:endParaRPr lang="en-US" sz="1200" dirty="0"/>
+          </a:p>
+        </p:txBody>
+      </p:sp>
+      <p:sp>
+        <p:nvSpPr>
+          <p:cNvPr id="25" name="Text 23"/>
+          <p:cNvSpPr/>
+          <p:nvPr/>
+        </p:nvSpPr>
+        <p:spPr>
+          <a:xfrm>
+            <a:off x="6355080" y="3319272"/>
+            <a:ext cx="2468880" cy="256032"/>
+          </a:xfrm>
+          <a:prstGeom prst="rect">
+            <a:avLst/>
+          </a:prstGeom>
+          <a:noFill/>
+          <a:ln/>
+        </p:spPr>
+        <p:txBody>
+          <a:bodyPr wrap="square" lIns="0" tIns="0" rIns="0" bIns="0" rtlCol="0" anchor="ctr"/>
+          <a:lstStyle/>
+          <a:p>
+            <a:pPr marL="0" indent="0">
+              <a:buNone/>
+            </a:pPr>
+            <a:r>
+              <a:rPr lang="en-US" sz="950" b="1" dirty="0">
+                <a:solidFill>
+                  <a:srgbClr val="1A1A18"/>
                 </a:solidFill>
                 <a:latin typeface="Calibri" pitchFamily="34" charset="0"/>
                 <a:ea typeface="Calibri" pitchFamily="34" charset="-122"/>
                 <a:cs typeface="Calibri" pitchFamily="34" charset="-120"/>
               </a:rPr>
-              <a:t>Bold row → semantic th scope="col"</a:t>
-            </a:r>
-            <a:endParaRPr lang="en-US" sz="1000" dirty="0"/>
-          </a:p>
-        </p:txBody>
-      </p:sp>
-      <p:sp>
-        <p:nvSpPr>
-          <p:cNvPr id="17" name="Shape 15"/>
-          <p:cNvSpPr/>
-          <p:nvPr/>
-        </p:nvSpPr>
-        <p:spPr>
-          <a:xfrm>
-            <a:off x="3474720" y="2606040"/>
-            <a:ext cx="2468880" cy="713232"/>
-          </a:xfrm>
-          <a:prstGeom prst="roundRect">
-            <a:avLst>
-              <a:gd name="adj" fmla="val 12821"/>
-            </a:avLst>
-          </a:prstGeom>
-          <a:solidFill>
-            <a:srgbClr val="252523"/>
-          </a:solidFill>
-          <a:ln w="12700">
-            <a:solidFill>
-              <a:srgbClr val="3D3D39"/>
-            </a:solidFill>
-            <a:prstDash val="solid"/>
-          </a:ln>
-        </p:spPr>
-      </p:sp>
-      <p:sp>
-        <p:nvSpPr>
-          <p:cNvPr id="18" name="Text 16"/>
-          <p:cNvSpPr/>
-          <p:nvPr/>
-        </p:nvSpPr>
-        <p:spPr>
-          <a:xfrm>
-            <a:off x="3584448" y="2697480"/>
-            <a:ext cx="411480" cy="502920"/>
-          </a:xfrm>
-          <a:prstGeom prst="rect">
-            <a:avLst/>
-          </a:prstGeom>
-          <a:noFill/>
-          <a:ln/>
-        </p:spPr>
-        <p:txBody>
-          <a:bodyPr wrap="square" lIns="0" tIns="0" rIns="0" bIns="0" rtlCol="0" anchor="ctr"/>
-          <a:lstStyle/>
-          <a:p>
-            <a:pPr algn="ctr" indent="0" marL="0">
-              <a:buNone/>
-            </a:pPr>
-            <a:r>
-              <a:rPr lang="en-US" sz="1800" dirty="0">
-                <a:solidFill>
-                  <a:srgbClr val="000000"/>
-                </a:solidFill>
-              </a:rPr>
-              <a:t>🚫</a:t>
-            </a:r>
-            <a:endParaRPr lang="en-US" sz="1800" dirty="0"/>
-          </a:p>
-        </p:txBody>
-      </p:sp>
-      <p:sp>
-        <p:nvSpPr>
-          <p:cNvPr id="19" name="Text 17"/>
-          <p:cNvSpPr/>
-          <p:nvPr/>
-        </p:nvSpPr>
-        <p:spPr>
-          <a:xfrm>
-            <a:off x="4005072" y="2715768"/>
-            <a:ext cx="1810512" cy="502920"/>
-          </a:xfrm>
-          <a:prstGeom prst="rect">
-            <a:avLst/>
-          </a:prstGeom>
-          <a:noFill/>
-          <a:ln/>
-        </p:spPr>
-        <p:txBody>
-          <a:bodyPr wrap="square" lIns="0" tIns="0" rIns="0" bIns="0" rtlCol="0" anchor="ctr"/>
-          <a:lstStyle/>
-          <a:p>
-            <a:pPr indent="0" marL="0">
-              <a:buNone/>
-            </a:pPr>
-            <a:r>
-              <a:rPr lang="en-US" sz="1000" dirty="0">
-                <a:solidFill>
-                  <a:srgbClr val="D0CFC8"/>
+              <a:t>No CDN, no framework</a:t>
+            </a:r>
+            <a:endParaRPr lang="en-US" sz="950" dirty="0"/>
+          </a:p>
+        </p:txBody>
+      </p:sp>
+      <p:sp>
+        <p:nvSpPr>
+          <p:cNvPr id="26" name="Text 24"/>
+          <p:cNvSpPr/>
+          <p:nvPr/>
+        </p:nvSpPr>
+        <p:spPr>
+          <a:xfrm>
+            <a:off x="6355080" y="3593592"/>
+            <a:ext cx="2468880" cy="777240"/>
+          </a:xfrm>
+          <a:prstGeom prst="rect">
+            <a:avLst/>
+          </a:prstGeom>
+          <a:noFill/>
+          <a:ln/>
+        </p:spPr>
+        <p:txBody>
+          <a:bodyPr wrap="square" lIns="0" tIns="0" rIns="0" bIns="0" rtlCol="0" anchor="ctr"/>
+          <a:lstStyle/>
+          <a:p>
+            <a:pPr marL="0" indent="0">
+              <a:buNone/>
+            </a:pPr>
+            <a:r>
+              <a:rPr lang="en-US" sz="900" dirty="0">
+                <a:solidFill>
+                  <a:srgbClr val="5A5952"/>
                 </a:solidFill>
                 <a:latin typeface="Calibri" pitchFamily="34" charset="0"/>
                 <a:ea typeface="Calibri" pitchFamily="34" charset="-122"/>
                 <a:cs typeface="Calibri" pitchFamily="34" charset="-120"/>
               </a:rPr>
-              <a:t>Strikethrough text removed entirely</a:t>
-            </a:r>
-            <a:endParaRPr lang="en-US" sz="1000" dirty="0"/>
-          </a:p>
-        </p:txBody>
-      </p:sp>
-      <p:sp>
-        <p:nvSpPr>
-          <p:cNvPr id="20" name="Shape 18"/>
-          <p:cNvSpPr/>
-          <p:nvPr/>
-        </p:nvSpPr>
-        <p:spPr>
-          <a:xfrm>
-            <a:off x="6217920" y="2606040"/>
-            <a:ext cx="2468880" cy="713232"/>
-          </a:xfrm>
-          <a:prstGeom prst="roundRect">
-            <a:avLst>
-              <a:gd name="adj" fmla="val 12821"/>
-            </a:avLst>
-          </a:prstGeom>
-          <a:solidFill>
-            <a:srgbClr val="252523"/>
-          </a:solidFill>
-          <a:ln w="12700">
-            <a:solidFill>
-              <a:srgbClr val="3D3D39"/>
-            </a:solidFill>
-            <a:prstDash val="solid"/>
-          </a:ln>
-        </p:spPr>
-      </p:sp>
-      <p:sp>
-        <p:nvSpPr>
-          <p:cNvPr id="21" name="Text 19"/>
-          <p:cNvSpPr/>
-          <p:nvPr/>
-        </p:nvSpPr>
-        <p:spPr>
-          <a:xfrm>
-            <a:off x="6327648" y="2697480"/>
-            <a:ext cx="411480" cy="502920"/>
-          </a:xfrm>
-          <a:prstGeom prst="rect">
-            <a:avLst/>
-          </a:prstGeom>
-          <a:noFill/>
-          <a:ln/>
-        </p:spPr>
-        <p:txBody>
-          <a:bodyPr wrap="square" lIns="0" tIns="0" rIns="0" bIns="0" rtlCol="0" anchor="ctr"/>
-          <a:lstStyle/>
-          <a:p>
-            <a:pPr algn="ctr" indent="0" marL="0">
-              <a:buNone/>
-            </a:pPr>
-            <a:r>
-              <a:rPr lang="en-US" sz="1800" dirty="0">
-                <a:solidFill>
-                  <a:srgbClr val="000000"/>
-                </a:solidFill>
-              </a:rPr>
-              <a:t>🔗</a:t>
-            </a:r>
-            <a:endParaRPr lang="en-US" sz="1800" dirty="0"/>
-          </a:p>
-        </p:txBody>
-      </p:sp>
-      <p:sp>
-        <p:nvSpPr>
-          <p:cNvPr id="22" name="Text 20"/>
-          <p:cNvSpPr/>
-          <p:nvPr/>
-        </p:nvSpPr>
-        <p:spPr>
-          <a:xfrm>
-            <a:off x="6748272" y="2715768"/>
-            <a:ext cx="1810512" cy="502920"/>
-          </a:xfrm>
-          <a:prstGeom prst="rect">
-            <a:avLst/>
-          </a:prstGeom>
-          <a:noFill/>
-          <a:ln/>
-        </p:spPr>
-        <p:txBody>
-          <a:bodyPr wrap="square" lIns="0" tIns="0" rIns="0" bIns="0" rtlCol="0" anchor="ctr"/>
-          <a:lstStyle/>
-          <a:p>
-            <a:pPr indent="0" marL="0">
-              <a:buNone/>
-            </a:pPr>
-            <a:r>
-              <a:rPr lang="en-US" sz="1000" dirty="0">
-                <a:solidFill>
-                  <a:srgbClr val="D0CFC8"/>
-                </a:solidFill>
-                <a:latin typeface="Calibri" pitchFamily="34" charset="0"/>
-                <a:ea typeface="Calibri" pitchFamily="34" charset="-122"/>
-                <a:cs typeface="Calibri" pitchFamily="34" charset="-120"/>
-              </a:rPr>
-              <a:t>strong wraps a · file:// URLs fixed</a:t>
-            </a:r>
-            <a:endParaRPr lang="en-US" sz="1000" dirty="0"/>
-          </a:p>
-        </p:txBody>
-      </p:sp>
-      <p:sp>
-        <p:nvSpPr>
-          <p:cNvPr id="23" name="Text 21"/>
-          <p:cNvSpPr/>
-          <p:nvPr/>
-        </p:nvSpPr>
-        <p:spPr>
-          <a:xfrm>
-            <a:off x="457200" y="4681728"/>
-            <a:ext cx="8229600" cy="320040"/>
-          </a:xfrm>
-          <a:prstGeom prst="rect">
-            <a:avLst/>
-          </a:prstGeom>
-          <a:noFill/>
-          <a:ln/>
-        </p:spPr>
-        <p:txBody>
-          <a:bodyPr wrap="square" lIns="0" tIns="0" rIns="0" bIns="0" rtlCol="0" anchor="ctr"/>
-          <a:lstStyle/>
-          <a:p>
-            <a:pPr algn="ctr" indent="0" marL="0">
-              <a:buNone/>
-            </a:pPr>
-            <a:r>
-              <a:rPr lang="en-US" sz="950" dirty="0">
-                <a:solidFill>
-                  <a:srgbClr val="5A5952"/>
-                </a:solidFill>
-                <a:latin typeface="Courier New" pitchFamily="34" charset="0"/>
-                <a:ea typeface="Courier New" pitchFamily="34" charset="-122"/>
-                <a:cs typeface="Courier New" pitchFamily="34" charset="-120"/>
-              </a:rPr>
-              <a:t>Files required: index.html  ·  app.js  ·  style.css  ·  mammoth.min.js  ·  xlsx.min.js</a:t>
-            </a:r>
-            <a:endParaRPr lang="en-US" sz="950" dirty="0"/>
+              <a:t>All libraries bundled locally. Works fully offline once downloaded.</a:t>
+            </a:r>
+            <a:endParaRPr lang="en-US" sz="900" dirty="0"/>
           </a:p>
         </p:txBody>
       </p:sp>
@@ -12269,4 +14111,299 @@
     </a:ext>
   </a:extLst>
 </a:theme>
+</file>
+
+<file path=ppt/theme/theme2.xml><?xml version="1.0" encoding="utf-8"?>
+<a:theme xmlns:a="http://schemas.openxmlformats.org/drawingml/2006/main" name="Office Theme">
+  <a:themeElements>
+    <a:clrScheme name="Office">
+      <a:dk1>
+        <a:sysClr val="windowText" lastClr="000000"/>
+      </a:dk1>
+      <a:lt1>
+        <a:sysClr val="window" lastClr="FFFFFF"/>
+      </a:lt1>
+      <a:dk2>
+        <a:srgbClr val="44546A"/>
+      </a:dk2>
+      <a:lt2>
+        <a:srgbClr val="E7E6E6"/>
+      </a:lt2>
+      <a:accent1>
+        <a:srgbClr val="4472C4"/>
+      </a:accent1>
+      <a:accent2>
+        <a:srgbClr val="ED7D31"/>
+      </a:accent2>
+      <a:accent3>
+        <a:srgbClr val="A5A5A5"/>
+      </a:accent3>
+      <a:accent4>
+        <a:srgbClr val="FFC000"/>
+      </a:accent4>
+      <a:accent5>
+        <a:srgbClr val="5B9BD5"/>
+      </a:accent5>
+      <a:accent6>
+        <a:srgbClr val="70AD47"/>
+      </a:accent6>
+      <a:hlink>
+        <a:srgbClr val="0563C1"/>
+      </a:hlink>
+      <a:folHlink>
+        <a:srgbClr val="954F72"/>
+      </a:folHlink>
+    </a:clrScheme>
+    <a:fontScheme name="Office">
+      <a:majorFont>
+        <a:latin typeface="Calibri Light" panose="020F0302020204030204"/>
+        <a:ea typeface=""/>
+        <a:cs typeface=""/>
+        <a:font script="Jpan" typeface="游ゴシック Light"/>
+        <a:font script="Hang" typeface="맑은 고딕"/>
+        <a:font script="Hans" typeface="等线 Light"/>
+        <a:font script="Hant" typeface="新細明體"/>
+        <a:font script="Arab" typeface="Times New Roman"/>
+        <a:font script="Hebr" typeface="Times New Roman"/>
+        <a:font script="Thai" typeface="Angsana New"/>
+        <a:font script="Ethi" typeface="Nyala"/>
+        <a:font script="Beng" typeface="Vrinda"/>
+        <a:font script="Gujr" typeface="Shruti"/>
+        <a:font script="Khmr" typeface="MoolBoran"/>
+        <a:font script="Knda" typeface="Tunga"/>
+        <a:font script="Guru" typeface="Raavi"/>
+        <a:font script="Cans" typeface="Euphemia"/>
+        <a:font script="Cher" typeface="Plantagenet Cherokee"/>
+        <a:font script="Yiii" typeface="Microsoft Yi Baiti"/>
+        <a:font script="Tibt" typeface="Microsoft Himalaya"/>
+        <a:font script="Thaa" typeface="MV Boli"/>
+        <a:font script="Deva" typeface="Mangal"/>
+        <a:font script="Telu" typeface="Gautami"/>
+        <a:font script="Taml" typeface="Latha"/>
+        <a:font script="Syrc" typeface="Estrangelo Edessa"/>
+        <a:font script="Orya" typeface="Kalinga"/>
+        <a:font script="Mlym" typeface="Kartika"/>
+        <a:font script="Laoo" typeface="DokChampa"/>
+        <a:font script="Sinh" typeface="Iskoola Pota"/>
+        <a:font script="Mong" typeface="Mongolian Baiti"/>
+        <a:font script="Viet" typeface="Times New Roman"/>
+        <a:font script="Uigh" typeface="Microsoft Uighur"/>
+        <a:font script="Geor" typeface="Sylfaen"/>
+        <a:font script="Armn" typeface="Arial"/>
+        <a:font script="Bugi" typeface="Leelawadee UI"/>
+        <a:font script="Bopo" typeface="Microsoft JhengHei"/>
+        <a:font script="Java" typeface="Javanese Text"/>
+        <a:font script="Lisu" typeface="Segoe UI"/>
+        <a:font script="Mymr" typeface="Myanmar Text"/>
+        <a:font script="Nkoo" typeface="Ebrima"/>
+        <a:font script="Olck" typeface="Nirmala UI"/>
+        <a:font script="Osma" typeface="Ebrima"/>
+        <a:font script="Phag" typeface="Phagspa"/>
+        <a:font script="Syrn" typeface="Estrangelo Edessa"/>
+        <a:font script="Syrj" typeface="Estrangelo Edessa"/>
+        <a:font script="Syre" typeface="Estrangelo Edessa"/>
+        <a:font script="Sora" typeface="Nirmala UI"/>
+        <a:font script="Tale" typeface="Microsoft Tai Le"/>
+        <a:font script="Talu" typeface="Microsoft New Tai Lue"/>
+        <a:font script="Tfng" typeface="Ebrima"/>
+      </a:majorFont>
+      <a:minorFont>
+        <a:latin typeface="Calibri" panose="020F0502020204030204"/>
+        <a:ea typeface=""/>
+        <a:cs typeface=""/>
+        <a:font script="Jpan" typeface="游ゴシック"/>
+        <a:font script="Hang" typeface="맑은 고딕"/>
+        <a:font script="Hans" typeface="等线"/>
+        <a:font script="Hant" typeface="新細明體"/>
+        <a:font script="Arab" typeface="Arial"/>
+        <a:font script="Hebr" typeface="Arial"/>
+        <a:font script="Thai" typeface="Cordia New"/>
+        <a:font script="Ethi" typeface="Nyala"/>
+        <a:font script="Beng" typeface="Vrinda"/>
+        <a:font script="Gujr" typeface="Shruti"/>
+        <a:font script="Khmr" typeface="DaunPenh"/>
+        <a:font script="Knda" typeface="Tunga"/>
+        <a:font script="Guru" typeface="Raavi"/>
+        <a:font script="Cans" typeface="Euphemia"/>
+        <a:font script="Cher" typeface="Plantagenet Cherokee"/>
+        <a:font script="Yiii" typeface="Microsoft Yi Baiti"/>
+        <a:font script="Tibt" typeface="Microsoft Himalaya"/>
+        <a:font script="Thaa" typeface="MV Boli"/>
+        <a:font script="Deva" typeface="Mangal"/>
+        <a:font script="Telu" typeface="Gautami"/>
+        <a:font script="Taml" typeface="Latha"/>
+        <a:font script="Syrc" typeface="Estrangelo Edessa"/>
+        <a:font script="Orya" typeface="Kalinga"/>
+        <a:font script="Mlym" typeface="Kartika"/>
+        <a:font script="Laoo" typeface="DokChampa"/>
+        <a:font script="Sinh" typeface="Iskoola Pota"/>
+        <a:font script="Mong" typeface="Mongolian Baiti"/>
+        <a:font script="Viet" typeface="Arial"/>
+        <a:font script="Uigh" typeface="Microsoft Uighur"/>
+        <a:font script="Geor" typeface="Sylfaen"/>
+        <a:font script="Armn" typeface="Arial"/>
+        <a:font script="Bugi" typeface="Leelawadee UI"/>
+        <a:font script="Bopo" typeface="Microsoft JhengHei"/>
+        <a:font script="Java" typeface="Javanese Text"/>
+        <a:font script="Lisu" typeface="Segoe UI"/>
+        <a:font script="Mymr" typeface="Myanmar Text"/>
+        <a:font script="Nkoo" typeface="Ebrima"/>
+        <a:font script="Olck" typeface="Nirmala UI"/>
+        <a:font script="Osma" typeface="Ebrima"/>
+        <a:font script="Phag" typeface="Phagspa"/>
+        <a:font script="Syrn" typeface="Estrangelo Edessa"/>
+        <a:font script="Syrj" typeface="Estrangelo Edessa"/>
+        <a:font script="Syre" typeface="Estrangelo Edessa"/>
+        <a:font script="Sora" typeface="Nirmala UI"/>
+        <a:font script="Tale" typeface="Microsoft Tai Le"/>
+        <a:font script="Talu" typeface="Microsoft New Tai Lue"/>
+        <a:font script="Tfng" typeface="Ebrima"/>
+      </a:minorFont>
+    </a:fontScheme>
+    <a:fmtScheme name="Office">
+      <a:fillStyleLst>
+        <a:solidFill>
+          <a:schemeClr val="phClr"/>
+        </a:solidFill>
+        <a:gradFill rotWithShape="1">
+          <a:gsLst>
+            <a:gs pos="0">
+              <a:schemeClr val="phClr">
+                <a:lumMod val="110000"/>
+                <a:satMod val="105000"/>
+                <a:tint val="67000"/>
+              </a:schemeClr>
+            </a:gs>
+            <a:gs pos="50000">
+              <a:schemeClr val="phClr">
+                <a:lumMod val="105000"/>
+                <a:satMod val="103000"/>
+                <a:tint val="73000"/>
+              </a:schemeClr>
+            </a:gs>
+            <a:gs pos="100000">
+              <a:schemeClr val="phClr">
+                <a:lumMod val="105000"/>
+                <a:satMod val="109000"/>
+                <a:tint val="81000"/>
+              </a:schemeClr>
+            </a:gs>
+          </a:gsLst>
+          <a:lin ang="5400000" scaled="0"/>
+        </a:gradFill>
+        <a:gradFill rotWithShape="1">
+          <a:gsLst>
+            <a:gs pos="0">
+              <a:schemeClr val="phClr">
+                <a:satMod val="103000"/>
+                <a:lumMod val="102000"/>
+                <a:tint val="94000"/>
+              </a:schemeClr>
+            </a:gs>
+            <a:gs pos="50000">
+              <a:schemeClr val="phClr">
+                <a:satMod val="110000"/>
+                <a:lumMod val="100000"/>
+                <a:shade val="100000"/>
+              </a:schemeClr>
+            </a:gs>
+            <a:gs pos="100000">
+              <a:schemeClr val="phClr">
+                <a:lumMod val="99000"/>
+                <a:satMod val="120000"/>
+                <a:shade val="78000"/>
+              </a:schemeClr>
+            </a:gs>
+          </a:gsLst>
+          <a:lin ang="5400000" scaled="0"/>
+        </a:gradFill>
+      </a:fillStyleLst>
+      <a:lnStyleLst>
+        <a:ln w="6350" cap="flat" cmpd="sng" algn="ctr">
+          <a:solidFill>
+            <a:schemeClr val="phClr"/>
+          </a:solidFill>
+          <a:prstDash val="solid"/>
+          <a:miter lim="800000"/>
+        </a:ln>
+        <a:ln w="12700" cap="flat" cmpd="sng" algn="ctr">
+          <a:solidFill>
+            <a:schemeClr val="phClr"/>
+          </a:solidFill>
+          <a:prstDash val="solid"/>
+          <a:miter lim="800000"/>
+        </a:ln>
+        <a:ln w="19050" cap="flat" cmpd="sng" algn="ctr">
+          <a:solidFill>
+            <a:schemeClr val="phClr"/>
+          </a:solidFill>
+          <a:prstDash val="solid"/>
+          <a:miter lim="800000"/>
+        </a:ln>
+      </a:lnStyleLst>
+      <a:effectStyleLst>
+        <a:effectStyle>
+          <a:effectLst/>
+        </a:effectStyle>
+        <a:effectStyle>
+          <a:effectLst/>
+        </a:effectStyle>
+        <a:effectStyle>
+          <a:effectLst>
+            <a:outerShdw blurRad="57150" dist="19050" dir="5400000" algn="ctr" rotWithShape="0">
+              <a:srgbClr val="000000">
+                <a:alpha val="63000"/>
+              </a:srgbClr>
+            </a:outerShdw>
+          </a:effectLst>
+        </a:effectStyle>
+      </a:effectStyleLst>
+      <a:bgFillStyleLst>
+        <a:solidFill>
+          <a:schemeClr val="phClr"/>
+        </a:solidFill>
+        <a:solidFill>
+          <a:schemeClr val="phClr">
+            <a:tint val="95000"/>
+            <a:satMod val="170000"/>
+          </a:schemeClr>
+        </a:solidFill>
+        <a:gradFill rotWithShape="1">
+          <a:gsLst>
+            <a:gs pos="0">
+              <a:schemeClr val="phClr">
+                <a:tint val="93000"/>
+                <a:satMod val="150000"/>
+                <a:shade val="98000"/>
+                <a:lumMod val="102000"/>
+              </a:schemeClr>
+            </a:gs>
+            <a:gs pos="50000">
+              <a:schemeClr val="phClr">
+                <a:tint val="98000"/>
+                <a:satMod val="130000"/>
+                <a:shade val="90000"/>
+                <a:lumMod val="103000"/>
+              </a:schemeClr>
+            </a:gs>
+            <a:gs pos="100000">
+              <a:schemeClr val="phClr">
+                <a:shade val="63000"/>
+                <a:satMod val="120000"/>
+              </a:schemeClr>
+            </a:gs>
+          </a:gsLst>
+          <a:lin ang="5400000" scaled="0"/>
+        </a:gradFill>
+      </a:bgFillStyleLst>
+    </a:fmtScheme>
+  </a:themeElements>
+  <a:objectDefaults/>
+  <a:extraClrSchemeLst/>
+  <a:extLst>
+    <a:ext uri="{05A4C25C-085E-4340-85A3-A5531E510DB2}">
+      <thm15:themeFamily xmlns:thm15="http://schemas.microsoft.com/office/thememl/2012/main" name="Office Theme" id="{62F939B6-93AF-4DB8-9C6B-D6C7DFDC589F}" vid="{4A3C46E8-61CC-4603-A589-7422A47A8E4A}"/>
+    </a:ext>
+  </a:extLst>
+</a:theme>
 </file>
--- a/dochtml-demo.pptx
+++ b/dochtml-demo.pptx
@@ -146,7 +146,7 @@
     </p:spTree>
     <p:extLst>
       <p:ext uri="{BB962C8B-B14F-4D97-AF65-F5344CB8AC3E}">
-        <p14:creationId xmlns:p14="http://schemas.microsoft.com/office/powerpoint/2010/main" val="1993953821"/>
+        <p14:creationId xmlns:p14="http://schemas.microsoft.com/office/powerpoint/2010/main" val="2552989394"/>
       </p:ext>
     </p:extLst>
   </p:cSld>
@@ -1875,6 +1875,13 @@
             <a:prstDash val="solid"/>
           </a:ln>
         </p:spPr>
+        <p:txBody>
+          <a:bodyPr/>
+          <a:lstStyle/>
+          <a:p>
+            <a:endParaRPr/>
+          </a:p>
+        </p:txBody>
       </p:sp>
       <p:sp>
         <p:nvSpPr>
@@ -1977,6 +1984,13 @@
             <a:prstDash val="solid"/>
           </a:ln>
         </p:spPr>
+        <p:txBody>
+          <a:bodyPr/>
+          <a:lstStyle/>
+          <a:p>
+            <a:endParaRPr/>
+          </a:p>
+        </p:txBody>
       </p:sp>
       <p:sp>
         <p:nvSpPr>
@@ -2079,6 +2093,13 @@
             <a:prstDash val="solid"/>
           </a:ln>
         </p:spPr>
+        <p:txBody>
+          <a:bodyPr/>
+          <a:lstStyle/>
+          <a:p>
+            <a:endParaRPr/>
+          </a:p>
+        </p:txBody>
       </p:sp>
       <p:sp>
         <p:nvSpPr>
@@ -2181,6 +2202,13 @@
             <a:prstDash val="solid"/>
           </a:ln>
         </p:spPr>
+        <p:txBody>
+          <a:bodyPr/>
+          <a:lstStyle/>
+          <a:p>
+            <a:endParaRPr/>
+          </a:p>
+        </p:txBody>
       </p:sp>
       <p:sp>
         <p:nvSpPr>
@@ -2283,6 +2311,13 @@
             <a:prstDash val="solid"/>
           </a:ln>
         </p:spPr>
+        <p:txBody>
+          <a:bodyPr/>
+          <a:lstStyle/>
+          <a:p>
+            <a:endParaRPr/>
+          </a:p>
+        </p:txBody>
       </p:sp>
       <p:sp>
         <p:nvSpPr>
@@ -2385,6 +2420,13 @@
             <a:prstDash val="solid"/>
           </a:ln>
         </p:spPr>
+        <p:txBody>
+          <a:bodyPr/>
+          <a:lstStyle/>
+          <a:p>
+            <a:endParaRPr/>
+          </a:p>
+        </p:txBody>
       </p:sp>
       <p:sp>
         <p:nvSpPr>
@@ -2614,7 +2656,7 @@
                 </a:solidFill>
                 <a:latin typeface="Calibri"/>
               </a:rPr>
-              <a:t>21 automated checks · line-numbered test report</a:t>
+              <a:t>22 automated checks · line-numbered test report</a:t>
             </a:r>
           </a:p>
         </p:txBody>
@@ -4996,7 +5038,7 @@
                 <a:ea typeface="Calibri" pitchFamily="34" charset="-122"/>
                 <a:cs typeface="Calibri" pitchFamily="34" charset="-120"/>
               </a:rPr>
-              <a:t>14 Conversion Rules</a:t>
+              <a:t>15 Conversion Rules</a:t>
             </a:r>
             <a:endParaRPr lang="en-US" sz="2600" dirty="0"/>
           </a:p>
@@ -5074,6 +5116,13 @@
             </a:outerShdw>
           </a:effectLst>
         </p:spPr>
+        <p:txBody>
+          <a:bodyPr/>
+          <a:lstStyle/>
+          <a:p>
+            <a:endParaRPr/>
+          </a:p>
+        </p:txBody>
       </p:sp>
       <p:sp>
         <p:nvSpPr>
@@ -5101,6 +5150,13 @@
             <a:prstDash val="solid"/>
           </a:ln>
         </p:spPr>
+        <p:txBody>
+          <a:bodyPr/>
+          <a:lstStyle/>
+          <a:p>
+            <a:endParaRPr/>
+          </a:p>
+        </p:txBody>
       </p:sp>
       <p:sp>
         <p:nvSpPr>
@@ -5227,7 +5283,7 @@
         </p:nvSpPr>
         <p:spPr>
           <a:xfrm>
-            <a:off x="365760" y="1682496"/>
+            <a:off x="365760" y="1591056"/>
             <a:ext cx="4023360" cy="493776"/>
           </a:xfrm>
           <a:prstGeom prst="roundRect">
@@ -5252,6 +5308,13 @@
             </a:outerShdw>
           </a:effectLst>
         </p:spPr>
+        <p:txBody>
+          <a:bodyPr/>
+          <a:lstStyle/>
+          <a:p>
+            <a:endParaRPr/>
+          </a:p>
+        </p:txBody>
       </p:sp>
       <p:sp>
         <p:nvSpPr>
@@ -5261,7 +5324,7 @@
         </p:nvSpPr>
         <p:spPr>
           <a:xfrm>
-            <a:off x="365760" y="1682496"/>
+            <a:off x="365760" y="1591056"/>
             <a:ext cx="347472" cy="493776"/>
           </a:xfrm>
           <a:prstGeom prst="roundRect">
@@ -5279,6 +5342,13 @@
             <a:prstDash val="solid"/>
           </a:ln>
         </p:spPr>
+        <p:txBody>
+          <a:bodyPr/>
+          <a:lstStyle/>
+          <a:p>
+            <a:endParaRPr/>
+          </a:p>
+        </p:txBody>
       </p:sp>
       <p:sp>
         <p:nvSpPr>
@@ -5288,7 +5358,7 @@
         </p:nvSpPr>
         <p:spPr>
           <a:xfrm>
-            <a:off x="365760" y="1682496"/>
+            <a:off x="365760" y="1591056"/>
             <a:ext cx="347472" cy="493776"/>
           </a:xfrm>
           <a:prstGeom prst="rect">
@@ -5327,7 +5397,7 @@
         </p:nvSpPr>
         <p:spPr>
           <a:xfrm>
-            <a:off x="786384" y="1709928"/>
+            <a:off x="786384" y="1618488"/>
             <a:ext cx="2286000" cy="228600"/>
           </a:xfrm>
           <a:prstGeom prst="rect">
@@ -5366,7 +5436,7 @@
         </p:nvSpPr>
         <p:spPr>
           <a:xfrm>
-            <a:off x="786384" y="1938528"/>
+            <a:off x="786384" y="1847088"/>
             <a:ext cx="3474720" cy="201168"/>
           </a:xfrm>
           <a:prstGeom prst="rect">
@@ -5405,7 +5475,7 @@
         </p:nvSpPr>
         <p:spPr>
           <a:xfrm>
-            <a:off x="365760" y="2249424"/>
+            <a:off x="365760" y="2066543"/>
             <a:ext cx="4023360" cy="493776"/>
           </a:xfrm>
           <a:prstGeom prst="roundRect">
@@ -5430,6 +5500,13 @@
             </a:outerShdw>
           </a:effectLst>
         </p:spPr>
+        <p:txBody>
+          <a:bodyPr/>
+          <a:lstStyle/>
+          <a:p>
+            <a:endParaRPr/>
+          </a:p>
+        </p:txBody>
       </p:sp>
       <p:sp>
         <p:nvSpPr>
@@ -5439,7 +5516,7 @@
         </p:nvSpPr>
         <p:spPr>
           <a:xfrm>
-            <a:off x="365760" y="2249424"/>
+            <a:off x="365760" y="2066543"/>
             <a:ext cx="347472" cy="493776"/>
           </a:xfrm>
           <a:prstGeom prst="roundRect">
@@ -5457,6 +5534,13 @@
             <a:prstDash val="solid"/>
           </a:ln>
         </p:spPr>
+        <p:txBody>
+          <a:bodyPr/>
+          <a:lstStyle/>
+          <a:p>
+            <a:endParaRPr/>
+          </a:p>
+        </p:txBody>
       </p:sp>
       <p:sp>
         <p:nvSpPr>
@@ -5466,7 +5550,7 @@
         </p:nvSpPr>
         <p:spPr>
           <a:xfrm>
-            <a:off x="365760" y="2249424"/>
+            <a:off x="365760" y="2066543"/>
             <a:ext cx="347472" cy="493776"/>
           </a:xfrm>
           <a:prstGeom prst="rect">
@@ -5505,7 +5589,7 @@
         </p:nvSpPr>
         <p:spPr>
           <a:xfrm>
-            <a:off x="786384" y="2276856"/>
+            <a:off x="786384" y="2093976"/>
             <a:ext cx="2286000" cy="228600"/>
           </a:xfrm>
           <a:prstGeom prst="rect">
@@ -5544,7 +5628,7 @@
         </p:nvSpPr>
         <p:spPr>
           <a:xfrm>
-            <a:off x="786384" y="2505456"/>
+            <a:off x="786384" y="2322576"/>
             <a:ext cx="3474720" cy="201168"/>
           </a:xfrm>
           <a:prstGeom prst="rect">
@@ -5583,7 +5667,7 @@
         </p:nvSpPr>
         <p:spPr>
           <a:xfrm>
-            <a:off x="365760" y="2816352"/>
+            <a:off x="365760" y="2542032"/>
             <a:ext cx="4023360" cy="493776"/>
           </a:xfrm>
           <a:prstGeom prst="roundRect">
@@ -5608,6 +5692,13 @@
             </a:outerShdw>
           </a:effectLst>
         </p:spPr>
+        <p:txBody>
+          <a:bodyPr/>
+          <a:lstStyle/>
+          <a:p>
+            <a:endParaRPr/>
+          </a:p>
+        </p:txBody>
       </p:sp>
       <p:sp>
         <p:nvSpPr>
@@ -5617,7 +5708,7 @@
         </p:nvSpPr>
         <p:spPr>
           <a:xfrm>
-            <a:off x="365760" y="2816352"/>
+            <a:off x="365760" y="2542032"/>
             <a:ext cx="347472" cy="493776"/>
           </a:xfrm>
           <a:prstGeom prst="roundRect">
@@ -5635,6 +5726,13 @@
             <a:prstDash val="solid"/>
           </a:ln>
         </p:spPr>
+        <p:txBody>
+          <a:bodyPr/>
+          <a:lstStyle/>
+          <a:p>
+            <a:endParaRPr/>
+          </a:p>
+        </p:txBody>
       </p:sp>
       <p:sp>
         <p:nvSpPr>
@@ -5644,7 +5742,7 @@
         </p:nvSpPr>
         <p:spPr>
           <a:xfrm>
-            <a:off x="365760" y="2816352"/>
+            <a:off x="365760" y="2542032"/>
             <a:ext cx="347472" cy="493776"/>
           </a:xfrm>
           <a:prstGeom prst="rect">
@@ -5683,7 +5781,7 @@
         </p:nvSpPr>
         <p:spPr>
           <a:xfrm>
-            <a:off x="786384" y="2843784"/>
+            <a:off x="786384" y="2569463"/>
             <a:ext cx="2286000" cy="228600"/>
           </a:xfrm>
           <a:prstGeom prst="rect">
@@ -5722,7 +5820,7 @@
         </p:nvSpPr>
         <p:spPr>
           <a:xfrm>
-            <a:off x="786384" y="3072384"/>
+            <a:off x="786384" y="2798063"/>
             <a:ext cx="3474720" cy="201168"/>
           </a:xfrm>
           <a:prstGeom prst="rect">
@@ -5761,7 +5859,7 @@
         </p:nvSpPr>
         <p:spPr>
           <a:xfrm>
-            <a:off x="365760" y="3383280"/>
+            <a:off x="365760" y="3017520"/>
             <a:ext cx="4023360" cy="493776"/>
           </a:xfrm>
           <a:prstGeom prst="roundRect">
@@ -5786,6 +5884,13 @@
             </a:outerShdw>
           </a:effectLst>
         </p:spPr>
+        <p:txBody>
+          <a:bodyPr/>
+          <a:lstStyle/>
+          <a:p>
+            <a:endParaRPr/>
+          </a:p>
+        </p:txBody>
       </p:sp>
       <p:sp>
         <p:nvSpPr>
@@ -5795,7 +5900,7 @@
         </p:nvSpPr>
         <p:spPr>
           <a:xfrm>
-            <a:off x="365760" y="3383280"/>
+            <a:off x="365760" y="3017520"/>
             <a:ext cx="347472" cy="493776"/>
           </a:xfrm>
           <a:prstGeom prst="roundRect">
@@ -5813,6 +5918,13 @@
             <a:prstDash val="solid"/>
           </a:ln>
         </p:spPr>
+        <p:txBody>
+          <a:bodyPr/>
+          <a:lstStyle/>
+          <a:p>
+            <a:endParaRPr/>
+          </a:p>
+        </p:txBody>
       </p:sp>
       <p:sp>
         <p:nvSpPr>
@@ -5822,7 +5934,7 @@
         </p:nvSpPr>
         <p:spPr>
           <a:xfrm>
-            <a:off x="365760" y="3383280"/>
+            <a:off x="365760" y="3017520"/>
             <a:ext cx="347472" cy="493776"/>
           </a:xfrm>
           <a:prstGeom prst="rect">
@@ -5861,7 +5973,7 @@
         </p:nvSpPr>
         <p:spPr>
           <a:xfrm>
-            <a:off x="786384" y="3410712"/>
+            <a:off x="786384" y="3044951"/>
             <a:ext cx="2286000" cy="228600"/>
           </a:xfrm>
           <a:prstGeom prst="rect">
@@ -5900,7 +6012,7 @@
         </p:nvSpPr>
         <p:spPr>
           <a:xfrm>
-            <a:off x="786384" y="3639312"/>
+            <a:off x="786384" y="3273551"/>
             <a:ext cx="3474720" cy="201168"/>
           </a:xfrm>
           <a:prstGeom prst="rect">
@@ -5939,7 +6051,7 @@
         </p:nvSpPr>
         <p:spPr>
           <a:xfrm>
-            <a:off x="365760" y="3950208"/>
+            <a:off x="365760" y="3493008"/>
             <a:ext cx="4023360" cy="493776"/>
           </a:xfrm>
           <a:prstGeom prst="roundRect">
@@ -5964,6 +6076,13 @@
             </a:outerShdw>
           </a:effectLst>
         </p:spPr>
+        <p:txBody>
+          <a:bodyPr/>
+          <a:lstStyle/>
+          <a:p>
+            <a:endParaRPr/>
+          </a:p>
+        </p:txBody>
       </p:sp>
       <p:sp>
         <p:nvSpPr>
@@ -5973,7 +6092,7 @@
         </p:nvSpPr>
         <p:spPr>
           <a:xfrm>
-            <a:off x="365760" y="3950208"/>
+            <a:off x="365760" y="3493008"/>
             <a:ext cx="347472" cy="493776"/>
           </a:xfrm>
           <a:prstGeom prst="roundRect">
@@ -5991,6 +6110,13 @@
             <a:prstDash val="solid"/>
           </a:ln>
         </p:spPr>
+        <p:txBody>
+          <a:bodyPr/>
+          <a:lstStyle/>
+          <a:p>
+            <a:endParaRPr/>
+          </a:p>
+        </p:txBody>
       </p:sp>
       <p:sp>
         <p:nvSpPr>
@@ -6000,7 +6126,7 @@
         </p:nvSpPr>
         <p:spPr>
           <a:xfrm>
-            <a:off x="365760" y="3950208"/>
+            <a:off x="365760" y="3493008"/>
             <a:ext cx="347472" cy="493776"/>
           </a:xfrm>
           <a:prstGeom prst="rect">
@@ -6039,7 +6165,7 @@
         </p:nvSpPr>
         <p:spPr>
           <a:xfrm>
-            <a:off x="786384" y="3977640"/>
+            <a:off x="786384" y="3520439"/>
             <a:ext cx="2286000" cy="228600"/>
           </a:xfrm>
           <a:prstGeom prst="rect">
@@ -6078,7 +6204,7 @@
         </p:nvSpPr>
         <p:spPr>
           <a:xfrm>
-            <a:off x="786384" y="4206240"/>
+            <a:off x="786384" y="3749039"/>
             <a:ext cx="3474720" cy="201168"/>
           </a:xfrm>
           <a:prstGeom prst="rect">
@@ -6142,6 +6268,13 @@
             </a:outerShdw>
           </a:effectLst>
         </p:spPr>
+        <p:txBody>
+          <a:bodyPr/>
+          <a:lstStyle/>
+          <a:p>
+            <a:endParaRPr/>
+          </a:p>
+        </p:txBody>
       </p:sp>
       <p:sp>
         <p:nvSpPr>
@@ -6169,6 +6302,13 @@
             <a:prstDash val="solid"/>
           </a:ln>
         </p:spPr>
+        <p:txBody>
+          <a:bodyPr/>
+          <a:lstStyle/>
+          <a:p>
+            <a:endParaRPr/>
+          </a:p>
+        </p:txBody>
       </p:sp>
       <p:sp>
         <p:nvSpPr>
@@ -6320,6 +6460,13 @@
             </a:outerShdw>
           </a:effectLst>
         </p:spPr>
+        <p:txBody>
+          <a:bodyPr/>
+          <a:lstStyle/>
+          <a:p>
+            <a:endParaRPr/>
+          </a:p>
+        </p:txBody>
       </p:sp>
       <p:sp>
         <p:nvSpPr>
@@ -6347,6 +6494,13 @@
             <a:prstDash val="solid"/>
           </a:ln>
         </p:spPr>
+        <p:txBody>
+          <a:bodyPr/>
+          <a:lstStyle/>
+          <a:p>
+            <a:endParaRPr/>
+          </a:p>
+        </p:txBody>
       </p:sp>
       <p:sp>
         <p:nvSpPr>
@@ -6498,6 +6652,13 @@
             </a:outerShdw>
           </a:effectLst>
         </p:spPr>
+        <p:txBody>
+          <a:bodyPr/>
+          <a:lstStyle/>
+          <a:p>
+            <a:endParaRPr/>
+          </a:p>
+        </p:txBody>
       </p:sp>
       <p:sp>
         <p:nvSpPr>
@@ -6525,6 +6686,13 @@
             <a:prstDash val="solid"/>
           </a:ln>
         </p:spPr>
+        <p:txBody>
+          <a:bodyPr/>
+          <a:lstStyle/>
+          <a:p>
+            <a:endParaRPr/>
+          </a:p>
+        </p:txBody>
       </p:sp>
       <p:sp>
         <p:nvSpPr>
@@ -6676,6 +6844,13 @@
             </a:outerShdw>
           </a:effectLst>
         </p:spPr>
+        <p:txBody>
+          <a:bodyPr/>
+          <a:lstStyle/>
+          <a:p>
+            <a:endParaRPr/>
+          </a:p>
+        </p:txBody>
       </p:sp>
       <p:sp>
         <p:nvSpPr>
@@ -6703,6 +6878,13 @@
             <a:prstDash val="solid"/>
           </a:ln>
         </p:spPr>
+        <p:txBody>
+          <a:bodyPr/>
+          <a:lstStyle/>
+          <a:p>
+            <a:endParaRPr/>
+          </a:p>
+        </p:txBody>
       </p:sp>
       <p:sp>
         <p:nvSpPr>
@@ -6854,6 +7036,13 @@
             </a:outerShdw>
           </a:effectLst>
         </p:spPr>
+        <p:txBody>
+          <a:bodyPr/>
+          <a:lstStyle/>
+          <a:p>
+            <a:endParaRPr/>
+          </a:p>
+        </p:txBody>
       </p:sp>
       <p:sp>
         <p:nvSpPr>
@@ -6881,6 +7070,13 @@
             <a:prstDash val="solid"/>
           </a:ln>
         </p:spPr>
+        <p:txBody>
+          <a:bodyPr/>
+          <a:lstStyle/>
+          <a:p>
+            <a:endParaRPr/>
+          </a:p>
+        </p:txBody>
       </p:sp>
       <p:sp>
         <p:nvSpPr>
@@ -7032,6 +7228,13 @@
             </a:outerShdw>
           </a:effectLst>
         </p:spPr>
+        <p:txBody>
+          <a:bodyPr/>
+          <a:lstStyle/>
+          <a:p>
+            <a:endParaRPr/>
+          </a:p>
+        </p:txBody>
       </p:sp>
       <p:sp>
         <p:nvSpPr>
@@ -7059,6 +7262,13 @@
             <a:prstDash val="solid"/>
           </a:ln>
         </p:spPr>
+        <p:txBody>
+          <a:bodyPr/>
+          <a:lstStyle/>
+          <a:p>
+            <a:endParaRPr/>
+          </a:p>
+        </p:txBody>
       </p:sp>
       <p:sp>
         <p:nvSpPr>
@@ -7203,6 +7413,13 @@
             <a:prstDash val="solid"/>
           </a:ln>
         </p:spPr>
+        <p:txBody>
+          <a:bodyPr/>
+          <a:lstStyle/>
+          <a:p>
+            <a:endParaRPr/>
+          </a:p>
+        </p:txBody>
       </p:sp>
       <p:sp>
         <p:nvSpPr>
@@ -7237,7 +7454,199 @@
                 <a:ea typeface="Courier New" pitchFamily="34" charset="-122"/>
                 <a:cs typeface="Courier New" pitchFamily="34" charset="-120"/>
               </a:rPr>
-              <a:t>Rule E — &lt;strong&gt; wraps &lt;a&gt;    |    Rule C — Adjacent/nested &lt;strong&gt; merged    |    Rule F — file:// URLs fixed to https://</a:t>
+              <a:t>Rule E — strong wraps a  |  Rule C — adjacent/nested strong merged  |  Rule F — file:// fixed  |  Rule G — unclosed quotes/tags auto-fixed</a:t>
+            </a:r>
+            <a:endParaRPr lang="en-US" sz="850" dirty="0"/>
+          </a:p>
+        </p:txBody>
+      </p:sp>
+      <p:sp>
+        <p:nvSpPr>
+          <p:cNvPr id="66" name="Shape 57"/>
+          <p:cNvSpPr/>
+          <p:nvPr/>
+        </p:nvSpPr>
+        <p:spPr>
+          <a:xfrm>
+            <a:off x="365760" y="3986784"/>
+            <a:ext cx="4023360" cy="493776"/>
+          </a:xfrm>
+          <a:prstGeom prst="roundRect">
+            <a:avLst>
+              <a:gd name="adj" fmla="val 14815"/>
+            </a:avLst>
+          </a:prstGeom>
+          <a:solidFill>
+            <a:srgbClr val="FFFFFF"/>
+          </a:solidFill>
+          <a:ln w="12700">
+            <a:solidFill>
+              <a:srgbClr val="E2E0D8"/>
+            </a:solidFill>
+            <a:prstDash val="solid"/>
+          </a:ln>
+          <a:effectLst>
+            <a:outerShdw blurRad="101600" dist="38100" dir="2700000" algn="bl" rotWithShape="0">
+              <a:srgbClr val="000000">
+                <a:alpha val="10000"/>
+              </a:srgbClr>
+            </a:outerShdw>
+          </a:effectLst>
+        </p:spPr>
+        <p:txBody>
+          <a:bodyPr/>
+          <a:lstStyle/>
+          <a:p>
+            <a:endParaRPr/>
+          </a:p>
+        </p:txBody>
+      </p:sp>
+      <p:sp>
+        <p:nvSpPr>
+          <p:cNvPr id="67" name="Shape 58"/>
+          <p:cNvSpPr/>
+          <p:nvPr/>
+        </p:nvSpPr>
+        <p:spPr>
+          <a:xfrm>
+            <a:off x="365760" y="3986784"/>
+            <a:ext cx="347472" cy="493776"/>
+          </a:xfrm>
+          <a:prstGeom prst="roundRect">
+            <a:avLst>
+              <a:gd name="adj" fmla="val 21053"/>
+            </a:avLst>
+          </a:prstGeom>
+          <a:solidFill>
+            <a:srgbClr val="7C4DAB"/>
+          </a:solidFill>
+          <a:ln w="12700">
+            <a:solidFill>
+              <a:srgbClr val="9B2C2C"/>
+            </a:solidFill>
+            <a:prstDash val="solid"/>
+          </a:ln>
+        </p:spPr>
+        <p:txBody>
+          <a:bodyPr/>
+          <a:lstStyle/>
+          <a:p>
+            <a:endParaRPr/>
+          </a:p>
+        </p:txBody>
+      </p:sp>
+      <p:sp>
+        <p:nvSpPr>
+          <p:cNvPr id="68" name="Text 59"/>
+          <p:cNvSpPr/>
+          <p:nvPr/>
+        </p:nvSpPr>
+        <p:spPr>
+          <a:xfrm>
+            <a:off x="365760" y="3986784"/>
+            <a:ext cx="347472" cy="493776"/>
+          </a:xfrm>
+          <a:prstGeom prst="rect">
+            <a:avLst/>
+          </a:prstGeom>
+          <a:noFill/>
+          <a:ln/>
+        </p:spPr>
+        <p:txBody>
+          <a:bodyPr wrap="square" lIns="0" tIns="0" rIns="0" bIns="0" rtlCol="0" anchor="ctr"/>
+          <a:lstStyle/>
+          <a:p>
+            <a:pPr marL="0" indent="0" algn="ctr">
+              <a:buNone/>
+            </a:pPr>
+            <a:r>
+              <a:rPr lang="en-US" sz="800" b="1" dirty="0">
+                <a:solidFill>
+                  <a:srgbClr val="FFFFFF"/>
+                </a:solidFill>
+                <a:latin typeface="Courier New" pitchFamily="34" charset="0"/>
+                <a:ea typeface="Courier New" pitchFamily="34" charset="-122"/>
+                <a:cs typeface="Courier New" pitchFamily="34" charset="-120"/>
+              </a:rPr>
+              <a:t>G</a:t>
+            </a:r>
+            <a:endParaRPr lang="en-US" sz="800" dirty="0"/>
+          </a:p>
+        </p:txBody>
+      </p:sp>
+      <p:sp>
+        <p:nvSpPr>
+          <p:cNvPr id="69" name="Text 60"/>
+          <p:cNvSpPr/>
+          <p:nvPr/>
+        </p:nvSpPr>
+        <p:spPr>
+          <a:xfrm>
+            <a:off x="786384" y="4014215"/>
+            <a:ext cx="2286000" cy="228600"/>
+          </a:xfrm>
+          <a:prstGeom prst="rect">
+            <a:avLst/>
+          </a:prstGeom>
+          <a:noFill/>
+          <a:ln/>
+        </p:spPr>
+        <p:txBody>
+          <a:bodyPr wrap="square" lIns="0" tIns="0" rIns="0" bIns="0" rtlCol="0" anchor="ctr"/>
+          <a:lstStyle/>
+          <a:p>
+            <a:pPr marL="0" indent="0">
+              <a:buNone/>
+            </a:pPr>
+            <a:r>
+              <a:rPr lang="en-US" sz="1000" b="1" dirty="0">
+                <a:solidFill>
+                  <a:srgbClr val="1A1A18"/>
+                </a:solidFill>
+                <a:latin typeface="Calibri" pitchFamily="34" charset="0"/>
+                <a:ea typeface="Calibri" pitchFamily="34" charset="-122"/>
+                <a:cs typeface="Calibri" pitchFamily="34" charset="-120"/>
+              </a:rPr>
+              <a:t>Fix syntax errors</a:t>
+            </a:r>
+            <a:endParaRPr lang="en-US" sz="1000" dirty="0"/>
+          </a:p>
+        </p:txBody>
+      </p:sp>
+      <p:sp>
+        <p:nvSpPr>
+          <p:cNvPr id="70" name="Text 61"/>
+          <p:cNvSpPr/>
+          <p:nvPr/>
+        </p:nvSpPr>
+        <p:spPr>
+          <a:xfrm>
+            <a:off x="786384" y="4242816"/>
+            <a:ext cx="3474720" cy="201168"/>
+          </a:xfrm>
+          <a:prstGeom prst="rect">
+            <a:avLst/>
+          </a:prstGeom>
+          <a:noFill/>
+          <a:ln/>
+        </p:spPr>
+        <p:txBody>
+          <a:bodyPr wrap="square" lIns="0" tIns="0" rIns="0" bIns="0" rtlCol="0" anchor="ctr"/>
+          <a:lstStyle/>
+          <a:p>
+            <a:pPr marL="0" indent="0">
+              <a:buNone/>
+            </a:pPr>
+            <a:r>
+              <a:rPr lang="en-US" sz="850" dirty="0">
+                <a:solidFill>
+                  <a:srgbClr val="5A5952"/>
+                </a:solidFill>
+                <a:latin typeface="Courier New" pitchFamily="34" charset="0"/>
+                <a:ea typeface="Courier New" pitchFamily="34" charset="-122"/>
+                <a:cs typeface="Courier New" pitchFamily="34" charset="-120"/>
+              </a:rPr>
+              <a:t>Unclosed quotes/tags auto-fixed</a:t>
             </a:r>
             <a:endParaRPr lang="en-US" sz="850" dirty="0"/>
           </a:p>
